--- a/multicore03-updated.pptx
+++ b/multicore03-updated.pptx
@@ -5,7 +5,7 @@
     <p:sldMasterId id="2147483655" r:id="rId1"/>
   </p:sldMasterIdLst>
   <p:notesMasterIdLst>
-    <p:notesMasterId r:id="rId57"/>
+    <p:notesMasterId r:id="rId58"/>
   </p:notesMasterIdLst>
   <p:sldIdLst>
     <p:sldId id="346" r:id="rId2"/>
@@ -14,55 +14,56 @@
     <p:sldId id="354" r:id="rId5"/>
     <p:sldId id="353" r:id="rId6"/>
     <p:sldId id="355" r:id="rId7"/>
-    <p:sldId id="337" r:id="rId8"/>
-    <p:sldId id="336" r:id="rId9"/>
-    <p:sldId id="349" r:id="rId10"/>
-    <p:sldId id="350" r:id="rId11"/>
-    <p:sldId id="338" r:id="rId12"/>
-    <p:sldId id="339" r:id="rId13"/>
-    <p:sldId id="340" r:id="rId14"/>
-    <p:sldId id="308" r:id="rId15"/>
-    <p:sldId id="313" r:id="rId16"/>
-    <p:sldId id="314" r:id="rId17"/>
-    <p:sldId id="315" r:id="rId18"/>
-    <p:sldId id="316" r:id="rId19"/>
-    <p:sldId id="364" r:id="rId20"/>
-    <p:sldId id="365" r:id="rId21"/>
-    <p:sldId id="317" r:id="rId22"/>
-    <p:sldId id="310" r:id="rId23"/>
-    <p:sldId id="319" r:id="rId24"/>
-    <p:sldId id="318" r:id="rId25"/>
-    <p:sldId id="361" r:id="rId26"/>
-    <p:sldId id="323" r:id="rId27"/>
-    <p:sldId id="360" r:id="rId28"/>
-    <p:sldId id="320" r:id="rId29"/>
-    <p:sldId id="321" r:id="rId30"/>
-    <p:sldId id="322" r:id="rId31"/>
-    <p:sldId id="324" r:id="rId32"/>
-    <p:sldId id="325" r:id="rId33"/>
-    <p:sldId id="356" r:id="rId34"/>
-    <p:sldId id="357" r:id="rId35"/>
-    <p:sldId id="358" r:id="rId36"/>
-    <p:sldId id="326" r:id="rId37"/>
-    <p:sldId id="327" r:id="rId38"/>
-    <p:sldId id="328" r:id="rId39"/>
-    <p:sldId id="329" r:id="rId40"/>
-    <p:sldId id="330" r:id="rId41"/>
-    <p:sldId id="331" r:id="rId42"/>
-    <p:sldId id="332" r:id="rId43"/>
-    <p:sldId id="333" r:id="rId44"/>
-    <p:sldId id="359" r:id="rId45"/>
-    <p:sldId id="311" r:id="rId46"/>
-    <p:sldId id="335" r:id="rId47"/>
-    <p:sldId id="343" r:id="rId48"/>
-    <p:sldId id="344" r:id="rId49"/>
-    <p:sldId id="362" r:id="rId50"/>
-    <p:sldId id="363" r:id="rId51"/>
-    <p:sldId id="345" r:id="rId52"/>
-    <p:sldId id="347" r:id="rId53"/>
-    <p:sldId id="348" r:id="rId54"/>
-    <p:sldId id="341" r:id="rId55"/>
-    <p:sldId id="342" r:id="rId56"/>
+    <p:sldId id="366" r:id="rId8"/>
+    <p:sldId id="337" r:id="rId9"/>
+    <p:sldId id="336" r:id="rId10"/>
+    <p:sldId id="349" r:id="rId11"/>
+    <p:sldId id="350" r:id="rId12"/>
+    <p:sldId id="338" r:id="rId13"/>
+    <p:sldId id="339" r:id="rId14"/>
+    <p:sldId id="340" r:id="rId15"/>
+    <p:sldId id="308" r:id="rId16"/>
+    <p:sldId id="313" r:id="rId17"/>
+    <p:sldId id="314" r:id="rId18"/>
+    <p:sldId id="315" r:id="rId19"/>
+    <p:sldId id="316" r:id="rId20"/>
+    <p:sldId id="364" r:id="rId21"/>
+    <p:sldId id="365" r:id="rId22"/>
+    <p:sldId id="317" r:id="rId23"/>
+    <p:sldId id="310" r:id="rId24"/>
+    <p:sldId id="319" r:id="rId25"/>
+    <p:sldId id="318" r:id="rId26"/>
+    <p:sldId id="361" r:id="rId27"/>
+    <p:sldId id="323" r:id="rId28"/>
+    <p:sldId id="360" r:id="rId29"/>
+    <p:sldId id="320" r:id="rId30"/>
+    <p:sldId id="321" r:id="rId31"/>
+    <p:sldId id="322" r:id="rId32"/>
+    <p:sldId id="324" r:id="rId33"/>
+    <p:sldId id="325" r:id="rId34"/>
+    <p:sldId id="356" r:id="rId35"/>
+    <p:sldId id="357" r:id="rId36"/>
+    <p:sldId id="358" r:id="rId37"/>
+    <p:sldId id="326" r:id="rId38"/>
+    <p:sldId id="327" r:id="rId39"/>
+    <p:sldId id="328" r:id="rId40"/>
+    <p:sldId id="329" r:id="rId41"/>
+    <p:sldId id="330" r:id="rId42"/>
+    <p:sldId id="331" r:id="rId43"/>
+    <p:sldId id="332" r:id="rId44"/>
+    <p:sldId id="333" r:id="rId45"/>
+    <p:sldId id="359" r:id="rId46"/>
+    <p:sldId id="311" r:id="rId47"/>
+    <p:sldId id="335" r:id="rId48"/>
+    <p:sldId id="343" r:id="rId49"/>
+    <p:sldId id="344" r:id="rId50"/>
+    <p:sldId id="362" r:id="rId51"/>
+    <p:sldId id="363" r:id="rId52"/>
+    <p:sldId id="345" r:id="rId53"/>
+    <p:sldId id="347" r:id="rId54"/>
+    <p:sldId id="348" r:id="rId55"/>
+    <p:sldId id="341" r:id="rId56"/>
+    <p:sldId id="342" r:id="rId57"/>
   </p:sldIdLst>
   <p:sldSz cx="9144000" cy="6858000" type="screen4x3"/>
   <p:notesSz cx="7099300" cy="10234613"/>
@@ -322,7 +323,7 @@
               <a:pPr>
                 <a:defRPr/>
               </a:pPr>
-              <a:t>2026. 3. 11.</a:t>
+              <a:t>2026. 3. 15.</a:t>
             </a:fld>
             <a:endParaRPr lang="ko-KR" altLang="en-US"/>
           </a:p>
@@ -8975,10 +8976,10 @@
       </p:grpSpPr>
       <p:sp>
         <p:nvSpPr>
-          <p:cNvPr id="24577" name="제목 1">
+          <p:cNvPr id="23553" name="제목 1">
             <a:extLst>
               <a:ext uri="{FF2B5EF4-FFF2-40B4-BE49-F238E27FC236}">
-                <a16:creationId xmlns:a16="http://schemas.microsoft.com/office/drawing/2014/main" id="{191B3349-84BE-B9EC-301A-B7FF2EC645D9}"/>
+                <a16:creationId xmlns:a16="http://schemas.microsoft.com/office/drawing/2014/main" id="{0926298B-34D0-1CEB-55D1-DBD5765141D0}"/>
               </a:ext>
             </a:extLst>
           </p:cNvPr>
@@ -8996,7 +8997,7 @@
           <a:p>
             <a:r>
               <a:rPr lang="en-US" altLang="ko-KR" b="1" u="sng"/>
-              <a:t>Functional Decomposition</a:t>
+              <a:t>Domain Decomposition</a:t>
             </a:r>
             <a:endParaRPr lang="ko-KR" altLang="en-US" b="1" u="sng"/>
           </a:p>
@@ -9004,10 +9005,10 @@
       </p:sp>
       <p:sp>
         <p:nvSpPr>
-          <p:cNvPr id="24578" name="내용 개체 틀 2">
+          <p:cNvPr id="23554" name="내용 개체 틀 2">
             <a:extLst>
               <a:ext uri="{FF2B5EF4-FFF2-40B4-BE49-F238E27FC236}">
-                <a16:creationId xmlns:a16="http://schemas.microsoft.com/office/drawing/2014/main" id="{3B2FEC42-48F4-5C80-12C9-723BC026A3A0}"/>
+                <a16:creationId xmlns:a16="http://schemas.microsoft.com/office/drawing/2014/main" id="{0517F6C2-F231-7FD7-B25B-6E575F733FE5}"/>
               </a:ext>
             </a:extLst>
           </p:cNvPr>
@@ -9018,26 +9019,25 @@
             <p:ph idx="1"/>
           </p:nvPr>
         </p:nvSpPr>
-        <p:spPr/>
+        <p:spPr>
+          <a:xfrm>
+            <a:off x="457200" y="1600200"/>
+            <a:ext cx="8686800" cy="4525963"/>
+          </a:xfrm>
+        </p:spPr>
         <p:txBody>
           <a:bodyPr/>
           <a:lstStyle/>
           <a:p>
             <a:r>
               <a:rPr lang="en-US" altLang="ko-KR" sz="2400"/>
-              <a:t>the focus is on the computation that is to be performed rather than on the data </a:t>
+              <a:t>data associated with a problem is decomposed. </a:t>
             </a:r>
           </a:p>
           <a:p>
             <a:r>
               <a:rPr lang="en-US" altLang="ko-KR" sz="2400"/>
-              <a:t>problem is decomposed according to the work that must be done. </a:t>
-            </a:r>
-          </a:p>
-          <a:p>
-            <a:r>
-              <a:rPr lang="en-US" altLang="ko-KR" sz="2400"/>
-              <a:t>Each task then performs a portion of the overall work.</a:t>
+              <a:t>Each parallel task then works on a portion of data.</a:t>
             </a:r>
             <a:endParaRPr lang="ko-KR" altLang="en-US" sz="2400"/>
           </a:p>
@@ -9045,10 +9045,10 @@
       </p:sp>
       <p:pic>
         <p:nvPicPr>
-          <p:cNvPr id="24579" name="Picture 2" descr="https://computing.llnl.gov/tutorials/parallel_comp/images/functional_decomp.gif">
+          <p:cNvPr id="23555" name="Picture 2" descr="https://computing.llnl.gov/tutorials/parallel_comp/images/domain_decomp.gif">
             <a:extLst>
               <a:ext uri="{FF2B5EF4-FFF2-40B4-BE49-F238E27FC236}">
-                <a16:creationId xmlns:a16="http://schemas.microsoft.com/office/drawing/2014/main" id="{78897A6D-2C04-4FCF-D620-B620A0E93EE8}"/>
+                <a16:creationId xmlns:a16="http://schemas.microsoft.com/office/drawing/2014/main" id="{17A8E93E-3DC3-C840-21D7-26A226C6B827}"/>
               </a:ext>
             </a:extLst>
           </p:cNvPr>
@@ -9072,8 +9072,68 @@
         </p:blipFill>
         <p:spPr bwMode="auto">
           <a:xfrm>
-            <a:off x="2051050" y="3933825"/>
-            <a:ext cx="4392613" cy="2640013"/>
+            <a:off x="468313" y="2852738"/>
+            <a:ext cx="3130550" cy="1743075"/>
+          </a:xfrm>
+          <a:prstGeom prst="rect">
+            <a:avLst/>
+          </a:prstGeom>
+          <a:noFill/>
+          <a:ln>
+            <a:noFill/>
+          </a:ln>
+          <a:extLst>
+            <a:ext uri="{909E8E84-426E-40DD-AFC4-6F175D3DCCD1}">
+              <a14:hiddenFill xmlns:a14="http://schemas.microsoft.com/office/drawing/2010/main">
+                <a:solidFill>
+                  <a:srgbClr val="FFFFFF"/>
+                </a:solidFill>
+              </a14:hiddenFill>
+            </a:ext>
+            <a:ext uri="{91240B29-F687-4F45-9708-019B960494DF}">
+              <a14:hiddenLine xmlns:a14="http://schemas.microsoft.com/office/drawing/2010/main" w="9525">
+                <a:solidFill>
+                  <a:srgbClr val="000000"/>
+                </a:solidFill>
+                <a:miter lim="800000"/>
+                <a:headEnd/>
+                <a:tailEnd/>
+              </a14:hiddenLine>
+            </a:ext>
+          </a:extLst>
+        </p:spPr>
+      </p:pic>
+      <p:pic>
+        <p:nvPicPr>
+          <p:cNvPr id="23556" name="Picture 4" descr="https://computing.llnl.gov/tutorials/parallel_comp/images/distributions.gif">
+            <a:extLst>
+              <a:ext uri="{FF2B5EF4-FFF2-40B4-BE49-F238E27FC236}">
+                <a16:creationId xmlns:a16="http://schemas.microsoft.com/office/drawing/2014/main" id="{BAAE90CA-50B2-D2FF-9E9E-309965580103}"/>
+              </a:ext>
+            </a:extLst>
+          </p:cNvPr>
+          <p:cNvPicPr>
+            <a:picLocks noChangeAspect="1" noChangeArrowheads="1"/>
+          </p:cNvPicPr>
+          <p:nvPr/>
+        </p:nvPicPr>
+        <p:blipFill>
+          <a:blip r:embed="rId3">
+            <a:extLst>
+              <a:ext uri="{28A0092B-C50C-407E-A947-70E740481C1C}">
+                <a14:useLocalDpi xmlns:a14="http://schemas.microsoft.com/office/drawing/2010/main" val="0"/>
+              </a:ext>
+            </a:extLst>
+          </a:blip>
+          <a:srcRect/>
+          <a:stretch>
+            <a:fillRect/>
+          </a:stretch>
+        </p:blipFill>
+        <p:spPr bwMode="auto">
+          <a:xfrm>
+            <a:off x="3708400" y="2636838"/>
+            <a:ext cx="4781550" cy="3676650"/>
           </a:xfrm>
           <a:prstGeom prst="rect">
             <a:avLst/>
@@ -9130,10 +9190,10 @@
       </p:grpSpPr>
       <p:sp>
         <p:nvSpPr>
-          <p:cNvPr id="25601" name="제목 1">
+          <p:cNvPr id="24577" name="제목 1">
             <a:extLst>
               <a:ext uri="{FF2B5EF4-FFF2-40B4-BE49-F238E27FC236}">
-                <a16:creationId xmlns:a16="http://schemas.microsoft.com/office/drawing/2014/main" id="{C7FD4766-E290-21A3-30B7-53FDF57C8779}"/>
+                <a16:creationId xmlns:a16="http://schemas.microsoft.com/office/drawing/2014/main" id="{191B3349-84BE-B9EC-301A-B7FF2EC645D9}"/>
               </a:ext>
             </a:extLst>
           </p:cNvPr>
@@ -9151,7 +9211,7 @@
           <a:p>
             <a:r>
               <a:rPr lang="en-US" altLang="ko-KR" b="1" u="sng"/>
-              <a:t>Assignment</a:t>
+              <a:t>Functional Decomposition</a:t>
             </a:r>
             <a:endParaRPr lang="ko-KR" altLang="en-US" b="1" u="sng"/>
           </a:p>
@@ -9159,10 +9219,10 @@
       </p:sp>
       <p:sp>
         <p:nvSpPr>
-          <p:cNvPr id="25602" name="내용 개체 틀 2">
+          <p:cNvPr id="24578" name="내용 개체 틀 2">
             <a:extLst>
               <a:ext uri="{FF2B5EF4-FFF2-40B4-BE49-F238E27FC236}">
-                <a16:creationId xmlns:a16="http://schemas.microsoft.com/office/drawing/2014/main" id="{3218F49B-CE5F-4E81-A2D8-BE629356A4E3}"/>
+                <a16:creationId xmlns:a16="http://schemas.microsoft.com/office/drawing/2014/main" id="{3B2FEC42-48F4-5C80-12C9-723BC026A3A0}"/>
               </a:ext>
             </a:extLst>
           </p:cNvPr>
@@ -9179,63 +9239,85 @@
           <a:lstStyle/>
           <a:p>
             <a:r>
-              <a:rPr lang="en-US" altLang="ko-KR" sz="2000"/>
-              <a:t>Assign tasks to threads</a:t>
-            </a:r>
-          </a:p>
-          <a:p>
-            <a:pPr lvl="1"/>
-            <a:r>
-              <a:rPr lang="en-US" altLang="ko-KR" sz="1800"/>
-              <a:t>Balance workload, reduce communication and management cost</a:t>
-            </a:r>
-          </a:p>
-          <a:p>
-            <a:pPr lvl="1"/>
-            <a:r>
-              <a:rPr lang="en-US" altLang="ko-KR" sz="1800"/>
-              <a:t>Together with decomposition, also called partitioning</a:t>
-            </a:r>
-          </a:p>
-          <a:p>
-            <a:pPr lvl="1"/>
-            <a:endParaRPr lang="en-US" altLang="ko-KR" sz="1800"/>
-          </a:p>
-          <a:p>
-            <a:r>
-              <a:rPr lang="en-US" altLang="ko-KR" sz="2200"/>
-              <a:t>Can be performed statically, or dynamically</a:t>
-            </a:r>
-          </a:p>
-          <a:p>
-            <a:endParaRPr lang="en-US" altLang="ko-KR" sz="2200"/>
-          </a:p>
-          <a:p>
-            <a:r>
-              <a:rPr lang="en-US" altLang="ko-KR" sz="2200"/>
-              <a:t>Goal</a:t>
-            </a:r>
-          </a:p>
-          <a:p>
-            <a:pPr lvl="1"/>
-            <a:r>
-              <a:rPr lang="en-US" altLang="ko-KR" sz="1800"/>
-              <a:t>Balanced workload</a:t>
-            </a:r>
-          </a:p>
-          <a:p>
-            <a:pPr lvl="1"/>
-            <a:r>
-              <a:rPr lang="en-US" altLang="ko-KR" sz="1800"/>
-              <a:t>Reduced communication costs</a:t>
-            </a:r>
-          </a:p>
-          <a:p>
-            <a:pPr lvl="1"/>
-            <a:endParaRPr lang="ko-KR" altLang="en-US" sz="1800"/>
+              <a:rPr lang="en-US" altLang="ko-KR" sz="2400"/>
+              <a:t>the focus is on the computation that is to be performed rather than on the data </a:t>
+            </a:r>
+          </a:p>
+          <a:p>
+            <a:r>
+              <a:rPr lang="en-US" altLang="ko-KR" sz="2400"/>
+              <a:t>problem is decomposed according to the work that must be done. </a:t>
+            </a:r>
+          </a:p>
+          <a:p>
+            <a:r>
+              <a:rPr lang="en-US" altLang="ko-KR" sz="2400"/>
+              <a:t>Each task then performs a portion of the overall work.</a:t>
+            </a:r>
+            <a:endParaRPr lang="ko-KR" altLang="en-US" sz="2400"/>
           </a:p>
         </p:txBody>
       </p:sp>
+      <p:pic>
+        <p:nvPicPr>
+          <p:cNvPr id="24579" name="Picture 2" descr="https://computing.llnl.gov/tutorials/parallel_comp/images/functional_decomp.gif">
+            <a:extLst>
+              <a:ext uri="{FF2B5EF4-FFF2-40B4-BE49-F238E27FC236}">
+                <a16:creationId xmlns:a16="http://schemas.microsoft.com/office/drawing/2014/main" id="{78897A6D-2C04-4FCF-D620-B620A0E93EE8}"/>
+              </a:ext>
+            </a:extLst>
+          </p:cNvPr>
+          <p:cNvPicPr>
+            <a:picLocks noChangeAspect="1" noChangeArrowheads="1"/>
+          </p:cNvPicPr>
+          <p:nvPr/>
+        </p:nvPicPr>
+        <p:blipFill>
+          <a:blip r:embed="rId2">
+            <a:extLst>
+              <a:ext uri="{28A0092B-C50C-407E-A947-70E740481C1C}">
+                <a14:useLocalDpi xmlns:a14="http://schemas.microsoft.com/office/drawing/2010/main" val="0"/>
+              </a:ext>
+            </a:extLst>
+          </a:blip>
+          <a:srcRect/>
+          <a:stretch>
+            <a:fillRect/>
+          </a:stretch>
+        </p:blipFill>
+        <p:spPr bwMode="auto">
+          <a:xfrm>
+            <a:off x="2051050" y="3933825"/>
+            <a:ext cx="4392613" cy="2640013"/>
+          </a:xfrm>
+          <a:prstGeom prst="rect">
+            <a:avLst/>
+          </a:prstGeom>
+          <a:noFill/>
+          <a:ln>
+            <a:noFill/>
+          </a:ln>
+          <a:extLst>
+            <a:ext uri="{909E8E84-426E-40DD-AFC4-6F175D3DCCD1}">
+              <a14:hiddenFill xmlns:a14="http://schemas.microsoft.com/office/drawing/2010/main">
+                <a:solidFill>
+                  <a:srgbClr val="FFFFFF"/>
+                </a:solidFill>
+              </a14:hiddenFill>
+            </a:ext>
+            <a:ext uri="{91240B29-F687-4F45-9708-019B960494DF}">
+              <a14:hiddenLine xmlns:a14="http://schemas.microsoft.com/office/drawing/2010/main" w="9525">
+                <a:solidFill>
+                  <a:srgbClr val="000000"/>
+                </a:solidFill>
+                <a:miter lim="800000"/>
+                <a:headEnd/>
+                <a:tailEnd/>
+              </a14:hiddenLine>
+            </a:ext>
+          </a:extLst>
+        </p:spPr>
+      </p:pic>
     </p:spTree>
   </p:cSld>
   <p:clrMapOvr>
@@ -9263,10 +9345,10 @@
       </p:grpSpPr>
       <p:sp>
         <p:nvSpPr>
-          <p:cNvPr id="26625" name="제목 1">
+          <p:cNvPr id="25601" name="제목 1">
             <a:extLst>
               <a:ext uri="{FF2B5EF4-FFF2-40B4-BE49-F238E27FC236}">
-                <a16:creationId xmlns:a16="http://schemas.microsoft.com/office/drawing/2014/main" id="{1EE023A3-CB32-F28E-757E-838458F6036A}"/>
+                <a16:creationId xmlns:a16="http://schemas.microsoft.com/office/drawing/2014/main" id="{C7FD4766-E290-21A3-30B7-53FDF57C8779}"/>
               </a:ext>
             </a:extLst>
           </p:cNvPr>
@@ -9284,7 +9366,7 @@
           <a:p>
             <a:r>
               <a:rPr lang="en-US" altLang="ko-KR" b="1" u="sng"/>
-              <a:t>Orchestration</a:t>
+              <a:t>Assignment</a:t>
             </a:r>
             <a:endParaRPr lang="ko-KR" altLang="en-US" b="1" u="sng"/>
           </a:p>
@@ -9292,10 +9374,10 @@
       </p:sp>
       <p:sp>
         <p:nvSpPr>
-          <p:cNvPr id="26626" name="내용 개체 틀 2">
+          <p:cNvPr id="25602" name="내용 개체 틀 2">
             <a:extLst>
               <a:ext uri="{FF2B5EF4-FFF2-40B4-BE49-F238E27FC236}">
-                <a16:creationId xmlns:a16="http://schemas.microsoft.com/office/drawing/2014/main" id="{512028FE-EBB6-D7B4-401B-E24C67F5A0A0}"/>
+                <a16:creationId xmlns:a16="http://schemas.microsoft.com/office/drawing/2014/main" id="{3218F49B-CE5F-4E81-A2D8-BE629356A4E3}"/>
               </a:ext>
             </a:extLst>
           </p:cNvPr>
@@ -9312,39 +9394,60 @@
           <a:lstStyle/>
           <a:p>
             <a:r>
-              <a:rPr lang="en-US" altLang="ko-KR" sz="2400"/>
-              <a:t>Structuring communication and synchronization</a:t>
-            </a:r>
-          </a:p>
-          <a:p>
-            <a:r>
-              <a:rPr lang="en-US" altLang="ko-KR" sz="2400"/>
-              <a:t>Organizing data structures in memory and scheduling tasks temporally</a:t>
-            </a:r>
-          </a:p>
-          <a:p>
-            <a:endParaRPr lang="en-US" altLang="ko-KR" sz="2400"/>
-          </a:p>
-          <a:p>
-            <a:r>
-              <a:rPr lang="en-US" altLang="ko-KR" sz="2400"/>
-              <a:t>Goals</a:t>
+              <a:rPr lang="en-US" altLang="ko-KR" sz="2000"/>
+              <a:t>Assign tasks to threads</a:t>
             </a:r>
           </a:p>
           <a:p>
             <a:pPr lvl="1"/>
             <a:r>
-              <a:rPr lang="en-US" altLang="ko-KR" sz="2000"/>
-              <a:t>Reduce cost of communication and synchronization as seen by processors</a:t>
+              <a:rPr lang="en-US" altLang="ko-KR" sz="1800"/>
+              <a:t>Balance workload, reduce communication and management cost</a:t>
             </a:r>
           </a:p>
           <a:p>
             <a:pPr lvl="1"/>
             <a:r>
-              <a:rPr lang="en-US" altLang="ko-KR" sz="2000"/>
-              <a:t>Reserve locality of data reference (including data structure organization)</a:t>
-            </a:r>
-            <a:endParaRPr lang="ko-KR" altLang="en-US" sz="2000"/>
+              <a:rPr lang="en-US" altLang="ko-KR" sz="1800"/>
+              <a:t>Together with decomposition, also called partitioning</a:t>
+            </a:r>
+          </a:p>
+          <a:p>
+            <a:pPr lvl="1"/>
+            <a:endParaRPr lang="en-US" altLang="ko-KR" sz="1800"/>
+          </a:p>
+          <a:p>
+            <a:r>
+              <a:rPr lang="en-US" altLang="ko-KR" sz="2200"/>
+              <a:t>Can be performed statically, or dynamically</a:t>
+            </a:r>
+          </a:p>
+          <a:p>
+            <a:endParaRPr lang="en-US" altLang="ko-KR" sz="2200"/>
+          </a:p>
+          <a:p>
+            <a:r>
+              <a:rPr lang="en-US" altLang="ko-KR" sz="2200"/>
+              <a:t>Goal</a:t>
+            </a:r>
+          </a:p>
+          <a:p>
+            <a:pPr lvl="1"/>
+            <a:r>
+              <a:rPr lang="en-US" altLang="ko-KR" sz="1800"/>
+              <a:t>Balanced workload</a:t>
+            </a:r>
+          </a:p>
+          <a:p>
+            <a:pPr lvl="1"/>
+            <a:r>
+              <a:rPr lang="en-US" altLang="ko-KR" sz="1800"/>
+              <a:t>Reduced communication costs</a:t>
+            </a:r>
+          </a:p>
+          <a:p>
+            <a:pPr lvl="1"/>
+            <a:endParaRPr lang="ko-KR" altLang="en-US" sz="1800"/>
           </a:p>
         </p:txBody>
       </p:sp>
@@ -9375,10 +9478,10 @@
       </p:grpSpPr>
       <p:sp>
         <p:nvSpPr>
-          <p:cNvPr id="27649" name="제목 1">
+          <p:cNvPr id="26625" name="제목 1">
             <a:extLst>
               <a:ext uri="{FF2B5EF4-FFF2-40B4-BE49-F238E27FC236}">
-                <a16:creationId xmlns:a16="http://schemas.microsoft.com/office/drawing/2014/main" id="{A4D4B361-F8BE-0FED-AB2A-E3F3944D8502}"/>
+                <a16:creationId xmlns:a16="http://schemas.microsoft.com/office/drawing/2014/main" id="{1EE023A3-CB32-F28E-757E-838458F6036A}"/>
               </a:ext>
             </a:extLst>
           </p:cNvPr>
@@ -9396,7 +9499,7 @@
           <a:p>
             <a:r>
               <a:rPr lang="en-US" altLang="ko-KR" b="1" u="sng"/>
-              <a:t>Mapping</a:t>
+              <a:t>Orchestration</a:t>
             </a:r>
             <a:endParaRPr lang="ko-KR" altLang="en-US" b="1" u="sng"/>
           </a:p>
@@ -9404,10 +9507,10 @@
       </p:sp>
       <p:sp>
         <p:nvSpPr>
-          <p:cNvPr id="27650" name="내용 개체 틀 2">
+          <p:cNvPr id="26626" name="내용 개체 틀 2">
             <a:extLst>
               <a:ext uri="{FF2B5EF4-FFF2-40B4-BE49-F238E27FC236}">
-                <a16:creationId xmlns:a16="http://schemas.microsoft.com/office/drawing/2014/main" id="{2AF207A2-8F5A-8F3F-EE27-5361B9793A26}"/>
+                <a16:creationId xmlns:a16="http://schemas.microsoft.com/office/drawing/2014/main" id="{512028FE-EBB6-D7B4-401B-E24C67F5A0A0}"/>
               </a:ext>
             </a:extLst>
           </p:cNvPr>
@@ -9425,41 +9528,38 @@
           <a:p>
             <a:r>
               <a:rPr lang="en-US" altLang="ko-KR" sz="2400"/>
-              <a:t>Mapping threads to execution units (CPU cores)</a:t>
+              <a:t>Structuring communication and synchronization</a:t>
             </a:r>
           </a:p>
           <a:p>
             <a:r>
               <a:rPr lang="en-US" altLang="ko-KR" sz="2400"/>
-              <a:t>Parallel application tries to use the entire machine</a:t>
-            </a:r>
+              <a:t>Organizing data structures in memory and scheduling tasks temporally</a:t>
+            </a:r>
+          </a:p>
+          <a:p>
+            <a:endParaRPr lang="en-US" altLang="ko-KR" sz="2400"/>
           </a:p>
           <a:p>
             <a:r>
               <a:rPr lang="en-US" altLang="ko-KR" sz="2400"/>
-              <a:t>Usually a job for OS</a:t>
-            </a:r>
-          </a:p>
-          <a:p>
-            <a:r>
-              <a:rPr lang="en-US" altLang="ko-KR" sz="2400"/>
-              <a:t>Mapping decision</a:t>
+              <a:t>Goals</a:t>
             </a:r>
           </a:p>
           <a:p>
             <a:pPr lvl="1"/>
             <a:r>
               <a:rPr lang="en-US" altLang="ko-KR" sz="2000"/>
-              <a:t>Place related threads (cooperating threads) on the same processor</a:t>
+              <a:t>Reduce cost of communication and synchronization as seen by processors</a:t>
             </a:r>
           </a:p>
           <a:p>
             <a:pPr lvl="1"/>
             <a:r>
               <a:rPr lang="en-US" altLang="ko-KR" sz="2000"/>
-              <a:t>maximize locality, data sharing, minimize costs of comm/sync</a:t>
-            </a:r>
-            <a:endParaRPr lang="ko-KR" altLang="en-US" sz="2400"/>
+              <a:t>Reserve locality of data reference (including data structure organization)</a:t>
+            </a:r>
+            <a:endParaRPr lang="ko-KR" altLang="en-US" sz="2000"/>
           </a:p>
         </p:txBody>
       </p:sp>
@@ -9490,10 +9590,10 @@
       </p:grpSpPr>
       <p:sp>
         <p:nvSpPr>
-          <p:cNvPr id="28673" name="제목 1">
+          <p:cNvPr id="27649" name="제목 1">
             <a:extLst>
               <a:ext uri="{FF2B5EF4-FFF2-40B4-BE49-F238E27FC236}">
-                <a16:creationId xmlns:a16="http://schemas.microsoft.com/office/drawing/2014/main" id="{D224A018-E60F-2B80-9BEC-C61967CE5E28}"/>
+                <a16:creationId xmlns:a16="http://schemas.microsoft.com/office/drawing/2014/main" id="{A4D4B361-F8BE-0FED-AB2A-E3F3944D8502}"/>
               </a:ext>
             </a:extLst>
           </p:cNvPr>
@@ -9510,19 +9610,19 @@
           <a:lstStyle/>
           <a:p>
             <a:r>
-              <a:rPr lang="en-US" altLang="ko-KR" sz="3600" b="1" u="sng"/>
-              <a:t>Performance of Parallel Programs</a:t>
-            </a:r>
-            <a:endParaRPr lang="ko-KR" altLang="en-US" sz="3600" b="1" u="sng"/>
+              <a:rPr lang="en-US" altLang="ko-KR" b="1" u="sng"/>
+              <a:t>Mapping</a:t>
+            </a:r>
+            <a:endParaRPr lang="ko-KR" altLang="en-US" b="1" u="sng"/>
           </a:p>
         </p:txBody>
       </p:sp>
       <p:sp>
         <p:nvSpPr>
-          <p:cNvPr id="28674" name="내용 개체 틀 2">
+          <p:cNvPr id="27650" name="내용 개체 틀 2">
             <a:extLst>
               <a:ext uri="{FF2B5EF4-FFF2-40B4-BE49-F238E27FC236}">
-                <a16:creationId xmlns:a16="http://schemas.microsoft.com/office/drawing/2014/main" id="{5C7B67AF-1342-F8A0-491C-8D263C3559AC}"/>
+                <a16:creationId xmlns:a16="http://schemas.microsoft.com/office/drawing/2014/main" id="{2AF207A2-8F5A-8F3F-EE27-5361B9793A26}"/>
               </a:ext>
             </a:extLst>
           </p:cNvPr>
@@ -9533,80 +9633,48 @@
             <p:ph idx="1"/>
           </p:nvPr>
         </p:nvSpPr>
-        <p:spPr>
-          <a:xfrm>
-            <a:off x="457200" y="1600200"/>
-            <a:ext cx="8435975" cy="4525963"/>
-          </a:xfrm>
-        </p:spPr>
+        <p:spPr/>
         <p:txBody>
           <a:bodyPr/>
           <a:lstStyle/>
           <a:p>
             <a:r>
-              <a:rPr lang="en-US" altLang="ko-KR" sz="3200"/>
-              <a:t>What factors affect the performance ?</a:t>
+              <a:rPr lang="en-US" altLang="ko-KR" sz="2400"/>
+              <a:t>Mapping threads to execution units (CPU cores)</a:t>
+            </a:r>
+          </a:p>
+          <a:p>
+            <a:r>
+              <a:rPr lang="en-US" altLang="ko-KR" sz="2400"/>
+              <a:t>Parallel application tries to use the entire machine</a:t>
+            </a:r>
+          </a:p>
+          <a:p>
+            <a:r>
+              <a:rPr lang="en-US" altLang="ko-KR" sz="2400"/>
+              <a:t>Usually a job for OS</a:t>
+            </a:r>
+          </a:p>
+          <a:p>
+            <a:r>
+              <a:rPr lang="en-US" altLang="ko-KR" sz="2400"/>
+              <a:t>Mapping decision</a:t>
             </a:r>
           </a:p>
           <a:p>
             <a:pPr lvl="1"/>
-            <a:endParaRPr lang="en-US" altLang="ko-KR" sz="2800" b="1"/>
+            <a:r>
+              <a:rPr lang="en-US" altLang="ko-KR" sz="2000"/>
+              <a:t>Place related threads (cooperating threads) on the same processor</a:t>
+            </a:r>
           </a:p>
           <a:p>
             <a:pPr lvl="1"/>
             <a:r>
-              <a:rPr lang="en-US" altLang="ko-KR" sz="2800" b="1"/>
-              <a:t>Decomposition</a:t>
-            </a:r>
-          </a:p>
-          <a:p>
-            <a:pPr lvl="2"/>
-            <a:r>
-              <a:rPr lang="en-US" altLang="ko-KR" sz="2500" b="1"/>
-              <a:t>Coverage </a:t>
-            </a:r>
-            <a:r>
-              <a:rPr lang="en-US" altLang="ko-KR" sz="2500"/>
-              <a:t>of parallelism in algorithm</a:t>
-            </a:r>
-            <a:endParaRPr lang="en-US" altLang="ko-KR" sz="3200"/>
-          </a:p>
-          <a:p>
-            <a:pPr lvl="1"/>
-            <a:r>
-              <a:rPr lang="en-US" altLang="ko-KR" sz="2800" b="1"/>
-              <a:t>Assignment</a:t>
-            </a:r>
-          </a:p>
-          <a:p>
-            <a:pPr lvl="2"/>
-            <a:r>
-              <a:rPr lang="en-US" altLang="ko-KR" sz="2500" b="1"/>
-              <a:t>Granularity </a:t>
-            </a:r>
-            <a:r>
-              <a:rPr lang="en-US" altLang="ko-KR" sz="2500"/>
-              <a:t>of partitioning among processors</a:t>
-            </a:r>
-          </a:p>
-          <a:p>
-            <a:pPr lvl="1"/>
-            <a:r>
-              <a:rPr lang="en-US" altLang="ko-KR" sz="2800" b="1"/>
-              <a:t>Orchestration/Mapping</a:t>
-            </a:r>
-          </a:p>
-          <a:p>
-            <a:pPr lvl="2"/>
-            <a:r>
-              <a:rPr lang="en-US" altLang="ko-KR" sz="2500" b="1"/>
-              <a:t>Locality </a:t>
-            </a:r>
-            <a:r>
-              <a:rPr lang="en-US" altLang="ko-KR" sz="2500"/>
-              <a:t>of computation and communication</a:t>
-            </a:r>
-            <a:endParaRPr lang="ko-KR" altLang="en-US" sz="2500"/>
+              <a:rPr lang="en-US" altLang="ko-KR" sz="2000"/>
+              <a:t>maximize locality, data sharing, minimize costs of comm/sync</a:t>
+            </a:r>
+            <a:endParaRPr lang="ko-KR" altLang="en-US" sz="2400"/>
           </a:p>
         </p:txBody>
       </p:sp>
@@ -9637,10 +9705,10 @@
       </p:grpSpPr>
       <p:sp>
         <p:nvSpPr>
-          <p:cNvPr id="29697" name="제목 1">
+          <p:cNvPr id="28673" name="제목 1">
             <a:extLst>
               <a:ext uri="{FF2B5EF4-FFF2-40B4-BE49-F238E27FC236}">
-                <a16:creationId xmlns:a16="http://schemas.microsoft.com/office/drawing/2014/main" id="{74A8B6EE-9676-FE9D-AF51-4C00FC7A2E41}"/>
+                <a16:creationId xmlns:a16="http://schemas.microsoft.com/office/drawing/2014/main" id="{D224A018-E60F-2B80-9BEC-C61967CE5E28}"/>
               </a:ext>
             </a:extLst>
           </p:cNvPr>
@@ -9657,19 +9725,19 @@
           <a:lstStyle/>
           <a:p>
             <a:r>
-              <a:rPr lang="en-US" altLang="ko-KR" b="1" u="sng"/>
-              <a:t>Coverage (Amdahl’s Law)</a:t>
-            </a:r>
-            <a:endParaRPr lang="ko-KR" altLang="en-US" b="1" u="sng"/>
+              <a:rPr lang="en-US" altLang="ko-KR" sz="3600" b="1" u="sng"/>
+              <a:t>Performance of Parallel Programs</a:t>
+            </a:r>
+            <a:endParaRPr lang="ko-KR" altLang="en-US" sz="3600" b="1" u="sng"/>
           </a:p>
         </p:txBody>
       </p:sp>
       <p:sp>
         <p:nvSpPr>
-          <p:cNvPr id="29698" name="내용 개체 틀 2">
+          <p:cNvPr id="28674" name="내용 개체 틀 2">
             <a:extLst>
               <a:ext uri="{FF2B5EF4-FFF2-40B4-BE49-F238E27FC236}">
-                <a16:creationId xmlns:a16="http://schemas.microsoft.com/office/drawing/2014/main" id="{3ECD7629-573B-1CB2-66C8-D204560E321A}"/>
+                <a16:creationId xmlns:a16="http://schemas.microsoft.com/office/drawing/2014/main" id="{5C7B67AF-1342-F8A0-491C-8D263C3559AC}"/>
               </a:ext>
             </a:extLst>
           </p:cNvPr>
@@ -9680,79 +9748,83 @@
             <p:ph idx="1"/>
           </p:nvPr>
         </p:nvSpPr>
-        <p:spPr/>
+        <p:spPr>
+          <a:xfrm>
+            <a:off x="457200" y="1600200"/>
+            <a:ext cx="8435975" cy="4525963"/>
+          </a:xfrm>
+        </p:spPr>
         <p:txBody>
           <a:bodyPr/>
           <a:lstStyle/>
           <a:p>
             <a:r>
-              <a:rPr lang="en-US" altLang="ko-KR"/>
-              <a:t>Potential program speedup is defined by the fraction of code that can be parallelized</a:t>
-            </a:r>
-            <a:endParaRPr lang="ko-KR" altLang="en-US"/>
+              <a:rPr lang="en-US" altLang="ko-KR" sz="3200"/>
+              <a:t>What factors affect the performance ?</a:t>
+            </a:r>
+          </a:p>
+          <a:p>
+            <a:pPr lvl="1"/>
+            <a:endParaRPr lang="en-US" altLang="ko-KR" sz="2800" b="1"/>
+          </a:p>
+          <a:p>
+            <a:pPr lvl="1"/>
+            <a:r>
+              <a:rPr lang="en-US" altLang="ko-KR" sz="2800" b="1"/>
+              <a:t>Decomposition</a:t>
+            </a:r>
+          </a:p>
+          <a:p>
+            <a:pPr lvl="2"/>
+            <a:r>
+              <a:rPr lang="en-US" altLang="ko-KR" sz="2500" b="1"/>
+              <a:t>Coverage </a:t>
+            </a:r>
+            <a:r>
+              <a:rPr lang="en-US" altLang="ko-KR" sz="2500"/>
+              <a:t>of parallelism in algorithm</a:t>
+            </a:r>
+            <a:endParaRPr lang="en-US" altLang="ko-KR" sz="3200"/>
+          </a:p>
+          <a:p>
+            <a:pPr lvl="1"/>
+            <a:r>
+              <a:rPr lang="en-US" altLang="ko-KR" sz="2800" b="1"/>
+              <a:t>Assignment</a:t>
+            </a:r>
+          </a:p>
+          <a:p>
+            <a:pPr lvl="2"/>
+            <a:r>
+              <a:rPr lang="en-US" altLang="ko-KR" sz="2500" b="1"/>
+              <a:t>Granularity </a:t>
+            </a:r>
+            <a:r>
+              <a:rPr lang="en-US" altLang="ko-KR" sz="2500"/>
+              <a:t>of partitioning among processors</a:t>
+            </a:r>
+          </a:p>
+          <a:p>
+            <a:pPr lvl="1"/>
+            <a:r>
+              <a:rPr lang="en-US" altLang="ko-KR" sz="2800" b="1"/>
+              <a:t>Orchestration/Mapping</a:t>
+            </a:r>
+          </a:p>
+          <a:p>
+            <a:pPr lvl="2"/>
+            <a:r>
+              <a:rPr lang="en-US" altLang="ko-KR" sz="2500" b="1"/>
+              <a:t>Locality </a:t>
+            </a:r>
+            <a:r>
+              <a:rPr lang="en-US" altLang="ko-KR" sz="2500"/>
+              <a:t>of computation and communication</a:t>
+            </a:r>
+            <a:endParaRPr lang="ko-KR" altLang="en-US" sz="2500"/>
           </a:p>
         </p:txBody>
       </p:sp>
-      <p:pic>
-        <p:nvPicPr>
-          <p:cNvPr id="29699" name="Picture 2">
-            <a:extLst>
-              <a:ext uri="{FF2B5EF4-FFF2-40B4-BE49-F238E27FC236}">
-                <a16:creationId xmlns:a16="http://schemas.microsoft.com/office/drawing/2014/main" id="{27EB098B-634D-E2CA-D928-DDB318D01069}"/>
-              </a:ext>
-            </a:extLst>
-          </p:cNvPr>
-          <p:cNvPicPr>
-            <a:picLocks noChangeAspect="1" noChangeArrowheads="1"/>
-          </p:cNvPicPr>
-          <p:nvPr/>
-        </p:nvPicPr>
-        <p:blipFill>
-          <a:blip r:embed="rId2">
-            <a:extLst>
-              <a:ext uri="{28A0092B-C50C-407E-A947-70E740481C1C}">
-                <a14:useLocalDpi xmlns:a14="http://schemas.microsoft.com/office/drawing/2010/main" val="0"/>
-              </a:ext>
-            </a:extLst>
-          </a:blip>
-          <a:srcRect/>
-          <a:stretch>
-            <a:fillRect/>
-          </a:stretch>
-        </p:blipFill>
-        <p:spPr bwMode="auto">
-          <a:xfrm>
-            <a:off x="107950" y="3357563"/>
-            <a:ext cx="8942388" cy="2760662"/>
-          </a:xfrm>
-          <a:prstGeom prst="rect">
-            <a:avLst/>
-          </a:prstGeom>
-          <a:noFill/>
-          <a:ln>
-            <a:noFill/>
-          </a:ln>
-          <a:extLst>
-            <a:ext uri="{909E8E84-426E-40DD-AFC4-6F175D3DCCD1}">
-              <a14:hiddenFill xmlns:a14="http://schemas.microsoft.com/office/drawing/2010/main">
-                <a:solidFill>
-                  <a:srgbClr val="FFFFFF"/>
-                </a:solidFill>
-              </a14:hiddenFill>
-            </a:ext>
-            <a:ext uri="{91240B29-F687-4F45-9708-019B960494DF}">
-              <a14:hiddenLine xmlns:a14="http://schemas.microsoft.com/office/drawing/2010/main" w="9525">
-                <a:solidFill>
-                  <a:srgbClr val="000000"/>
-                </a:solidFill>
-                <a:miter lim="800000"/>
-                <a:headEnd/>
-                <a:tailEnd/>
-              </a14:hiddenLine>
-            </a:ext>
-          </a:extLst>
-        </p:spPr>
-      </p:pic>
     </p:spTree>
   </p:cSld>
   <p:clrMapOvr>
@@ -9780,10 +9852,10 @@
       </p:grpSpPr>
       <p:sp>
         <p:nvSpPr>
-          <p:cNvPr id="30721" name="제목 1">
+          <p:cNvPr id="29697" name="제목 1">
             <a:extLst>
               <a:ext uri="{FF2B5EF4-FFF2-40B4-BE49-F238E27FC236}">
-                <a16:creationId xmlns:a16="http://schemas.microsoft.com/office/drawing/2014/main" id="{BFADF104-40B8-2756-042F-9CC997C5CFA8}"/>
+                <a16:creationId xmlns:a16="http://schemas.microsoft.com/office/drawing/2014/main" id="{74A8B6EE-9676-FE9D-AF51-4C00FC7A2E41}"/>
               </a:ext>
             </a:extLst>
           </p:cNvPr>
@@ -9801,18 +9873,18 @@
           <a:p>
             <a:r>
               <a:rPr lang="en-US" altLang="ko-KR" b="1" u="sng"/>
-              <a:t>Amdahl’s Law</a:t>
-            </a:r>
-            <a:endParaRPr lang="ko-KR" altLang="en-US"/>
+              <a:t>Coverage (Amdahl’s Law)</a:t>
+            </a:r>
+            <a:endParaRPr lang="ko-KR" altLang="en-US" b="1" u="sng"/>
           </a:p>
         </p:txBody>
       </p:sp>
       <p:sp>
         <p:nvSpPr>
-          <p:cNvPr id="30722" name="내용 개체 틀 2">
+          <p:cNvPr id="29698" name="내용 개체 틀 2">
             <a:extLst>
               <a:ext uri="{FF2B5EF4-FFF2-40B4-BE49-F238E27FC236}">
-                <a16:creationId xmlns:a16="http://schemas.microsoft.com/office/drawing/2014/main" id="{1E58C8E1-142D-F591-CD8A-E5AA307F8B45}"/>
+                <a16:creationId xmlns:a16="http://schemas.microsoft.com/office/drawing/2014/main" id="{3ECD7629-573B-1CB2-66C8-D204560E321A}"/>
               </a:ext>
             </a:extLst>
           </p:cNvPr>
@@ -9823,60 +9895,25 @@
             <p:ph idx="1"/>
           </p:nvPr>
         </p:nvSpPr>
-        <p:spPr>
-          <a:xfrm>
-            <a:off x="457200" y="4403725"/>
-            <a:ext cx="8229600" cy="1978025"/>
-          </a:xfrm>
-        </p:spPr>
+        <p:spPr/>
         <p:txBody>
           <a:bodyPr/>
           <a:lstStyle/>
           <a:p>
             <a:r>
-              <a:rPr lang="en-US" altLang="ko-KR" sz="2400"/>
-              <a:t>Speedup = old running time / new running time</a:t>
-            </a:r>
-          </a:p>
-          <a:p>
-            <a:pPr>
-              <a:buFont typeface="Wingdings" pitchFamily="2" charset="2"/>
-              <a:buNone/>
-            </a:pPr>
-            <a:r>
-              <a:rPr lang="en-US" altLang="ko-KR" sz="2400"/>
-              <a:t>                = 100 sec / 60 sec</a:t>
-            </a:r>
-          </a:p>
-          <a:p>
-            <a:pPr>
-              <a:buFont typeface="Wingdings" pitchFamily="2" charset="2"/>
-              <a:buNone/>
-            </a:pPr>
-            <a:r>
-              <a:rPr lang="en-US" altLang="ko-KR" sz="2400"/>
-              <a:t>                = 1.67</a:t>
-            </a:r>
-          </a:p>
-          <a:p>
-            <a:pPr>
-              <a:buFont typeface="Wingdings" pitchFamily="2" charset="2"/>
-              <a:buNone/>
-            </a:pPr>
-            <a:r>
-              <a:rPr lang="en-US" altLang="ko-KR" sz="2400"/>
-              <a:t>                 (parallel version is 1.67 times faster)</a:t>
-            </a:r>
-            <a:endParaRPr lang="ko-KR" altLang="en-US" sz="2400"/>
+              <a:rPr lang="en-US" altLang="ko-KR"/>
+              <a:t>Potential program speedup is defined by the fraction of code that can be parallelized</a:t>
+            </a:r>
+            <a:endParaRPr lang="ko-KR" altLang="en-US"/>
           </a:p>
         </p:txBody>
       </p:sp>
       <p:pic>
         <p:nvPicPr>
-          <p:cNvPr id="30723" name="Picture 2">
+          <p:cNvPr id="29699" name="Picture 2">
             <a:extLst>
               <a:ext uri="{FF2B5EF4-FFF2-40B4-BE49-F238E27FC236}">
-                <a16:creationId xmlns:a16="http://schemas.microsoft.com/office/drawing/2014/main" id="{DAE5F989-9777-2506-3C31-4C8AF5B4C2AC}"/>
+                <a16:creationId xmlns:a16="http://schemas.microsoft.com/office/drawing/2014/main" id="{27EB098B-634D-E2CA-D928-DDB318D01069}"/>
               </a:ext>
             </a:extLst>
           </p:cNvPr>
@@ -9900,8 +9937,8 @@
         </p:blipFill>
         <p:spPr bwMode="auto">
           <a:xfrm>
-            <a:off x="93663" y="1460500"/>
-            <a:ext cx="8942387" cy="2760663"/>
+            <a:off x="107950" y="3357563"/>
+            <a:ext cx="8942388" cy="2760662"/>
           </a:xfrm>
           <a:prstGeom prst="rect">
             <a:avLst/>
@@ -9958,10 +9995,10 @@
       </p:grpSpPr>
       <p:sp>
         <p:nvSpPr>
-          <p:cNvPr id="31745" name="제목 1">
+          <p:cNvPr id="30721" name="제목 1">
             <a:extLst>
               <a:ext uri="{FF2B5EF4-FFF2-40B4-BE49-F238E27FC236}">
-                <a16:creationId xmlns:a16="http://schemas.microsoft.com/office/drawing/2014/main" id="{422FB6ED-07E9-7B6A-80AC-A2C8E1A4EA68}"/>
+                <a16:creationId xmlns:a16="http://schemas.microsoft.com/office/drawing/2014/main" id="{BFADF104-40B8-2756-042F-9CC997C5CFA8}"/>
               </a:ext>
             </a:extLst>
           </p:cNvPr>
@@ -9987,10 +10024,10 @@
       </p:sp>
       <p:sp>
         <p:nvSpPr>
-          <p:cNvPr id="31746" name="내용 개체 틀 2">
+          <p:cNvPr id="30722" name="내용 개체 틀 2">
             <a:extLst>
               <a:ext uri="{FF2B5EF4-FFF2-40B4-BE49-F238E27FC236}">
-                <a16:creationId xmlns:a16="http://schemas.microsoft.com/office/drawing/2014/main" id="{E833ADAB-AB59-250B-BC94-2582B96CFA9C}"/>
+                <a16:creationId xmlns:a16="http://schemas.microsoft.com/office/drawing/2014/main" id="{1E58C8E1-142D-F591-CD8A-E5AA307F8B45}"/>
               </a:ext>
             </a:extLst>
           </p:cNvPr>
@@ -10001,37 +10038,60 @@
             <p:ph idx="1"/>
           </p:nvPr>
         </p:nvSpPr>
-        <p:spPr/>
+        <p:spPr>
+          <a:xfrm>
+            <a:off x="457200" y="4403725"/>
+            <a:ext cx="8229600" cy="1978025"/>
+          </a:xfrm>
+        </p:spPr>
         <p:txBody>
           <a:bodyPr/>
           <a:lstStyle/>
           <a:p>
             <a:r>
-              <a:rPr lang="en-US" altLang="ko-KR" sz="2800" i="1" dirty="0"/>
-              <a:t>p = fraction of work that can be parallelized</a:t>
-            </a:r>
-          </a:p>
-          <a:p>
-            <a:r>
-              <a:rPr lang="en-US" altLang="ko-KR" sz="2800" i="1" dirty="0"/>
-              <a:t>n = the number of processor</a:t>
-            </a:r>
-          </a:p>
-          <a:p>
-            <a:r>
-              <a:rPr lang="en-US" altLang="ko-KR" sz="2800" i="1" dirty="0"/>
-              <a:t>Speedup &lt; 1/(1-p)  as  n → infinity</a:t>
-            </a:r>
-            <a:endParaRPr lang="ko-KR" altLang="en-US" sz="2800" dirty="0"/>
+              <a:rPr lang="en-US" altLang="ko-KR" sz="2400"/>
+              <a:t>Speedup = old running time / new running time</a:t>
+            </a:r>
+          </a:p>
+          <a:p>
+            <a:pPr>
+              <a:buFont typeface="Wingdings" pitchFamily="2" charset="2"/>
+              <a:buNone/>
+            </a:pPr>
+            <a:r>
+              <a:rPr lang="en-US" altLang="ko-KR" sz="2400"/>
+              <a:t>                = 100 sec / 60 sec</a:t>
+            </a:r>
+          </a:p>
+          <a:p>
+            <a:pPr>
+              <a:buFont typeface="Wingdings" pitchFamily="2" charset="2"/>
+              <a:buNone/>
+            </a:pPr>
+            <a:r>
+              <a:rPr lang="en-US" altLang="ko-KR" sz="2400"/>
+              <a:t>                = 1.67</a:t>
+            </a:r>
+          </a:p>
+          <a:p>
+            <a:pPr>
+              <a:buFont typeface="Wingdings" pitchFamily="2" charset="2"/>
+              <a:buNone/>
+            </a:pPr>
+            <a:r>
+              <a:rPr lang="en-US" altLang="ko-KR" sz="2400"/>
+              <a:t>                 (parallel version is 1.67 times faster)</a:t>
+            </a:r>
+            <a:endParaRPr lang="ko-KR" altLang="en-US" sz="2400"/>
           </a:p>
         </p:txBody>
       </p:sp>
       <p:pic>
         <p:nvPicPr>
-          <p:cNvPr id="31747" name="Picture 2">
+          <p:cNvPr id="30723" name="Picture 2">
             <a:extLst>
               <a:ext uri="{FF2B5EF4-FFF2-40B4-BE49-F238E27FC236}">
-                <a16:creationId xmlns:a16="http://schemas.microsoft.com/office/drawing/2014/main" id="{5430C091-8815-5BAE-1694-80A81024249F}"/>
+                <a16:creationId xmlns:a16="http://schemas.microsoft.com/office/drawing/2014/main" id="{DAE5F989-9777-2506-3C31-4C8AF5B4C2AC}"/>
               </a:ext>
             </a:extLst>
           </p:cNvPr>
@@ -10055,8 +10115,8 @@
         </p:blipFill>
         <p:spPr bwMode="auto">
           <a:xfrm>
-            <a:off x="683568" y="3284984"/>
-            <a:ext cx="6499225" cy="3489325"/>
+            <a:off x="93663" y="1460500"/>
+            <a:ext cx="8942387" cy="2760663"/>
           </a:xfrm>
           <a:prstGeom prst="rect">
             <a:avLst/>
@@ -10113,10 +10173,10 @@
       </p:grpSpPr>
       <p:sp>
         <p:nvSpPr>
-          <p:cNvPr id="32769" name="제목 1">
+          <p:cNvPr id="31745" name="제목 1">
             <a:extLst>
               <a:ext uri="{FF2B5EF4-FFF2-40B4-BE49-F238E27FC236}">
-                <a16:creationId xmlns:a16="http://schemas.microsoft.com/office/drawing/2014/main" id="{5640B87C-FF60-186A-B5A2-3AC96FD1F97B}"/>
+                <a16:creationId xmlns:a16="http://schemas.microsoft.com/office/drawing/2014/main" id="{422FB6ED-07E9-7B6A-80AC-A2C8E1A4EA68}"/>
               </a:ext>
             </a:extLst>
           </p:cNvPr>
@@ -10134,7 +10194,7 @@
           <a:p>
             <a:r>
               <a:rPr lang="en-US" altLang="ko-KR" b="1" u="sng"/>
-              <a:t>Implications of Amdahl’s Law</a:t>
+              <a:t>Amdahl’s Law</a:t>
             </a:r>
             <a:endParaRPr lang="ko-KR" altLang="en-US"/>
           </a:p>
@@ -10142,10 +10202,10 @@
       </p:sp>
       <p:sp>
         <p:nvSpPr>
-          <p:cNvPr id="32770" name="내용 개체 틀 2">
+          <p:cNvPr id="31746" name="내용 개체 틀 2">
             <a:extLst>
               <a:ext uri="{FF2B5EF4-FFF2-40B4-BE49-F238E27FC236}">
-                <a16:creationId xmlns:a16="http://schemas.microsoft.com/office/drawing/2014/main" id="{D10F90B0-5706-95CD-4283-B865D7AB78A1}"/>
+                <a16:creationId xmlns:a16="http://schemas.microsoft.com/office/drawing/2014/main" id="{E833ADAB-AB59-250B-BC94-2582B96CFA9C}"/>
               </a:ext>
             </a:extLst>
           </p:cNvPr>
@@ -10162,31 +10222,85 @@
           <a:lstStyle/>
           <a:p>
             <a:r>
-              <a:rPr lang="en-US" altLang="ko-KR" sz="2400" dirty="0"/>
-              <a:t>Speedup tends to 1/(1-p) as number of processors tends to infinity</a:t>
-            </a:r>
-          </a:p>
-          <a:p>
-            <a:endParaRPr lang="en-US" altLang="ko-KR" sz="2400" dirty="0"/>
-          </a:p>
-          <a:p>
-            <a:r>
-              <a:rPr lang="en-US" altLang="ko-KR" sz="2400" dirty="0"/>
-              <a:t>Even if the parallel part speeds up perfectly           performance is limited by the sequential part</a:t>
-            </a:r>
-          </a:p>
-          <a:p>
-            <a:endParaRPr lang="en-US" altLang="ko-KR" sz="2400" dirty="0"/>
-          </a:p>
-          <a:p>
-            <a:r>
-              <a:rPr lang="en-US" altLang="ko-KR" sz="2400" dirty="0"/>
-              <a:t>Parallel programming is worthwhile when programs have a lot of work that is parallel in nature</a:t>
-            </a:r>
-            <a:endParaRPr lang="ko-KR" altLang="en-US" sz="2400" dirty="0"/>
+              <a:rPr lang="en-US" altLang="ko-KR" sz="2800" i="1" dirty="0"/>
+              <a:t>p = fraction of work that can be parallelized</a:t>
+            </a:r>
+          </a:p>
+          <a:p>
+            <a:r>
+              <a:rPr lang="en-US" altLang="ko-KR" sz="2800" i="1" dirty="0"/>
+              <a:t>n = the number of processor</a:t>
+            </a:r>
+          </a:p>
+          <a:p>
+            <a:r>
+              <a:rPr lang="en-US" altLang="ko-KR" sz="2800" i="1" dirty="0"/>
+              <a:t>Speedup &lt; 1/(1-p)  as  n → infinity</a:t>
+            </a:r>
+            <a:endParaRPr lang="ko-KR" altLang="en-US" sz="2800" dirty="0"/>
           </a:p>
         </p:txBody>
       </p:sp>
+      <p:pic>
+        <p:nvPicPr>
+          <p:cNvPr id="31747" name="Picture 2">
+            <a:extLst>
+              <a:ext uri="{FF2B5EF4-FFF2-40B4-BE49-F238E27FC236}">
+                <a16:creationId xmlns:a16="http://schemas.microsoft.com/office/drawing/2014/main" id="{5430C091-8815-5BAE-1694-80A81024249F}"/>
+              </a:ext>
+            </a:extLst>
+          </p:cNvPr>
+          <p:cNvPicPr>
+            <a:picLocks noChangeAspect="1" noChangeArrowheads="1"/>
+          </p:cNvPicPr>
+          <p:nvPr/>
+        </p:nvPicPr>
+        <p:blipFill>
+          <a:blip r:embed="rId2">
+            <a:extLst>
+              <a:ext uri="{28A0092B-C50C-407E-A947-70E740481C1C}">
+                <a14:useLocalDpi xmlns:a14="http://schemas.microsoft.com/office/drawing/2010/main" val="0"/>
+              </a:ext>
+            </a:extLst>
+          </a:blip>
+          <a:srcRect/>
+          <a:stretch>
+            <a:fillRect/>
+          </a:stretch>
+        </p:blipFill>
+        <p:spPr bwMode="auto">
+          <a:xfrm>
+            <a:off x="683568" y="3284984"/>
+            <a:ext cx="6499225" cy="3489325"/>
+          </a:xfrm>
+          <a:prstGeom prst="rect">
+            <a:avLst/>
+          </a:prstGeom>
+          <a:noFill/>
+          <a:ln>
+            <a:noFill/>
+          </a:ln>
+          <a:extLst>
+            <a:ext uri="{909E8E84-426E-40DD-AFC4-6F175D3DCCD1}">
+              <a14:hiddenFill xmlns:a14="http://schemas.microsoft.com/office/drawing/2010/main">
+                <a:solidFill>
+                  <a:srgbClr val="FFFFFF"/>
+                </a:solidFill>
+              </a14:hiddenFill>
+            </a:ext>
+            <a:ext uri="{91240B29-F687-4F45-9708-019B960494DF}">
+              <a14:hiddenLine xmlns:a14="http://schemas.microsoft.com/office/drawing/2010/main" w="9525">
+                <a:solidFill>
+                  <a:srgbClr val="000000"/>
+                </a:solidFill>
+                <a:miter lim="800000"/>
+                <a:headEnd/>
+                <a:tailEnd/>
+              </a14:hiddenLine>
+            </a:ext>
+          </a:extLst>
+        </p:spPr>
+      </p:pic>
     </p:spTree>
   </p:cSld>
   <p:clrMapOvr>
@@ -10214,15 +10328,15 @@
       </p:grpSpPr>
       <p:sp>
         <p:nvSpPr>
-          <p:cNvPr id="2" name="제목 1">
+          <p:cNvPr id="32769" name="제목 1">
             <a:extLst>
               <a:ext uri="{FF2B5EF4-FFF2-40B4-BE49-F238E27FC236}">
-                <a16:creationId xmlns:a16="http://schemas.microsoft.com/office/drawing/2014/main" id="{B304E6DD-6177-951A-B23F-D6A0C644D26F}"/>
+                <a16:creationId xmlns:a16="http://schemas.microsoft.com/office/drawing/2014/main" id="{5640B87C-FF60-186A-B5A2-3AC96FD1F97B}"/>
               </a:ext>
             </a:extLst>
           </p:cNvPr>
           <p:cNvSpPr>
-            <a:spLocks noGrp="1"/>
+            <a:spLocks noGrp="1" noChangeArrowheads="1"/>
           </p:cNvSpPr>
           <p:nvPr>
             <p:ph type="title"/>
@@ -10234,261 +10348,61 @@
           <a:lstStyle/>
           <a:p>
             <a:r>
-              <a:rPr kumimoji="1" lang="en-US" altLang="ko-Kore-KR" b="1" u="sng" dirty="0"/>
-              <a:t>Gustafson’s Law</a:t>
-            </a:r>
-            <a:endParaRPr kumimoji="1" lang="ko-Kore-KR" altLang="en-US" b="1" u="sng" dirty="0"/>
+              <a:rPr lang="en-US" altLang="ko-KR" b="1" u="sng"/>
+              <a:t>Implications of Amdahl’s Law</a:t>
+            </a:r>
+            <a:endParaRPr lang="ko-KR" altLang="en-US"/>
           </a:p>
         </p:txBody>
       </p:sp>
       <p:sp>
         <p:nvSpPr>
-          <p:cNvPr id="3" name="내용 개체 틀 2">
+          <p:cNvPr id="32770" name="내용 개체 틀 2">
             <a:extLst>
               <a:ext uri="{FF2B5EF4-FFF2-40B4-BE49-F238E27FC236}">
-                <a16:creationId xmlns:a16="http://schemas.microsoft.com/office/drawing/2014/main" id="{72CF879A-4CC9-308E-4E99-D9386E4FCCBF}"/>
+                <a16:creationId xmlns:a16="http://schemas.microsoft.com/office/drawing/2014/main" id="{D10F90B0-5706-95CD-4283-B865D7AB78A1}"/>
               </a:ext>
             </a:extLst>
           </p:cNvPr>
           <p:cNvSpPr>
-            <a:spLocks noGrp="1"/>
+            <a:spLocks noGrp="1" noChangeArrowheads="1"/>
           </p:cNvSpPr>
           <p:nvPr>
             <p:ph idx="1"/>
           </p:nvPr>
         </p:nvSpPr>
-        <p:spPr>
-          <a:xfrm>
-            <a:off x="457200" y="1600200"/>
-            <a:ext cx="8229600" cy="4525963"/>
-          </a:xfrm>
-        </p:spPr>
+        <p:spPr/>
         <p:txBody>
           <a:bodyPr/>
           <a:lstStyle/>
           <a:p>
             <a:r>
-              <a:rPr kumimoji="1" lang="en-US" altLang="ko-Kore-KR" dirty="0"/>
-              <a:t>Amdahl’s law</a:t>
-            </a:r>
-          </a:p>
-          <a:p>
-            <a:pPr lvl="1"/>
-            <a:r>
-              <a:rPr lang="en-US" altLang="ko-Kore-KR" dirty="0"/>
-              <a:t>how much faster you can run a fixed workload</a:t>
-            </a:r>
-          </a:p>
-          <a:p>
-            <a:r>
-              <a:rPr kumimoji="1" lang="en-US" altLang="ko-Kore-KR" dirty="0"/>
-              <a:t>Gustafson’s law</a:t>
-            </a:r>
-          </a:p>
-          <a:p>
-            <a:pPr lvl="1"/>
-            <a:r>
-              <a:rPr lang="en-US" altLang="ko-Kore-KR" dirty="0"/>
-              <a:t>How much more work you can do in the same amount of time by adding processors</a:t>
-            </a:r>
-          </a:p>
-          <a:p>
-            <a:pPr lvl="1"/>
-            <a:endParaRPr kumimoji="1" lang="en-US" altLang="ko-Kore-KR" dirty="0"/>
-          </a:p>
-          <a:p>
-            <a:pPr lvl="1"/>
-            <a:endParaRPr lang="en-US" altLang="ko-Kore-KR" dirty="0"/>
-          </a:p>
-          <a:p>
-            <a:pPr marL="457200" lvl="1" indent="0">
-              <a:buNone/>
-            </a:pPr>
-            <a:endParaRPr kumimoji="1" lang="en-US" altLang="ko-Kore-KR" dirty="0"/>
-          </a:p>
-          <a:p>
-            <a:endParaRPr kumimoji="1" lang="ko-Kore-KR" altLang="en-US" dirty="0"/>
-          </a:p>
-        </p:txBody>
-      </p:sp>
-      <p:pic>
-        <p:nvPicPr>
-          <p:cNvPr id="4" name="그림 3">
-            <a:extLst>
-              <a:ext uri="{FF2B5EF4-FFF2-40B4-BE49-F238E27FC236}">
-                <a16:creationId xmlns:a16="http://schemas.microsoft.com/office/drawing/2014/main" id="{5BF62A7D-2931-CF37-CCF1-1D4F10600D95}"/>
-              </a:ext>
-            </a:extLst>
-          </p:cNvPr>
-          <p:cNvPicPr>
-            <a:picLocks noChangeAspect="1"/>
-          </p:cNvPicPr>
-          <p:nvPr/>
-        </p:nvPicPr>
-        <p:blipFill>
-          <a:blip r:embed="rId2"/>
-          <a:stretch>
-            <a:fillRect/>
-          </a:stretch>
-        </p:blipFill>
-        <p:spPr>
-          <a:xfrm>
-            <a:off x="611560" y="4038416"/>
-            <a:ext cx="2808312" cy="2783785"/>
-          </a:xfrm>
-          <a:prstGeom prst="rect">
-            <a:avLst/>
-          </a:prstGeom>
-        </p:spPr>
-      </p:pic>
-      <p:sp>
-        <p:nvSpPr>
-          <p:cNvPr id="6" name="TextBox 5">
-            <a:extLst>
-              <a:ext uri="{FF2B5EF4-FFF2-40B4-BE49-F238E27FC236}">
-                <a16:creationId xmlns:a16="http://schemas.microsoft.com/office/drawing/2014/main" id="{7C6AFA70-CF8F-913A-272D-BEE334BB7099}"/>
-              </a:ext>
-            </a:extLst>
-          </p:cNvPr>
-          <p:cNvSpPr txBox="1"/>
-          <p:nvPr/>
-        </p:nvSpPr>
-        <p:spPr>
-          <a:xfrm>
-            <a:off x="4644008" y="4293096"/>
-            <a:ext cx="4392488" cy="2308324"/>
-          </a:xfrm>
-          <a:prstGeom prst="rect">
-            <a:avLst/>
-          </a:prstGeom>
-          <a:solidFill>
-            <a:srgbClr val="FFFFFF"/>
-          </a:solidFill>
-        </p:spPr>
-        <p:txBody>
-          <a:bodyPr wrap="square" rtlCol="0">
-            <a:spAutoFit/>
-          </a:bodyPr>
-          <a:lstStyle/>
-          <a:p>
-            <a:pPr marL="285750" indent="-285750">
-              <a:buFont typeface="Arial" panose="020B0604020202020204" pitchFamily="34" charset="0"/>
-              <a:buChar char="•"/>
-            </a:pPr>
-            <a:r>
-              <a:rPr kumimoji="1" lang="en-US" altLang="ko-Kore-KR" i="1" dirty="0"/>
-              <a:t>s </a:t>
-            </a:r>
-            <a:r>
-              <a:rPr kumimoji="1" lang="en-US" altLang="ko-Kore-KR" dirty="0"/>
-              <a:t>: serial fraction</a:t>
-            </a:r>
-          </a:p>
-          <a:p>
-            <a:pPr marL="285750" indent="-285750">
-              <a:buFont typeface="Arial" panose="020B0604020202020204" pitchFamily="34" charset="0"/>
-              <a:buChar char="•"/>
-            </a:pPr>
-            <a:r>
-              <a:rPr kumimoji="1" lang="en-US" altLang="ko-Kore-KR" i="1" dirty="0"/>
-              <a:t>p </a:t>
-            </a:r>
-            <a:r>
-              <a:rPr kumimoji="1" lang="en-US" altLang="ko-Kore-KR" dirty="0"/>
-              <a:t>: parallel fraction</a:t>
-            </a:r>
-          </a:p>
-          <a:p>
-            <a:r>
-              <a:rPr lang="en-US" altLang="ko-Kore-KR" dirty="0"/>
-              <a:t>   ( </a:t>
-            </a:r>
-            <a:r>
-              <a:rPr lang="en-US" altLang="ko-Kore-KR" i="1" dirty="0" err="1"/>
-              <a:t>s</a:t>
-            </a:r>
-            <a:r>
-              <a:rPr lang="en-US" altLang="ko-Kore-KR" dirty="0" err="1"/>
-              <a:t>+</a:t>
-            </a:r>
-            <a:r>
-              <a:rPr lang="en-US" altLang="ko-Kore-KR" i="1" dirty="0" err="1"/>
-              <a:t>p</a:t>
-            </a:r>
-            <a:r>
-              <a:rPr lang="en-US" altLang="ko-Kore-KR" dirty="0"/>
-              <a:t> = 1 )</a:t>
-            </a:r>
-          </a:p>
-          <a:p>
-            <a:endParaRPr lang="en-US" altLang="ko-Kore-KR" dirty="0"/>
-          </a:p>
-          <a:p>
-            <a:pPr marL="285750" indent="-285750">
-              <a:buFont typeface="Arial" panose="020B0604020202020204" pitchFamily="34" charset="0"/>
-              <a:buChar char="•"/>
-            </a:pPr>
-            <a:r>
-              <a:rPr lang="en-US" altLang="ko-Kore-KR" i="1" dirty="0"/>
-              <a:t>N </a:t>
-            </a:r>
-            <a:r>
-              <a:rPr lang="en-US" altLang="ko-Kore-KR" dirty="0"/>
-              <a:t>: the number of processors</a:t>
-            </a:r>
-          </a:p>
-          <a:p>
-            <a:endParaRPr kumimoji="1" lang="en-US" altLang="ko-Kore-KR" dirty="0"/>
-          </a:p>
-          <a:p>
-            <a:pPr marL="285750" indent="-285750">
-              <a:buFont typeface="Arial" panose="020B0604020202020204" pitchFamily="34" charset="0"/>
-              <a:buChar char="•"/>
-            </a:pPr>
-            <a:r>
-              <a:rPr lang="en-US" altLang="ko-Kore-KR" i="1" dirty="0"/>
-              <a:t>T</a:t>
-            </a:r>
-            <a:r>
-              <a:rPr lang="en-US" altLang="ko-Kore-KR" i="1" baseline="-25000" dirty="0"/>
-              <a:t>1 </a:t>
-            </a:r>
-            <a:r>
-              <a:rPr lang="en-US" altLang="ko-Kore-KR" dirty="0"/>
-              <a:t>: running time on 1 processor</a:t>
-            </a:r>
-            <a:r>
-              <a:rPr kumimoji="1" lang="en-US" altLang="ko-Kore-KR" dirty="0"/>
-              <a:t>  </a:t>
-            </a:r>
-          </a:p>
-          <a:p>
-            <a:pPr marL="285750" indent="-285750">
-              <a:buFont typeface="Arial" panose="020B0604020202020204" pitchFamily="34" charset="0"/>
-              <a:buChar char="•"/>
-            </a:pPr>
-            <a:r>
-              <a:rPr lang="en-US" altLang="ko-Kore-KR" i="1" dirty="0"/>
-              <a:t>T</a:t>
-            </a:r>
-            <a:r>
-              <a:rPr lang="en-US" altLang="ko-Kore-KR" i="1" baseline="-25000" dirty="0"/>
-              <a:t>N </a:t>
-            </a:r>
-            <a:r>
-              <a:rPr lang="en-US" altLang="ko-Kore-KR" dirty="0"/>
-              <a:t>: running time on N processor</a:t>
-            </a:r>
-            <a:endParaRPr kumimoji="1" lang="ko-Kore-KR" altLang="en-US" dirty="0"/>
+              <a:rPr lang="en-US" altLang="ko-KR" sz="2400" dirty="0"/>
+              <a:t>Speedup tends to 1/(1-p) as number of processors tends to infinity</a:t>
+            </a:r>
+          </a:p>
+          <a:p>
+            <a:endParaRPr lang="en-US" altLang="ko-KR" sz="2400" dirty="0"/>
+          </a:p>
+          <a:p>
+            <a:r>
+              <a:rPr lang="en-US" altLang="ko-KR" sz="2400" dirty="0"/>
+              <a:t>Even if the parallel part speeds up perfectly           performance is limited by the sequential part</a:t>
+            </a:r>
+          </a:p>
+          <a:p>
+            <a:endParaRPr lang="en-US" altLang="ko-KR" sz="2400" dirty="0"/>
+          </a:p>
+          <a:p>
+            <a:r>
+              <a:rPr lang="en-US" altLang="ko-KR" sz="2400" dirty="0"/>
+              <a:t>Parallel programming is worthwhile when programs have a lot of work that is parallel in nature</a:t>
+            </a:r>
+            <a:endParaRPr lang="ko-KR" altLang="en-US" sz="2400" dirty="0"/>
           </a:p>
         </p:txBody>
       </p:sp>
     </p:spTree>
-    <p:extLst>
-      <p:ext uri="{BB962C8B-B14F-4D97-AF65-F5344CB8AC3E}">
-        <p14:creationId xmlns:p14="http://schemas.microsoft.com/office/powerpoint/2010/main" val="2450718365"/>
-      </p:ext>
-    </p:extLst>
   </p:cSld>
   <p:clrMapOvr>
     <a:masterClrMapping/>
@@ -10675,7 +10589,7 @@
           <p:cNvPr id="2" name="제목 1">
             <a:extLst>
               <a:ext uri="{FF2B5EF4-FFF2-40B4-BE49-F238E27FC236}">
-                <a16:creationId xmlns:a16="http://schemas.microsoft.com/office/drawing/2014/main" id="{AD23C8AE-E253-CBAE-4577-F1EC172B177B}"/>
+                <a16:creationId xmlns:a16="http://schemas.microsoft.com/office/drawing/2014/main" id="{B304E6DD-6177-951A-B23F-D6A0C644D26F}"/>
               </a:ext>
             </a:extLst>
           </p:cNvPr>
@@ -10693,7 +10607,7 @@
           <a:p>
             <a:r>
               <a:rPr kumimoji="1" lang="en-US" altLang="ko-Kore-KR" b="1" u="sng" dirty="0"/>
-              <a:t>Implications</a:t>
+              <a:t>Gustafson’s Law</a:t>
             </a:r>
             <a:endParaRPr kumimoji="1" lang="ko-Kore-KR" altLang="en-US" b="1" u="sng" dirty="0"/>
           </a:p>
@@ -10704,7 +10618,7 @@
           <p:cNvPr id="3" name="내용 개체 틀 2">
             <a:extLst>
               <a:ext uri="{FF2B5EF4-FFF2-40B4-BE49-F238E27FC236}">
-                <a16:creationId xmlns:a16="http://schemas.microsoft.com/office/drawing/2014/main" id="{A19558AB-2DE8-2710-5621-015FFEE3F844}"/>
+                <a16:creationId xmlns:a16="http://schemas.microsoft.com/office/drawing/2014/main" id="{72CF879A-4CC9-308E-4E99-D9386E4FCCBF}"/>
               </a:ext>
             </a:extLst>
           </p:cNvPr>
@@ -10718,7 +10632,7 @@
         <p:spPr>
           <a:xfrm>
             <a:off x="457200" y="1600200"/>
-            <a:ext cx="4992508" cy="4525963"/>
+            <a:ext cx="8229600" cy="4525963"/>
           </a:xfrm>
         </p:spPr>
         <p:txBody>
@@ -10726,176 +10640,225 @@
           <a:lstStyle/>
           <a:p>
             <a:r>
-              <a:rPr kumimoji="1" lang="en-US" altLang="ko-Kore-KR" sz="2800" dirty="0"/>
-              <a:t>Amdah</a:t>
-            </a:r>
-            <a:r>
-              <a:rPr lang="en-US" altLang="ko-Kore-KR" sz="2800" dirty="0"/>
-              <a:t>l’s law</a:t>
+              <a:rPr kumimoji="1" lang="en-US" altLang="ko-Kore-KR" dirty="0"/>
+              <a:t>Amdahl’s law</a:t>
             </a:r>
           </a:p>
           <a:p>
             <a:pPr lvl="1"/>
             <a:r>
-              <a:rPr kumimoji="1" lang="en-US" altLang="ko-Kore-KR" sz="2400" dirty="0"/>
-              <a:t>often pessimistic </a:t>
-            </a:r>
+              <a:rPr lang="en-US" altLang="ko-Kore-KR" dirty="0"/>
+              <a:t>how much faster you can run a fixed workload</a:t>
+            </a:r>
+          </a:p>
+          <a:p>
+            <a:r>
+              <a:rPr kumimoji="1" lang="en-US" altLang="ko-Kore-KR" dirty="0"/>
+              <a:t>Gustafson’s law</a:t>
+            </a:r>
+          </a:p>
+          <a:p>
+            <a:pPr lvl="1"/>
+            <a:r>
+              <a:rPr lang="en-US" altLang="ko-Kore-KR" dirty="0"/>
+              <a:t>How much more work you can do in the same amount of time by adding processors</a:t>
+            </a:r>
+          </a:p>
+          <a:p>
+            <a:pPr lvl="1"/>
+            <a:endParaRPr kumimoji="1" lang="en-US" altLang="ko-Kore-KR" dirty="0"/>
+          </a:p>
+          <a:p>
+            <a:pPr lvl="1"/>
+            <a:endParaRPr lang="en-US" altLang="ko-Kore-KR" dirty="0"/>
           </a:p>
           <a:p>
             <a:pPr marL="457200" lvl="1" indent="0">
               <a:buNone/>
             </a:pPr>
-            <a:r>
-              <a:rPr lang="en-US" altLang="ko-Kore-KR" sz="2400" dirty="0"/>
-              <a:t>   (limited speed up)</a:t>
-            </a:r>
-            <a:endParaRPr kumimoji="1" lang="en-US" altLang="ko-Kore-KR" sz="2400" dirty="0"/>
-          </a:p>
-          <a:p>
-            <a:pPr lvl="1"/>
-            <a:r>
-              <a:rPr lang="en-US" altLang="ko-Kore-KR" sz="2400" dirty="0"/>
-              <a:t>assumes fixed </a:t>
-            </a:r>
-            <a:r>
-              <a:rPr kumimoji="1" lang="en-US" altLang="ko-Kore-KR" sz="2400" dirty="0"/>
-              <a:t>problem size </a:t>
-            </a:r>
-          </a:p>
-          <a:p>
-            <a:pPr lvl="1"/>
-            <a:endParaRPr lang="en-US" altLang="ko-Kore-KR" sz="2400" dirty="0"/>
-          </a:p>
-          <a:p>
-            <a:r>
-              <a:rPr kumimoji="1" lang="en-US" altLang="ko-Kore-KR" sz="2800" dirty="0"/>
-              <a:t>Gustafson’s law</a:t>
-            </a:r>
-          </a:p>
-          <a:p>
-            <a:pPr lvl="1"/>
-            <a:r>
-              <a:rPr lang="en-US" altLang="ko-Kore-KR" sz="2000" dirty="0"/>
-              <a:t>Often optimistic</a:t>
-            </a:r>
-          </a:p>
-          <a:p>
-            <a:pPr marL="457200" lvl="1" indent="0">
-              <a:buNone/>
-            </a:pPr>
-            <a:r>
-              <a:rPr lang="en-US" altLang="ko-Kore-KR" sz="2000" dirty="0"/>
-              <a:t>   ( linear speedup with N)</a:t>
-            </a:r>
-          </a:p>
-          <a:p>
-            <a:pPr lvl="1"/>
-            <a:r>
-              <a:rPr lang="en-US" altLang="ko-Kore-KR" sz="2000" dirty="0"/>
-              <a:t>As we get more powerful computers, we run larger problems in the same amount of time. In this view, the speedup can scale almost    linearly with N</a:t>
-            </a:r>
-            <a:endParaRPr kumimoji="1" lang="ko-Kore-KR" altLang="en-US" sz="2000" dirty="0"/>
+            <a:endParaRPr kumimoji="1" lang="en-US" altLang="ko-Kore-KR" dirty="0"/>
+          </a:p>
+          <a:p>
+            <a:endParaRPr kumimoji="1" lang="ko-Kore-KR" altLang="en-US" dirty="0"/>
           </a:p>
         </p:txBody>
       </p:sp>
       <p:pic>
         <p:nvPicPr>
-          <p:cNvPr id="83972" name="Picture 4" descr="undefined">
+          <p:cNvPr id="4" name="그림 3">
             <a:extLst>
               <a:ext uri="{FF2B5EF4-FFF2-40B4-BE49-F238E27FC236}">
-                <a16:creationId xmlns:a16="http://schemas.microsoft.com/office/drawing/2014/main" id="{7638A0C4-9FFE-D062-A6AC-60810C8EF63A}"/>
+                <a16:creationId xmlns:a16="http://schemas.microsoft.com/office/drawing/2014/main" id="{5BF62A7D-2931-CF37-CCF1-1D4F10600D95}"/>
               </a:ext>
             </a:extLst>
           </p:cNvPr>
           <p:cNvPicPr>
-            <a:picLocks noChangeAspect="1" noChangeArrowheads="1"/>
+            <a:picLocks noChangeAspect="1"/>
           </p:cNvPicPr>
           <p:nvPr/>
         </p:nvPicPr>
         <p:blipFill>
-          <a:blip r:embed="rId2">
-            <a:extLst>
-              <a:ext uri="{28A0092B-C50C-407E-A947-70E740481C1C}">
-                <a14:useLocalDpi xmlns:a14="http://schemas.microsoft.com/office/drawing/2010/main" val="0"/>
-              </a:ext>
-            </a:extLst>
-          </a:blip>
-          <a:srcRect/>
+          <a:blip r:embed="rId2"/>
           <a:stretch>
             <a:fillRect/>
           </a:stretch>
         </p:blipFill>
-        <p:spPr bwMode="auto">
+        <p:spPr>
           <a:xfrm>
-            <a:off x="5449709" y="1243622"/>
-            <a:ext cx="3608670" cy="2819069"/>
+            <a:off x="611560" y="4038416"/>
+            <a:ext cx="2808312" cy="2783785"/>
           </a:xfrm>
           <a:prstGeom prst="rect">
             <a:avLst/>
           </a:prstGeom>
-          <a:noFill/>
-          <a:extLst>
-            <a:ext uri="{909E8E84-426E-40DD-AFC4-6F175D3DCCD1}">
-              <a14:hiddenFill xmlns:a14="http://schemas.microsoft.com/office/drawing/2010/main">
-                <a:solidFill>
-                  <a:srgbClr val="FFFFFF"/>
-                </a:solidFill>
-              </a14:hiddenFill>
-            </a:ext>
-          </a:extLst>
         </p:spPr>
       </p:pic>
-      <p:pic>
-        <p:nvPicPr>
-          <p:cNvPr id="83974" name="Picture 6" descr="undefined">
+      <p:sp>
+        <p:nvSpPr>
+          <p:cNvPr id="6" name="TextBox 5">
             <a:extLst>
               <a:ext uri="{FF2B5EF4-FFF2-40B4-BE49-F238E27FC236}">
-                <a16:creationId xmlns:a16="http://schemas.microsoft.com/office/drawing/2014/main" id="{1394A10A-1228-B942-035E-5B0DC6CEDC11}"/>
+                <a16:creationId xmlns:a16="http://schemas.microsoft.com/office/drawing/2014/main" id="{7C6AFA70-CF8F-913A-272D-BEE334BB7099}"/>
               </a:ext>
             </a:extLst>
           </p:cNvPr>
-          <p:cNvPicPr>
-            <a:picLocks noChangeAspect="1" noChangeArrowheads="1"/>
-          </p:cNvPicPr>
+          <p:cNvSpPr txBox="1"/>
           <p:nvPr/>
-        </p:nvPicPr>
-        <p:blipFill>
-          <a:blip r:embed="rId3">
-            <a:extLst>
-              <a:ext uri="{28A0092B-C50C-407E-A947-70E740481C1C}">
-                <a14:useLocalDpi xmlns:a14="http://schemas.microsoft.com/office/drawing/2010/main" val="0"/>
-              </a:ext>
-            </a:extLst>
-          </a:blip>
-          <a:srcRect/>
-          <a:stretch>
-            <a:fillRect/>
-          </a:stretch>
-        </p:blipFill>
-        <p:spPr bwMode="auto">
+        </p:nvSpPr>
+        <p:spPr>
           <a:xfrm>
-            <a:off x="5449708" y="4182887"/>
-            <a:ext cx="3608671" cy="2532961"/>
+            <a:off x="4644008" y="4293096"/>
+            <a:ext cx="4392488" cy="2308324"/>
           </a:xfrm>
           <a:prstGeom prst="rect">
             <a:avLst/>
           </a:prstGeom>
-          <a:noFill/>
-          <a:extLst>
-            <a:ext uri="{909E8E84-426E-40DD-AFC4-6F175D3DCCD1}">
-              <a14:hiddenFill xmlns:a14="http://schemas.microsoft.com/office/drawing/2010/main">
-                <a:solidFill>
-                  <a:srgbClr val="FFFFFF"/>
-                </a:solidFill>
-              </a14:hiddenFill>
-            </a:ext>
-          </a:extLst>
+          <a:solidFill>
+            <a:srgbClr val="FFFFFF"/>
+          </a:solidFill>
         </p:spPr>
-      </p:pic>
+        <p:txBody>
+          <a:bodyPr wrap="square" rtlCol="0">
+            <a:spAutoFit/>
+          </a:bodyPr>
+          <a:lstStyle/>
+          <a:p>
+            <a:pPr marL="285750" indent="-285750">
+              <a:buFont typeface="Arial" panose="020B0604020202020204" pitchFamily="34" charset="0"/>
+              <a:buChar char="•"/>
+            </a:pPr>
+            <a:r>
+              <a:rPr kumimoji="1" lang="en-US" altLang="ko-Kore-KR" i="1" dirty="0"/>
+              <a:t>s </a:t>
+            </a:r>
+            <a:r>
+              <a:rPr kumimoji="1" lang="en-US" altLang="ko-Kore-KR" dirty="0"/>
+              <a:t>: serial fraction</a:t>
+            </a:r>
+          </a:p>
+          <a:p>
+            <a:pPr marL="285750" indent="-285750">
+              <a:buFont typeface="Arial" panose="020B0604020202020204" pitchFamily="34" charset="0"/>
+              <a:buChar char="•"/>
+            </a:pPr>
+            <a:r>
+              <a:rPr kumimoji="1" lang="en-US" altLang="ko-Kore-KR" i="1" dirty="0"/>
+              <a:t>p </a:t>
+            </a:r>
+            <a:r>
+              <a:rPr kumimoji="1" lang="en-US" altLang="ko-Kore-KR" dirty="0"/>
+              <a:t>: parallel fraction</a:t>
+            </a:r>
+          </a:p>
+          <a:p>
+            <a:r>
+              <a:rPr lang="en-US" altLang="ko-Kore-KR" dirty="0"/>
+              <a:t>   ( </a:t>
+            </a:r>
+            <a:r>
+              <a:rPr lang="en-US" altLang="ko-Kore-KR" i="1" dirty="0" err="1"/>
+              <a:t>s</a:t>
+            </a:r>
+            <a:r>
+              <a:rPr lang="en-US" altLang="ko-Kore-KR" dirty="0" err="1"/>
+              <a:t>+</a:t>
+            </a:r>
+            <a:r>
+              <a:rPr lang="en-US" altLang="ko-Kore-KR" i="1" dirty="0" err="1"/>
+              <a:t>p</a:t>
+            </a:r>
+            <a:r>
+              <a:rPr lang="en-US" altLang="ko-Kore-KR" dirty="0"/>
+              <a:t> = 1 )</a:t>
+            </a:r>
+          </a:p>
+          <a:p>
+            <a:endParaRPr lang="en-US" altLang="ko-Kore-KR" dirty="0"/>
+          </a:p>
+          <a:p>
+            <a:pPr marL="285750" indent="-285750">
+              <a:buFont typeface="Arial" panose="020B0604020202020204" pitchFamily="34" charset="0"/>
+              <a:buChar char="•"/>
+            </a:pPr>
+            <a:r>
+              <a:rPr lang="en-US" altLang="ko-Kore-KR" i="1" dirty="0"/>
+              <a:t>N </a:t>
+            </a:r>
+            <a:r>
+              <a:rPr lang="en-US" altLang="ko-Kore-KR" dirty="0"/>
+              <a:t>: the number of processors</a:t>
+            </a:r>
+          </a:p>
+          <a:p>
+            <a:endParaRPr kumimoji="1" lang="en-US" altLang="ko-Kore-KR" dirty="0"/>
+          </a:p>
+          <a:p>
+            <a:pPr marL="285750" indent="-285750">
+              <a:buFont typeface="Arial" panose="020B0604020202020204" pitchFamily="34" charset="0"/>
+              <a:buChar char="•"/>
+            </a:pPr>
+            <a:r>
+              <a:rPr lang="en-US" altLang="ko-Kore-KR" i="1" dirty="0"/>
+              <a:t>T</a:t>
+            </a:r>
+            <a:r>
+              <a:rPr lang="en-US" altLang="ko-Kore-KR" i="1" baseline="-25000" dirty="0"/>
+              <a:t>1 </a:t>
+            </a:r>
+            <a:r>
+              <a:rPr lang="en-US" altLang="ko-Kore-KR" dirty="0"/>
+              <a:t>: running time on 1 processor</a:t>
+            </a:r>
+            <a:r>
+              <a:rPr kumimoji="1" lang="en-US" altLang="ko-Kore-KR" dirty="0"/>
+              <a:t>  </a:t>
+            </a:r>
+          </a:p>
+          <a:p>
+            <a:pPr marL="285750" indent="-285750">
+              <a:buFont typeface="Arial" panose="020B0604020202020204" pitchFamily="34" charset="0"/>
+              <a:buChar char="•"/>
+            </a:pPr>
+            <a:r>
+              <a:rPr lang="en-US" altLang="ko-Kore-KR" i="1" dirty="0"/>
+              <a:t>T</a:t>
+            </a:r>
+            <a:r>
+              <a:rPr lang="en-US" altLang="ko-Kore-KR" i="1" baseline="-25000" dirty="0"/>
+              <a:t>N </a:t>
+            </a:r>
+            <a:r>
+              <a:rPr lang="en-US" altLang="ko-Kore-KR" dirty="0"/>
+              <a:t>: running time on N processor</a:t>
+            </a:r>
+            <a:endParaRPr kumimoji="1" lang="ko-Kore-KR" altLang="en-US" dirty="0"/>
+          </a:p>
+        </p:txBody>
+      </p:sp>
     </p:spTree>
     <p:extLst>
       <p:ext uri="{BB962C8B-B14F-4D97-AF65-F5344CB8AC3E}">
-        <p14:creationId xmlns:p14="http://schemas.microsoft.com/office/powerpoint/2010/main" val="2276611271"/>
+        <p14:creationId xmlns:p14="http://schemas.microsoft.com/office/powerpoint/2010/main" val="2450718365"/>
       </p:ext>
     </p:extLst>
   </p:cSld>
@@ -10924,15 +10887,15 @@
       </p:grpSpPr>
       <p:sp>
         <p:nvSpPr>
-          <p:cNvPr id="33793" name="제목 1">
+          <p:cNvPr id="2" name="제목 1">
             <a:extLst>
               <a:ext uri="{FF2B5EF4-FFF2-40B4-BE49-F238E27FC236}">
-                <a16:creationId xmlns:a16="http://schemas.microsoft.com/office/drawing/2014/main" id="{C73B0A89-74E4-9982-0998-C34EE9B3768A}"/>
+                <a16:creationId xmlns:a16="http://schemas.microsoft.com/office/drawing/2014/main" id="{AD23C8AE-E253-CBAE-4577-F1EC172B177B}"/>
               </a:ext>
             </a:extLst>
           </p:cNvPr>
           <p:cNvSpPr>
-            <a:spLocks noGrp="1" noChangeArrowheads="1"/>
+            <a:spLocks noGrp="1"/>
           </p:cNvSpPr>
           <p:nvPr>
             <p:ph type="title"/>
@@ -10944,19 +10907,118 @@
           <a:lstStyle/>
           <a:p>
             <a:r>
-              <a:rPr lang="en-US" altLang="ko-KR" b="1" u="sng"/>
-              <a:t>Performance Scalability</a:t>
-            </a:r>
-            <a:endParaRPr lang="ko-KR" altLang="en-US" b="1" u="sng"/>
+              <a:rPr kumimoji="1" lang="en-US" altLang="ko-Kore-KR" b="1" u="sng" dirty="0"/>
+              <a:t>Implications</a:t>
+            </a:r>
+            <a:endParaRPr kumimoji="1" lang="ko-Kore-KR" altLang="en-US" b="1" u="sng" dirty="0"/>
+          </a:p>
+        </p:txBody>
+      </p:sp>
+      <p:sp>
+        <p:nvSpPr>
+          <p:cNvPr id="3" name="내용 개체 틀 2">
+            <a:extLst>
+              <a:ext uri="{FF2B5EF4-FFF2-40B4-BE49-F238E27FC236}">
+                <a16:creationId xmlns:a16="http://schemas.microsoft.com/office/drawing/2014/main" id="{A19558AB-2DE8-2710-5621-015FFEE3F844}"/>
+              </a:ext>
+            </a:extLst>
+          </p:cNvPr>
+          <p:cNvSpPr>
+            <a:spLocks noGrp="1"/>
+          </p:cNvSpPr>
+          <p:nvPr>
+            <p:ph idx="1"/>
+          </p:nvPr>
+        </p:nvSpPr>
+        <p:spPr>
+          <a:xfrm>
+            <a:off x="457200" y="1600200"/>
+            <a:ext cx="4992508" cy="4525963"/>
+          </a:xfrm>
+        </p:spPr>
+        <p:txBody>
+          <a:bodyPr/>
+          <a:lstStyle/>
+          <a:p>
+            <a:r>
+              <a:rPr kumimoji="1" lang="en-US" altLang="ko-Kore-KR" sz="2800" dirty="0"/>
+              <a:t>Amdah</a:t>
+            </a:r>
+            <a:r>
+              <a:rPr lang="en-US" altLang="ko-Kore-KR" sz="2800" dirty="0"/>
+              <a:t>l’s law</a:t>
+            </a:r>
+          </a:p>
+          <a:p>
+            <a:pPr lvl="1"/>
+            <a:r>
+              <a:rPr kumimoji="1" lang="en-US" altLang="ko-Kore-KR" sz="2400" dirty="0"/>
+              <a:t>often pessimistic </a:t>
+            </a:r>
+          </a:p>
+          <a:p>
+            <a:pPr marL="457200" lvl="1" indent="0">
+              <a:buNone/>
+            </a:pPr>
+            <a:r>
+              <a:rPr lang="en-US" altLang="ko-Kore-KR" sz="2400" dirty="0"/>
+              <a:t>   (limited speed up)</a:t>
+            </a:r>
+            <a:endParaRPr kumimoji="1" lang="en-US" altLang="ko-Kore-KR" sz="2400" dirty="0"/>
+          </a:p>
+          <a:p>
+            <a:pPr lvl="1"/>
+            <a:r>
+              <a:rPr lang="en-US" altLang="ko-Kore-KR" sz="2400" dirty="0"/>
+              <a:t>assumes fixed </a:t>
+            </a:r>
+            <a:r>
+              <a:rPr kumimoji="1" lang="en-US" altLang="ko-Kore-KR" sz="2400" dirty="0"/>
+              <a:t>problem size </a:t>
+            </a:r>
+          </a:p>
+          <a:p>
+            <a:pPr lvl="1"/>
+            <a:endParaRPr lang="en-US" altLang="ko-Kore-KR" sz="2400" dirty="0"/>
+          </a:p>
+          <a:p>
+            <a:r>
+              <a:rPr kumimoji="1" lang="en-US" altLang="ko-Kore-KR" sz="2800" dirty="0"/>
+              <a:t>Gustafson’s law</a:t>
+            </a:r>
+          </a:p>
+          <a:p>
+            <a:pPr lvl="1"/>
+            <a:r>
+              <a:rPr lang="en-US" altLang="ko-Kore-KR" sz="2000" dirty="0"/>
+              <a:t>Often optimistic</a:t>
+            </a:r>
+          </a:p>
+          <a:p>
+            <a:pPr marL="457200" lvl="1" indent="0">
+              <a:buNone/>
+            </a:pPr>
+            <a:r>
+              <a:rPr lang="en-US" altLang="ko-Kore-KR" sz="2000" dirty="0"/>
+              <a:t>   ( linear speedup with N)</a:t>
+            </a:r>
+          </a:p>
+          <a:p>
+            <a:pPr lvl="1"/>
+            <a:r>
+              <a:rPr lang="en-US" altLang="ko-Kore-KR" sz="2000" dirty="0"/>
+              <a:t>As we get more powerful computers, we run larger problems in the same amount of time. In this view, the speedup can scale almost    linearly with N</a:t>
+            </a:r>
+            <a:endParaRPr kumimoji="1" lang="ko-Kore-KR" altLang="en-US" sz="2000" dirty="0"/>
           </a:p>
         </p:txBody>
       </p:sp>
       <p:pic>
         <p:nvPicPr>
-          <p:cNvPr id="33794" name="Picture 2">
+          <p:cNvPr id="83972" name="Picture 4" descr="undefined">
             <a:extLst>
               <a:ext uri="{FF2B5EF4-FFF2-40B4-BE49-F238E27FC236}">
-                <a16:creationId xmlns:a16="http://schemas.microsoft.com/office/drawing/2014/main" id="{C9B03905-F2C8-6574-D0A9-5ADFE3000935}"/>
+                <a16:creationId xmlns:a16="http://schemas.microsoft.com/office/drawing/2014/main" id="{7638A0C4-9FFE-D062-A6AC-60810C8EF63A}"/>
               </a:ext>
             </a:extLst>
           </p:cNvPr>
@@ -10980,16 +11042,13 @@
         </p:blipFill>
         <p:spPr bwMode="auto">
           <a:xfrm>
-            <a:off x="107950" y="1412875"/>
-            <a:ext cx="5378450" cy="5184775"/>
+            <a:off x="5449709" y="1243622"/>
+            <a:ext cx="3608670" cy="2819069"/>
           </a:xfrm>
           <a:prstGeom prst="rect">
             <a:avLst/>
           </a:prstGeom>
           <a:noFill/>
-          <a:ln>
-            <a:noFill/>
-          </a:ln>
           <a:extLst>
             <a:ext uri="{909E8E84-426E-40DD-AFC4-6F175D3DCCD1}">
               <a14:hiddenFill xmlns:a14="http://schemas.microsoft.com/office/drawing/2010/main">
@@ -10997,46 +11056,46 @@
                   <a:srgbClr val="FFFFFF"/>
                 </a:solidFill>
               </a14:hiddenFill>
-            </a:ext>
-            <a:ext uri="{91240B29-F687-4F45-9708-019B960494DF}">
-              <a14:hiddenLine xmlns:a14="http://schemas.microsoft.com/office/drawing/2010/main" w="9525">
-                <a:solidFill>
-                  <a:srgbClr val="000000"/>
-                </a:solidFill>
-                <a:miter lim="800000"/>
-                <a:headEnd/>
-                <a:tailEnd/>
-              </a14:hiddenLine>
             </a:ext>
           </a:extLst>
         </p:spPr>
       </p:pic>
-      <p:sp>
-        <p:nvSpPr>
-          <p:cNvPr id="33795" name="TextBox 5">
+      <p:pic>
+        <p:nvPicPr>
+          <p:cNvPr id="83974" name="Picture 6" descr="undefined">
             <a:extLst>
               <a:ext uri="{FF2B5EF4-FFF2-40B4-BE49-F238E27FC236}">
-                <a16:creationId xmlns:a16="http://schemas.microsoft.com/office/drawing/2014/main" id="{EAA83077-2AD4-DAF3-2D34-95646CE95B6E}"/>
+                <a16:creationId xmlns:a16="http://schemas.microsoft.com/office/drawing/2014/main" id="{1394A10A-1228-B942-035E-5B0DC6CEDC11}"/>
               </a:ext>
             </a:extLst>
           </p:cNvPr>
-          <p:cNvSpPr txBox="1">
-            <a:spLocks noChangeArrowheads="1"/>
-          </p:cNvSpPr>
+          <p:cNvPicPr>
+            <a:picLocks noChangeAspect="1" noChangeArrowheads="1"/>
+          </p:cNvPicPr>
           <p:nvPr/>
-        </p:nvSpPr>
+        </p:nvPicPr>
+        <p:blipFill>
+          <a:blip r:embed="rId3">
+            <a:extLst>
+              <a:ext uri="{28A0092B-C50C-407E-A947-70E740481C1C}">
+                <a14:useLocalDpi xmlns:a14="http://schemas.microsoft.com/office/drawing/2010/main" val="0"/>
+              </a:ext>
+            </a:extLst>
+          </a:blip>
+          <a:srcRect/>
+          <a:stretch>
+            <a:fillRect/>
+          </a:stretch>
+        </p:blipFill>
         <p:spPr bwMode="auto">
           <a:xfrm>
-            <a:off x="5580063" y="1530350"/>
-            <a:ext cx="3095625" cy="1754188"/>
+            <a:off x="5449708" y="4182887"/>
+            <a:ext cx="3608671" cy="2532961"/>
           </a:xfrm>
           <a:prstGeom prst="rect">
             <a:avLst/>
           </a:prstGeom>
           <a:noFill/>
-          <a:ln>
-            <a:noFill/>
-          </a:ln>
           <a:extLst>
             <a:ext uri="{909E8E84-426E-40DD-AFC4-6F175D3DCCD1}">
               <a14:hiddenFill xmlns:a14="http://schemas.microsoft.com/office/drawing/2010/main">
@@ -11045,230 +11104,15 @@
                 </a:solidFill>
               </a14:hiddenFill>
             </a:ext>
-            <a:ext uri="{91240B29-F687-4F45-9708-019B960494DF}">
-              <a14:hiddenLine xmlns:a14="http://schemas.microsoft.com/office/drawing/2010/main" w="9525">
-                <a:solidFill>
-                  <a:srgbClr val="000000"/>
-                </a:solidFill>
-                <a:miter lim="800000"/>
-                <a:headEnd/>
-                <a:tailEnd/>
-              </a14:hiddenLine>
-            </a:ext>
           </a:extLst>
         </p:spPr>
-        <p:txBody>
-          <a:bodyPr>
-            <a:spAutoFit/>
-          </a:bodyPr>
-          <a:lstStyle>
-            <a:lvl1pPr fontAlgn="t" latinLnBrk="1">
-              <a:spcBef>
-                <a:spcPct val="20000"/>
-              </a:spcBef>
-              <a:buClr>
-                <a:schemeClr val="hlink"/>
-              </a:buClr>
-              <a:buSzPct val="80000"/>
-              <a:buFont typeface="Wingdings" pitchFamily="2" charset="2"/>
-              <a:buChar char="n"/>
-              <a:defRPr kumimoji="1" sz="3000">
-                <a:solidFill>
-                  <a:schemeClr val="tx1"/>
-                </a:solidFill>
-                <a:latin typeface="굴림" panose="020B0600000101010101" pitchFamily="34" charset="-127"/>
-                <a:ea typeface="굴림" panose="020B0600000101010101" pitchFamily="34" charset="-127"/>
-                <a:cs typeface="Arial" panose="020B0604020202020204" pitchFamily="34" charset="0"/>
-              </a:defRPr>
-            </a:lvl1pPr>
-            <a:lvl2pPr marL="742950" indent="-285750" fontAlgn="t" latinLnBrk="1">
-              <a:spcBef>
-                <a:spcPct val="20000"/>
-              </a:spcBef>
-              <a:buClr>
-                <a:schemeClr val="accent2"/>
-              </a:buClr>
-              <a:buSzPct val="70000"/>
-              <a:buFont typeface="Wingdings" pitchFamily="2" charset="2"/>
-              <a:buChar char="n"/>
-              <a:defRPr kumimoji="1" sz="2600">
-                <a:solidFill>
-                  <a:schemeClr val="tx1"/>
-                </a:solidFill>
-                <a:latin typeface="굴림" panose="020B0600000101010101" pitchFamily="34" charset="-127"/>
-                <a:ea typeface="굴림" panose="020B0600000101010101" pitchFamily="34" charset="-127"/>
-                <a:cs typeface="Arial" panose="020B0604020202020204" pitchFamily="34" charset="0"/>
-              </a:defRPr>
-            </a:lvl2pPr>
-            <a:lvl3pPr marL="1143000" indent="-228600" fontAlgn="t" latinLnBrk="1">
-              <a:spcBef>
-                <a:spcPct val="20000"/>
-              </a:spcBef>
-              <a:buClr>
-                <a:schemeClr val="accent1"/>
-              </a:buClr>
-              <a:buSzPct val="70000"/>
-              <a:buFont typeface="Wingdings" pitchFamily="2" charset="2"/>
-              <a:buChar char="n"/>
-              <a:defRPr kumimoji="1" sz="2300">
-                <a:solidFill>
-                  <a:schemeClr val="tx1"/>
-                </a:solidFill>
-                <a:latin typeface="굴림" panose="020B0600000101010101" pitchFamily="34" charset="-127"/>
-                <a:ea typeface="굴림" panose="020B0600000101010101" pitchFamily="34" charset="-127"/>
-                <a:cs typeface="Arial" panose="020B0604020202020204" pitchFamily="34" charset="0"/>
-              </a:defRPr>
-            </a:lvl3pPr>
-            <a:lvl4pPr marL="1600200" indent="-228600" fontAlgn="t" latinLnBrk="1">
-              <a:spcBef>
-                <a:spcPct val="20000"/>
-              </a:spcBef>
-              <a:buClr>
-                <a:schemeClr val="folHlink"/>
-              </a:buClr>
-              <a:buSzPct val="70000"/>
-              <a:buFont typeface="Wingdings" pitchFamily="2" charset="2"/>
-              <a:buChar char="n"/>
-              <a:defRPr kumimoji="1" sz="2000">
-                <a:solidFill>
-                  <a:schemeClr val="tx1"/>
-                </a:solidFill>
-                <a:latin typeface="굴림" panose="020B0600000101010101" pitchFamily="34" charset="-127"/>
-                <a:ea typeface="굴림" panose="020B0600000101010101" pitchFamily="34" charset="-127"/>
-                <a:cs typeface="Arial" panose="020B0604020202020204" pitchFamily="34" charset="0"/>
-              </a:defRPr>
-            </a:lvl4pPr>
-            <a:lvl5pPr marL="2057400" indent="-228600" fontAlgn="t" latinLnBrk="1">
-              <a:spcBef>
-                <a:spcPct val="20000"/>
-              </a:spcBef>
-              <a:buClr>
-                <a:schemeClr val="folHlink"/>
-              </a:buClr>
-              <a:buSzPct val="70000"/>
-              <a:buFont typeface="Wingdings" pitchFamily="2" charset="2"/>
-              <a:buChar char="n"/>
-              <a:defRPr kumimoji="1" sz="2000">
-                <a:solidFill>
-                  <a:schemeClr val="tx1"/>
-                </a:solidFill>
-                <a:latin typeface="굴림" panose="020B0600000101010101" pitchFamily="34" charset="-127"/>
-                <a:ea typeface="굴림" panose="020B0600000101010101" pitchFamily="34" charset="-127"/>
-                <a:cs typeface="Arial" panose="020B0604020202020204" pitchFamily="34" charset="0"/>
-              </a:defRPr>
-            </a:lvl5pPr>
-            <a:lvl6pPr marL="2514600" indent="-228600" eaLnBrk="0" fontAlgn="t" latinLnBrk="1" hangingPunct="0">
-              <a:spcBef>
-                <a:spcPct val="20000"/>
-              </a:spcBef>
-              <a:spcAft>
-                <a:spcPct val="0"/>
-              </a:spcAft>
-              <a:buClr>
-                <a:schemeClr val="folHlink"/>
-              </a:buClr>
-              <a:buSzPct val="70000"/>
-              <a:buFont typeface="Wingdings" pitchFamily="2" charset="2"/>
-              <a:buChar char="n"/>
-              <a:defRPr kumimoji="1" sz="2000">
-                <a:solidFill>
-                  <a:schemeClr val="tx1"/>
-                </a:solidFill>
-                <a:latin typeface="굴림" panose="020B0600000101010101" pitchFamily="34" charset="-127"/>
-                <a:ea typeface="굴림" panose="020B0600000101010101" pitchFamily="34" charset="-127"/>
-                <a:cs typeface="Arial" panose="020B0604020202020204" pitchFamily="34" charset="0"/>
-              </a:defRPr>
-            </a:lvl6pPr>
-            <a:lvl7pPr marL="2971800" indent="-228600" eaLnBrk="0" fontAlgn="t" latinLnBrk="1" hangingPunct="0">
-              <a:spcBef>
-                <a:spcPct val="20000"/>
-              </a:spcBef>
-              <a:spcAft>
-                <a:spcPct val="0"/>
-              </a:spcAft>
-              <a:buClr>
-                <a:schemeClr val="folHlink"/>
-              </a:buClr>
-              <a:buSzPct val="70000"/>
-              <a:buFont typeface="Wingdings" pitchFamily="2" charset="2"/>
-              <a:buChar char="n"/>
-              <a:defRPr kumimoji="1" sz="2000">
-                <a:solidFill>
-                  <a:schemeClr val="tx1"/>
-                </a:solidFill>
-                <a:latin typeface="굴림" panose="020B0600000101010101" pitchFamily="34" charset="-127"/>
-                <a:ea typeface="굴림" panose="020B0600000101010101" pitchFamily="34" charset="-127"/>
-                <a:cs typeface="Arial" panose="020B0604020202020204" pitchFamily="34" charset="0"/>
-              </a:defRPr>
-            </a:lvl7pPr>
-            <a:lvl8pPr marL="3429000" indent="-228600" eaLnBrk="0" fontAlgn="t" latinLnBrk="1" hangingPunct="0">
-              <a:spcBef>
-                <a:spcPct val="20000"/>
-              </a:spcBef>
-              <a:spcAft>
-                <a:spcPct val="0"/>
-              </a:spcAft>
-              <a:buClr>
-                <a:schemeClr val="folHlink"/>
-              </a:buClr>
-              <a:buSzPct val="70000"/>
-              <a:buFont typeface="Wingdings" pitchFamily="2" charset="2"/>
-              <a:buChar char="n"/>
-              <a:defRPr kumimoji="1" sz="2000">
-                <a:solidFill>
-                  <a:schemeClr val="tx1"/>
-                </a:solidFill>
-                <a:latin typeface="굴림" panose="020B0600000101010101" pitchFamily="34" charset="-127"/>
-                <a:ea typeface="굴림" panose="020B0600000101010101" pitchFamily="34" charset="-127"/>
-                <a:cs typeface="Arial" panose="020B0604020202020204" pitchFamily="34" charset="0"/>
-              </a:defRPr>
-            </a:lvl8pPr>
-            <a:lvl9pPr marL="3886200" indent="-228600" eaLnBrk="0" fontAlgn="t" latinLnBrk="1" hangingPunct="0">
-              <a:spcBef>
-                <a:spcPct val="20000"/>
-              </a:spcBef>
-              <a:spcAft>
-                <a:spcPct val="0"/>
-              </a:spcAft>
-              <a:buClr>
-                <a:schemeClr val="folHlink"/>
-              </a:buClr>
-              <a:buSzPct val="70000"/>
-              <a:buFont typeface="Wingdings" pitchFamily="2" charset="2"/>
-              <a:buChar char="n"/>
-              <a:defRPr kumimoji="1" sz="2000">
-                <a:solidFill>
-                  <a:schemeClr val="tx1"/>
-                </a:solidFill>
-                <a:latin typeface="굴림" panose="020B0600000101010101" pitchFamily="34" charset="-127"/>
-                <a:ea typeface="굴림" panose="020B0600000101010101" pitchFamily="34" charset="-127"/>
-                <a:cs typeface="Arial" panose="020B0604020202020204" pitchFamily="34" charset="0"/>
-              </a:defRPr>
-            </a:lvl9pPr>
-          </a:lstStyle>
-          <a:p>
-            <a:pPr eaLnBrk="1" fontAlgn="base" hangingPunct="1">
-              <a:spcBef>
-                <a:spcPct val="0"/>
-              </a:spcBef>
-              <a:buClrTx/>
-              <a:buSzTx/>
-              <a:buFont typeface="Arial" panose="020B0604020202020204" pitchFamily="34" charset="0"/>
-              <a:buChar char="•"/>
-            </a:pPr>
-            <a:r>
-              <a:rPr lang="en-US" altLang="ko-KR" sz="1800" b="1"/>
-              <a:t> Scalability</a:t>
-            </a:r>
-            <a:r>
-              <a:rPr lang="en-US" altLang="ko-KR" sz="1800"/>
-              <a:t> : the capability of a system to increase total throughput under an increased load when resources (typically hardware) are added</a:t>
-            </a:r>
-            <a:endParaRPr lang="ko-KR" altLang="en-US" sz="1800"/>
-          </a:p>
-        </p:txBody>
-      </p:sp>
+      </p:pic>
     </p:spTree>
+    <p:extLst>
+      <p:ext uri="{BB962C8B-B14F-4D97-AF65-F5344CB8AC3E}">
+        <p14:creationId xmlns:p14="http://schemas.microsoft.com/office/powerpoint/2010/main" val="2276611271"/>
+      </p:ext>
+    </p:extLst>
   </p:cSld>
   <p:clrMapOvr>
     <a:masterClrMapping/>
@@ -11295,10 +11139,10 @@
       </p:grpSpPr>
       <p:sp>
         <p:nvSpPr>
-          <p:cNvPr id="34817" name="제목 1">
+          <p:cNvPr id="33793" name="제목 1">
             <a:extLst>
               <a:ext uri="{FF2B5EF4-FFF2-40B4-BE49-F238E27FC236}">
-                <a16:creationId xmlns:a16="http://schemas.microsoft.com/office/drawing/2014/main" id="{1B74AAAB-AF9F-D7F2-E064-980E4CE904C0}"/>
+                <a16:creationId xmlns:a16="http://schemas.microsoft.com/office/drawing/2014/main" id="{C73B0A89-74E4-9982-0998-C34EE9B3768A}"/>
               </a:ext>
             </a:extLst>
           </p:cNvPr>
@@ -11316,69 +11160,326 @@
           <a:p>
             <a:r>
               <a:rPr lang="en-US" altLang="ko-KR" b="1" u="sng"/>
-              <a:t>Granularity</a:t>
+              <a:t>Performance Scalability</a:t>
             </a:r>
             <a:endParaRPr lang="ko-KR" altLang="en-US" b="1" u="sng"/>
           </a:p>
         </p:txBody>
       </p:sp>
+      <p:pic>
+        <p:nvPicPr>
+          <p:cNvPr id="33794" name="Picture 2">
+            <a:extLst>
+              <a:ext uri="{FF2B5EF4-FFF2-40B4-BE49-F238E27FC236}">
+                <a16:creationId xmlns:a16="http://schemas.microsoft.com/office/drawing/2014/main" id="{C9B03905-F2C8-6574-D0A9-5ADFE3000935}"/>
+              </a:ext>
+            </a:extLst>
+          </p:cNvPr>
+          <p:cNvPicPr>
+            <a:picLocks noChangeAspect="1" noChangeArrowheads="1"/>
+          </p:cNvPicPr>
+          <p:nvPr/>
+        </p:nvPicPr>
+        <p:blipFill>
+          <a:blip r:embed="rId2">
+            <a:extLst>
+              <a:ext uri="{28A0092B-C50C-407E-A947-70E740481C1C}">
+                <a14:useLocalDpi xmlns:a14="http://schemas.microsoft.com/office/drawing/2010/main" val="0"/>
+              </a:ext>
+            </a:extLst>
+          </a:blip>
+          <a:srcRect/>
+          <a:stretch>
+            <a:fillRect/>
+          </a:stretch>
+        </p:blipFill>
+        <p:spPr bwMode="auto">
+          <a:xfrm>
+            <a:off x="107950" y="1412875"/>
+            <a:ext cx="5378450" cy="5184775"/>
+          </a:xfrm>
+          <a:prstGeom prst="rect">
+            <a:avLst/>
+          </a:prstGeom>
+          <a:noFill/>
+          <a:ln>
+            <a:noFill/>
+          </a:ln>
+          <a:extLst>
+            <a:ext uri="{909E8E84-426E-40DD-AFC4-6F175D3DCCD1}">
+              <a14:hiddenFill xmlns:a14="http://schemas.microsoft.com/office/drawing/2010/main">
+                <a:solidFill>
+                  <a:srgbClr val="FFFFFF"/>
+                </a:solidFill>
+              </a14:hiddenFill>
+            </a:ext>
+            <a:ext uri="{91240B29-F687-4F45-9708-019B960494DF}">
+              <a14:hiddenLine xmlns:a14="http://schemas.microsoft.com/office/drawing/2010/main" w="9525">
+                <a:solidFill>
+                  <a:srgbClr val="000000"/>
+                </a:solidFill>
+                <a:miter lim="800000"/>
+                <a:headEnd/>
+                <a:tailEnd/>
+              </a14:hiddenLine>
+            </a:ext>
+          </a:extLst>
+        </p:spPr>
+      </p:pic>
       <p:sp>
         <p:nvSpPr>
-          <p:cNvPr id="34818" name="내용 개체 틀 2">
+          <p:cNvPr id="33795" name="TextBox 5">
             <a:extLst>
               <a:ext uri="{FF2B5EF4-FFF2-40B4-BE49-F238E27FC236}">
-                <a16:creationId xmlns:a16="http://schemas.microsoft.com/office/drawing/2014/main" id="{0FF8E2FF-3AC8-DA85-ABEE-A4D30B1C6A4E}"/>
+                <a16:creationId xmlns:a16="http://schemas.microsoft.com/office/drawing/2014/main" id="{EAA83077-2AD4-DAF3-2D34-95646CE95B6E}"/>
               </a:ext>
             </a:extLst>
           </p:cNvPr>
-          <p:cNvSpPr>
-            <a:spLocks noGrp="1" noChangeArrowheads="1"/>
+          <p:cNvSpPr txBox="1">
+            <a:spLocks noChangeArrowheads="1"/>
           </p:cNvSpPr>
-          <p:nvPr>
-            <p:ph idx="1"/>
-          </p:nvPr>
+          <p:nvPr/>
         </p:nvSpPr>
-        <p:spPr/>
+        <p:spPr bwMode="auto">
+          <a:xfrm>
+            <a:off x="5580063" y="1530350"/>
+            <a:ext cx="3095625" cy="1754188"/>
+          </a:xfrm>
+          <a:prstGeom prst="rect">
+            <a:avLst/>
+          </a:prstGeom>
+          <a:noFill/>
+          <a:ln>
+            <a:noFill/>
+          </a:ln>
+          <a:extLst>
+            <a:ext uri="{909E8E84-426E-40DD-AFC4-6F175D3DCCD1}">
+              <a14:hiddenFill xmlns:a14="http://schemas.microsoft.com/office/drawing/2010/main">
+                <a:solidFill>
+                  <a:srgbClr val="FFFFFF"/>
+                </a:solidFill>
+              </a14:hiddenFill>
+            </a:ext>
+            <a:ext uri="{91240B29-F687-4F45-9708-019B960494DF}">
+              <a14:hiddenLine xmlns:a14="http://schemas.microsoft.com/office/drawing/2010/main" w="9525">
+                <a:solidFill>
+                  <a:srgbClr val="000000"/>
+                </a:solidFill>
+                <a:miter lim="800000"/>
+                <a:headEnd/>
+                <a:tailEnd/>
+              </a14:hiddenLine>
+            </a:ext>
+          </a:extLst>
+        </p:spPr>
         <p:txBody>
-          <a:bodyPr/>
-          <a:lstStyle/>
-          <a:p>
-            <a:r>
-              <a:rPr lang="en-US" altLang="ko-KR" sz="2800"/>
-              <a:t>Granularity is a qualitative measure of the ratio of computation to communication</a:t>
-            </a:r>
-          </a:p>
-          <a:p>
-            <a:pPr lvl="1"/>
-            <a:r>
-              <a:rPr lang="en-US" altLang="ko-KR" sz="2000" b="1"/>
-              <a:t>Coarse</a:t>
-            </a:r>
-            <a:r>
-              <a:rPr lang="en-US" altLang="ko-KR" sz="2000"/>
-              <a:t>: relatively large amounts of computational work are done between communication events</a:t>
-            </a:r>
-          </a:p>
-          <a:p>
-            <a:pPr lvl="1"/>
-            <a:r>
-              <a:rPr lang="en-US" altLang="ko-KR" sz="2000" b="1"/>
-              <a:t>Fine</a:t>
-            </a:r>
-            <a:r>
-              <a:rPr lang="en-US" altLang="ko-KR" sz="2000"/>
-              <a:t>: relatively small amounts of computational work are done between communication events</a:t>
-            </a:r>
-          </a:p>
-          <a:p>
-            <a:endParaRPr lang="en-US" altLang="ko-KR" sz="2800"/>
-          </a:p>
-          <a:p>
-            <a:r>
-              <a:rPr lang="en-US" altLang="ko-KR" sz="2800"/>
-              <a:t>Computation stages are typically separated from periods of communication by synchronization events</a:t>
-            </a:r>
-            <a:endParaRPr lang="ko-KR" altLang="en-US" sz="2800"/>
+          <a:bodyPr>
+            <a:spAutoFit/>
+          </a:bodyPr>
+          <a:lstStyle>
+            <a:lvl1pPr fontAlgn="t" latinLnBrk="1">
+              <a:spcBef>
+                <a:spcPct val="20000"/>
+              </a:spcBef>
+              <a:buClr>
+                <a:schemeClr val="hlink"/>
+              </a:buClr>
+              <a:buSzPct val="80000"/>
+              <a:buFont typeface="Wingdings" pitchFamily="2" charset="2"/>
+              <a:buChar char="n"/>
+              <a:defRPr kumimoji="1" sz="3000">
+                <a:solidFill>
+                  <a:schemeClr val="tx1"/>
+                </a:solidFill>
+                <a:latin typeface="굴림" panose="020B0600000101010101" pitchFamily="34" charset="-127"/>
+                <a:ea typeface="굴림" panose="020B0600000101010101" pitchFamily="34" charset="-127"/>
+                <a:cs typeface="Arial" panose="020B0604020202020204" pitchFamily="34" charset="0"/>
+              </a:defRPr>
+            </a:lvl1pPr>
+            <a:lvl2pPr marL="742950" indent="-285750" fontAlgn="t" latinLnBrk="1">
+              <a:spcBef>
+                <a:spcPct val="20000"/>
+              </a:spcBef>
+              <a:buClr>
+                <a:schemeClr val="accent2"/>
+              </a:buClr>
+              <a:buSzPct val="70000"/>
+              <a:buFont typeface="Wingdings" pitchFamily="2" charset="2"/>
+              <a:buChar char="n"/>
+              <a:defRPr kumimoji="1" sz="2600">
+                <a:solidFill>
+                  <a:schemeClr val="tx1"/>
+                </a:solidFill>
+                <a:latin typeface="굴림" panose="020B0600000101010101" pitchFamily="34" charset="-127"/>
+                <a:ea typeface="굴림" panose="020B0600000101010101" pitchFamily="34" charset="-127"/>
+                <a:cs typeface="Arial" panose="020B0604020202020204" pitchFamily="34" charset="0"/>
+              </a:defRPr>
+            </a:lvl2pPr>
+            <a:lvl3pPr marL="1143000" indent="-228600" fontAlgn="t" latinLnBrk="1">
+              <a:spcBef>
+                <a:spcPct val="20000"/>
+              </a:spcBef>
+              <a:buClr>
+                <a:schemeClr val="accent1"/>
+              </a:buClr>
+              <a:buSzPct val="70000"/>
+              <a:buFont typeface="Wingdings" pitchFamily="2" charset="2"/>
+              <a:buChar char="n"/>
+              <a:defRPr kumimoji="1" sz="2300">
+                <a:solidFill>
+                  <a:schemeClr val="tx1"/>
+                </a:solidFill>
+                <a:latin typeface="굴림" panose="020B0600000101010101" pitchFamily="34" charset="-127"/>
+                <a:ea typeface="굴림" panose="020B0600000101010101" pitchFamily="34" charset="-127"/>
+                <a:cs typeface="Arial" panose="020B0604020202020204" pitchFamily="34" charset="0"/>
+              </a:defRPr>
+            </a:lvl3pPr>
+            <a:lvl4pPr marL="1600200" indent="-228600" fontAlgn="t" latinLnBrk="1">
+              <a:spcBef>
+                <a:spcPct val="20000"/>
+              </a:spcBef>
+              <a:buClr>
+                <a:schemeClr val="folHlink"/>
+              </a:buClr>
+              <a:buSzPct val="70000"/>
+              <a:buFont typeface="Wingdings" pitchFamily="2" charset="2"/>
+              <a:buChar char="n"/>
+              <a:defRPr kumimoji="1" sz="2000">
+                <a:solidFill>
+                  <a:schemeClr val="tx1"/>
+                </a:solidFill>
+                <a:latin typeface="굴림" panose="020B0600000101010101" pitchFamily="34" charset="-127"/>
+                <a:ea typeface="굴림" panose="020B0600000101010101" pitchFamily="34" charset="-127"/>
+                <a:cs typeface="Arial" panose="020B0604020202020204" pitchFamily="34" charset="0"/>
+              </a:defRPr>
+            </a:lvl4pPr>
+            <a:lvl5pPr marL="2057400" indent="-228600" fontAlgn="t" latinLnBrk="1">
+              <a:spcBef>
+                <a:spcPct val="20000"/>
+              </a:spcBef>
+              <a:buClr>
+                <a:schemeClr val="folHlink"/>
+              </a:buClr>
+              <a:buSzPct val="70000"/>
+              <a:buFont typeface="Wingdings" pitchFamily="2" charset="2"/>
+              <a:buChar char="n"/>
+              <a:defRPr kumimoji="1" sz="2000">
+                <a:solidFill>
+                  <a:schemeClr val="tx1"/>
+                </a:solidFill>
+                <a:latin typeface="굴림" panose="020B0600000101010101" pitchFamily="34" charset="-127"/>
+                <a:ea typeface="굴림" panose="020B0600000101010101" pitchFamily="34" charset="-127"/>
+                <a:cs typeface="Arial" panose="020B0604020202020204" pitchFamily="34" charset="0"/>
+              </a:defRPr>
+            </a:lvl5pPr>
+            <a:lvl6pPr marL="2514600" indent="-228600" eaLnBrk="0" fontAlgn="t" latinLnBrk="1" hangingPunct="0">
+              <a:spcBef>
+                <a:spcPct val="20000"/>
+              </a:spcBef>
+              <a:spcAft>
+                <a:spcPct val="0"/>
+              </a:spcAft>
+              <a:buClr>
+                <a:schemeClr val="folHlink"/>
+              </a:buClr>
+              <a:buSzPct val="70000"/>
+              <a:buFont typeface="Wingdings" pitchFamily="2" charset="2"/>
+              <a:buChar char="n"/>
+              <a:defRPr kumimoji="1" sz="2000">
+                <a:solidFill>
+                  <a:schemeClr val="tx1"/>
+                </a:solidFill>
+                <a:latin typeface="굴림" panose="020B0600000101010101" pitchFamily="34" charset="-127"/>
+                <a:ea typeface="굴림" panose="020B0600000101010101" pitchFamily="34" charset="-127"/>
+                <a:cs typeface="Arial" panose="020B0604020202020204" pitchFamily="34" charset="0"/>
+              </a:defRPr>
+            </a:lvl6pPr>
+            <a:lvl7pPr marL="2971800" indent="-228600" eaLnBrk="0" fontAlgn="t" latinLnBrk="1" hangingPunct="0">
+              <a:spcBef>
+                <a:spcPct val="20000"/>
+              </a:spcBef>
+              <a:spcAft>
+                <a:spcPct val="0"/>
+              </a:spcAft>
+              <a:buClr>
+                <a:schemeClr val="folHlink"/>
+              </a:buClr>
+              <a:buSzPct val="70000"/>
+              <a:buFont typeface="Wingdings" pitchFamily="2" charset="2"/>
+              <a:buChar char="n"/>
+              <a:defRPr kumimoji="1" sz="2000">
+                <a:solidFill>
+                  <a:schemeClr val="tx1"/>
+                </a:solidFill>
+                <a:latin typeface="굴림" panose="020B0600000101010101" pitchFamily="34" charset="-127"/>
+                <a:ea typeface="굴림" panose="020B0600000101010101" pitchFamily="34" charset="-127"/>
+                <a:cs typeface="Arial" panose="020B0604020202020204" pitchFamily="34" charset="0"/>
+              </a:defRPr>
+            </a:lvl7pPr>
+            <a:lvl8pPr marL="3429000" indent="-228600" eaLnBrk="0" fontAlgn="t" latinLnBrk="1" hangingPunct="0">
+              <a:spcBef>
+                <a:spcPct val="20000"/>
+              </a:spcBef>
+              <a:spcAft>
+                <a:spcPct val="0"/>
+              </a:spcAft>
+              <a:buClr>
+                <a:schemeClr val="folHlink"/>
+              </a:buClr>
+              <a:buSzPct val="70000"/>
+              <a:buFont typeface="Wingdings" pitchFamily="2" charset="2"/>
+              <a:buChar char="n"/>
+              <a:defRPr kumimoji="1" sz="2000">
+                <a:solidFill>
+                  <a:schemeClr val="tx1"/>
+                </a:solidFill>
+                <a:latin typeface="굴림" panose="020B0600000101010101" pitchFamily="34" charset="-127"/>
+                <a:ea typeface="굴림" panose="020B0600000101010101" pitchFamily="34" charset="-127"/>
+                <a:cs typeface="Arial" panose="020B0604020202020204" pitchFamily="34" charset="0"/>
+              </a:defRPr>
+            </a:lvl8pPr>
+            <a:lvl9pPr marL="3886200" indent="-228600" eaLnBrk="0" fontAlgn="t" latinLnBrk="1" hangingPunct="0">
+              <a:spcBef>
+                <a:spcPct val="20000"/>
+              </a:spcBef>
+              <a:spcAft>
+                <a:spcPct val="0"/>
+              </a:spcAft>
+              <a:buClr>
+                <a:schemeClr val="folHlink"/>
+              </a:buClr>
+              <a:buSzPct val="70000"/>
+              <a:buFont typeface="Wingdings" pitchFamily="2" charset="2"/>
+              <a:buChar char="n"/>
+              <a:defRPr kumimoji="1" sz="2000">
+                <a:solidFill>
+                  <a:schemeClr val="tx1"/>
+                </a:solidFill>
+                <a:latin typeface="굴림" panose="020B0600000101010101" pitchFamily="34" charset="-127"/>
+                <a:ea typeface="굴림" panose="020B0600000101010101" pitchFamily="34" charset="-127"/>
+                <a:cs typeface="Arial" panose="020B0604020202020204" pitchFamily="34" charset="0"/>
+              </a:defRPr>
+            </a:lvl9pPr>
+          </a:lstStyle>
+          <a:p>
+            <a:pPr eaLnBrk="1" fontAlgn="base" hangingPunct="1">
+              <a:spcBef>
+                <a:spcPct val="0"/>
+              </a:spcBef>
+              <a:buClrTx/>
+              <a:buSzTx/>
+              <a:buFont typeface="Arial" panose="020B0604020202020204" pitchFamily="34" charset="0"/>
+              <a:buChar char="•"/>
+            </a:pPr>
+            <a:r>
+              <a:rPr lang="en-US" altLang="ko-KR" sz="1800" b="1"/>
+              <a:t> Scalability</a:t>
+            </a:r>
+            <a:r>
+              <a:rPr lang="en-US" altLang="ko-KR" sz="1800"/>
+              <a:t> : the capability of a system to increase total throughput under an increased load when resources (typically hardware) are added</a:t>
+            </a:r>
+            <a:endParaRPr lang="ko-KR" altLang="en-US" sz="1800"/>
           </a:p>
         </p:txBody>
       </p:sp>
@@ -11409,10 +11510,10 @@
       </p:grpSpPr>
       <p:sp>
         <p:nvSpPr>
-          <p:cNvPr id="35841" name="제목 1">
+          <p:cNvPr id="34817" name="제목 1">
             <a:extLst>
               <a:ext uri="{FF2B5EF4-FFF2-40B4-BE49-F238E27FC236}">
-                <a16:creationId xmlns:a16="http://schemas.microsoft.com/office/drawing/2014/main" id="{6FD3B885-A5F4-0765-57A9-E89F681C1F91}"/>
+                <a16:creationId xmlns:a16="http://schemas.microsoft.com/office/drawing/2014/main" id="{1B74AAAB-AF9F-D7F2-E064-980E4CE904C0}"/>
               </a:ext>
             </a:extLst>
           </p:cNvPr>
@@ -11430,7 +11531,7 @@
           <a:p>
             <a:r>
               <a:rPr lang="en-US" altLang="ko-KR" b="1" u="sng"/>
-              <a:t>Granularity (from wikipedia)</a:t>
+              <a:t>Granularity</a:t>
             </a:r>
             <a:endParaRPr lang="ko-KR" altLang="en-US" b="1" u="sng"/>
           </a:p>
@@ -11438,10 +11539,10 @@
       </p:sp>
       <p:sp>
         <p:nvSpPr>
-          <p:cNvPr id="35842" name="내용 개체 틀 2">
+          <p:cNvPr id="34818" name="내용 개체 틀 2">
             <a:extLst>
               <a:ext uri="{FF2B5EF4-FFF2-40B4-BE49-F238E27FC236}">
-                <a16:creationId xmlns:a16="http://schemas.microsoft.com/office/drawing/2014/main" id="{EF59FF5C-B282-7317-592C-86B061FE4955}"/>
+                <a16:creationId xmlns:a16="http://schemas.microsoft.com/office/drawing/2014/main" id="{0FF8E2FF-3AC8-DA85-ABEE-A4D30B1C6A4E}"/>
               </a:ext>
             </a:extLst>
           </p:cNvPr>
@@ -11458,50 +11559,41 @@
           <a:lstStyle/>
           <a:p>
             <a:r>
-              <a:rPr lang="en-US" altLang="ko-KR" sz="2400"/>
-              <a:t>Granularity </a:t>
+              <a:rPr lang="en-US" altLang="ko-KR" sz="2800"/>
+              <a:t>Granularity is a qualitative measure of the ratio of computation to communication</a:t>
             </a:r>
           </a:p>
           <a:p>
             <a:pPr lvl="1"/>
             <a:r>
-              <a:rPr lang="en-US" altLang="ko-KR" sz="1800"/>
-              <a:t>the extent to which a system is broken down into small parts</a:t>
-            </a:r>
-          </a:p>
-          <a:p>
-            <a:r>
-              <a:rPr lang="en-US" altLang="ko-KR" sz="2400"/>
-              <a:t>Coarse-grained systems </a:t>
+              <a:rPr lang="en-US" altLang="ko-KR" sz="2000" b="1"/>
+              <a:t>Coarse</a:t>
+            </a:r>
+            <a:r>
+              <a:rPr lang="en-US" altLang="ko-KR" sz="2000"/>
+              <a:t>: relatively large amounts of computational work are done between communication events</a:t>
             </a:r>
           </a:p>
           <a:p>
             <a:pPr lvl="1"/>
             <a:r>
-              <a:rPr lang="en-US" altLang="ko-KR" sz="1800"/>
-              <a:t>consist of fewer, larger components than fine-grained systems</a:t>
-            </a:r>
-          </a:p>
-          <a:p>
-            <a:pPr lvl="1"/>
-            <a:r>
-              <a:rPr lang="en-US" altLang="ko-KR" sz="1800"/>
-              <a:t>regards large subcomponents </a:t>
-            </a:r>
-          </a:p>
-          <a:p>
-            <a:r>
-              <a:rPr lang="en-US" altLang="ko-KR" sz="2400"/>
-              <a:t>Fine-grained systems </a:t>
-            </a:r>
-          </a:p>
-          <a:p>
-            <a:pPr lvl="1"/>
-            <a:r>
-              <a:rPr lang="en-US" altLang="ko-KR" sz="1800"/>
-              <a:t>regards smaller components of which the larger ones are composed.</a:t>
-            </a:r>
-            <a:endParaRPr lang="ko-KR" altLang="en-US" sz="1800"/>
+              <a:rPr lang="en-US" altLang="ko-KR" sz="2000" b="1"/>
+              <a:t>Fine</a:t>
+            </a:r>
+            <a:r>
+              <a:rPr lang="en-US" altLang="ko-KR" sz="2000"/>
+              <a:t>: relatively small amounts of computational work are done between communication events</a:t>
+            </a:r>
+          </a:p>
+          <a:p>
+            <a:endParaRPr lang="en-US" altLang="ko-KR" sz="2800"/>
+          </a:p>
+          <a:p>
+            <a:r>
+              <a:rPr lang="en-US" altLang="ko-KR" sz="2800"/>
+              <a:t>Computation stages are typically separated from periods of communication by synchronization events</a:t>
+            </a:r>
+            <a:endParaRPr lang="ko-KR" altLang="en-US" sz="2800"/>
           </a:p>
         </p:txBody>
       </p:sp>
@@ -11532,10 +11624,10 @@
       </p:grpSpPr>
       <p:sp>
         <p:nvSpPr>
-          <p:cNvPr id="36865" name="제목 1">
+          <p:cNvPr id="35841" name="제목 1">
             <a:extLst>
               <a:ext uri="{FF2B5EF4-FFF2-40B4-BE49-F238E27FC236}">
-                <a16:creationId xmlns:a16="http://schemas.microsoft.com/office/drawing/2014/main" id="{8FECE2EB-BFC3-2260-5471-C68911729041}"/>
+                <a16:creationId xmlns:a16="http://schemas.microsoft.com/office/drawing/2014/main" id="{6FD3B885-A5F4-0765-57A9-E89F681C1F91}"/>
               </a:ext>
             </a:extLst>
           </p:cNvPr>
@@ -11553,7 +11645,7 @@
           <a:p>
             <a:r>
               <a:rPr lang="en-US" altLang="ko-KR" b="1" u="sng"/>
-              <a:t>Fine vs. Coarse Granularity</a:t>
+              <a:t>Granularity (from wikipedia)</a:t>
             </a:r>
             <a:endParaRPr lang="ko-KR" altLang="en-US" b="1" u="sng"/>
           </a:p>
@@ -11561,10 +11653,10 @@
       </p:sp>
       <p:sp>
         <p:nvSpPr>
-          <p:cNvPr id="36866" name="텍스트 개체 틀 3">
+          <p:cNvPr id="35842" name="내용 개체 틀 2">
             <a:extLst>
               <a:ext uri="{FF2B5EF4-FFF2-40B4-BE49-F238E27FC236}">
-                <a16:creationId xmlns:a16="http://schemas.microsoft.com/office/drawing/2014/main" id="{D9B56C3F-8E42-D07C-FAEB-3CC2222ECB6B}"/>
+                <a16:creationId xmlns:a16="http://schemas.microsoft.com/office/drawing/2014/main" id="{EF59FF5C-B282-7317-592C-86B061FE4955}"/>
               </a:ext>
             </a:extLst>
           </p:cNvPr>
@@ -11572,7 +11664,7 @@
             <a:spLocks noGrp="1" noChangeArrowheads="1"/>
           </p:cNvSpPr>
           <p:nvPr>
-            <p:ph type="body" idx="1"/>
+            <p:ph idx="1"/>
           </p:nvPr>
         </p:nvSpPr>
         <p:spPr/>
@@ -11580,198 +11672,54 @@
           <a:bodyPr/>
           <a:lstStyle/>
           <a:p>
-            <a:pPr>
-              <a:buFont typeface="Arial" panose="020B0604020202020204" pitchFamily="34" charset="0"/>
-              <a:buChar char="•"/>
-            </a:pPr>
-            <a:r>
-              <a:rPr lang="en-US" altLang="ko-KR"/>
-              <a:t> Fine-grain Parallelism</a:t>
-            </a:r>
-            <a:endParaRPr lang="ko-KR" altLang="en-US"/>
+            <a:r>
+              <a:rPr lang="en-US" altLang="ko-KR" sz="2400"/>
+              <a:t>Granularity </a:t>
+            </a:r>
+          </a:p>
+          <a:p>
+            <a:pPr lvl="1"/>
+            <a:r>
+              <a:rPr lang="en-US" altLang="ko-KR" sz="1800"/>
+              <a:t>the extent to which a system is broken down into small parts</a:t>
+            </a:r>
+          </a:p>
+          <a:p>
+            <a:r>
+              <a:rPr lang="en-US" altLang="ko-KR" sz="2400"/>
+              <a:t>Coarse-grained systems </a:t>
+            </a:r>
+          </a:p>
+          <a:p>
+            <a:pPr lvl="1"/>
+            <a:r>
+              <a:rPr lang="en-US" altLang="ko-KR" sz="1800"/>
+              <a:t>consist of fewer, larger components than fine-grained systems</a:t>
+            </a:r>
+          </a:p>
+          <a:p>
+            <a:pPr lvl="1"/>
+            <a:r>
+              <a:rPr lang="en-US" altLang="ko-KR" sz="1800"/>
+              <a:t>regards large subcomponents </a:t>
+            </a:r>
+          </a:p>
+          <a:p>
+            <a:r>
+              <a:rPr lang="en-US" altLang="ko-KR" sz="2400"/>
+              <a:t>Fine-grained systems </a:t>
+            </a:r>
+          </a:p>
+          <a:p>
+            <a:pPr lvl="1"/>
+            <a:r>
+              <a:rPr lang="en-US" altLang="ko-KR" sz="1800"/>
+              <a:t>regards smaller components of which the larger ones are composed.</a:t>
+            </a:r>
+            <a:endParaRPr lang="ko-KR" altLang="en-US" sz="1800"/>
           </a:p>
         </p:txBody>
       </p:sp>
-      <p:sp>
-        <p:nvSpPr>
-          <p:cNvPr id="36867" name="내용 개체 틀 4">
-            <a:extLst>
-              <a:ext uri="{FF2B5EF4-FFF2-40B4-BE49-F238E27FC236}">
-                <a16:creationId xmlns:a16="http://schemas.microsoft.com/office/drawing/2014/main" id="{0D456764-0C04-02AE-B779-EB6BC7F123A1}"/>
-              </a:ext>
-            </a:extLst>
-          </p:cNvPr>
-          <p:cNvSpPr>
-            <a:spLocks noGrp="1" noChangeArrowheads="1"/>
-          </p:cNvSpPr>
-          <p:nvPr>
-            <p:ph sz="half" idx="2"/>
-          </p:nvPr>
-        </p:nvSpPr>
-        <p:spPr/>
-        <p:txBody>
-          <a:bodyPr/>
-          <a:lstStyle/>
-          <a:p>
-            <a:r>
-              <a:rPr lang="en-US" altLang="ko-KR" sz="2000"/>
-              <a:t>Low computation to communication ratio</a:t>
-            </a:r>
-          </a:p>
-          <a:p>
-            <a:r>
-              <a:rPr lang="en-US" altLang="ko-KR" sz="2000"/>
-              <a:t>Small amounts of computational work between communication stages</a:t>
-            </a:r>
-          </a:p>
-          <a:p>
-            <a:r>
-              <a:rPr lang="en-US" altLang="ko-KR" sz="2000"/>
-              <a:t>Less opportunity for performance enhancement</a:t>
-            </a:r>
-          </a:p>
-          <a:p>
-            <a:r>
-              <a:rPr lang="en-US" altLang="ko-KR" sz="2000"/>
-              <a:t>High communication overhead</a:t>
-            </a:r>
-            <a:endParaRPr lang="ko-KR" altLang="en-US" sz="2000"/>
-          </a:p>
-        </p:txBody>
-      </p:sp>
-      <p:sp>
-        <p:nvSpPr>
-          <p:cNvPr id="36868" name="텍스트 개체 틀 5">
-            <a:extLst>
-              <a:ext uri="{FF2B5EF4-FFF2-40B4-BE49-F238E27FC236}">
-                <a16:creationId xmlns:a16="http://schemas.microsoft.com/office/drawing/2014/main" id="{E609D92D-9060-FCD3-0FC2-9A5107B996B3}"/>
-              </a:ext>
-            </a:extLst>
-          </p:cNvPr>
-          <p:cNvSpPr>
-            <a:spLocks noGrp="1" noChangeArrowheads="1"/>
-          </p:cNvSpPr>
-          <p:nvPr>
-            <p:ph type="body" sz="quarter" idx="3"/>
-          </p:nvPr>
-        </p:nvSpPr>
-        <p:spPr/>
-        <p:txBody>
-          <a:bodyPr/>
-          <a:lstStyle/>
-          <a:p>
-            <a:pPr>
-              <a:buFont typeface="Arial" panose="020B0604020202020204" pitchFamily="34" charset="0"/>
-              <a:buChar char="•"/>
-            </a:pPr>
-            <a:r>
-              <a:rPr lang="en-US" altLang="ko-KR"/>
-              <a:t> Coarse-grain Parallelism</a:t>
-            </a:r>
-            <a:endParaRPr lang="ko-KR" altLang="en-US"/>
-          </a:p>
-        </p:txBody>
-      </p:sp>
-      <p:sp>
-        <p:nvSpPr>
-          <p:cNvPr id="36869" name="내용 개체 틀 6">
-            <a:extLst>
-              <a:ext uri="{FF2B5EF4-FFF2-40B4-BE49-F238E27FC236}">
-                <a16:creationId xmlns:a16="http://schemas.microsoft.com/office/drawing/2014/main" id="{3405E4ED-EEFB-22A1-FD07-D37A34F2A58B}"/>
-              </a:ext>
-            </a:extLst>
-          </p:cNvPr>
-          <p:cNvSpPr>
-            <a:spLocks noGrp="1" noChangeArrowheads="1"/>
-          </p:cNvSpPr>
-          <p:nvPr>
-            <p:ph sz="quarter" idx="4"/>
-          </p:nvPr>
-        </p:nvSpPr>
-        <p:spPr/>
-        <p:txBody>
-          <a:bodyPr/>
-          <a:lstStyle/>
-          <a:p>
-            <a:r>
-              <a:rPr lang="en-US" altLang="ko-KR" sz="2000"/>
-              <a:t>High computation to communication ratio</a:t>
-            </a:r>
-          </a:p>
-          <a:p>
-            <a:r>
-              <a:rPr lang="en-US" altLang="ko-KR" sz="2000"/>
-              <a:t>Large amounts of computational work between communication events</a:t>
-            </a:r>
-          </a:p>
-          <a:p>
-            <a:r>
-              <a:rPr lang="en-US" altLang="ko-KR" sz="2000"/>
-              <a:t>More opportunity for performance increase</a:t>
-            </a:r>
-          </a:p>
-        </p:txBody>
-      </p:sp>
-      <p:pic>
-        <p:nvPicPr>
-          <p:cNvPr id="36870" name="Picture 2">
-            <a:extLst>
-              <a:ext uri="{FF2B5EF4-FFF2-40B4-BE49-F238E27FC236}">
-                <a16:creationId xmlns:a16="http://schemas.microsoft.com/office/drawing/2014/main" id="{83062615-16B0-F2DF-FDF9-0840AA0E8AC9}"/>
-              </a:ext>
-            </a:extLst>
-          </p:cNvPr>
-          <p:cNvPicPr>
-            <a:picLocks noChangeAspect="1" noChangeArrowheads="1"/>
-          </p:cNvPicPr>
-          <p:nvPr/>
-        </p:nvPicPr>
-        <p:blipFill>
-          <a:blip r:embed="rId2">
-            <a:extLst>
-              <a:ext uri="{28A0092B-C50C-407E-A947-70E740481C1C}">
-                <a14:useLocalDpi xmlns:a14="http://schemas.microsoft.com/office/drawing/2010/main" val="0"/>
-              </a:ext>
-            </a:extLst>
-          </a:blip>
-          <a:srcRect/>
-          <a:stretch>
-            <a:fillRect/>
-          </a:stretch>
-        </p:blipFill>
-        <p:spPr bwMode="auto">
-          <a:xfrm>
-            <a:off x="2339975" y="5157788"/>
-            <a:ext cx="4619625" cy="1447800"/>
-          </a:xfrm>
-          <a:prstGeom prst="rect">
-            <a:avLst/>
-          </a:prstGeom>
-          <a:noFill/>
-          <a:ln>
-            <a:noFill/>
-          </a:ln>
-          <a:extLst>
-            <a:ext uri="{909E8E84-426E-40DD-AFC4-6F175D3DCCD1}">
-              <a14:hiddenFill xmlns:a14="http://schemas.microsoft.com/office/drawing/2010/main">
-                <a:solidFill>
-                  <a:srgbClr val="FFFFFF"/>
-                </a:solidFill>
-              </a14:hiddenFill>
-            </a:ext>
-            <a:ext uri="{91240B29-F687-4F45-9708-019B960494DF}">
-              <a14:hiddenLine xmlns:a14="http://schemas.microsoft.com/office/drawing/2010/main" w="9525">
-                <a:solidFill>
-                  <a:srgbClr val="000000"/>
-                </a:solidFill>
-                <a:miter lim="800000"/>
-                <a:headEnd/>
-                <a:tailEnd/>
-              </a14:hiddenLine>
-            </a:ext>
-          </a:extLst>
-        </p:spPr>
-      </p:pic>
     </p:spTree>
   </p:cSld>
   <p:clrMapOvr>
@@ -11799,10 +11747,10 @@
       </p:grpSpPr>
       <p:sp>
         <p:nvSpPr>
-          <p:cNvPr id="37889" name="제목 1">
+          <p:cNvPr id="36865" name="제목 1">
             <a:extLst>
               <a:ext uri="{FF2B5EF4-FFF2-40B4-BE49-F238E27FC236}">
-                <a16:creationId xmlns:a16="http://schemas.microsoft.com/office/drawing/2014/main" id="{5BE6299E-B25D-2C2B-C3E3-BFF6F30DB4F6}"/>
+                <a16:creationId xmlns:a16="http://schemas.microsoft.com/office/drawing/2014/main" id="{8FECE2EB-BFC3-2260-5471-C68911729041}"/>
               </a:ext>
             </a:extLst>
           </p:cNvPr>
@@ -11822,16 +11770,16 @@
               <a:rPr lang="en-US" altLang="ko-KR" b="1" u="sng"/>
               <a:t>Fine vs. Coarse Granularity</a:t>
             </a:r>
-            <a:endParaRPr lang="ko-KR" altLang="en-US"/>
+            <a:endParaRPr lang="ko-KR" altLang="en-US" b="1" u="sng"/>
           </a:p>
         </p:txBody>
       </p:sp>
       <p:sp>
         <p:nvSpPr>
-          <p:cNvPr id="37890" name="내용 개체 틀 2">
+          <p:cNvPr id="36866" name="텍스트 개체 틀 3">
             <a:extLst>
               <a:ext uri="{FF2B5EF4-FFF2-40B4-BE49-F238E27FC236}">
-                <a16:creationId xmlns:a16="http://schemas.microsoft.com/office/drawing/2014/main" id="{5CA74200-0B4D-0988-D9A1-A86D6393AD08}"/>
+                <a16:creationId xmlns:a16="http://schemas.microsoft.com/office/drawing/2014/main" id="{D9B56C3F-8E42-D07C-FAEB-3CC2222ECB6B}"/>
               </a:ext>
             </a:extLst>
           </p:cNvPr>
@@ -11839,7 +11787,7 @@
             <a:spLocks noGrp="1" noChangeArrowheads="1"/>
           </p:cNvSpPr>
           <p:nvPr>
-            <p:ph idx="1"/>
+            <p:ph type="body" idx="1"/>
           </p:nvPr>
         </p:nvSpPr>
         <p:spPr/>
@@ -11847,26 +11795,198 @@
           <a:bodyPr/>
           <a:lstStyle/>
           <a:p>
-            <a:r>
-              <a:rPr lang="en-US" altLang="ko-KR" sz="2400"/>
-              <a:t>The most efficient granularity is dependent on the algorithm and the hardware</a:t>
-            </a:r>
-          </a:p>
-          <a:p>
-            <a:r>
-              <a:rPr lang="en-US" altLang="ko-KR" sz="2400"/>
-              <a:t>In most cases the overhead associated with communications and synchronization is high relative to execution speed so it is advantageous to have coarse granularity.</a:t>
-            </a:r>
-          </a:p>
-          <a:p>
-            <a:r>
-              <a:rPr lang="en-US" altLang="ko-KR" sz="2400"/>
-              <a:t>Fine-grain parallelism can help reduce overheads due to load imbalance.</a:t>
-            </a:r>
-            <a:endParaRPr lang="ko-KR" altLang="en-US" sz="2400"/>
+            <a:pPr>
+              <a:buFont typeface="Arial" panose="020B0604020202020204" pitchFamily="34" charset="0"/>
+              <a:buChar char="•"/>
+            </a:pPr>
+            <a:r>
+              <a:rPr lang="en-US" altLang="ko-KR"/>
+              <a:t> Fine-grain Parallelism</a:t>
+            </a:r>
+            <a:endParaRPr lang="ko-KR" altLang="en-US"/>
           </a:p>
         </p:txBody>
       </p:sp>
+      <p:sp>
+        <p:nvSpPr>
+          <p:cNvPr id="36867" name="내용 개체 틀 4">
+            <a:extLst>
+              <a:ext uri="{FF2B5EF4-FFF2-40B4-BE49-F238E27FC236}">
+                <a16:creationId xmlns:a16="http://schemas.microsoft.com/office/drawing/2014/main" id="{0D456764-0C04-02AE-B779-EB6BC7F123A1}"/>
+              </a:ext>
+            </a:extLst>
+          </p:cNvPr>
+          <p:cNvSpPr>
+            <a:spLocks noGrp="1" noChangeArrowheads="1"/>
+          </p:cNvSpPr>
+          <p:nvPr>
+            <p:ph sz="half" idx="2"/>
+          </p:nvPr>
+        </p:nvSpPr>
+        <p:spPr/>
+        <p:txBody>
+          <a:bodyPr/>
+          <a:lstStyle/>
+          <a:p>
+            <a:r>
+              <a:rPr lang="en-US" altLang="ko-KR" sz="2000"/>
+              <a:t>Low computation to communication ratio</a:t>
+            </a:r>
+          </a:p>
+          <a:p>
+            <a:r>
+              <a:rPr lang="en-US" altLang="ko-KR" sz="2000"/>
+              <a:t>Small amounts of computational work between communication stages</a:t>
+            </a:r>
+          </a:p>
+          <a:p>
+            <a:r>
+              <a:rPr lang="en-US" altLang="ko-KR" sz="2000"/>
+              <a:t>Less opportunity for performance enhancement</a:t>
+            </a:r>
+          </a:p>
+          <a:p>
+            <a:r>
+              <a:rPr lang="en-US" altLang="ko-KR" sz="2000"/>
+              <a:t>High communication overhead</a:t>
+            </a:r>
+            <a:endParaRPr lang="ko-KR" altLang="en-US" sz="2000"/>
+          </a:p>
+        </p:txBody>
+      </p:sp>
+      <p:sp>
+        <p:nvSpPr>
+          <p:cNvPr id="36868" name="텍스트 개체 틀 5">
+            <a:extLst>
+              <a:ext uri="{FF2B5EF4-FFF2-40B4-BE49-F238E27FC236}">
+                <a16:creationId xmlns:a16="http://schemas.microsoft.com/office/drawing/2014/main" id="{E609D92D-9060-FCD3-0FC2-9A5107B996B3}"/>
+              </a:ext>
+            </a:extLst>
+          </p:cNvPr>
+          <p:cNvSpPr>
+            <a:spLocks noGrp="1" noChangeArrowheads="1"/>
+          </p:cNvSpPr>
+          <p:nvPr>
+            <p:ph type="body" sz="quarter" idx="3"/>
+          </p:nvPr>
+        </p:nvSpPr>
+        <p:spPr/>
+        <p:txBody>
+          <a:bodyPr/>
+          <a:lstStyle/>
+          <a:p>
+            <a:pPr>
+              <a:buFont typeface="Arial" panose="020B0604020202020204" pitchFamily="34" charset="0"/>
+              <a:buChar char="•"/>
+            </a:pPr>
+            <a:r>
+              <a:rPr lang="en-US" altLang="ko-KR"/>
+              <a:t> Coarse-grain Parallelism</a:t>
+            </a:r>
+            <a:endParaRPr lang="ko-KR" altLang="en-US"/>
+          </a:p>
+        </p:txBody>
+      </p:sp>
+      <p:sp>
+        <p:nvSpPr>
+          <p:cNvPr id="36869" name="내용 개체 틀 6">
+            <a:extLst>
+              <a:ext uri="{FF2B5EF4-FFF2-40B4-BE49-F238E27FC236}">
+                <a16:creationId xmlns:a16="http://schemas.microsoft.com/office/drawing/2014/main" id="{3405E4ED-EEFB-22A1-FD07-D37A34F2A58B}"/>
+              </a:ext>
+            </a:extLst>
+          </p:cNvPr>
+          <p:cNvSpPr>
+            <a:spLocks noGrp="1" noChangeArrowheads="1"/>
+          </p:cNvSpPr>
+          <p:nvPr>
+            <p:ph sz="quarter" idx="4"/>
+          </p:nvPr>
+        </p:nvSpPr>
+        <p:spPr/>
+        <p:txBody>
+          <a:bodyPr/>
+          <a:lstStyle/>
+          <a:p>
+            <a:r>
+              <a:rPr lang="en-US" altLang="ko-KR" sz="2000"/>
+              <a:t>High computation to communication ratio</a:t>
+            </a:r>
+          </a:p>
+          <a:p>
+            <a:r>
+              <a:rPr lang="en-US" altLang="ko-KR" sz="2000"/>
+              <a:t>Large amounts of computational work between communication events</a:t>
+            </a:r>
+          </a:p>
+          <a:p>
+            <a:r>
+              <a:rPr lang="en-US" altLang="ko-KR" sz="2000"/>
+              <a:t>More opportunity for performance increase</a:t>
+            </a:r>
+          </a:p>
+        </p:txBody>
+      </p:sp>
+      <p:pic>
+        <p:nvPicPr>
+          <p:cNvPr id="36870" name="Picture 2">
+            <a:extLst>
+              <a:ext uri="{FF2B5EF4-FFF2-40B4-BE49-F238E27FC236}">
+                <a16:creationId xmlns:a16="http://schemas.microsoft.com/office/drawing/2014/main" id="{83062615-16B0-F2DF-FDF9-0840AA0E8AC9}"/>
+              </a:ext>
+            </a:extLst>
+          </p:cNvPr>
+          <p:cNvPicPr>
+            <a:picLocks noChangeAspect="1" noChangeArrowheads="1"/>
+          </p:cNvPicPr>
+          <p:nvPr/>
+        </p:nvPicPr>
+        <p:blipFill>
+          <a:blip r:embed="rId2">
+            <a:extLst>
+              <a:ext uri="{28A0092B-C50C-407E-A947-70E740481C1C}">
+                <a14:useLocalDpi xmlns:a14="http://schemas.microsoft.com/office/drawing/2010/main" val="0"/>
+              </a:ext>
+            </a:extLst>
+          </a:blip>
+          <a:srcRect/>
+          <a:stretch>
+            <a:fillRect/>
+          </a:stretch>
+        </p:blipFill>
+        <p:spPr bwMode="auto">
+          <a:xfrm>
+            <a:off x="2339975" y="5157788"/>
+            <a:ext cx="4619625" cy="1447800"/>
+          </a:xfrm>
+          <a:prstGeom prst="rect">
+            <a:avLst/>
+          </a:prstGeom>
+          <a:noFill/>
+          <a:ln>
+            <a:noFill/>
+          </a:ln>
+          <a:extLst>
+            <a:ext uri="{909E8E84-426E-40DD-AFC4-6F175D3DCCD1}">
+              <a14:hiddenFill xmlns:a14="http://schemas.microsoft.com/office/drawing/2010/main">
+                <a:solidFill>
+                  <a:srgbClr val="FFFFFF"/>
+                </a:solidFill>
+              </a14:hiddenFill>
+            </a:ext>
+            <a:ext uri="{91240B29-F687-4F45-9708-019B960494DF}">
+              <a14:hiddenLine xmlns:a14="http://schemas.microsoft.com/office/drawing/2010/main" w="9525">
+                <a:solidFill>
+                  <a:srgbClr val="000000"/>
+                </a:solidFill>
+                <a:miter lim="800000"/>
+                <a:headEnd/>
+                <a:tailEnd/>
+              </a14:hiddenLine>
+            </a:ext>
+          </a:extLst>
+        </p:spPr>
+      </p:pic>
     </p:spTree>
   </p:cSld>
   <p:clrMapOvr>
@@ -11894,10 +12014,10 @@
       </p:grpSpPr>
       <p:sp>
         <p:nvSpPr>
-          <p:cNvPr id="38913" name="제목 1">
+          <p:cNvPr id="37889" name="제목 1">
             <a:extLst>
               <a:ext uri="{FF2B5EF4-FFF2-40B4-BE49-F238E27FC236}">
-                <a16:creationId xmlns:a16="http://schemas.microsoft.com/office/drawing/2014/main" id="{3CAC987F-ED48-1B2F-4CC4-5C5C4C9057FC}"/>
+                <a16:creationId xmlns:a16="http://schemas.microsoft.com/office/drawing/2014/main" id="{5BE6299E-B25D-2C2B-C3E3-BFF6F30DB4F6}"/>
               </a:ext>
             </a:extLst>
           </p:cNvPr>
@@ -11914,19 +12034,19 @@
           <a:lstStyle/>
           <a:p>
             <a:r>
-              <a:rPr lang="en-US" altLang="ko-KR" sz="3600" b="1" u="sng"/>
-              <a:t>Load Balancing</a:t>
-            </a:r>
-            <a:endParaRPr lang="ko-KR" altLang="en-US" sz="3600" b="1" u="sng"/>
+              <a:rPr lang="en-US" altLang="ko-KR" b="1" u="sng"/>
+              <a:t>Fine vs. Coarse Granularity</a:t>
+            </a:r>
+            <a:endParaRPr lang="ko-KR" altLang="en-US"/>
           </a:p>
         </p:txBody>
       </p:sp>
       <p:sp>
         <p:nvSpPr>
-          <p:cNvPr id="38914" name="내용 개체 틀 2">
+          <p:cNvPr id="37890" name="내용 개체 틀 2">
             <a:extLst>
               <a:ext uri="{FF2B5EF4-FFF2-40B4-BE49-F238E27FC236}">
-                <a16:creationId xmlns:a16="http://schemas.microsoft.com/office/drawing/2014/main" id="{4AD0ED2C-9058-2176-2150-A59EF4B6D25D}"/>
+                <a16:creationId xmlns:a16="http://schemas.microsoft.com/office/drawing/2014/main" id="{5CA74200-0B4D-0988-D9A1-A86D6393AD08}"/>
               </a:ext>
             </a:extLst>
           </p:cNvPr>
@@ -11943,88 +12063,25 @@
           <a:lstStyle/>
           <a:p>
             <a:r>
-              <a:rPr lang="en-US" altLang="ko-KR" sz="2000"/>
-              <a:t>distributing approximately equal amounts of work among tasks so that all tasks are kept busy all of the time. </a:t>
-            </a:r>
-          </a:p>
-          <a:p>
-            <a:r>
-              <a:rPr lang="en-US" altLang="ko-KR" sz="2000"/>
-              <a:t>It can be considered a minimization of task idle time.</a:t>
-            </a:r>
-          </a:p>
-          <a:p>
-            <a:endParaRPr lang="en-US" altLang="ko-KR" sz="2000"/>
-          </a:p>
-          <a:p>
-            <a:r>
-              <a:rPr lang="en-US" altLang="ko-KR" sz="2000"/>
-              <a:t>For example, if all tasks are subject to a barrier synchronization point, the slowest task will determine the overall performance.</a:t>
-            </a:r>
-            <a:endParaRPr lang="ko-KR" altLang="en-US" sz="2000"/>
+              <a:rPr lang="en-US" altLang="ko-KR" sz="2400"/>
+              <a:t>The most efficient granularity is dependent on the algorithm and the hardware</a:t>
+            </a:r>
+          </a:p>
+          <a:p>
+            <a:r>
+              <a:rPr lang="en-US" altLang="ko-KR" sz="2400"/>
+              <a:t>In most cases the overhead associated with communications and synchronization is high relative to execution speed so it is advantageous to have coarse granularity.</a:t>
+            </a:r>
+          </a:p>
+          <a:p>
+            <a:r>
+              <a:rPr lang="en-US" altLang="ko-KR" sz="2400"/>
+              <a:t>Fine-grain parallelism can help reduce overheads due to load imbalance.</a:t>
+            </a:r>
+            <a:endParaRPr lang="ko-KR" altLang="en-US" sz="2400"/>
           </a:p>
         </p:txBody>
       </p:sp>
-      <p:pic>
-        <p:nvPicPr>
-          <p:cNvPr id="38915" name="Picture 5" descr="Load Imbalance">
-            <a:extLst>
-              <a:ext uri="{FF2B5EF4-FFF2-40B4-BE49-F238E27FC236}">
-                <a16:creationId xmlns:a16="http://schemas.microsoft.com/office/drawing/2014/main" id="{C4B37047-B1FD-6802-4AFA-F46AB50C7214}"/>
-              </a:ext>
-            </a:extLst>
-          </p:cNvPr>
-          <p:cNvPicPr>
-            <a:picLocks noChangeAspect="1" noChangeArrowheads="1"/>
-          </p:cNvPicPr>
-          <p:nvPr/>
-        </p:nvPicPr>
-        <p:blipFill>
-          <a:blip r:embed="rId2">
-            <a:extLst>
-              <a:ext uri="{28A0092B-C50C-407E-A947-70E740481C1C}">
-                <a14:useLocalDpi xmlns:a14="http://schemas.microsoft.com/office/drawing/2010/main" val="0"/>
-              </a:ext>
-            </a:extLst>
-          </a:blip>
-          <a:srcRect/>
-          <a:stretch>
-            <a:fillRect/>
-          </a:stretch>
-        </p:blipFill>
-        <p:spPr bwMode="auto">
-          <a:xfrm>
-            <a:off x="2484438" y="3860800"/>
-            <a:ext cx="3838575" cy="1790700"/>
-          </a:xfrm>
-          <a:prstGeom prst="rect">
-            <a:avLst/>
-          </a:prstGeom>
-          <a:noFill/>
-          <a:ln>
-            <a:noFill/>
-          </a:ln>
-          <a:extLst>
-            <a:ext uri="{909E8E84-426E-40DD-AFC4-6F175D3DCCD1}">
-              <a14:hiddenFill xmlns:a14="http://schemas.microsoft.com/office/drawing/2010/main">
-                <a:solidFill>
-                  <a:srgbClr val="FFFFFF"/>
-                </a:solidFill>
-              </a14:hiddenFill>
-            </a:ext>
-            <a:ext uri="{91240B29-F687-4F45-9708-019B960494DF}">
-              <a14:hiddenLine xmlns:a14="http://schemas.microsoft.com/office/drawing/2010/main" w="9525">
-                <a:solidFill>
-                  <a:srgbClr val="000000"/>
-                </a:solidFill>
-                <a:miter lim="800000"/>
-                <a:headEnd/>
-                <a:tailEnd/>
-              </a14:hiddenLine>
-            </a:ext>
-          </a:extLst>
-        </p:spPr>
-      </p:pic>
     </p:spTree>
   </p:cSld>
   <p:clrMapOvr>
@@ -12052,10 +12109,10 @@
       </p:grpSpPr>
       <p:sp>
         <p:nvSpPr>
-          <p:cNvPr id="39937" name="제목 1">
+          <p:cNvPr id="38913" name="제목 1">
             <a:extLst>
               <a:ext uri="{FF2B5EF4-FFF2-40B4-BE49-F238E27FC236}">
-                <a16:creationId xmlns:a16="http://schemas.microsoft.com/office/drawing/2014/main" id="{AA28D6F9-661C-26E5-EDEE-29812382B8DD}"/>
+                <a16:creationId xmlns:a16="http://schemas.microsoft.com/office/drawing/2014/main" id="{3CAC987F-ED48-1B2F-4CC4-5C5C4C9057FC}"/>
               </a:ext>
             </a:extLst>
           </p:cNvPr>
@@ -12073,7 +12130,7 @@
           <a:p>
             <a:r>
               <a:rPr lang="en-US" altLang="ko-KR" sz="3600" b="1" u="sng"/>
-              <a:t>General Load Balancing Problem</a:t>
+              <a:t>Load Balancing</a:t>
             </a:r>
             <a:endParaRPr lang="ko-KR" altLang="en-US" sz="3600" b="1" u="sng"/>
           </a:p>
@@ -12081,10 +12138,10 @@
       </p:sp>
       <p:sp>
         <p:nvSpPr>
-          <p:cNvPr id="39938" name="내용 개체 틀 2">
+          <p:cNvPr id="38914" name="내용 개체 틀 2">
             <a:extLst>
               <a:ext uri="{FF2B5EF4-FFF2-40B4-BE49-F238E27FC236}">
-                <a16:creationId xmlns:a16="http://schemas.microsoft.com/office/drawing/2014/main" id="{F741A157-0F9B-E7A4-63B5-9A6B9180FD47}"/>
+                <a16:creationId xmlns:a16="http://schemas.microsoft.com/office/drawing/2014/main" id="{4AD0ED2C-9058-2176-2150-A59EF4B6D25D}"/>
               </a:ext>
             </a:extLst>
           </p:cNvPr>
@@ -12102,7 +12159,13 @@
           <a:p>
             <a:r>
               <a:rPr lang="en-US" altLang="ko-KR" sz="2000"/>
-              <a:t>The whole work should be completed as fast as possible.</a:t>
+              <a:t>distributing approximately equal amounts of work among tasks so that all tasks are kept busy all of the time. </a:t>
+            </a:r>
+          </a:p>
+          <a:p>
+            <a:r>
+              <a:rPr lang="en-US" altLang="ko-KR" sz="2000"/>
+              <a:t>It can be considered a minimization of task idle time.</a:t>
             </a:r>
           </a:p>
           <a:p>
@@ -12111,32 +12174,72 @@
           <a:p>
             <a:r>
               <a:rPr lang="en-US" altLang="ko-KR" sz="2000"/>
-              <a:t>As workers are very expensive, they should be kept busy.</a:t>
-            </a:r>
-          </a:p>
-          <a:p>
-            <a:endParaRPr lang="en-US" altLang="ko-KR" sz="2000"/>
-          </a:p>
-          <a:p>
-            <a:r>
-              <a:rPr lang="en-US" altLang="ko-KR" sz="2000"/>
-              <a:t>The work should be distributed fairly. About the same amount of work should be assigned to every worker.</a:t>
-            </a:r>
-          </a:p>
-          <a:p>
-            <a:endParaRPr lang="en-US" altLang="ko-KR" sz="2000"/>
-          </a:p>
-          <a:p>
-            <a:r>
-              <a:rPr lang="en-US" altLang="ko-KR" sz="2000"/>
-              <a:t>There are precedence constraints between different tasks (we can start building the roof only after finishing the walls). Thus we also have to find a clever processing order of the different jobs.</a:t>
-            </a:r>
-          </a:p>
-          <a:p>
+              <a:t>For example, if all tasks are subject to a barrier synchronization point, the slowest task will determine the overall performance.</a:t>
+            </a:r>
             <a:endParaRPr lang="ko-KR" altLang="en-US" sz="2000"/>
           </a:p>
         </p:txBody>
       </p:sp>
+      <p:pic>
+        <p:nvPicPr>
+          <p:cNvPr id="38915" name="Picture 5" descr="Load Imbalance">
+            <a:extLst>
+              <a:ext uri="{FF2B5EF4-FFF2-40B4-BE49-F238E27FC236}">
+                <a16:creationId xmlns:a16="http://schemas.microsoft.com/office/drawing/2014/main" id="{C4B37047-B1FD-6802-4AFA-F46AB50C7214}"/>
+              </a:ext>
+            </a:extLst>
+          </p:cNvPr>
+          <p:cNvPicPr>
+            <a:picLocks noChangeAspect="1" noChangeArrowheads="1"/>
+          </p:cNvPicPr>
+          <p:nvPr/>
+        </p:nvPicPr>
+        <p:blipFill>
+          <a:blip r:embed="rId2">
+            <a:extLst>
+              <a:ext uri="{28A0092B-C50C-407E-A947-70E740481C1C}">
+                <a14:useLocalDpi xmlns:a14="http://schemas.microsoft.com/office/drawing/2010/main" val="0"/>
+              </a:ext>
+            </a:extLst>
+          </a:blip>
+          <a:srcRect/>
+          <a:stretch>
+            <a:fillRect/>
+          </a:stretch>
+        </p:blipFill>
+        <p:spPr bwMode="auto">
+          <a:xfrm>
+            <a:off x="2484438" y="3860800"/>
+            <a:ext cx="3838575" cy="1790700"/>
+          </a:xfrm>
+          <a:prstGeom prst="rect">
+            <a:avLst/>
+          </a:prstGeom>
+          <a:noFill/>
+          <a:ln>
+            <a:noFill/>
+          </a:ln>
+          <a:extLst>
+            <a:ext uri="{909E8E84-426E-40DD-AFC4-6F175D3DCCD1}">
+              <a14:hiddenFill xmlns:a14="http://schemas.microsoft.com/office/drawing/2010/main">
+                <a:solidFill>
+                  <a:srgbClr val="FFFFFF"/>
+                </a:solidFill>
+              </a14:hiddenFill>
+            </a:ext>
+            <a:ext uri="{91240B29-F687-4F45-9708-019B960494DF}">
+              <a14:hiddenLine xmlns:a14="http://schemas.microsoft.com/office/drawing/2010/main" w="9525">
+                <a:solidFill>
+                  <a:srgbClr val="000000"/>
+                </a:solidFill>
+                <a:miter lim="800000"/>
+                <a:headEnd/>
+                <a:tailEnd/>
+              </a14:hiddenLine>
+            </a:ext>
+          </a:extLst>
+        </p:spPr>
+      </p:pic>
     </p:spTree>
   </p:cSld>
   <p:clrMapOvr>
@@ -12164,10 +12267,10 @@
       </p:grpSpPr>
       <p:sp>
         <p:nvSpPr>
-          <p:cNvPr id="40961" name="제목 6">
+          <p:cNvPr id="39937" name="제목 1">
             <a:extLst>
               <a:ext uri="{FF2B5EF4-FFF2-40B4-BE49-F238E27FC236}">
-                <a16:creationId xmlns:a16="http://schemas.microsoft.com/office/drawing/2014/main" id="{FDDB823E-27CE-564A-E756-6C8A6930B80D}"/>
+                <a16:creationId xmlns:a16="http://schemas.microsoft.com/office/drawing/2014/main" id="{AA28D6F9-661C-26E5-EDEE-29812382B8DD}"/>
               </a:ext>
             </a:extLst>
           </p:cNvPr>
@@ -12184,19 +12287,19 @@
           <a:lstStyle/>
           <a:p>
             <a:r>
-              <a:rPr lang="en-US" altLang="ko-KR" b="1" u="sng"/>
-              <a:t>Load Balancing Problem</a:t>
-            </a:r>
-            <a:endParaRPr lang="ko-KR" altLang="en-US" b="1" u="sng"/>
+              <a:rPr lang="en-US" altLang="ko-KR" sz="3600" b="1" u="sng"/>
+              <a:t>General Load Balancing Problem</a:t>
+            </a:r>
+            <a:endParaRPr lang="ko-KR" altLang="en-US" sz="3600" b="1" u="sng"/>
           </a:p>
         </p:txBody>
       </p:sp>
       <p:sp>
         <p:nvSpPr>
-          <p:cNvPr id="40962" name="내용 개체 틀 7">
+          <p:cNvPr id="39938" name="내용 개체 틀 2">
             <a:extLst>
               <a:ext uri="{FF2B5EF4-FFF2-40B4-BE49-F238E27FC236}">
-                <a16:creationId xmlns:a16="http://schemas.microsoft.com/office/drawing/2014/main" id="{4EB28171-9265-E5F8-C4A8-70D940676E03}"/>
+                <a16:creationId xmlns:a16="http://schemas.microsoft.com/office/drawing/2014/main" id="{F741A157-0F9B-E7A4-63B5-9A6B9180FD47}"/>
               </a:ext>
             </a:extLst>
           </p:cNvPr>
@@ -12207,91 +12310,48 @@
             <p:ph idx="1"/>
           </p:nvPr>
         </p:nvSpPr>
-        <p:spPr>
-          <a:xfrm>
-            <a:off x="457200" y="1600200"/>
-            <a:ext cx="8362950" cy="4525963"/>
-          </a:xfrm>
-        </p:spPr>
+        <p:spPr/>
         <p:txBody>
           <a:bodyPr/>
           <a:lstStyle/>
           <a:p>
             <a:r>
-              <a:rPr lang="en-US" altLang="ko-KR" sz="2400"/>
-              <a:t>Processors that finish early have to wait for the processor with the largest amount of work to complete</a:t>
-            </a:r>
-          </a:p>
-          <a:p>
-            <a:pPr lvl="1"/>
-            <a:r>
               <a:rPr lang="en-US" altLang="ko-KR" sz="2000"/>
-              <a:t>Leads to idle time, lowers utilization</a:t>
-            </a:r>
+              <a:t>The whole work should be completed as fast as possible.</a:t>
+            </a:r>
+          </a:p>
+          <a:p>
+            <a:endParaRPr lang="en-US" altLang="ko-KR" sz="2000"/>
+          </a:p>
+          <a:p>
+            <a:r>
+              <a:rPr lang="en-US" altLang="ko-KR" sz="2000"/>
+              <a:t>As workers are very expensive, they should be kept busy.</a:t>
+            </a:r>
+          </a:p>
+          <a:p>
+            <a:endParaRPr lang="en-US" altLang="ko-KR" sz="2000"/>
+          </a:p>
+          <a:p>
+            <a:r>
+              <a:rPr lang="en-US" altLang="ko-KR" sz="2000"/>
+              <a:t>The work should be distributed fairly. About the same amount of work should be assigned to every worker.</a:t>
+            </a:r>
+          </a:p>
+          <a:p>
+            <a:endParaRPr lang="en-US" altLang="ko-KR" sz="2000"/>
+          </a:p>
+          <a:p>
+            <a:r>
+              <a:rPr lang="en-US" altLang="ko-KR" sz="2000"/>
+              <a:t>There are precedence constraints between different tasks (we can start building the roof only after finishing the walls). Thus we also have to find a clever processing order of the different jobs.</a:t>
+            </a:r>
+          </a:p>
+          <a:p>
             <a:endParaRPr lang="ko-KR" altLang="en-US" sz="2000"/>
           </a:p>
         </p:txBody>
       </p:sp>
-      <p:pic>
-        <p:nvPicPr>
-          <p:cNvPr id="40963" name="Picture 2">
-            <a:extLst>
-              <a:ext uri="{FF2B5EF4-FFF2-40B4-BE49-F238E27FC236}">
-                <a16:creationId xmlns:a16="http://schemas.microsoft.com/office/drawing/2014/main" id="{A97914FB-6487-595C-9C45-B2F36AF81B35}"/>
-              </a:ext>
-            </a:extLst>
-          </p:cNvPr>
-          <p:cNvPicPr>
-            <a:picLocks noChangeAspect="1" noChangeArrowheads="1"/>
-          </p:cNvPicPr>
-          <p:nvPr/>
-        </p:nvPicPr>
-        <p:blipFill>
-          <a:blip r:embed="rId2">
-            <a:extLst>
-              <a:ext uri="{28A0092B-C50C-407E-A947-70E740481C1C}">
-                <a14:useLocalDpi xmlns:a14="http://schemas.microsoft.com/office/drawing/2010/main" val="0"/>
-              </a:ext>
-            </a:extLst>
-          </a:blip>
-          <a:srcRect/>
-          <a:stretch>
-            <a:fillRect/>
-          </a:stretch>
-        </p:blipFill>
-        <p:spPr bwMode="auto">
-          <a:xfrm>
-            <a:off x="179388" y="2890838"/>
-            <a:ext cx="8856662" cy="3851275"/>
-          </a:xfrm>
-          <a:prstGeom prst="rect">
-            <a:avLst/>
-          </a:prstGeom>
-          <a:noFill/>
-          <a:ln>
-            <a:noFill/>
-          </a:ln>
-          <a:extLst>
-            <a:ext uri="{909E8E84-426E-40DD-AFC4-6F175D3DCCD1}">
-              <a14:hiddenFill xmlns:a14="http://schemas.microsoft.com/office/drawing/2010/main">
-                <a:solidFill>
-                  <a:srgbClr val="FFFFFF"/>
-                </a:solidFill>
-              </a14:hiddenFill>
-            </a:ext>
-            <a:ext uri="{91240B29-F687-4F45-9708-019B960494DF}">
-              <a14:hiddenLine xmlns:a14="http://schemas.microsoft.com/office/drawing/2010/main" w="9525">
-                <a:solidFill>
-                  <a:srgbClr val="000000"/>
-                </a:solidFill>
-                <a:miter lim="800000"/>
-                <a:headEnd/>
-                <a:tailEnd/>
-              </a14:hiddenLine>
-            </a:ext>
-          </a:extLst>
-        </p:spPr>
-      </p:pic>
     </p:spTree>
   </p:cSld>
   <p:clrMapOvr>
@@ -12319,10 +12379,10 @@
       </p:grpSpPr>
       <p:sp>
         <p:nvSpPr>
-          <p:cNvPr id="41985" name="제목 1">
+          <p:cNvPr id="40961" name="제목 6">
             <a:extLst>
               <a:ext uri="{FF2B5EF4-FFF2-40B4-BE49-F238E27FC236}">
-                <a16:creationId xmlns:a16="http://schemas.microsoft.com/office/drawing/2014/main" id="{EF918DD2-5173-9180-DF41-730B579E01DA}"/>
+                <a16:creationId xmlns:a16="http://schemas.microsoft.com/office/drawing/2014/main" id="{FDDB823E-27CE-564A-E756-6C8A6930B80D}"/>
               </a:ext>
             </a:extLst>
           </p:cNvPr>
@@ -12340,7 +12400,7 @@
           <a:p>
             <a:r>
               <a:rPr lang="en-US" altLang="ko-KR" b="1" u="sng"/>
-              <a:t>Static load balancing</a:t>
+              <a:t>Load Balancing Problem</a:t>
             </a:r>
             <a:endParaRPr lang="ko-KR" altLang="en-US" b="1" u="sng"/>
           </a:p>
@@ -12348,10 +12408,10 @@
       </p:sp>
       <p:sp>
         <p:nvSpPr>
-          <p:cNvPr id="41986" name="내용 개체 틀 2">
+          <p:cNvPr id="40962" name="내용 개체 틀 7">
             <a:extLst>
               <a:ext uri="{FF2B5EF4-FFF2-40B4-BE49-F238E27FC236}">
-                <a16:creationId xmlns:a16="http://schemas.microsoft.com/office/drawing/2014/main" id="{1A92AA20-D7AA-E7A8-18E4-B584F3D923AE}"/>
+                <a16:creationId xmlns:a16="http://schemas.microsoft.com/office/drawing/2014/main" id="{4EB28171-9265-E5F8-C4A8-70D940676E03}"/>
               </a:ext>
             </a:extLst>
           </p:cNvPr>
@@ -12362,60 +12422,26 @@
             <p:ph idx="1"/>
           </p:nvPr>
         </p:nvSpPr>
-        <p:spPr/>
+        <p:spPr>
+          <a:xfrm>
+            <a:off x="457200" y="1600200"/>
+            <a:ext cx="8362950" cy="4525963"/>
+          </a:xfrm>
+        </p:spPr>
         <p:txBody>
           <a:bodyPr/>
           <a:lstStyle/>
           <a:p>
             <a:r>
               <a:rPr lang="en-US" altLang="ko-KR" sz="2400"/>
-              <a:t>Programmer make decisions and assigns a fixed amount of work to each processing core a priori</a:t>
-            </a:r>
-          </a:p>
-          <a:p>
-            <a:r>
-              <a:rPr lang="en-US" altLang="ko-KR" sz="2400"/>
-              <a:t>Low run time overhead</a:t>
-            </a:r>
-          </a:p>
-          <a:p>
-            <a:r>
-              <a:rPr lang="en-US" altLang="ko-KR" sz="2400"/>
-              <a:t>Works well for homogeneous multicores</a:t>
+              <a:t>Processors that finish early have to wait for the processor with the largest amount of work to complete</a:t>
             </a:r>
           </a:p>
           <a:p>
             <a:pPr lvl="1"/>
             <a:r>
               <a:rPr lang="en-US" altLang="ko-KR" sz="2000"/>
-              <a:t>All core are the same</a:t>
-            </a:r>
-          </a:p>
-          <a:p>
-            <a:pPr lvl="1"/>
-            <a:r>
-              <a:rPr lang="en-US" altLang="ko-KR" sz="2000"/>
-              <a:t>Each core has an equal amount of work</a:t>
-            </a:r>
-          </a:p>
-          <a:p>
-            <a:r>
-              <a:rPr lang="en-US" altLang="ko-KR" sz="2400"/>
-              <a:t>Not so well for heterogeneous multicores</a:t>
-            </a:r>
-          </a:p>
-          <a:p>
-            <a:pPr lvl="1"/>
-            <a:r>
-              <a:rPr lang="en-US" altLang="ko-KR" sz="2000"/>
-              <a:t>Some cores may be faster than others</a:t>
-            </a:r>
-          </a:p>
-          <a:p>
-            <a:pPr lvl="1"/>
-            <a:r>
-              <a:rPr lang="en-US" altLang="ko-KR" sz="2000"/>
-              <a:t>Work distribution is uneven</a:t>
+              <a:t>Leads to idle time, lowers utilization</a:t>
             </a:r>
             <a:endParaRPr lang="ko-KR" altLang="en-US" sz="2000"/>
           </a:p>
@@ -12423,10 +12449,10 @@
       </p:sp>
       <p:pic>
         <p:nvPicPr>
-          <p:cNvPr id="41987" name="Picture 2">
+          <p:cNvPr id="40963" name="Picture 2">
             <a:extLst>
               <a:ext uri="{FF2B5EF4-FFF2-40B4-BE49-F238E27FC236}">
-                <a16:creationId xmlns:a16="http://schemas.microsoft.com/office/drawing/2014/main" id="{58E11854-FEF1-F816-4392-6DCB49346162}"/>
+                <a16:creationId xmlns:a16="http://schemas.microsoft.com/office/drawing/2014/main" id="{A97914FB-6487-595C-9C45-B2F36AF81B35}"/>
               </a:ext>
             </a:extLst>
           </p:cNvPr>
@@ -12450,8 +12476,8 @@
         </p:blipFill>
         <p:spPr bwMode="auto">
           <a:xfrm>
-            <a:off x="7524750" y="2541588"/>
-            <a:ext cx="1409700" cy="2400300"/>
+            <a:off x="179388" y="2890838"/>
+            <a:ext cx="8856662" cy="3851275"/>
           </a:xfrm>
           <a:prstGeom prst="rect">
             <a:avLst/>
@@ -12662,10 +12688,10 @@
       </p:grpSpPr>
       <p:sp>
         <p:nvSpPr>
-          <p:cNvPr id="43009" name="제목 1">
+          <p:cNvPr id="41985" name="제목 1">
             <a:extLst>
               <a:ext uri="{FF2B5EF4-FFF2-40B4-BE49-F238E27FC236}">
-                <a16:creationId xmlns:a16="http://schemas.microsoft.com/office/drawing/2014/main" id="{0CECC29E-AE14-9874-F4BC-DB0F3B2987F2}"/>
+                <a16:creationId xmlns:a16="http://schemas.microsoft.com/office/drawing/2014/main" id="{EF918DD2-5173-9180-DF41-730B579E01DA}"/>
               </a:ext>
             </a:extLst>
           </p:cNvPr>
@@ -12683,18 +12709,18 @@
           <a:p>
             <a:r>
               <a:rPr lang="en-US" altLang="ko-KR" b="1" u="sng"/>
-              <a:t>Dynamic Load Balancing</a:t>
-            </a:r>
-            <a:endParaRPr lang="ko-KR" altLang="en-US" u="sng"/>
+              <a:t>Static load balancing</a:t>
+            </a:r>
+            <a:endParaRPr lang="ko-KR" altLang="en-US" b="1" u="sng"/>
           </a:p>
         </p:txBody>
       </p:sp>
       <p:sp>
         <p:nvSpPr>
-          <p:cNvPr id="43010" name="내용 개체 틀 2">
+          <p:cNvPr id="41986" name="내용 개체 틀 2">
             <a:extLst>
               <a:ext uri="{FF2B5EF4-FFF2-40B4-BE49-F238E27FC236}">
-                <a16:creationId xmlns:a16="http://schemas.microsoft.com/office/drawing/2014/main" id="{612777FC-F325-EA8F-2B88-CCB4D0B53F93}"/>
+                <a16:creationId xmlns:a16="http://schemas.microsoft.com/office/drawing/2014/main" id="{1A92AA20-D7AA-E7A8-18E4-B584F3D923AE}"/>
               </a:ext>
             </a:extLst>
           </p:cNvPr>
@@ -12711,26 +12737,54 @@
           <a:lstStyle/>
           <a:p>
             <a:r>
+              <a:rPr lang="en-US" altLang="ko-KR" sz="2400"/>
+              <a:t>Programmer make decisions and assigns a fixed amount of work to each processing core a priori</a:t>
+            </a:r>
+          </a:p>
+          <a:p>
+            <a:r>
+              <a:rPr lang="en-US" altLang="ko-KR" sz="2400"/>
+              <a:t>Low run time overhead</a:t>
+            </a:r>
+          </a:p>
+          <a:p>
+            <a:r>
+              <a:rPr lang="en-US" altLang="ko-KR" sz="2400"/>
+              <a:t>Works well for homogeneous multicores</a:t>
+            </a:r>
+          </a:p>
+          <a:p>
+            <a:pPr lvl="1"/>
+            <a:r>
               <a:rPr lang="en-US" altLang="ko-KR" sz="2000"/>
-              <a:t>When one core finishes its allocated work, it takes  work from a work queue or a core with the heaviest workload</a:t>
-            </a:r>
-          </a:p>
-          <a:p>
+              <a:t>All core are the same</a:t>
+            </a:r>
+          </a:p>
+          <a:p>
+            <a:pPr lvl="1"/>
             <a:r>
               <a:rPr lang="en-US" altLang="ko-KR" sz="2000"/>
-              <a:t>Adapt partitioning at run time to balance load</a:t>
-            </a:r>
-          </a:p>
-          <a:p>
+              <a:t>Each core has an equal amount of work</a:t>
+            </a:r>
+          </a:p>
+          <a:p>
+            <a:r>
+              <a:rPr lang="en-US" altLang="ko-KR" sz="2400"/>
+              <a:t>Not so well for heterogeneous multicores</a:t>
+            </a:r>
+          </a:p>
+          <a:p>
+            <a:pPr lvl="1"/>
             <a:r>
               <a:rPr lang="en-US" altLang="ko-KR" sz="2000"/>
-              <a:t>High runtime overhead</a:t>
-            </a:r>
-          </a:p>
-          <a:p>
+              <a:t>Some cores may be faster than others</a:t>
+            </a:r>
+          </a:p>
+          <a:p>
+            <a:pPr lvl="1"/>
             <a:r>
               <a:rPr lang="en-US" altLang="ko-KR" sz="2000"/>
-              <a:t>Ideal for codes where work is uneven, unpredictable, and in heterogeneous multicore</a:t>
+              <a:t>Work distribution is uneven</a:t>
             </a:r>
             <a:endParaRPr lang="ko-KR" altLang="en-US" sz="2000"/>
           </a:p>
@@ -12738,10 +12792,10 @@
       </p:sp>
       <p:pic>
         <p:nvPicPr>
-          <p:cNvPr id="43011" name="Picture 2">
+          <p:cNvPr id="41987" name="Picture 2">
             <a:extLst>
               <a:ext uri="{FF2B5EF4-FFF2-40B4-BE49-F238E27FC236}">
-                <a16:creationId xmlns:a16="http://schemas.microsoft.com/office/drawing/2014/main" id="{55D8D108-B43D-F73E-7262-3549470B6FB4}"/>
+                <a16:creationId xmlns:a16="http://schemas.microsoft.com/office/drawing/2014/main" id="{58E11854-FEF1-F816-4392-6DCB49346162}"/>
               </a:ext>
             </a:extLst>
           </p:cNvPr>
@@ -12765,8 +12819,8 @@
         </p:blipFill>
         <p:spPr bwMode="auto">
           <a:xfrm>
-            <a:off x="971550" y="3933825"/>
-            <a:ext cx="7200900" cy="2552700"/>
+            <a:off x="7524750" y="2541588"/>
+            <a:ext cx="1409700" cy="2400300"/>
           </a:xfrm>
           <a:prstGeom prst="rect">
             <a:avLst/>
@@ -12823,10 +12877,10 @@
       </p:grpSpPr>
       <p:sp>
         <p:nvSpPr>
-          <p:cNvPr id="44033" name="제목 1">
+          <p:cNvPr id="43009" name="제목 1">
             <a:extLst>
               <a:ext uri="{FF2B5EF4-FFF2-40B4-BE49-F238E27FC236}">
-                <a16:creationId xmlns:a16="http://schemas.microsoft.com/office/drawing/2014/main" id="{00DECA76-9A6C-17EA-2517-AEEC3129E4D5}"/>
+                <a16:creationId xmlns:a16="http://schemas.microsoft.com/office/drawing/2014/main" id="{0CECC29E-AE14-9874-F4BC-DB0F3B2987F2}"/>
               </a:ext>
             </a:extLst>
           </p:cNvPr>
@@ -12843,24 +12897,24 @@
           <a:lstStyle/>
           <a:p>
             <a:r>
-              <a:rPr lang="en-US" altLang="ko-KR" sz="3200" b="1" u="sng"/>
-              <a:t>Granularity and Performance Tradeoffs</a:t>
-            </a:r>
-            <a:endParaRPr lang="ko-KR" altLang="en-US" sz="3200" b="1" u="sng"/>
+              <a:rPr lang="en-US" altLang="ko-KR" b="1" u="sng"/>
+              <a:t>Dynamic Load Balancing</a:t>
+            </a:r>
+            <a:endParaRPr lang="ko-KR" altLang="en-US" u="sng"/>
           </a:p>
         </p:txBody>
       </p:sp>
       <p:sp>
         <p:nvSpPr>
-          <p:cNvPr id="3" name="내용 개체 틀 2">
+          <p:cNvPr id="43010" name="내용 개체 틀 2">
             <a:extLst>
               <a:ext uri="{FF2B5EF4-FFF2-40B4-BE49-F238E27FC236}">
-                <a16:creationId xmlns:a16="http://schemas.microsoft.com/office/drawing/2014/main" id="{A76A9B17-AAE3-2042-9CB0-AFE1E7955A33}"/>
+                <a16:creationId xmlns:a16="http://schemas.microsoft.com/office/drawing/2014/main" id="{612777FC-F325-EA8F-2B88-CCB4D0B53F93}"/>
               </a:ext>
             </a:extLst>
           </p:cNvPr>
           <p:cNvSpPr>
-            <a:spLocks noGrp="1"/>
+            <a:spLocks noGrp="1" noChangeArrowheads="1"/>
           </p:cNvSpPr>
           <p:nvPr>
             <p:ph idx="1"/>
@@ -12871,56 +12925,92 @@
           <a:bodyPr/>
           <a:lstStyle/>
           <a:p>
-            <a:pPr marL="514350" indent="-514350">
-              <a:buFont typeface="Wingdings" pitchFamily="2" charset="2"/>
-              <a:buAutoNum type="arabicPeriod"/>
-              <a:defRPr/>
-            </a:pPr>
-            <a:r>
-              <a:rPr lang="en-US" altLang="ko-KR" dirty="0"/>
-              <a:t>Load balancing</a:t>
-            </a:r>
-          </a:p>
-          <a:p>
-            <a:pPr marL="914400" lvl="1" indent="-514350">
-              <a:defRPr/>
-            </a:pPr>
-            <a:r>
-              <a:rPr lang="en-US" altLang="ko-KR" dirty="0"/>
-              <a:t>How well is work distributed among cores?</a:t>
-            </a:r>
-          </a:p>
-          <a:p>
-            <a:pPr marL="514350" indent="-514350">
-              <a:buFont typeface="Wingdings" pitchFamily="2" charset="2"/>
-              <a:buAutoNum type="arabicPeriod"/>
-              <a:defRPr/>
-            </a:pPr>
-            <a:endParaRPr lang="en-US" altLang="ko-KR" dirty="0"/>
-          </a:p>
-          <a:p>
-            <a:pPr marL="514350" indent="-514350">
-              <a:buFont typeface="Wingdings" pitchFamily="2" charset="2"/>
-              <a:buAutoNum type="arabicPeriod"/>
-              <a:defRPr/>
-            </a:pPr>
-            <a:r>
-              <a:rPr lang="en-US" altLang="ko-KR" dirty="0"/>
-              <a:t>Synchronization/Communication</a:t>
-            </a:r>
-          </a:p>
-          <a:p>
-            <a:pPr lvl="1">
-              <a:defRPr/>
-            </a:pPr>
-            <a:r>
-              <a:rPr lang="en-US" altLang="ko-KR" dirty="0"/>
-              <a:t>Communication Overhead?</a:t>
-            </a:r>
-            <a:endParaRPr lang="ko-KR" altLang="en-US" dirty="0"/>
+            <a:r>
+              <a:rPr lang="en-US" altLang="ko-KR" sz="2000"/>
+              <a:t>When one core finishes its allocated work, it takes  work from a work queue or a core with the heaviest workload</a:t>
+            </a:r>
+          </a:p>
+          <a:p>
+            <a:r>
+              <a:rPr lang="en-US" altLang="ko-KR" sz="2000"/>
+              <a:t>Adapt partitioning at run time to balance load</a:t>
+            </a:r>
+          </a:p>
+          <a:p>
+            <a:r>
+              <a:rPr lang="en-US" altLang="ko-KR" sz="2000"/>
+              <a:t>High runtime overhead</a:t>
+            </a:r>
+          </a:p>
+          <a:p>
+            <a:r>
+              <a:rPr lang="en-US" altLang="ko-KR" sz="2000"/>
+              <a:t>Ideal for codes where work is uneven, unpredictable, and in heterogeneous multicore</a:t>
+            </a:r>
+            <a:endParaRPr lang="ko-KR" altLang="en-US" sz="2000"/>
           </a:p>
         </p:txBody>
       </p:sp>
+      <p:pic>
+        <p:nvPicPr>
+          <p:cNvPr id="43011" name="Picture 2">
+            <a:extLst>
+              <a:ext uri="{FF2B5EF4-FFF2-40B4-BE49-F238E27FC236}">
+                <a16:creationId xmlns:a16="http://schemas.microsoft.com/office/drawing/2014/main" id="{55D8D108-B43D-F73E-7262-3549470B6FB4}"/>
+              </a:ext>
+            </a:extLst>
+          </p:cNvPr>
+          <p:cNvPicPr>
+            <a:picLocks noChangeAspect="1" noChangeArrowheads="1"/>
+          </p:cNvPicPr>
+          <p:nvPr/>
+        </p:nvPicPr>
+        <p:blipFill>
+          <a:blip r:embed="rId2">
+            <a:extLst>
+              <a:ext uri="{28A0092B-C50C-407E-A947-70E740481C1C}">
+                <a14:useLocalDpi xmlns:a14="http://schemas.microsoft.com/office/drawing/2010/main" val="0"/>
+              </a:ext>
+            </a:extLst>
+          </a:blip>
+          <a:srcRect/>
+          <a:stretch>
+            <a:fillRect/>
+          </a:stretch>
+        </p:blipFill>
+        <p:spPr bwMode="auto">
+          <a:xfrm>
+            <a:off x="971550" y="3933825"/>
+            <a:ext cx="7200900" cy="2552700"/>
+          </a:xfrm>
+          <a:prstGeom prst="rect">
+            <a:avLst/>
+          </a:prstGeom>
+          <a:noFill/>
+          <a:ln>
+            <a:noFill/>
+          </a:ln>
+          <a:extLst>
+            <a:ext uri="{909E8E84-426E-40DD-AFC4-6F175D3DCCD1}">
+              <a14:hiddenFill xmlns:a14="http://schemas.microsoft.com/office/drawing/2010/main">
+                <a:solidFill>
+                  <a:srgbClr val="FFFFFF"/>
+                </a:solidFill>
+              </a14:hiddenFill>
+            </a:ext>
+            <a:ext uri="{91240B29-F687-4F45-9708-019B960494DF}">
+              <a14:hiddenLine xmlns:a14="http://schemas.microsoft.com/office/drawing/2010/main" w="9525">
+                <a:solidFill>
+                  <a:srgbClr val="000000"/>
+                </a:solidFill>
+                <a:miter lim="800000"/>
+                <a:headEnd/>
+                <a:tailEnd/>
+              </a14:hiddenLine>
+            </a:ext>
+          </a:extLst>
+        </p:spPr>
+      </p:pic>
     </p:spTree>
   </p:cSld>
   <p:clrMapOvr>
@@ -12948,10 +13038,10 @@
       </p:grpSpPr>
       <p:sp>
         <p:nvSpPr>
-          <p:cNvPr id="45057" name="제목 1">
+          <p:cNvPr id="44033" name="제목 1">
             <a:extLst>
               <a:ext uri="{FF2B5EF4-FFF2-40B4-BE49-F238E27FC236}">
-                <a16:creationId xmlns:a16="http://schemas.microsoft.com/office/drawing/2014/main" id="{CF827607-756E-8120-0DF7-E4617D911A5A}"/>
+                <a16:creationId xmlns:a16="http://schemas.microsoft.com/office/drawing/2014/main" id="{00DECA76-9A6C-17EA-2517-AEEC3129E4D5}"/>
               </a:ext>
             </a:extLst>
           </p:cNvPr>
@@ -12968,24 +13058,24 @@
           <a:lstStyle/>
           <a:p>
             <a:r>
-              <a:rPr lang="en-US" altLang="ko-KR" b="1" u="sng"/>
-              <a:t>Communication</a:t>
-            </a:r>
-            <a:endParaRPr lang="ko-KR" altLang="en-US" b="1" u="sng"/>
+              <a:rPr lang="en-US" altLang="ko-KR" sz="3200" b="1" u="sng"/>
+              <a:t>Granularity and Performance Tradeoffs</a:t>
+            </a:r>
+            <a:endParaRPr lang="ko-KR" altLang="en-US" sz="3200" b="1" u="sng"/>
           </a:p>
         </p:txBody>
       </p:sp>
       <p:sp>
         <p:nvSpPr>
-          <p:cNvPr id="45058" name="내용 개체 틀 2">
+          <p:cNvPr id="3" name="내용 개체 틀 2">
             <a:extLst>
               <a:ext uri="{FF2B5EF4-FFF2-40B4-BE49-F238E27FC236}">
-                <a16:creationId xmlns:a16="http://schemas.microsoft.com/office/drawing/2014/main" id="{9315482D-9141-AD33-DD51-933FDFE94BB3}"/>
+                <a16:creationId xmlns:a16="http://schemas.microsoft.com/office/drawing/2014/main" id="{A76A9B17-AAE3-2042-9CB0-AFE1E7955A33}"/>
               </a:ext>
             </a:extLst>
           </p:cNvPr>
           <p:cNvSpPr>
-            <a:spLocks noGrp="1" noChangeArrowheads="1"/>
+            <a:spLocks noGrp="1"/>
           </p:cNvSpPr>
           <p:nvPr>
             <p:ph idx="1"/>
@@ -12996,39 +13086,53 @@
           <a:bodyPr/>
           <a:lstStyle/>
           <a:p>
-            <a:r>
-              <a:rPr lang="en-US" altLang="ko-KR" sz="2400"/>
-              <a:t>With message passing, programmer has to understand the computation and orchestrate the communication accordingly</a:t>
-            </a:r>
-          </a:p>
-          <a:p>
-            <a:pPr lvl="1"/>
-            <a:r>
-              <a:rPr lang="en-US" altLang="ko-KR" sz="2000"/>
-              <a:t>Point to Point</a:t>
-            </a:r>
-          </a:p>
-          <a:p>
-            <a:pPr lvl="1"/>
-            <a:r>
-              <a:rPr lang="en-US" altLang="ko-KR" sz="2000"/>
-              <a:t>Broadcast (one to all) and Reduce (all to one)</a:t>
-            </a:r>
-          </a:p>
-          <a:p>
-            <a:pPr lvl="1"/>
-            <a:r>
-              <a:rPr lang="en-US" altLang="ko-KR" sz="2000"/>
-              <a:t>All to All (each processor sends its data to all others)</a:t>
-            </a:r>
-          </a:p>
-          <a:p>
-            <a:pPr lvl="1"/>
-            <a:r>
-              <a:rPr lang="en-US" altLang="ko-KR" sz="2000"/>
-              <a:t>Scatter (one to several) and Gather (several to one)</a:t>
-            </a:r>
-            <a:endParaRPr lang="ko-KR" altLang="en-US" sz="2000"/>
+            <a:pPr marL="514350" indent="-514350">
+              <a:buFont typeface="Wingdings" pitchFamily="2" charset="2"/>
+              <a:buAutoNum type="arabicPeriod"/>
+              <a:defRPr/>
+            </a:pPr>
+            <a:r>
+              <a:rPr lang="en-US" altLang="ko-KR" dirty="0"/>
+              <a:t>Load balancing</a:t>
+            </a:r>
+          </a:p>
+          <a:p>
+            <a:pPr marL="914400" lvl="1" indent="-514350">
+              <a:defRPr/>
+            </a:pPr>
+            <a:r>
+              <a:rPr lang="en-US" altLang="ko-KR" dirty="0"/>
+              <a:t>How well is work distributed among cores?</a:t>
+            </a:r>
+          </a:p>
+          <a:p>
+            <a:pPr marL="514350" indent="-514350">
+              <a:buFont typeface="Wingdings" pitchFamily="2" charset="2"/>
+              <a:buAutoNum type="arabicPeriod"/>
+              <a:defRPr/>
+            </a:pPr>
+            <a:endParaRPr lang="en-US" altLang="ko-KR" dirty="0"/>
+          </a:p>
+          <a:p>
+            <a:pPr marL="514350" indent="-514350">
+              <a:buFont typeface="Wingdings" pitchFamily="2" charset="2"/>
+              <a:buAutoNum type="arabicPeriod"/>
+              <a:defRPr/>
+            </a:pPr>
+            <a:r>
+              <a:rPr lang="en-US" altLang="ko-KR" dirty="0"/>
+              <a:t>Synchronization/Communication</a:t>
+            </a:r>
+          </a:p>
+          <a:p>
+            <a:pPr lvl="1">
+              <a:defRPr/>
+            </a:pPr>
+            <a:r>
+              <a:rPr lang="en-US" altLang="ko-KR" dirty="0"/>
+              <a:t>Communication Overhead?</a:t>
+            </a:r>
+            <a:endParaRPr lang="ko-KR" altLang="en-US" dirty="0"/>
           </a:p>
         </p:txBody>
       </p:sp>
@@ -13059,10 +13163,10 @@
       </p:grpSpPr>
       <p:sp>
         <p:nvSpPr>
-          <p:cNvPr id="46081" name="제목 1">
+          <p:cNvPr id="45057" name="제목 1">
             <a:extLst>
               <a:ext uri="{FF2B5EF4-FFF2-40B4-BE49-F238E27FC236}">
-                <a16:creationId xmlns:a16="http://schemas.microsoft.com/office/drawing/2014/main" id="{C75E92A1-5CB4-3A2C-B5B7-D7B61824A0D4}"/>
+                <a16:creationId xmlns:a16="http://schemas.microsoft.com/office/drawing/2014/main" id="{CF827607-756E-8120-0DF7-E4617D911A5A}"/>
               </a:ext>
             </a:extLst>
           </p:cNvPr>
@@ -13079,19 +13183,19 @@
           <a:lstStyle/>
           <a:p>
             <a:r>
-              <a:rPr lang="en-US" altLang="ko-KR" sz="3200" b="1" u="sng"/>
-              <a:t>Factors to consider for communcation</a:t>
-            </a:r>
-            <a:endParaRPr lang="ko-KR" altLang="en-US" sz="3200" b="1" u="sng"/>
+              <a:rPr lang="en-US" altLang="ko-KR" b="1" u="sng"/>
+              <a:t>Communication</a:t>
+            </a:r>
+            <a:endParaRPr lang="ko-KR" altLang="en-US" b="1" u="sng"/>
           </a:p>
         </p:txBody>
       </p:sp>
       <p:sp>
         <p:nvSpPr>
-          <p:cNvPr id="46082" name="내용 개체 틀 2">
+          <p:cNvPr id="45058" name="내용 개체 틀 2">
             <a:extLst>
               <a:ext uri="{FF2B5EF4-FFF2-40B4-BE49-F238E27FC236}">
-                <a16:creationId xmlns:a16="http://schemas.microsoft.com/office/drawing/2014/main" id="{F5833CE1-D6DF-749D-5DF7-DB68F8CE3D97}"/>
+                <a16:creationId xmlns:a16="http://schemas.microsoft.com/office/drawing/2014/main" id="{9315482D-9141-AD33-DD51-933FDFE94BB3}"/>
               </a:ext>
             </a:extLst>
           </p:cNvPr>
@@ -13108,23 +13212,38 @@
           <a:lstStyle/>
           <a:p>
             <a:r>
-              <a:rPr lang="en-US" altLang="ko-KR" sz="2800"/>
-              <a:t>Cost of communications</a:t>
+              <a:rPr lang="en-US" altLang="ko-KR" sz="2400"/>
+              <a:t>With message passing, programmer has to understand the computation and orchestrate the communication accordingly</a:t>
             </a:r>
           </a:p>
           <a:p>
             <a:pPr lvl="1"/>
             <a:r>
-              <a:rPr lang="en-US" altLang="ko-KR" sz="2400"/>
-              <a:t>Inter-task communication virtually always implies overhead.</a:t>
+              <a:rPr lang="en-US" altLang="ko-KR" sz="2000"/>
+              <a:t>Point to Point</a:t>
             </a:r>
           </a:p>
           <a:p>
             <a:pPr lvl="1"/>
             <a:r>
-              <a:rPr lang="en-US" altLang="ko-KR" sz="2400"/>
-              <a:t>Communications frequently require some type of synchronization between tasks, which can result in tasks spending time ‘waiting’ instead of doing work.</a:t>
-            </a:r>
+              <a:rPr lang="en-US" altLang="ko-KR" sz="2000"/>
+              <a:t>Broadcast (one to all) and Reduce (all to one)</a:t>
+            </a:r>
+          </a:p>
+          <a:p>
+            <a:pPr lvl="1"/>
+            <a:r>
+              <a:rPr lang="en-US" altLang="ko-KR" sz="2000"/>
+              <a:t>All to All (each processor sends its data to all others)</a:t>
+            </a:r>
+          </a:p>
+          <a:p>
+            <a:pPr lvl="1"/>
+            <a:r>
+              <a:rPr lang="en-US" altLang="ko-KR" sz="2000"/>
+              <a:t>Scatter (one to several) and Gather (several to one)</a:t>
+            </a:r>
+            <a:endParaRPr lang="ko-KR" altLang="en-US" sz="2000"/>
           </a:p>
         </p:txBody>
       </p:sp>
@@ -13155,10 +13274,10 @@
       </p:grpSpPr>
       <p:sp>
         <p:nvSpPr>
-          <p:cNvPr id="47105" name="제목 1">
+          <p:cNvPr id="46081" name="제목 1">
             <a:extLst>
               <a:ext uri="{FF2B5EF4-FFF2-40B4-BE49-F238E27FC236}">
-                <a16:creationId xmlns:a16="http://schemas.microsoft.com/office/drawing/2014/main" id="{F21D807F-78B5-794D-6E96-80106A933B6E}"/>
+                <a16:creationId xmlns:a16="http://schemas.microsoft.com/office/drawing/2014/main" id="{C75E92A1-5CB4-3A2C-B5B7-D7B61824A0D4}"/>
               </a:ext>
             </a:extLst>
           </p:cNvPr>
@@ -13184,10 +13303,10 @@
       </p:sp>
       <p:sp>
         <p:nvSpPr>
-          <p:cNvPr id="47106" name="내용 개체 틀 2">
+          <p:cNvPr id="46082" name="내용 개체 틀 2">
             <a:extLst>
               <a:ext uri="{FF2B5EF4-FFF2-40B4-BE49-F238E27FC236}">
-                <a16:creationId xmlns:a16="http://schemas.microsoft.com/office/drawing/2014/main" id="{E9BDB214-7A87-511B-DF64-95A9367EEDE6}"/>
+                <a16:creationId xmlns:a16="http://schemas.microsoft.com/office/drawing/2014/main" id="{F5833CE1-D6DF-749D-5DF7-DB68F8CE3D97}"/>
               </a:ext>
             </a:extLst>
           </p:cNvPr>
@@ -13205,51 +13324,22 @@
           <a:p>
             <a:r>
               <a:rPr lang="en-US" altLang="ko-KR" sz="2800"/>
-              <a:t>Latency vs Bandwidth</a:t>
+              <a:t>Cost of communications</a:t>
             </a:r>
           </a:p>
           <a:p>
             <a:pPr lvl="1"/>
             <a:r>
-              <a:rPr lang="en-US" altLang="ko-KR" sz="2000"/>
-              <a:t>Latency</a:t>
-            </a:r>
-          </a:p>
-          <a:p>
-            <a:pPr lvl="2"/>
-            <a:r>
-              <a:rPr lang="en-US" altLang="ko-KR" sz="1800"/>
-              <a:t>the time it takes to send a minimal (0 byte) message from point A to point B.</a:t>
+              <a:rPr lang="en-US" altLang="ko-KR" sz="2400"/>
+              <a:t>Inter-task communication virtually always implies overhead.</a:t>
             </a:r>
           </a:p>
           <a:p>
             <a:pPr lvl="1"/>
             <a:r>
-              <a:rPr lang="en-US" altLang="ko-KR" sz="2000"/>
-              <a:t>Bandwidth</a:t>
-            </a:r>
-          </a:p>
-          <a:p>
-            <a:pPr lvl="2"/>
-            <a:r>
-              <a:rPr lang="en-US" altLang="ko-KR" sz="1800"/>
-              <a:t>the amount of data that can be communicated per unit of time. </a:t>
-            </a:r>
-          </a:p>
-          <a:p>
-            <a:pPr lvl="1"/>
-            <a:r>
-              <a:rPr lang="en-US" altLang="ko-KR" sz="2000"/>
-              <a:t>Sending many small messages can cause latency to dominate communication overheads. </a:t>
-            </a:r>
-          </a:p>
-          <a:p>
-            <a:pPr lvl="1"/>
-            <a:r>
-              <a:rPr lang="en-US" altLang="ko-KR" sz="2000"/>
-              <a:t>Often it is more efficient to package small messages into a larger message.</a:t>
-            </a:r>
-            <a:endParaRPr lang="ko-KR" altLang="en-US" sz="2000"/>
+              <a:rPr lang="en-US" altLang="ko-KR" sz="2400"/>
+              <a:t>Communications frequently require some type of synchronization between tasks, which can result in tasks spending time ‘waiting’ instead of doing work.</a:t>
+            </a:r>
           </a:p>
         </p:txBody>
       </p:sp>
@@ -13280,10 +13370,10 @@
       </p:grpSpPr>
       <p:sp>
         <p:nvSpPr>
-          <p:cNvPr id="48129" name="제목 1">
+          <p:cNvPr id="47105" name="제목 1">
             <a:extLst>
               <a:ext uri="{FF2B5EF4-FFF2-40B4-BE49-F238E27FC236}">
-                <a16:creationId xmlns:a16="http://schemas.microsoft.com/office/drawing/2014/main" id="{1F3C3251-A045-2479-B2F5-B8C828E33F1A}"/>
+                <a16:creationId xmlns:a16="http://schemas.microsoft.com/office/drawing/2014/main" id="{F21D807F-78B5-794D-6E96-80106A933B6E}"/>
               </a:ext>
             </a:extLst>
           </p:cNvPr>
@@ -13309,10 +13399,10 @@
       </p:sp>
       <p:sp>
         <p:nvSpPr>
-          <p:cNvPr id="48130" name="내용 개체 틀 2">
+          <p:cNvPr id="47106" name="내용 개체 틀 2">
             <a:extLst>
               <a:ext uri="{FF2B5EF4-FFF2-40B4-BE49-F238E27FC236}">
-                <a16:creationId xmlns:a16="http://schemas.microsoft.com/office/drawing/2014/main" id="{D600EE69-7122-283F-1F79-E863CD7CD925}"/>
+                <a16:creationId xmlns:a16="http://schemas.microsoft.com/office/drawing/2014/main" id="{E9BDB214-7A87-511B-DF64-95A9367EEDE6}"/>
               </a:ext>
             </a:extLst>
           </p:cNvPr>
@@ -13330,109 +13420,54 @@
           <a:p>
             <a:r>
               <a:rPr lang="en-US" altLang="ko-KR" sz="2800"/>
-              <a:t>synchronous vs asynchronous</a:t>
+              <a:t>Latency vs Bandwidth</a:t>
             </a:r>
           </a:p>
           <a:p>
             <a:pPr lvl="1"/>
             <a:r>
-              <a:rPr lang="en-US" altLang="ko-KR" sz="2400"/>
-              <a:t>Synchronous : require some type of ‘handshaking’ between tasks that share data</a:t>
+              <a:rPr lang="en-US" altLang="ko-KR" sz="2000"/>
+              <a:t>Latency</a:t>
+            </a:r>
+          </a:p>
+          <a:p>
+            <a:pPr lvl="2"/>
+            <a:r>
+              <a:rPr lang="en-US" altLang="ko-KR" sz="1800"/>
+              <a:t>the time it takes to send a minimal (0 byte) message from point A to point B.</a:t>
             </a:r>
           </a:p>
           <a:p>
             <a:pPr lvl="1"/>
             <a:r>
-              <a:rPr lang="en-US" altLang="ko-KR" sz="2400"/>
-              <a:t>Asynchronous : transfer data independently from one another.</a:t>
-            </a:r>
-          </a:p>
-          <a:p>
-            <a:endParaRPr lang="en-US" altLang="ko-KR" sz="2800"/>
-          </a:p>
-          <a:p>
-            <a:r>
-              <a:rPr lang="en-US" altLang="ko-KR" sz="2800"/>
-              <a:t>Scope of communication</a:t>
+              <a:rPr lang="en-US" altLang="ko-KR" sz="2000"/>
+              <a:t>Bandwidth</a:t>
+            </a:r>
+          </a:p>
+          <a:p>
+            <a:pPr lvl="2"/>
+            <a:r>
+              <a:rPr lang="en-US" altLang="ko-KR" sz="1800"/>
+              <a:t>the amount of data that can be communicated per unit of time. </a:t>
             </a:r>
           </a:p>
           <a:p>
             <a:pPr lvl="1"/>
             <a:r>
-              <a:rPr lang="en-US" altLang="ko-KR" sz="2400"/>
-              <a:t>Point-to-point</a:t>
+              <a:rPr lang="en-US" altLang="ko-KR" sz="2000"/>
+              <a:t>Sending many small messages can cause latency to dominate communication overheads. </a:t>
             </a:r>
           </a:p>
           <a:p>
             <a:pPr lvl="1"/>
             <a:r>
-              <a:rPr lang="en-US" altLang="ko-KR" sz="2400"/>
-              <a:t>collective</a:t>
+              <a:rPr lang="en-US" altLang="ko-KR" sz="2000"/>
+              <a:t>Often it is more efficient to package small messages into a larger message.</a:t>
             </a:r>
             <a:endParaRPr lang="ko-KR" altLang="en-US" sz="2000"/>
           </a:p>
         </p:txBody>
       </p:sp>
-      <p:pic>
-        <p:nvPicPr>
-          <p:cNvPr id="48131" name="Picture 2" descr="Collective communications examples">
-            <a:extLst>
-              <a:ext uri="{FF2B5EF4-FFF2-40B4-BE49-F238E27FC236}">
-                <a16:creationId xmlns:a16="http://schemas.microsoft.com/office/drawing/2014/main" id="{6B49EBD7-DAC0-76F9-E26C-EB8BE0FFF2D0}"/>
-              </a:ext>
-            </a:extLst>
-          </p:cNvPr>
-          <p:cNvPicPr>
-            <a:picLocks noChangeAspect="1" noChangeArrowheads="1"/>
-          </p:cNvPicPr>
-          <p:nvPr/>
-        </p:nvPicPr>
-        <p:blipFill>
-          <a:blip r:embed="rId2">
-            <a:extLst>
-              <a:ext uri="{28A0092B-C50C-407E-A947-70E740481C1C}">
-                <a14:useLocalDpi xmlns:a14="http://schemas.microsoft.com/office/drawing/2010/main" val="0"/>
-              </a:ext>
-            </a:extLst>
-          </a:blip>
-          <a:srcRect/>
-          <a:stretch>
-            <a:fillRect/>
-          </a:stretch>
-        </p:blipFill>
-        <p:spPr bwMode="auto">
-          <a:xfrm>
-            <a:off x="5292725" y="4149725"/>
-            <a:ext cx="3089275" cy="2447925"/>
-          </a:xfrm>
-          <a:prstGeom prst="rect">
-            <a:avLst/>
-          </a:prstGeom>
-          <a:noFill/>
-          <a:ln>
-            <a:noFill/>
-          </a:ln>
-          <a:extLst>
-            <a:ext uri="{909E8E84-426E-40DD-AFC4-6F175D3DCCD1}">
-              <a14:hiddenFill xmlns:a14="http://schemas.microsoft.com/office/drawing/2010/main">
-                <a:solidFill>
-                  <a:srgbClr val="FFFFFF"/>
-                </a:solidFill>
-              </a14:hiddenFill>
-            </a:ext>
-            <a:ext uri="{91240B29-F687-4F45-9708-019B960494DF}">
-              <a14:hiddenLine xmlns:a14="http://schemas.microsoft.com/office/drawing/2010/main" w="9525">
-                <a:solidFill>
-                  <a:srgbClr val="000000"/>
-                </a:solidFill>
-                <a:miter lim="800000"/>
-                <a:headEnd/>
-                <a:tailEnd/>
-              </a14:hiddenLine>
-            </a:ext>
-          </a:extLst>
-        </p:spPr>
-      </p:pic>
     </p:spTree>
   </p:cSld>
   <p:clrMapOvr>
@@ -13460,10 +13495,10 @@
       </p:grpSpPr>
       <p:sp>
         <p:nvSpPr>
-          <p:cNvPr id="49153" name="제목 1">
+          <p:cNvPr id="48129" name="제목 1">
             <a:extLst>
               <a:ext uri="{FF2B5EF4-FFF2-40B4-BE49-F238E27FC236}">
-                <a16:creationId xmlns:a16="http://schemas.microsoft.com/office/drawing/2014/main" id="{50ADF28B-A0CE-66FC-C1ED-42488ADF571A}"/>
+                <a16:creationId xmlns:a16="http://schemas.microsoft.com/office/drawing/2014/main" id="{1F3C3251-A045-2479-B2F5-B8C828E33F1A}"/>
               </a:ext>
             </a:extLst>
           </p:cNvPr>
@@ -13480,19 +13515,19 @@
           <a:lstStyle/>
           <a:p>
             <a:r>
-              <a:rPr lang="en-US" altLang="ko-KR" sz="4000" b="1" u="sng"/>
-              <a:t>MPI : Message Passing Library</a:t>
-            </a:r>
-            <a:endParaRPr lang="ko-KR" altLang="en-US" sz="4000" b="1" u="sng"/>
+              <a:rPr lang="en-US" altLang="ko-KR" sz="3200" b="1" u="sng"/>
+              <a:t>Factors to consider for communcation</a:t>
+            </a:r>
+            <a:endParaRPr lang="ko-KR" altLang="en-US" sz="3200" b="1" u="sng"/>
           </a:p>
         </p:txBody>
       </p:sp>
       <p:sp>
         <p:nvSpPr>
-          <p:cNvPr id="49154" name="내용 개체 틀 2">
+          <p:cNvPr id="48130" name="내용 개체 틀 2">
             <a:extLst>
               <a:ext uri="{FF2B5EF4-FFF2-40B4-BE49-F238E27FC236}">
-                <a16:creationId xmlns:a16="http://schemas.microsoft.com/office/drawing/2014/main" id="{F1B74929-7375-F7D2-370D-A6073917AD96}"/>
+                <a16:creationId xmlns:a16="http://schemas.microsoft.com/office/drawing/2014/main" id="{D600EE69-7122-283F-1F79-E863CD7CD925}"/>
               </a:ext>
             </a:extLst>
           </p:cNvPr>
@@ -13510,54 +13545,109 @@
           <a:p>
             <a:r>
               <a:rPr lang="en-US" altLang="ko-KR" sz="2800"/>
-              <a:t>MPI : portable specification</a:t>
+              <a:t>synchronous vs asynchronous</a:t>
             </a:r>
           </a:p>
           <a:p>
             <a:pPr lvl="1"/>
             <a:r>
-              <a:rPr lang="en-US" altLang="ko-KR" sz="2000"/>
-              <a:t>Not a language or compiler specification</a:t>
+              <a:rPr lang="en-US" altLang="ko-KR" sz="2400"/>
+              <a:t>Synchronous : require some type of ‘handshaking’ between tasks that share data</a:t>
             </a:r>
           </a:p>
           <a:p>
             <a:pPr lvl="1"/>
             <a:r>
-              <a:rPr lang="en-US" altLang="ko-KR" sz="2000"/>
-              <a:t>Not a specific implementation or product</a:t>
+              <a:rPr lang="en-US" altLang="ko-KR" sz="2400"/>
+              <a:t>Asynchronous : transfer data independently from one another.</a:t>
+            </a:r>
+          </a:p>
+          <a:p>
+            <a:endParaRPr lang="en-US" altLang="ko-KR" sz="2800"/>
+          </a:p>
+          <a:p>
+            <a:r>
+              <a:rPr lang="en-US" altLang="ko-KR" sz="2800"/>
+              <a:t>Scope of communication</a:t>
             </a:r>
           </a:p>
           <a:p>
             <a:pPr lvl="1"/>
             <a:r>
-              <a:rPr lang="nn-NO" altLang="ko-KR" sz="2000"/>
-              <a:t>SPMD model (same program, multiple data)</a:t>
-            </a:r>
-            <a:endParaRPr lang="en-US" altLang="ko-KR" sz="2000"/>
-          </a:p>
-          <a:p>
-            <a:r>
-              <a:rPr lang="en-US" altLang="ko-KR" sz="2800"/>
-              <a:t>For parallel computers, clusters, and heterogeneous networks, multicores</a:t>
-            </a:r>
-          </a:p>
-          <a:p>
-            <a:r>
-              <a:rPr lang="en-US" altLang="ko-KR" sz="2800"/>
-              <a:t>Multiple communication modes allow precise buffer management</a:t>
-            </a:r>
-          </a:p>
-          <a:p>
-            <a:r>
-              <a:rPr lang="en-US" altLang="ko-KR" sz="2800"/>
-              <a:t>Extensive collective operations for scalable global communication</a:t>
-            </a:r>
-          </a:p>
-          <a:p>
-            <a:endParaRPr lang="ko-KR" altLang="en-US" sz="2800"/>
+              <a:rPr lang="en-US" altLang="ko-KR" sz="2400"/>
+              <a:t>Point-to-point</a:t>
+            </a:r>
+          </a:p>
+          <a:p>
+            <a:pPr lvl="1"/>
+            <a:r>
+              <a:rPr lang="en-US" altLang="ko-KR" sz="2400"/>
+              <a:t>collective</a:t>
+            </a:r>
+            <a:endParaRPr lang="ko-KR" altLang="en-US" sz="2000"/>
           </a:p>
         </p:txBody>
       </p:sp>
+      <p:pic>
+        <p:nvPicPr>
+          <p:cNvPr id="48131" name="Picture 2" descr="Collective communications examples">
+            <a:extLst>
+              <a:ext uri="{FF2B5EF4-FFF2-40B4-BE49-F238E27FC236}">
+                <a16:creationId xmlns:a16="http://schemas.microsoft.com/office/drawing/2014/main" id="{6B49EBD7-DAC0-76F9-E26C-EB8BE0FFF2D0}"/>
+              </a:ext>
+            </a:extLst>
+          </p:cNvPr>
+          <p:cNvPicPr>
+            <a:picLocks noChangeAspect="1" noChangeArrowheads="1"/>
+          </p:cNvPicPr>
+          <p:nvPr/>
+        </p:nvPicPr>
+        <p:blipFill>
+          <a:blip r:embed="rId2">
+            <a:extLst>
+              <a:ext uri="{28A0092B-C50C-407E-A947-70E740481C1C}">
+                <a14:useLocalDpi xmlns:a14="http://schemas.microsoft.com/office/drawing/2010/main" val="0"/>
+              </a:ext>
+            </a:extLst>
+          </a:blip>
+          <a:srcRect/>
+          <a:stretch>
+            <a:fillRect/>
+          </a:stretch>
+        </p:blipFill>
+        <p:spPr bwMode="auto">
+          <a:xfrm>
+            <a:off x="5292725" y="4149725"/>
+            <a:ext cx="3089275" cy="2447925"/>
+          </a:xfrm>
+          <a:prstGeom prst="rect">
+            <a:avLst/>
+          </a:prstGeom>
+          <a:noFill/>
+          <a:ln>
+            <a:noFill/>
+          </a:ln>
+          <a:extLst>
+            <a:ext uri="{909E8E84-426E-40DD-AFC4-6F175D3DCCD1}">
+              <a14:hiddenFill xmlns:a14="http://schemas.microsoft.com/office/drawing/2010/main">
+                <a:solidFill>
+                  <a:srgbClr val="FFFFFF"/>
+                </a:solidFill>
+              </a14:hiddenFill>
+            </a:ext>
+            <a:ext uri="{91240B29-F687-4F45-9708-019B960494DF}">
+              <a14:hiddenLine xmlns:a14="http://schemas.microsoft.com/office/drawing/2010/main" w="9525">
+                <a:solidFill>
+                  <a:srgbClr val="000000"/>
+                </a:solidFill>
+                <a:miter lim="800000"/>
+                <a:headEnd/>
+                <a:tailEnd/>
+              </a14:hiddenLine>
+            </a:ext>
+          </a:extLst>
+        </p:spPr>
+      </p:pic>
     </p:spTree>
   </p:cSld>
   <p:clrMapOvr>
@@ -13585,10 +13675,10 @@
       </p:grpSpPr>
       <p:sp>
         <p:nvSpPr>
-          <p:cNvPr id="50177" name="제목 1">
+          <p:cNvPr id="49153" name="제목 1">
             <a:extLst>
               <a:ext uri="{FF2B5EF4-FFF2-40B4-BE49-F238E27FC236}">
-                <a16:creationId xmlns:a16="http://schemas.microsoft.com/office/drawing/2014/main" id="{3FDD186D-599F-EEEE-B9A7-44CF72D9DE85}"/>
+                <a16:creationId xmlns:a16="http://schemas.microsoft.com/office/drawing/2014/main" id="{50ADF28B-A0CE-66FC-C1ED-42488ADF571A}"/>
               </a:ext>
             </a:extLst>
           </p:cNvPr>
@@ -13605,19 +13695,19 @@
           <a:lstStyle/>
           <a:p>
             <a:r>
-              <a:rPr lang="en-US" altLang="ko-KR" b="1" u="sng"/>
-              <a:t>Point-to-Point</a:t>
-            </a:r>
-            <a:endParaRPr lang="ko-KR" altLang="en-US" b="1" u="sng"/>
+              <a:rPr lang="en-US" altLang="ko-KR" sz="4000" b="1" u="sng"/>
+              <a:t>MPI : Message Passing Library</a:t>
+            </a:r>
+            <a:endParaRPr lang="ko-KR" altLang="en-US" sz="4000" b="1" u="sng"/>
           </a:p>
         </p:txBody>
       </p:sp>
       <p:sp>
         <p:nvSpPr>
-          <p:cNvPr id="50178" name="내용 개체 틀 2">
+          <p:cNvPr id="49154" name="내용 개체 틀 2">
             <a:extLst>
               <a:ext uri="{FF2B5EF4-FFF2-40B4-BE49-F238E27FC236}">
-                <a16:creationId xmlns:a16="http://schemas.microsoft.com/office/drawing/2014/main" id="{6192B157-5127-16A5-D168-8728B68ABD99}"/>
+                <a16:creationId xmlns:a16="http://schemas.microsoft.com/office/drawing/2014/main" id="{F1B74929-7375-F7D2-370D-A6073917AD96}"/>
               </a:ext>
             </a:extLst>
           </p:cNvPr>
@@ -13634,117 +13724,55 @@
           <a:lstStyle/>
           <a:p>
             <a:r>
+              <a:rPr lang="en-US" altLang="ko-KR" sz="2800"/>
+              <a:t>MPI : portable specification</a:t>
+            </a:r>
+          </a:p>
+          <a:p>
+            <a:pPr lvl="1"/>
+            <a:r>
               <a:rPr lang="en-US" altLang="ko-KR" sz="2000"/>
-              <a:t>Basic method of communication between two processors</a:t>
+              <a:t>Not a language or compiler specification</a:t>
             </a:r>
           </a:p>
           <a:p>
             <a:pPr lvl="1"/>
             <a:r>
-              <a:rPr lang="en-US" altLang="ko-KR" sz="1600"/>
-              <a:t>Originating processor "sends" message to destination processor</a:t>
+              <a:rPr lang="en-US" altLang="ko-KR" sz="2000"/>
+              <a:t>Not a specific implementation or product</a:t>
             </a:r>
           </a:p>
           <a:p>
             <a:pPr lvl="1"/>
             <a:r>
-              <a:rPr lang="en-US" altLang="ko-KR" sz="1600"/>
-              <a:t>Destination processor then "receives" the message</a:t>
-            </a:r>
-          </a:p>
-          <a:p>
+              <a:rPr lang="nn-NO" altLang="ko-KR" sz="2000"/>
+              <a:t>SPMD model (same program, multiple data)</a:t>
+            </a:r>
             <a:endParaRPr lang="en-US" altLang="ko-KR" sz="2000"/>
           </a:p>
           <a:p>
             <a:r>
-              <a:rPr lang="en-US" altLang="ko-KR" sz="2000"/>
-              <a:t>The message commonly includes</a:t>
-            </a:r>
-          </a:p>
-          <a:p>
-            <a:pPr lvl="1"/>
-            <a:r>
-              <a:rPr lang="en-US" altLang="ko-KR" sz="1600"/>
-              <a:t>Data or other information</a:t>
-            </a:r>
-          </a:p>
-          <a:p>
-            <a:pPr lvl="1"/>
-            <a:r>
-              <a:rPr lang="en-US" altLang="ko-KR" sz="1600"/>
-              <a:t>Length of the message</a:t>
-            </a:r>
-          </a:p>
-          <a:p>
-            <a:pPr lvl="1"/>
-            <a:r>
-              <a:rPr lang="en-US" altLang="ko-KR" sz="1600"/>
-              <a:t>Destination address and possibly a tag</a:t>
-            </a:r>
-            <a:endParaRPr lang="ko-KR" altLang="en-US" sz="1600"/>
+              <a:rPr lang="en-US" altLang="ko-KR" sz="2800"/>
+              <a:t>For parallel computers, clusters, and heterogeneous networks, multicores</a:t>
+            </a:r>
+          </a:p>
+          <a:p>
+            <a:r>
+              <a:rPr lang="en-US" altLang="ko-KR" sz="2800"/>
+              <a:t>Multiple communication modes allow precise buffer management</a:t>
+            </a:r>
+          </a:p>
+          <a:p>
+            <a:r>
+              <a:rPr lang="en-US" altLang="ko-KR" sz="2800"/>
+              <a:t>Extensive collective operations for scalable global communication</a:t>
+            </a:r>
+          </a:p>
+          <a:p>
+            <a:endParaRPr lang="ko-KR" altLang="en-US" sz="2800"/>
           </a:p>
         </p:txBody>
       </p:sp>
-      <p:pic>
-        <p:nvPicPr>
-          <p:cNvPr id="50179" name="Picture 2">
-            <a:extLst>
-              <a:ext uri="{FF2B5EF4-FFF2-40B4-BE49-F238E27FC236}">
-                <a16:creationId xmlns:a16="http://schemas.microsoft.com/office/drawing/2014/main" id="{68F011EE-F7B3-90BC-63BC-8CA5872FD054}"/>
-              </a:ext>
-            </a:extLst>
-          </p:cNvPr>
-          <p:cNvPicPr>
-            <a:picLocks noChangeAspect="1" noChangeArrowheads="1"/>
-          </p:cNvPicPr>
-          <p:nvPr/>
-        </p:nvPicPr>
-        <p:blipFill>
-          <a:blip r:embed="rId2">
-            <a:extLst>
-              <a:ext uri="{28A0092B-C50C-407E-A947-70E740481C1C}">
-                <a14:useLocalDpi xmlns:a14="http://schemas.microsoft.com/office/drawing/2010/main" val="0"/>
-              </a:ext>
-            </a:extLst>
-          </a:blip>
-          <a:srcRect/>
-          <a:stretch>
-            <a:fillRect/>
-          </a:stretch>
-        </p:blipFill>
-        <p:spPr bwMode="auto">
-          <a:xfrm>
-            <a:off x="5572125" y="2708275"/>
-            <a:ext cx="3319463" cy="1368425"/>
-          </a:xfrm>
-          <a:prstGeom prst="rect">
-            <a:avLst/>
-          </a:prstGeom>
-          <a:noFill/>
-          <a:ln>
-            <a:noFill/>
-          </a:ln>
-          <a:extLst>
-            <a:ext uri="{909E8E84-426E-40DD-AFC4-6F175D3DCCD1}">
-              <a14:hiddenFill xmlns:a14="http://schemas.microsoft.com/office/drawing/2010/main">
-                <a:solidFill>
-                  <a:srgbClr val="FFFFFF"/>
-                </a:solidFill>
-              </a14:hiddenFill>
-            </a:ext>
-            <a:ext uri="{91240B29-F687-4F45-9708-019B960494DF}">
-              <a14:hiddenLine xmlns:a14="http://schemas.microsoft.com/office/drawing/2010/main" w="9525">
-                <a:solidFill>
-                  <a:srgbClr val="000000"/>
-                </a:solidFill>
-                <a:miter lim="800000"/>
-                <a:headEnd/>
-                <a:tailEnd/>
-              </a14:hiddenLine>
-            </a:ext>
-          </a:extLst>
-        </p:spPr>
-      </p:pic>
     </p:spTree>
   </p:cSld>
   <p:clrMapOvr>
@@ -13772,10 +13800,10 @@
       </p:grpSpPr>
       <p:sp>
         <p:nvSpPr>
-          <p:cNvPr id="51201" name="제목 1">
+          <p:cNvPr id="50177" name="제목 1">
             <a:extLst>
               <a:ext uri="{FF2B5EF4-FFF2-40B4-BE49-F238E27FC236}">
-                <a16:creationId xmlns:a16="http://schemas.microsoft.com/office/drawing/2014/main" id="{7257064B-F115-0903-384E-B520467C3EFF}"/>
+                <a16:creationId xmlns:a16="http://schemas.microsoft.com/office/drawing/2014/main" id="{3FDD186D-599F-EEEE-B9A7-44CF72D9DE85}"/>
               </a:ext>
             </a:extLst>
           </p:cNvPr>
@@ -13792,19 +13820,19 @@
           <a:lstStyle/>
           <a:p>
             <a:r>
-              <a:rPr lang="en-US" altLang="ko-KR" sz="3200" b="1" u="sng"/>
-              <a:t>Synchronous vs. Asynchronous Messages</a:t>
-            </a:r>
-            <a:endParaRPr lang="ko-KR" altLang="en-US" sz="3200" u="sng"/>
+              <a:rPr lang="en-US" altLang="ko-KR" b="1" u="sng"/>
+              <a:t>Point-to-Point</a:t>
+            </a:r>
+            <a:endParaRPr lang="ko-KR" altLang="en-US" b="1" u="sng"/>
           </a:p>
         </p:txBody>
       </p:sp>
       <p:sp>
         <p:nvSpPr>
-          <p:cNvPr id="51202" name="내용 개체 틀 2">
+          <p:cNvPr id="50178" name="내용 개체 틀 2">
             <a:extLst>
               <a:ext uri="{FF2B5EF4-FFF2-40B4-BE49-F238E27FC236}">
-                <a16:creationId xmlns:a16="http://schemas.microsoft.com/office/drawing/2014/main" id="{324B7CC1-AE38-99AC-7352-621DDB6E8EBA}"/>
+                <a16:creationId xmlns:a16="http://schemas.microsoft.com/office/drawing/2014/main" id="{6192B157-5127-16A5-D168-8728B68ABD99}"/>
               </a:ext>
             </a:extLst>
           </p:cNvPr>
@@ -13820,16 +13848,64 @@
           <a:bodyPr/>
           <a:lstStyle/>
           <a:p>
-            <a:endParaRPr lang="ko-KR" altLang="en-US"/>
+            <a:r>
+              <a:rPr lang="en-US" altLang="ko-KR" sz="2000"/>
+              <a:t>Basic method of communication between two processors</a:t>
+            </a:r>
+          </a:p>
+          <a:p>
+            <a:pPr lvl="1"/>
+            <a:r>
+              <a:rPr lang="en-US" altLang="ko-KR" sz="1600"/>
+              <a:t>Originating processor "sends" message to destination processor</a:t>
+            </a:r>
+          </a:p>
+          <a:p>
+            <a:pPr lvl="1"/>
+            <a:r>
+              <a:rPr lang="en-US" altLang="ko-KR" sz="1600"/>
+              <a:t>Destination processor then "receives" the message</a:t>
+            </a:r>
+          </a:p>
+          <a:p>
+            <a:endParaRPr lang="en-US" altLang="ko-KR" sz="2000"/>
+          </a:p>
+          <a:p>
+            <a:r>
+              <a:rPr lang="en-US" altLang="ko-KR" sz="2000"/>
+              <a:t>The message commonly includes</a:t>
+            </a:r>
+          </a:p>
+          <a:p>
+            <a:pPr lvl="1"/>
+            <a:r>
+              <a:rPr lang="en-US" altLang="ko-KR" sz="1600"/>
+              <a:t>Data or other information</a:t>
+            </a:r>
+          </a:p>
+          <a:p>
+            <a:pPr lvl="1"/>
+            <a:r>
+              <a:rPr lang="en-US" altLang="ko-KR" sz="1600"/>
+              <a:t>Length of the message</a:t>
+            </a:r>
+          </a:p>
+          <a:p>
+            <a:pPr lvl="1"/>
+            <a:r>
+              <a:rPr lang="en-US" altLang="ko-KR" sz="1600"/>
+              <a:t>Destination address and possibly a tag</a:t>
+            </a:r>
+            <a:endParaRPr lang="ko-KR" altLang="en-US" sz="1600"/>
           </a:p>
         </p:txBody>
       </p:sp>
       <p:pic>
         <p:nvPicPr>
-          <p:cNvPr id="51203" name="Picture 2">
+          <p:cNvPr id="50179" name="Picture 2">
             <a:extLst>
               <a:ext uri="{FF2B5EF4-FFF2-40B4-BE49-F238E27FC236}">
-                <a16:creationId xmlns:a16="http://schemas.microsoft.com/office/drawing/2014/main" id="{E634FE97-0B86-431C-503D-8D08E70B9A95}"/>
+                <a16:creationId xmlns:a16="http://schemas.microsoft.com/office/drawing/2014/main" id="{68F011EE-F7B3-90BC-63BC-8CA5872FD054}"/>
               </a:ext>
             </a:extLst>
           </p:cNvPr>
@@ -13853,8 +13929,8 @@
         </p:blipFill>
         <p:spPr bwMode="auto">
           <a:xfrm>
-            <a:off x="468313" y="1341438"/>
-            <a:ext cx="8170862" cy="5313362"/>
+            <a:off x="5572125" y="2708275"/>
+            <a:ext cx="3319463" cy="1368425"/>
           </a:xfrm>
           <a:prstGeom prst="rect">
             <a:avLst/>
@@ -13911,10 +13987,10 @@
       </p:grpSpPr>
       <p:sp>
         <p:nvSpPr>
-          <p:cNvPr id="52225" name="제목 1">
+          <p:cNvPr id="51201" name="제목 1">
             <a:extLst>
               <a:ext uri="{FF2B5EF4-FFF2-40B4-BE49-F238E27FC236}">
-                <a16:creationId xmlns:a16="http://schemas.microsoft.com/office/drawing/2014/main" id="{AF94F386-DB51-2912-2654-06585FF31D5F}"/>
+                <a16:creationId xmlns:a16="http://schemas.microsoft.com/office/drawing/2014/main" id="{7257064B-F115-0903-384E-B520467C3EFF}"/>
               </a:ext>
             </a:extLst>
           </p:cNvPr>
@@ -13932,7 +14008,7 @@
           <a:p>
             <a:r>
               <a:rPr lang="en-US" altLang="ko-KR" sz="3200" b="1" u="sng"/>
-              <a:t>Blocking vs. Non-Blocking Messages</a:t>
+              <a:t>Synchronous vs. Asynchronous Messages</a:t>
             </a:r>
             <a:endParaRPr lang="ko-KR" altLang="en-US" sz="3200" u="sng"/>
           </a:p>
@@ -13940,10 +14016,10 @@
       </p:sp>
       <p:sp>
         <p:nvSpPr>
-          <p:cNvPr id="52226" name="내용 개체 틀 2">
+          <p:cNvPr id="51202" name="내용 개체 틀 2">
             <a:extLst>
               <a:ext uri="{FF2B5EF4-FFF2-40B4-BE49-F238E27FC236}">
-                <a16:creationId xmlns:a16="http://schemas.microsoft.com/office/drawing/2014/main" id="{AA776A28-B938-B45F-4BAE-764DB73A701C}"/>
+                <a16:creationId xmlns:a16="http://schemas.microsoft.com/office/drawing/2014/main" id="{324B7CC1-AE38-99AC-7352-621DDB6E8EBA}"/>
               </a:ext>
             </a:extLst>
           </p:cNvPr>
@@ -13965,10 +14041,10 @@
       </p:sp>
       <p:pic>
         <p:nvPicPr>
-          <p:cNvPr id="52227" name="Picture 2">
+          <p:cNvPr id="51203" name="Picture 2">
             <a:extLst>
               <a:ext uri="{FF2B5EF4-FFF2-40B4-BE49-F238E27FC236}">
-                <a16:creationId xmlns:a16="http://schemas.microsoft.com/office/drawing/2014/main" id="{9D9DB114-83B2-ECFF-A512-B65FBC546375}"/>
+                <a16:creationId xmlns:a16="http://schemas.microsoft.com/office/drawing/2014/main" id="{E634FE97-0B86-431C-503D-8D08E70B9A95}"/>
               </a:ext>
             </a:extLst>
           </p:cNvPr>
@@ -13985,15 +14061,15 @@
               </a:ext>
             </a:extLst>
           </a:blip>
-          <a:srcRect b="42584"/>
+          <a:srcRect/>
           <a:stretch>
             <a:fillRect/>
           </a:stretch>
         </p:blipFill>
         <p:spPr bwMode="auto">
           <a:xfrm>
-            <a:off x="61913" y="1327150"/>
-            <a:ext cx="9001125" cy="3038475"/>
+            <a:off x="468313" y="1341438"/>
+            <a:ext cx="8170862" cy="5313362"/>
           </a:xfrm>
           <a:prstGeom prst="rect">
             <a:avLst/>
@@ -14577,10 +14653,10 @@
       </p:grpSpPr>
       <p:sp>
         <p:nvSpPr>
-          <p:cNvPr id="53249" name="제목 1">
+          <p:cNvPr id="52225" name="제목 1">
             <a:extLst>
               <a:ext uri="{FF2B5EF4-FFF2-40B4-BE49-F238E27FC236}">
-                <a16:creationId xmlns:a16="http://schemas.microsoft.com/office/drawing/2014/main" id="{BA87474D-1B08-5EEC-DFF4-6C23621D9F52}"/>
+                <a16:creationId xmlns:a16="http://schemas.microsoft.com/office/drawing/2014/main" id="{AF94F386-DB51-2912-2654-06585FF31D5F}"/>
               </a:ext>
             </a:extLst>
           </p:cNvPr>
@@ -14597,19 +14673,19 @@
           <a:lstStyle/>
           <a:p>
             <a:r>
-              <a:rPr lang="en-US" altLang="ko-KR" b="1" u="sng"/>
-              <a:t>Broadcast</a:t>
-            </a:r>
-            <a:endParaRPr lang="ko-KR" altLang="en-US" u="sng"/>
+              <a:rPr lang="en-US" altLang="ko-KR" sz="3200" b="1" u="sng"/>
+              <a:t>Blocking vs. Non-Blocking Messages</a:t>
+            </a:r>
+            <a:endParaRPr lang="ko-KR" altLang="en-US" sz="3200" u="sng"/>
           </a:p>
         </p:txBody>
       </p:sp>
       <p:sp>
         <p:nvSpPr>
-          <p:cNvPr id="53250" name="내용 개체 틀 2">
+          <p:cNvPr id="52226" name="내용 개체 틀 2">
             <a:extLst>
               <a:ext uri="{FF2B5EF4-FFF2-40B4-BE49-F238E27FC236}">
-                <a16:creationId xmlns:a16="http://schemas.microsoft.com/office/drawing/2014/main" id="{C16120CA-0ADF-C494-39FB-027A1EF8828A}"/>
+                <a16:creationId xmlns:a16="http://schemas.microsoft.com/office/drawing/2014/main" id="{AA776A28-B938-B45F-4BAE-764DB73A701C}"/>
               </a:ext>
             </a:extLst>
           </p:cNvPr>
@@ -14631,10 +14707,10 @@
       </p:sp>
       <p:pic>
         <p:nvPicPr>
-          <p:cNvPr id="53251" name="Picture 2">
+          <p:cNvPr id="52227" name="Picture 2">
             <a:extLst>
               <a:ext uri="{FF2B5EF4-FFF2-40B4-BE49-F238E27FC236}">
-                <a16:creationId xmlns:a16="http://schemas.microsoft.com/office/drawing/2014/main" id="{CE08141A-4BAC-F19D-EDA7-BB49FEBAD0A2}"/>
+                <a16:creationId xmlns:a16="http://schemas.microsoft.com/office/drawing/2014/main" id="{9D9DB114-83B2-ECFF-A512-B65FBC546375}"/>
               </a:ext>
             </a:extLst>
           </p:cNvPr>
@@ -14651,15 +14727,15 @@
               </a:ext>
             </a:extLst>
           </a:blip>
-          <a:srcRect/>
+          <a:srcRect b="42584"/>
           <a:stretch>
             <a:fillRect/>
           </a:stretch>
         </p:blipFill>
         <p:spPr bwMode="auto">
           <a:xfrm>
-            <a:off x="84138" y="1431925"/>
-            <a:ext cx="8956675" cy="5168900"/>
+            <a:off x="61913" y="1327150"/>
+            <a:ext cx="9001125" cy="3038475"/>
           </a:xfrm>
           <a:prstGeom prst="rect">
             <a:avLst/>
@@ -14716,10 +14792,10 @@
       </p:grpSpPr>
       <p:sp>
         <p:nvSpPr>
-          <p:cNvPr id="54273" name="제목 1">
+          <p:cNvPr id="53249" name="제목 1">
             <a:extLst>
               <a:ext uri="{FF2B5EF4-FFF2-40B4-BE49-F238E27FC236}">
-                <a16:creationId xmlns:a16="http://schemas.microsoft.com/office/drawing/2014/main" id="{2F2DDF08-0EE3-AC58-B634-756C65494E05}"/>
+                <a16:creationId xmlns:a16="http://schemas.microsoft.com/office/drawing/2014/main" id="{BA87474D-1B08-5EEC-DFF4-6C23621D9F52}"/>
               </a:ext>
             </a:extLst>
           </p:cNvPr>
@@ -14737,7 +14813,7 @@
           <a:p>
             <a:r>
               <a:rPr lang="en-US" altLang="ko-KR" b="1" u="sng"/>
-              <a:t>Reduction</a:t>
+              <a:t>Broadcast</a:t>
             </a:r>
             <a:endParaRPr lang="ko-KR" altLang="en-US" u="sng"/>
           </a:p>
@@ -14745,10 +14821,10 @@
       </p:sp>
       <p:sp>
         <p:nvSpPr>
-          <p:cNvPr id="54274" name="내용 개체 틀 2">
+          <p:cNvPr id="53250" name="내용 개체 틀 2">
             <a:extLst>
               <a:ext uri="{FF2B5EF4-FFF2-40B4-BE49-F238E27FC236}">
-                <a16:creationId xmlns:a16="http://schemas.microsoft.com/office/drawing/2014/main" id="{9F44BEE9-34CF-03DD-4AF9-74832A669ACA}"/>
+                <a16:creationId xmlns:a16="http://schemas.microsoft.com/office/drawing/2014/main" id="{C16120CA-0ADF-C494-39FB-027A1EF8828A}"/>
               </a:ext>
             </a:extLst>
           </p:cNvPr>
@@ -14764,69 +14840,70 @@
           <a:bodyPr/>
           <a:lstStyle/>
           <a:p>
-            <a:r>
-              <a:rPr lang="en-US" altLang="ko-KR" sz="2400"/>
-              <a:t>Example: every processor starts with a value and needs to know the sum of values stored on all processors</a:t>
-            </a:r>
-          </a:p>
-          <a:p>
-            <a:r>
-              <a:rPr lang="en-US" altLang="ko-KR" sz="2400"/>
-              <a:t>A reduction combines data from all processors and returns it to a single process</a:t>
-            </a:r>
-          </a:p>
-          <a:p>
-            <a:pPr lvl="1"/>
-            <a:r>
-              <a:rPr lang="en-US" altLang="ko-KR" sz="1800" b="1">
-                <a:latin typeface="Courier New" panose="02070309020205020404" pitchFamily="49" charset="0"/>
-                <a:cs typeface="Courier New" panose="02070309020205020404" pitchFamily="49" charset="0"/>
-              </a:rPr>
-              <a:t>MPI_REDUCE</a:t>
-            </a:r>
-          </a:p>
-          <a:p>
-            <a:pPr lvl="1"/>
-            <a:r>
-              <a:rPr lang="en-US" altLang="ko-KR" sz="1800"/>
-              <a:t>Can apply any associative operation on gathered data</a:t>
-            </a:r>
-          </a:p>
-          <a:p>
-            <a:pPr lvl="2"/>
-            <a:r>
-              <a:rPr lang="en-US" altLang="ko-KR" sz="1400"/>
-              <a:t>ADD, OR, AND, MAX, MIN, etc.</a:t>
-            </a:r>
-          </a:p>
-          <a:p>
-            <a:pPr lvl="1"/>
-            <a:r>
-              <a:rPr lang="en-US" altLang="ko-KR" sz="1800"/>
-              <a:t>No processor can finish reduction before each processor has contributed a value</a:t>
-            </a:r>
-            <a:endParaRPr lang="en-US" altLang="ko-KR" sz="2400"/>
-          </a:p>
-          <a:p>
-            <a:r>
-              <a:rPr lang="en-US" altLang="ko-KR" sz="2400" b="1">
-                <a:latin typeface="Courier New" panose="02070309020205020404" pitchFamily="49" charset="0"/>
-                <a:cs typeface="Courier New" panose="02070309020205020404" pitchFamily="49" charset="0"/>
-              </a:rPr>
-              <a:t>BCAST/REDUCE</a:t>
-            </a:r>
-            <a:r>
-              <a:rPr lang="en-US" altLang="ko-KR" sz="2400" b="1"/>
-              <a:t> can reduce programming complexity and may </a:t>
-            </a:r>
-            <a:r>
-              <a:rPr lang="en-US" altLang="ko-KR" sz="2400"/>
-              <a:t>be more efficient in some programs</a:t>
-            </a:r>
-            <a:endParaRPr lang="ko-KR" altLang="en-US" sz="2400"/>
+            <a:endParaRPr lang="ko-KR" altLang="en-US"/>
           </a:p>
         </p:txBody>
       </p:sp>
+      <p:pic>
+        <p:nvPicPr>
+          <p:cNvPr id="53251" name="Picture 2">
+            <a:extLst>
+              <a:ext uri="{FF2B5EF4-FFF2-40B4-BE49-F238E27FC236}">
+                <a16:creationId xmlns:a16="http://schemas.microsoft.com/office/drawing/2014/main" id="{CE08141A-4BAC-F19D-EDA7-BB49FEBAD0A2}"/>
+              </a:ext>
+            </a:extLst>
+          </p:cNvPr>
+          <p:cNvPicPr>
+            <a:picLocks noChangeAspect="1" noChangeArrowheads="1"/>
+          </p:cNvPicPr>
+          <p:nvPr/>
+        </p:nvPicPr>
+        <p:blipFill>
+          <a:blip r:embed="rId2">
+            <a:extLst>
+              <a:ext uri="{28A0092B-C50C-407E-A947-70E740481C1C}">
+                <a14:useLocalDpi xmlns:a14="http://schemas.microsoft.com/office/drawing/2010/main" val="0"/>
+              </a:ext>
+            </a:extLst>
+          </a:blip>
+          <a:srcRect/>
+          <a:stretch>
+            <a:fillRect/>
+          </a:stretch>
+        </p:blipFill>
+        <p:spPr bwMode="auto">
+          <a:xfrm>
+            <a:off x="84138" y="1431925"/>
+            <a:ext cx="8956675" cy="5168900"/>
+          </a:xfrm>
+          <a:prstGeom prst="rect">
+            <a:avLst/>
+          </a:prstGeom>
+          <a:noFill/>
+          <a:ln>
+            <a:noFill/>
+          </a:ln>
+          <a:extLst>
+            <a:ext uri="{909E8E84-426E-40DD-AFC4-6F175D3DCCD1}">
+              <a14:hiddenFill xmlns:a14="http://schemas.microsoft.com/office/drawing/2010/main">
+                <a:solidFill>
+                  <a:srgbClr val="FFFFFF"/>
+                </a:solidFill>
+              </a14:hiddenFill>
+            </a:ext>
+            <a:ext uri="{91240B29-F687-4F45-9708-019B960494DF}">
+              <a14:hiddenLine xmlns:a14="http://schemas.microsoft.com/office/drawing/2010/main" w="9525">
+                <a:solidFill>
+                  <a:srgbClr val="000000"/>
+                </a:solidFill>
+                <a:miter lim="800000"/>
+                <a:headEnd/>
+                <a:tailEnd/>
+              </a14:hiddenLine>
+            </a:ext>
+          </a:extLst>
+        </p:spPr>
+      </p:pic>
     </p:spTree>
   </p:cSld>
   <p:clrMapOvr>
@@ -14854,10 +14931,10 @@
       </p:grpSpPr>
       <p:sp>
         <p:nvSpPr>
-          <p:cNvPr id="55297" name="제목 1">
+          <p:cNvPr id="54273" name="제목 1">
             <a:extLst>
               <a:ext uri="{FF2B5EF4-FFF2-40B4-BE49-F238E27FC236}">
-                <a16:creationId xmlns:a16="http://schemas.microsoft.com/office/drawing/2014/main" id="{65054A56-35B9-6FE0-8002-FD9529B79D9C}"/>
+                <a16:creationId xmlns:a16="http://schemas.microsoft.com/office/drawing/2014/main" id="{2F2DDF08-0EE3-AC58-B634-756C65494E05}"/>
               </a:ext>
             </a:extLst>
           </p:cNvPr>
@@ -14874,19 +14951,19 @@
           <a:lstStyle/>
           <a:p>
             <a:r>
-              <a:rPr lang="en-US" altLang="ko-KR" sz="3200" b="1" u="sng"/>
-              <a:t>Example : Parallel Numerical Integration</a:t>
-            </a:r>
-            <a:endParaRPr lang="ko-KR" altLang="en-US" sz="3200" b="1" u="sng"/>
+              <a:rPr lang="en-US" altLang="ko-KR" b="1" u="sng"/>
+              <a:t>Reduction</a:t>
+            </a:r>
+            <a:endParaRPr lang="ko-KR" altLang="en-US" u="sng"/>
           </a:p>
         </p:txBody>
       </p:sp>
       <p:sp>
         <p:nvSpPr>
-          <p:cNvPr id="55298" name="내용 개체 틀 2">
+          <p:cNvPr id="54274" name="내용 개체 틀 2">
             <a:extLst>
               <a:ext uri="{FF2B5EF4-FFF2-40B4-BE49-F238E27FC236}">
-                <a16:creationId xmlns:a16="http://schemas.microsoft.com/office/drawing/2014/main" id="{1A469467-F9B1-8BDB-B6BA-498F0EBBAD7E}"/>
+                <a16:creationId xmlns:a16="http://schemas.microsoft.com/office/drawing/2014/main" id="{9F44BEE9-34CF-03DD-4AF9-74832A669ACA}"/>
               </a:ext>
             </a:extLst>
           </p:cNvPr>
@@ -14902,70 +14979,69 @@
           <a:bodyPr/>
           <a:lstStyle/>
           <a:p>
-            <a:endParaRPr lang="ko-KR" altLang="en-US"/>
+            <a:r>
+              <a:rPr lang="en-US" altLang="ko-KR" sz="2400"/>
+              <a:t>Example: every processor starts with a value and needs to know the sum of values stored on all processors</a:t>
+            </a:r>
+          </a:p>
+          <a:p>
+            <a:r>
+              <a:rPr lang="en-US" altLang="ko-KR" sz="2400"/>
+              <a:t>A reduction combines data from all processors and returns it to a single process</a:t>
+            </a:r>
+          </a:p>
+          <a:p>
+            <a:pPr lvl="1"/>
+            <a:r>
+              <a:rPr lang="en-US" altLang="ko-KR" sz="1800" b="1">
+                <a:latin typeface="Courier New" panose="02070309020205020404" pitchFamily="49" charset="0"/>
+                <a:cs typeface="Courier New" panose="02070309020205020404" pitchFamily="49" charset="0"/>
+              </a:rPr>
+              <a:t>MPI_REDUCE</a:t>
+            </a:r>
+          </a:p>
+          <a:p>
+            <a:pPr lvl="1"/>
+            <a:r>
+              <a:rPr lang="en-US" altLang="ko-KR" sz="1800"/>
+              <a:t>Can apply any associative operation on gathered data</a:t>
+            </a:r>
+          </a:p>
+          <a:p>
+            <a:pPr lvl="2"/>
+            <a:r>
+              <a:rPr lang="en-US" altLang="ko-KR" sz="1400"/>
+              <a:t>ADD, OR, AND, MAX, MIN, etc.</a:t>
+            </a:r>
+          </a:p>
+          <a:p>
+            <a:pPr lvl="1"/>
+            <a:r>
+              <a:rPr lang="en-US" altLang="ko-KR" sz="1800"/>
+              <a:t>No processor can finish reduction before each processor has contributed a value</a:t>
+            </a:r>
+            <a:endParaRPr lang="en-US" altLang="ko-KR" sz="2400"/>
+          </a:p>
+          <a:p>
+            <a:r>
+              <a:rPr lang="en-US" altLang="ko-KR" sz="2400" b="1">
+                <a:latin typeface="Courier New" panose="02070309020205020404" pitchFamily="49" charset="0"/>
+                <a:cs typeface="Courier New" panose="02070309020205020404" pitchFamily="49" charset="0"/>
+              </a:rPr>
+              <a:t>BCAST/REDUCE</a:t>
+            </a:r>
+            <a:r>
+              <a:rPr lang="en-US" altLang="ko-KR" sz="2400" b="1"/>
+              <a:t> can reduce programming complexity and may </a:t>
+            </a:r>
+            <a:r>
+              <a:rPr lang="en-US" altLang="ko-KR" sz="2400"/>
+              <a:t>be more efficient in some programs</a:t>
+            </a:r>
+            <a:endParaRPr lang="ko-KR" altLang="en-US" sz="2400"/>
           </a:p>
         </p:txBody>
       </p:sp>
-      <p:pic>
-        <p:nvPicPr>
-          <p:cNvPr id="55299" name="Picture 2">
-            <a:extLst>
-              <a:ext uri="{FF2B5EF4-FFF2-40B4-BE49-F238E27FC236}">
-                <a16:creationId xmlns:a16="http://schemas.microsoft.com/office/drawing/2014/main" id="{34BD975D-86E0-2715-9CAE-A4C4C922255F}"/>
-              </a:ext>
-            </a:extLst>
-          </p:cNvPr>
-          <p:cNvPicPr>
-            <a:picLocks noChangeAspect="1" noChangeArrowheads="1"/>
-          </p:cNvPicPr>
-          <p:nvPr/>
-        </p:nvPicPr>
-        <p:blipFill>
-          <a:blip r:embed="rId2">
-            <a:extLst>
-              <a:ext uri="{28A0092B-C50C-407E-A947-70E740481C1C}">
-                <a14:useLocalDpi xmlns:a14="http://schemas.microsoft.com/office/drawing/2010/main" val="0"/>
-              </a:ext>
-            </a:extLst>
-          </a:blip>
-          <a:srcRect/>
-          <a:stretch>
-            <a:fillRect/>
-          </a:stretch>
-        </p:blipFill>
-        <p:spPr bwMode="auto">
-          <a:xfrm>
-            <a:off x="107950" y="1701800"/>
-            <a:ext cx="8869363" cy="4533900"/>
-          </a:xfrm>
-          <a:prstGeom prst="rect">
-            <a:avLst/>
-          </a:prstGeom>
-          <a:noFill/>
-          <a:ln>
-            <a:noFill/>
-          </a:ln>
-          <a:extLst>
-            <a:ext uri="{909E8E84-426E-40DD-AFC4-6F175D3DCCD1}">
-              <a14:hiddenFill xmlns:a14="http://schemas.microsoft.com/office/drawing/2010/main">
-                <a:solidFill>
-                  <a:srgbClr val="FFFFFF"/>
-                </a:solidFill>
-              </a14:hiddenFill>
-            </a:ext>
-            <a:ext uri="{91240B29-F687-4F45-9708-019B960494DF}">
-              <a14:hiddenLine xmlns:a14="http://schemas.microsoft.com/office/drawing/2010/main" w="9525">
-                <a:solidFill>
-                  <a:srgbClr val="000000"/>
-                </a:solidFill>
-                <a:miter lim="800000"/>
-                <a:headEnd/>
-                <a:tailEnd/>
-              </a14:hiddenLine>
-            </a:ext>
-          </a:extLst>
-        </p:spPr>
-      </p:pic>
     </p:spTree>
   </p:cSld>
   <p:clrMapOvr>
@@ -14993,10 +15069,10 @@
       </p:grpSpPr>
       <p:sp>
         <p:nvSpPr>
-          <p:cNvPr id="56321" name="제목 1">
+          <p:cNvPr id="55297" name="제목 1">
             <a:extLst>
               <a:ext uri="{FF2B5EF4-FFF2-40B4-BE49-F238E27FC236}">
-                <a16:creationId xmlns:a16="http://schemas.microsoft.com/office/drawing/2014/main" id="{F2ECBC3A-F0EA-019A-1CEA-ACF2A8E247F3}"/>
+                <a16:creationId xmlns:a16="http://schemas.microsoft.com/office/drawing/2014/main" id="{65054A56-35B9-6FE0-8002-FD9529B79D9C}"/>
               </a:ext>
             </a:extLst>
           </p:cNvPr>
@@ -15013,19 +15089,19 @@
           <a:lstStyle/>
           <a:p>
             <a:r>
-              <a:rPr lang="en-US" altLang="ko-KR" b="1" u="sng"/>
-              <a:t>Computing the Integration (MPI)</a:t>
-            </a:r>
-            <a:endParaRPr lang="ko-KR" altLang="en-US" b="1" u="sng"/>
+              <a:rPr lang="en-US" altLang="ko-KR" sz="3200" b="1" u="sng"/>
+              <a:t>Example : Parallel Numerical Integration</a:t>
+            </a:r>
+            <a:endParaRPr lang="ko-KR" altLang="en-US" sz="3200" b="1" u="sng"/>
           </a:p>
         </p:txBody>
       </p:sp>
       <p:sp>
         <p:nvSpPr>
-          <p:cNvPr id="56322" name="내용 개체 틀 2">
+          <p:cNvPr id="55298" name="내용 개체 틀 2">
             <a:extLst>
               <a:ext uri="{FF2B5EF4-FFF2-40B4-BE49-F238E27FC236}">
-                <a16:creationId xmlns:a16="http://schemas.microsoft.com/office/drawing/2014/main" id="{47BC4FB4-AE63-8C55-F923-2AE893A0C3A9}"/>
+                <a16:creationId xmlns:a16="http://schemas.microsoft.com/office/drawing/2014/main" id="{1A469467-F9B1-8BDB-B6BA-498F0EBBAD7E}"/>
               </a:ext>
             </a:extLst>
           </p:cNvPr>
@@ -15047,10 +15123,10 @@
       </p:sp>
       <p:pic>
         <p:nvPicPr>
-          <p:cNvPr id="56323" name="Picture 2">
+          <p:cNvPr id="55299" name="Picture 2">
             <a:extLst>
               <a:ext uri="{FF2B5EF4-FFF2-40B4-BE49-F238E27FC236}">
-                <a16:creationId xmlns:a16="http://schemas.microsoft.com/office/drawing/2014/main" id="{48F1108C-B500-6C36-2D19-E6E41B0A693E}"/>
+                <a16:creationId xmlns:a16="http://schemas.microsoft.com/office/drawing/2014/main" id="{34BD975D-86E0-2715-9CAE-A4C4C922255F}"/>
               </a:ext>
             </a:extLst>
           </p:cNvPr>
@@ -15074,8 +15150,8 @@
         </p:blipFill>
         <p:spPr bwMode="auto">
           <a:xfrm>
-            <a:off x="1108075" y="1576388"/>
-            <a:ext cx="7064375" cy="5191125"/>
+            <a:off x="107950" y="1701800"/>
+            <a:ext cx="8869363" cy="4533900"/>
           </a:xfrm>
           <a:prstGeom prst="rect">
             <a:avLst/>
@@ -15132,10 +15208,10 @@
       </p:grpSpPr>
       <p:sp>
         <p:nvSpPr>
-          <p:cNvPr id="57345" name="제목 1">
+          <p:cNvPr id="56321" name="제목 1">
             <a:extLst>
               <a:ext uri="{FF2B5EF4-FFF2-40B4-BE49-F238E27FC236}">
-                <a16:creationId xmlns:a16="http://schemas.microsoft.com/office/drawing/2014/main" id="{C1ECDD80-5EC0-F090-CBAD-03FEF18008BC}"/>
+                <a16:creationId xmlns:a16="http://schemas.microsoft.com/office/drawing/2014/main" id="{F2ECBC3A-F0EA-019A-1CEA-ACF2A8E247F3}"/>
               </a:ext>
             </a:extLst>
           </p:cNvPr>
@@ -15153,7 +15229,7 @@
           <a:p>
             <a:r>
               <a:rPr lang="en-US" altLang="ko-KR" b="1" u="sng"/>
-              <a:t>Synchronization</a:t>
+              <a:t>Computing the Integration (MPI)</a:t>
             </a:r>
             <a:endParaRPr lang="ko-KR" altLang="en-US" b="1" u="sng"/>
           </a:p>
@@ -15161,10 +15237,10 @@
       </p:sp>
       <p:sp>
         <p:nvSpPr>
-          <p:cNvPr id="57346" name="내용 개체 틀 2">
+          <p:cNvPr id="56322" name="내용 개체 틀 2">
             <a:extLst>
               <a:ext uri="{FF2B5EF4-FFF2-40B4-BE49-F238E27FC236}">
-                <a16:creationId xmlns:a16="http://schemas.microsoft.com/office/drawing/2014/main" id="{F0922D29-22DC-3988-C89A-9AE1C827F3D9}"/>
+                <a16:creationId xmlns:a16="http://schemas.microsoft.com/office/drawing/2014/main" id="{47BC4FB4-AE63-8C55-F923-2AE893A0C3A9}"/>
               </a:ext>
             </a:extLst>
           </p:cNvPr>
@@ -15180,6 +15256,145 @@
           <a:bodyPr/>
           <a:lstStyle/>
           <a:p>
+            <a:endParaRPr lang="ko-KR" altLang="en-US"/>
+          </a:p>
+        </p:txBody>
+      </p:sp>
+      <p:pic>
+        <p:nvPicPr>
+          <p:cNvPr id="56323" name="Picture 2">
+            <a:extLst>
+              <a:ext uri="{FF2B5EF4-FFF2-40B4-BE49-F238E27FC236}">
+                <a16:creationId xmlns:a16="http://schemas.microsoft.com/office/drawing/2014/main" id="{48F1108C-B500-6C36-2D19-E6E41B0A693E}"/>
+              </a:ext>
+            </a:extLst>
+          </p:cNvPr>
+          <p:cNvPicPr>
+            <a:picLocks noChangeAspect="1" noChangeArrowheads="1"/>
+          </p:cNvPicPr>
+          <p:nvPr/>
+        </p:nvPicPr>
+        <p:blipFill>
+          <a:blip r:embed="rId2">
+            <a:extLst>
+              <a:ext uri="{28A0092B-C50C-407E-A947-70E740481C1C}">
+                <a14:useLocalDpi xmlns:a14="http://schemas.microsoft.com/office/drawing/2010/main" val="0"/>
+              </a:ext>
+            </a:extLst>
+          </a:blip>
+          <a:srcRect/>
+          <a:stretch>
+            <a:fillRect/>
+          </a:stretch>
+        </p:blipFill>
+        <p:spPr bwMode="auto">
+          <a:xfrm>
+            <a:off x="1108075" y="1576388"/>
+            <a:ext cx="7064375" cy="5191125"/>
+          </a:xfrm>
+          <a:prstGeom prst="rect">
+            <a:avLst/>
+          </a:prstGeom>
+          <a:noFill/>
+          <a:ln>
+            <a:noFill/>
+          </a:ln>
+          <a:extLst>
+            <a:ext uri="{909E8E84-426E-40DD-AFC4-6F175D3DCCD1}">
+              <a14:hiddenFill xmlns:a14="http://schemas.microsoft.com/office/drawing/2010/main">
+                <a:solidFill>
+                  <a:srgbClr val="FFFFFF"/>
+                </a:solidFill>
+              </a14:hiddenFill>
+            </a:ext>
+            <a:ext uri="{91240B29-F687-4F45-9708-019B960494DF}">
+              <a14:hiddenLine xmlns:a14="http://schemas.microsoft.com/office/drawing/2010/main" w="9525">
+                <a:solidFill>
+                  <a:srgbClr val="000000"/>
+                </a:solidFill>
+                <a:miter lim="800000"/>
+                <a:headEnd/>
+                <a:tailEnd/>
+              </a14:hiddenLine>
+            </a:ext>
+          </a:extLst>
+        </p:spPr>
+      </p:pic>
+    </p:spTree>
+  </p:cSld>
+  <p:clrMapOvr>
+    <a:masterClrMapping/>
+  </p:clrMapOvr>
+</p:sld>
+</file>
+
+<file path=ppt/slides/slide45.xml><?xml version="1.0" encoding="utf-8"?>
+<p:sld xmlns:a="http://schemas.openxmlformats.org/drawingml/2006/main" xmlns:r="http://schemas.openxmlformats.org/officeDocument/2006/relationships" xmlns:p="http://schemas.openxmlformats.org/presentationml/2006/main">
+  <p:cSld>
+    <p:spTree>
+      <p:nvGrpSpPr>
+        <p:cNvPr id="1" name=""/>
+        <p:cNvGrpSpPr/>
+        <p:nvPr/>
+      </p:nvGrpSpPr>
+      <p:grpSpPr>
+        <a:xfrm>
+          <a:off x="0" y="0"/>
+          <a:ext cx="0" cy="0"/>
+          <a:chOff x="0" y="0"/>
+          <a:chExt cx="0" cy="0"/>
+        </a:xfrm>
+      </p:grpSpPr>
+      <p:sp>
+        <p:nvSpPr>
+          <p:cNvPr id="57345" name="제목 1">
+            <a:extLst>
+              <a:ext uri="{FF2B5EF4-FFF2-40B4-BE49-F238E27FC236}">
+                <a16:creationId xmlns:a16="http://schemas.microsoft.com/office/drawing/2014/main" id="{C1ECDD80-5EC0-F090-CBAD-03FEF18008BC}"/>
+              </a:ext>
+            </a:extLst>
+          </p:cNvPr>
+          <p:cNvSpPr>
+            <a:spLocks noGrp="1" noChangeArrowheads="1"/>
+          </p:cNvSpPr>
+          <p:nvPr>
+            <p:ph type="title"/>
+          </p:nvPr>
+        </p:nvSpPr>
+        <p:spPr/>
+        <p:txBody>
+          <a:bodyPr/>
+          <a:lstStyle/>
+          <a:p>
+            <a:r>
+              <a:rPr lang="en-US" altLang="ko-KR" b="1" u="sng"/>
+              <a:t>Synchronization</a:t>
+            </a:r>
+            <a:endParaRPr lang="ko-KR" altLang="en-US" b="1" u="sng"/>
+          </a:p>
+        </p:txBody>
+      </p:sp>
+      <p:sp>
+        <p:nvSpPr>
+          <p:cNvPr id="57346" name="내용 개체 틀 2">
+            <a:extLst>
+              <a:ext uri="{FF2B5EF4-FFF2-40B4-BE49-F238E27FC236}">
+                <a16:creationId xmlns:a16="http://schemas.microsoft.com/office/drawing/2014/main" id="{F0922D29-22DC-3988-C89A-9AE1C827F3D9}"/>
+              </a:ext>
+            </a:extLst>
+          </p:cNvPr>
+          <p:cNvSpPr>
+            <a:spLocks noGrp="1" noChangeArrowheads="1"/>
+          </p:cNvSpPr>
+          <p:nvPr>
+            <p:ph idx="1"/>
+          </p:nvPr>
+        </p:nvSpPr>
+        <p:spPr/>
+        <p:txBody>
+          <a:bodyPr/>
+          <a:lstStyle/>
+          <a:p>
             <a:r>
               <a:rPr lang="en-US" altLang="ko-KR" sz="2400"/>
               <a:t>Coodination of simultaneous events (threads / processes) in order to obtain correct runtime order and avoid unexpected condition</a:t>
@@ -15242,7 +15457,7 @@
 </p:sld>
 </file>
 
-<file path=ppt/slides/slide45.xml><?xml version="1.0" encoding="utf-8"?>
+<file path=ppt/slides/slide46.xml><?xml version="1.0" encoding="utf-8"?>
 <p:sld xmlns:a="http://schemas.openxmlformats.org/drawingml/2006/main" xmlns:r="http://schemas.openxmlformats.org/officeDocument/2006/relationships" xmlns:p="http://schemas.openxmlformats.org/presentationml/2006/main">
   <p:cSld>
     <p:spTree>
@@ -25486,7 +25701,7 @@
 </p:sld>
 </file>
 
-<file path=ppt/slides/slide46.xml><?xml version="1.0" encoding="utf-8"?>
+<file path=ppt/slides/slide47.xml><?xml version="1.0" encoding="utf-8"?>
 <p:sld xmlns:a="http://schemas.openxmlformats.org/drawingml/2006/main" xmlns:r="http://schemas.openxmlformats.org/officeDocument/2006/relationships" xmlns:p="http://schemas.openxmlformats.org/presentationml/2006/main">
   <p:cSld>
     <p:spTree>
@@ -25595,127 +25810,6 @@
           <a:xfrm>
             <a:off x="468313" y="1574800"/>
             <a:ext cx="8205787" cy="4878388"/>
-          </a:xfrm>
-          <a:prstGeom prst="rect">
-            <a:avLst/>
-          </a:prstGeom>
-          <a:noFill/>
-          <a:ln>
-            <a:noFill/>
-          </a:ln>
-          <a:extLst>
-            <a:ext uri="{909E8E84-426E-40DD-AFC4-6F175D3DCCD1}">
-              <a14:hiddenFill xmlns:a14="http://schemas.microsoft.com/office/drawing/2010/main">
-                <a:solidFill>
-                  <a:srgbClr val="FFFFFF"/>
-                </a:solidFill>
-              </a14:hiddenFill>
-            </a:ext>
-            <a:ext uri="{91240B29-F687-4F45-9708-019B960494DF}">
-              <a14:hiddenLine xmlns:a14="http://schemas.microsoft.com/office/drawing/2010/main" w="9525">
-                <a:solidFill>
-                  <a:srgbClr val="000000"/>
-                </a:solidFill>
-                <a:miter lim="800000"/>
-                <a:headEnd/>
-                <a:tailEnd/>
-              </a14:hiddenLine>
-            </a:ext>
-          </a:extLst>
-        </p:spPr>
-      </p:pic>
-    </p:spTree>
-  </p:cSld>
-  <p:clrMapOvr>
-    <a:masterClrMapping/>
-  </p:clrMapOvr>
-</p:sld>
-</file>
-
-<file path=ppt/slides/slide47.xml><?xml version="1.0" encoding="utf-8"?>
-<p:sld xmlns:a="http://schemas.openxmlformats.org/drawingml/2006/main" xmlns:r="http://schemas.openxmlformats.org/officeDocument/2006/relationships" xmlns:p="http://schemas.openxmlformats.org/presentationml/2006/main">
-  <p:cSld>
-    <p:spTree>
-      <p:nvGrpSpPr>
-        <p:cNvPr id="1" name=""/>
-        <p:cNvGrpSpPr/>
-        <p:nvPr/>
-      </p:nvGrpSpPr>
-      <p:grpSpPr>
-        <a:xfrm>
-          <a:off x="0" y="0"/>
-          <a:ext cx="0" cy="0"/>
-          <a:chOff x="0" y="0"/>
-          <a:chExt cx="0" cy="0"/>
-        </a:xfrm>
-      </p:grpSpPr>
-      <p:sp>
-        <p:nvSpPr>
-          <p:cNvPr id="60417" name="제목 1">
-            <a:extLst>
-              <a:ext uri="{FF2B5EF4-FFF2-40B4-BE49-F238E27FC236}">
-                <a16:creationId xmlns:a16="http://schemas.microsoft.com/office/drawing/2014/main" id="{C8239946-46C2-DD5C-B05D-F20C0740E77A}"/>
-              </a:ext>
-            </a:extLst>
-          </p:cNvPr>
-          <p:cNvSpPr>
-            <a:spLocks noGrp="1" noChangeArrowheads="1"/>
-          </p:cNvSpPr>
-          <p:nvPr>
-            <p:ph type="title"/>
-          </p:nvPr>
-        </p:nvSpPr>
-        <p:spPr/>
-        <p:txBody>
-          <a:bodyPr/>
-          <a:lstStyle/>
-          <a:p>
-            <a:r>
-              <a:rPr lang="en-US" altLang="ko-KR" sz="3600" b="1" u="sng"/>
-              <a:t>Locality of memory access </a:t>
-            </a:r>
-            <a:br>
-              <a:rPr lang="en-US" altLang="ko-KR" sz="3600" b="1" u="sng"/>
-            </a:br>
-            <a:r>
-              <a:rPr lang="en-US" altLang="ko-KR" sz="3600" b="1"/>
-              <a:t>(shared memory)</a:t>
-            </a:r>
-            <a:endParaRPr lang="ko-KR" altLang="en-US" sz="3600"/>
-          </a:p>
-        </p:txBody>
-      </p:sp>
-      <p:pic>
-        <p:nvPicPr>
-          <p:cNvPr id="60418" name="Picture 2">
-            <a:extLst>
-              <a:ext uri="{FF2B5EF4-FFF2-40B4-BE49-F238E27FC236}">
-                <a16:creationId xmlns:a16="http://schemas.microsoft.com/office/drawing/2014/main" id="{A97B4C7E-7946-68DE-58F6-C33B9A980CAB}"/>
-              </a:ext>
-            </a:extLst>
-          </p:cNvPr>
-          <p:cNvPicPr>
-            <a:picLocks noChangeAspect="1" noChangeArrowheads="1"/>
-          </p:cNvPicPr>
-          <p:nvPr/>
-        </p:nvPicPr>
-        <p:blipFill>
-          <a:blip r:embed="rId2">
-            <a:extLst>
-              <a:ext uri="{28A0092B-C50C-407E-A947-70E740481C1C}">
-                <a14:useLocalDpi xmlns:a14="http://schemas.microsoft.com/office/drawing/2010/main" val="0"/>
-              </a:ext>
-            </a:extLst>
-          </a:blip>
-          <a:srcRect/>
-          <a:stretch>
-            <a:fillRect/>
-          </a:stretch>
-        </p:blipFill>
-        <p:spPr bwMode="auto">
-          <a:xfrm>
-            <a:off x="684213" y="1587500"/>
-            <a:ext cx="7920037" cy="4797425"/>
           </a:xfrm>
           <a:prstGeom prst="rect">
             <a:avLst/>
@@ -25772,10 +25866,10 @@
       </p:grpSpPr>
       <p:sp>
         <p:nvSpPr>
-          <p:cNvPr id="61441" name="제목 1">
+          <p:cNvPr id="60417" name="제목 1">
             <a:extLst>
               <a:ext uri="{FF2B5EF4-FFF2-40B4-BE49-F238E27FC236}">
-                <a16:creationId xmlns:a16="http://schemas.microsoft.com/office/drawing/2014/main" id="{C0498088-5A1E-47F1-5CAC-B1472D36C201}"/>
+                <a16:creationId xmlns:a16="http://schemas.microsoft.com/office/drawing/2014/main" id="{C8239946-46C2-DD5C-B05D-F20C0740E77A}"/>
               </a:ext>
             </a:extLst>
           </p:cNvPr>
@@ -25793,112 +25887,25 @@
           <a:p>
             <a:r>
               <a:rPr lang="en-US" altLang="ko-KR" sz="3600" b="1" u="sng"/>
-              <a:t>Memory Access Latency in</a:t>
+              <a:t>Locality of memory access </a:t>
             </a:r>
             <a:br>
               <a:rPr lang="en-US" altLang="ko-KR" sz="3600" b="1" u="sng"/>
             </a:br>
             <a:r>
-              <a:rPr lang="en-US" altLang="ko-KR" sz="3600" b="1" u="sng"/>
-              <a:t>Shared Memory Architectures</a:t>
-            </a:r>
-            <a:endParaRPr lang="ko-KR" altLang="en-US" sz="3600" u="sng"/>
-          </a:p>
-        </p:txBody>
-      </p:sp>
-      <p:sp>
-        <p:nvSpPr>
-          <p:cNvPr id="61442" name="내용 개체 틀 2">
-            <a:extLst>
-              <a:ext uri="{FF2B5EF4-FFF2-40B4-BE49-F238E27FC236}">
-                <a16:creationId xmlns:a16="http://schemas.microsoft.com/office/drawing/2014/main" id="{9554494D-70C2-0A6F-797D-253AAC6182C2}"/>
-              </a:ext>
-            </a:extLst>
-          </p:cNvPr>
-          <p:cNvSpPr>
-            <a:spLocks noGrp="1" noChangeArrowheads="1"/>
-          </p:cNvSpPr>
-          <p:nvPr>
-            <p:ph idx="1"/>
-          </p:nvPr>
-        </p:nvSpPr>
-        <p:spPr/>
-        <p:txBody>
-          <a:bodyPr/>
-          <a:lstStyle/>
-          <a:p>
-            <a:r>
-              <a:rPr lang="en-US" altLang="ko-KR" sz="2400"/>
-              <a:t>Uniform Memory Access (UMA)</a:t>
-            </a:r>
-          </a:p>
-          <a:p>
-            <a:pPr lvl="1"/>
-            <a:r>
-              <a:rPr lang="en-US" altLang="ko-KR" sz="1800"/>
-              <a:t>Centrally located memory</a:t>
-            </a:r>
-          </a:p>
-          <a:p>
-            <a:pPr lvl="1"/>
-            <a:r>
-              <a:rPr lang="en-US" altLang="ko-KR" sz="1800"/>
-              <a:t>All processors are equidistant (access times)</a:t>
-            </a:r>
-          </a:p>
-          <a:p>
-            <a:endParaRPr lang="en-US" altLang="ko-KR" sz="2400"/>
-          </a:p>
-          <a:p>
-            <a:r>
-              <a:rPr lang="en-US" altLang="ko-KR" sz="2400"/>
-              <a:t>Non-Uniform Access (NUMA)</a:t>
-            </a:r>
-          </a:p>
-          <a:p>
-            <a:pPr lvl="1"/>
-            <a:r>
-              <a:rPr lang="en-US" altLang="ko-KR" sz="1800"/>
-              <a:t>Physically partitioned but accessible by all</a:t>
-            </a:r>
-          </a:p>
-          <a:p>
-            <a:pPr lvl="1"/>
-            <a:r>
-              <a:rPr lang="en-US" altLang="ko-KR" sz="1800"/>
-              <a:t>Processors have the same address space</a:t>
-            </a:r>
-          </a:p>
-          <a:p>
-            <a:pPr lvl="1"/>
-            <a:r>
-              <a:rPr lang="en-US" altLang="ko-KR" sz="1800"/>
-              <a:t>Placement of data affects performance</a:t>
-            </a:r>
-          </a:p>
-          <a:p>
-            <a:pPr lvl="1"/>
-            <a:r>
-              <a:rPr lang="en-US" altLang="ko-KR" sz="1800"/>
-              <a:t>CC-NUMA (</a:t>
-            </a:r>
-            <a:r>
-              <a:rPr lang="en-US" altLang="ko-KR" sz="1800" b="1"/>
-              <a:t>Cache-Coherent</a:t>
-            </a:r>
-            <a:r>
-              <a:rPr lang="en-US" altLang="ko-KR" sz="1800"/>
-              <a:t> NUMA)</a:t>
-            </a:r>
+              <a:rPr lang="en-US" altLang="ko-KR" sz="3600" b="1"/>
+              <a:t>(shared memory)</a:t>
+            </a:r>
+            <a:endParaRPr lang="ko-KR" altLang="en-US" sz="3600"/>
           </a:p>
         </p:txBody>
       </p:sp>
       <p:pic>
         <p:nvPicPr>
-          <p:cNvPr id="61443" name="Picture 2">
+          <p:cNvPr id="60418" name="Picture 2">
             <a:extLst>
               <a:ext uri="{FF2B5EF4-FFF2-40B4-BE49-F238E27FC236}">
-                <a16:creationId xmlns:a16="http://schemas.microsoft.com/office/drawing/2014/main" id="{0CC103FC-B9B9-E75B-2B94-24C164FB7334}"/>
+                <a16:creationId xmlns:a16="http://schemas.microsoft.com/office/drawing/2014/main" id="{A97B4C7E-7946-68DE-58F6-C33B9A980CAB}"/>
               </a:ext>
             </a:extLst>
           </p:cNvPr>
@@ -25922,68 +25929,8 @@
         </p:blipFill>
         <p:spPr bwMode="auto">
           <a:xfrm>
-            <a:off x="1042988" y="4941888"/>
-            <a:ext cx="2379662" cy="1727200"/>
-          </a:xfrm>
-          <a:prstGeom prst="rect">
-            <a:avLst/>
-          </a:prstGeom>
-          <a:noFill/>
-          <a:ln>
-            <a:noFill/>
-          </a:ln>
-          <a:extLst>
-            <a:ext uri="{909E8E84-426E-40DD-AFC4-6F175D3DCCD1}">
-              <a14:hiddenFill xmlns:a14="http://schemas.microsoft.com/office/drawing/2010/main">
-                <a:solidFill>
-                  <a:srgbClr val="FFFFFF"/>
-                </a:solidFill>
-              </a14:hiddenFill>
-            </a:ext>
-            <a:ext uri="{91240B29-F687-4F45-9708-019B960494DF}">
-              <a14:hiddenLine xmlns:a14="http://schemas.microsoft.com/office/drawing/2010/main" w="9525">
-                <a:solidFill>
-                  <a:srgbClr val="000000"/>
-                </a:solidFill>
-                <a:miter lim="800000"/>
-                <a:headEnd/>
-                <a:tailEnd/>
-              </a14:hiddenLine>
-            </a:ext>
-          </a:extLst>
-        </p:spPr>
-      </p:pic>
-      <p:pic>
-        <p:nvPicPr>
-          <p:cNvPr id="61444" name="Picture 3">
-            <a:extLst>
-              <a:ext uri="{FF2B5EF4-FFF2-40B4-BE49-F238E27FC236}">
-                <a16:creationId xmlns:a16="http://schemas.microsoft.com/office/drawing/2014/main" id="{29090A67-A125-7BE0-35E3-1FB87D0D480E}"/>
-              </a:ext>
-            </a:extLst>
-          </p:cNvPr>
-          <p:cNvPicPr>
-            <a:picLocks noChangeAspect="1" noChangeArrowheads="1"/>
-          </p:cNvPicPr>
-          <p:nvPr/>
-        </p:nvPicPr>
-        <p:blipFill>
-          <a:blip r:embed="rId3">
-            <a:extLst>
-              <a:ext uri="{28A0092B-C50C-407E-A947-70E740481C1C}">
-                <a14:useLocalDpi xmlns:a14="http://schemas.microsoft.com/office/drawing/2010/main" val="0"/>
-              </a:ext>
-            </a:extLst>
-          </a:blip>
-          <a:srcRect/>
-          <a:stretch>
-            <a:fillRect/>
-          </a:stretch>
-        </p:blipFill>
-        <p:spPr bwMode="auto">
-          <a:xfrm>
-            <a:off x="3922713" y="5084763"/>
-            <a:ext cx="3097212" cy="1563687"/>
+            <a:off x="684213" y="1587500"/>
+            <a:ext cx="7920037" cy="4797425"/>
           </a:xfrm>
           <a:prstGeom prst="rect">
             <a:avLst/>
@@ -26040,10 +25987,10 @@
       </p:grpSpPr>
       <p:sp>
         <p:nvSpPr>
-          <p:cNvPr id="68609" name="제목 1">
+          <p:cNvPr id="61441" name="제목 1">
             <a:extLst>
               <a:ext uri="{FF2B5EF4-FFF2-40B4-BE49-F238E27FC236}">
-                <a16:creationId xmlns:a16="http://schemas.microsoft.com/office/drawing/2014/main" id="{24CAEA40-D045-5725-6860-CA540E173BC5}"/>
+                <a16:creationId xmlns:a16="http://schemas.microsoft.com/office/drawing/2014/main" id="{C0498088-5A1E-47F1-5CAC-B1472D36C201}"/>
               </a:ext>
             </a:extLst>
           </p:cNvPr>
@@ -26060,19 +26007,26 @@
           <a:lstStyle/>
           <a:p>
             <a:r>
-              <a:rPr lang="en-US" altLang="ko-KR" b="1" u="sng"/>
-              <a:t>Cache Coherence</a:t>
-            </a:r>
-            <a:endParaRPr lang="ko-KR" altLang="en-US" b="1" u="sng"/>
+              <a:rPr lang="en-US" altLang="ko-KR" sz="3600" b="1" u="sng"/>
+              <a:t>Memory Access Latency in</a:t>
+            </a:r>
+            <a:br>
+              <a:rPr lang="en-US" altLang="ko-KR" sz="3600" b="1" u="sng"/>
+            </a:br>
+            <a:r>
+              <a:rPr lang="en-US" altLang="ko-KR" sz="3600" b="1" u="sng"/>
+              <a:t>Shared Memory Architectures</a:t>
+            </a:r>
+            <a:endParaRPr lang="ko-KR" altLang="en-US" sz="3600" u="sng"/>
           </a:p>
         </p:txBody>
       </p:sp>
       <p:sp>
         <p:nvSpPr>
-          <p:cNvPr id="68610" name="내용 개체 틀 2">
+          <p:cNvPr id="61442" name="내용 개체 틀 2">
             <a:extLst>
               <a:ext uri="{FF2B5EF4-FFF2-40B4-BE49-F238E27FC236}">
-                <a16:creationId xmlns:a16="http://schemas.microsoft.com/office/drawing/2014/main" id="{4C92C52A-2DC3-DA76-FB53-75353E8DFCFE}"/>
+                <a16:creationId xmlns:a16="http://schemas.microsoft.com/office/drawing/2014/main" id="{9554494D-70C2-0A6F-797D-253AAC6182C2}"/>
               </a:ext>
             </a:extLst>
           </p:cNvPr>
@@ -26083,66 +26037,197 @@
             <p:ph idx="1"/>
           </p:nvPr>
         </p:nvSpPr>
-        <p:spPr>
-          <a:xfrm>
-            <a:off x="457200" y="1600200"/>
-            <a:ext cx="8362950" cy="4525963"/>
-          </a:xfrm>
-        </p:spPr>
+        <p:spPr/>
         <p:txBody>
           <a:bodyPr/>
           <a:lstStyle/>
           <a:p>
             <a:r>
-              <a:rPr lang="en-US" altLang="ko-KR" sz="2800"/>
-              <a:t>the uniformity of shared resource data that ends up stored in multiple local caches </a:t>
-            </a:r>
-            <a:endParaRPr lang="ko-KR" altLang="en-US" sz="2800"/>
-          </a:p>
-          <a:p>
-            <a:endParaRPr lang="en-US" altLang="ko-KR" sz="2800"/>
-          </a:p>
-          <a:p>
-            <a:r>
-              <a:rPr lang="en-US" altLang="ko-KR" sz="2800"/>
-              <a:t>Problem: When a processor modifies a shared variable in local cache, different processors may have different value of the variable.</a:t>
+              <a:rPr lang="en-US" altLang="ko-KR" sz="2400"/>
+              <a:t>Uniform Memory Access (UMA)</a:t>
             </a:r>
           </a:p>
           <a:p>
             <a:pPr lvl="1"/>
             <a:r>
-              <a:rPr lang="en-US" altLang="en-US" sz="2000"/>
-              <a:t>Copies of a variable can be present in multiple caches</a:t>
+              <a:rPr lang="en-US" altLang="ko-KR" sz="1800"/>
+              <a:t>Centrally located memory</a:t>
             </a:r>
           </a:p>
           <a:p>
             <a:pPr lvl="1"/>
             <a:r>
-              <a:rPr lang="en-US" altLang="en-US" sz="2000"/>
-              <a:t>A write by one processor may not become visible to others</a:t>
+              <a:rPr lang="en-US" altLang="ko-KR" sz="1800"/>
+              <a:t>All processors are equidistant (access times)</a:t>
+            </a:r>
+          </a:p>
+          <a:p>
+            <a:endParaRPr lang="en-US" altLang="ko-KR" sz="2400"/>
+          </a:p>
+          <a:p>
+            <a:r>
+              <a:rPr lang="en-US" altLang="ko-KR" sz="2400"/>
+              <a:t>Non-Uniform Access (NUMA)</a:t>
             </a:r>
           </a:p>
           <a:p>
             <a:pPr lvl="1"/>
             <a:r>
-              <a:rPr lang="en-US" altLang="en-US" sz="2000"/>
-              <a:t>They'll keep accessing stale value in their caches</a:t>
+              <a:rPr lang="en-US" altLang="ko-KR" sz="1800"/>
+              <a:t>Physically partitioned but accessible by all</a:t>
             </a:r>
           </a:p>
           <a:p>
             <a:pPr lvl="1"/>
             <a:r>
-              <a:rPr lang="en-US" altLang="en-US" sz="2000"/>
-              <a:t>Need to take actions to ensure visibility or cache coherence</a:t>
-            </a:r>
-            <a:endParaRPr lang="en-US" altLang="ko-KR" sz="2000"/>
+              <a:rPr lang="en-US" altLang="ko-KR" sz="1800"/>
+              <a:t>Processors have the same address space</a:t>
+            </a:r>
           </a:p>
           <a:p>
             <a:pPr lvl="1"/>
-            <a:endParaRPr lang="en-US" altLang="ko-KR"/>
+            <a:r>
+              <a:rPr lang="en-US" altLang="ko-KR" sz="1800"/>
+              <a:t>Placement of data affects performance</a:t>
+            </a:r>
+          </a:p>
+          <a:p>
+            <a:pPr lvl="1"/>
+            <a:r>
+              <a:rPr lang="en-US" altLang="ko-KR" sz="1800"/>
+              <a:t>CC-NUMA (</a:t>
+            </a:r>
+            <a:r>
+              <a:rPr lang="en-US" altLang="ko-KR" sz="1800" b="1"/>
+              <a:t>Cache-Coherent</a:t>
+            </a:r>
+            <a:r>
+              <a:rPr lang="en-US" altLang="ko-KR" sz="1800"/>
+              <a:t> NUMA)</a:t>
+            </a:r>
           </a:p>
         </p:txBody>
       </p:sp>
+      <p:pic>
+        <p:nvPicPr>
+          <p:cNvPr id="61443" name="Picture 2">
+            <a:extLst>
+              <a:ext uri="{FF2B5EF4-FFF2-40B4-BE49-F238E27FC236}">
+                <a16:creationId xmlns:a16="http://schemas.microsoft.com/office/drawing/2014/main" id="{0CC103FC-B9B9-E75B-2B94-24C164FB7334}"/>
+              </a:ext>
+            </a:extLst>
+          </p:cNvPr>
+          <p:cNvPicPr>
+            <a:picLocks noChangeAspect="1" noChangeArrowheads="1"/>
+          </p:cNvPicPr>
+          <p:nvPr/>
+        </p:nvPicPr>
+        <p:blipFill>
+          <a:blip r:embed="rId2">
+            <a:extLst>
+              <a:ext uri="{28A0092B-C50C-407E-A947-70E740481C1C}">
+                <a14:useLocalDpi xmlns:a14="http://schemas.microsoft.com/office/drawing/2010/main" val="0"/>
+              </a:ext>
+            </a:extLst>
+          </a:blip>
+          <a:srcRect/>
+          <a:stretch>
+            <a:fillRect/>
+          </a:stretch>
+        </p:blipFill>
+        <p:spPr bwMode="auto">
+          <a:xfrm>
+            <a:off x="1042988" y="4941888"/>
+            <a:ext cx="2379662" cy="1727200"/>
+          </a:xfrm>
+          <a:prstGeom prst="rect">
+            <a:avLst/>
+          </a:prstGeom>
+          <a:noFill/>
+          <a:ln>
+            <a:noFill/>
+          </a:ln>
+          <a:extLst>
+            <a:ext uri="{909E8E84-426E-40DD-AFC4-6F175D3DCCD1}">
+              <a14:hiddenFill xmlns:a14="http://schemas.microsoft.com/office/drawing/2010/main">
+                <a:solidFill>
+                  <a:srgbClr val="FFFFFF"/>
+                </a:solidFill>
+              </a14:hiddenFill>
+            </a:ext>
+            <a:ext uri="{91240B29-F687-4F45-9708-019B960494DF}">
+              <a14:hiddenLine xmlns:a14="http://schemas.microsoft.com/office/drawing/2010/main" w="9525">
+                <a:solidFill>
+                  <a:srgbClr val="000000"/>
+                </a:solidFill>
+                <a:miter lim="800000"/>
+                <a:headEnd/>
+                <a:tailEnd/>
+              </a14:hiddenLine>
+            </a:ext>
+          </a:extLst>
+        </p:spPr>
+      </p:pic>
+      <p:pic>
+        <p:nvPicPr>
+          <p:cNvPr id="61444" name="Picture 3">
+            <a:extLst>
+              <a:ext uri="{FF2B5EF4-FFF2-40B4-BE49-F238E27FC236}">
+                <a16:creationId xmlns:a16="http://schemas.microsoft.com/office/drawing/2014/main" id="{29090A67-A125-7BE0-35E3-1FB87D0D480E}"/>
+              </a:ext>
+            </a:extLst>
+          </p:cNvPr>
+          <p:cNvPicPr>
+            <a:picLocks noChangeAspect="1" noChangeArrowheads="1"/>
+          </p:cNvPicPr>
+          <p:nvPr/>
+        </p:nvPicPr>
+        <p:blipFill>
+          <a:blip r:embed="rId3">
+            <a:extLst>
+              <a:ext uri="{28A0092B-C50C-407E-A947-70E740481C1C}">
+                <a14:useLocalDpi xmlns:a14="http://schemas.microsoft.com/office/drawing/2010/main" val="0"/>
+              </a:ext>
+            </a:extLst>
+          </a:blip>
+          <a:srcRect/>
+          <a:stretch>
+            <a:fillRect/>
+          </a:stretch>
+        </p:blipFill>
+        <p:spPr bwMode="auto">
+          <a:xfrm>
+            <a:off x="3922713" y="5084763"/>
+            <a:ext cx="3097212" cy="1563687"/>
+          </a:xfrm>
+          <a:prstGeom prst="rect">
+            <a:avLst/>
+          </a:prstGeom>
+          <a:noFill/>
+          <a:ln>
+            <a:noFill/>
+          </a:ln>
+          <a:extLst>
+            <a:ext uri="{909E8E84-426E-40DD-AFC4-6F175D3DCCD1}">
+              <a14:hiddenFill xmlns:a14="http://schemas.microsoft.com/office/drawing/2010/main">
+                <a:solidFill>
+                  <a:srgbClr val="FFFFFF"/>
+                </a:solidFill>
+              </a14:hiddenFill>
+            </a:ext>
+            <a:ext uri="{91240B29-F687-4F45-9708-019B960494DF}">
+              <a14:hiddenLine xmlns:a14="http://schemas.microsoft.com/office/drawing/2010/main" w="9525">
+                <a:solidFill>
+                  <a:srgbClr val="000000"/>
+                </a:solidFill>
+                <a:miter lim="800000"/>
+                <a:headEnd/>
+                <a:tailEnd/>
+              </a14:hiddenLine>
+            </a:ext>
+          </a:extLst>
+        </p:spPr>
+      </p:pic>
     </p:spTree>
   </p:cSld>
   <p:clrMapOvr>
@@ -26319,10 +26404,10 @@
       </p:grpSpPr>
       <p:sp>
         <p:nvSpPr>
-          <p:cNvPr id="69633" name="제목 1">
+          <p:cNvPr id="68609" name="제목 1">
             <a:extLst>
               <a:ext uri="{FF2B5EF4-FFF2-40B4-BE49-F238E27FC236}">
-                <a16:creationId xmlns:a16="http://schemas.microsoft.com/office/drawing/2014/main" id="{040247E4-D7F0-0A40-5B0E-678D8B3BED16}"/>
+                <a16:creationId xmlns:a16="http://schemas.microsoft.com/office/drawing/2014/main" id="{24CAEA40-D045-5725-6860-CA540E173BC5}"/>
               </a:ext>
             </a:extLst>
           </p:cNvPr>
@@ -26340,7 +26425,7 @@
           <a:p>
             <a:r>
               <a:rPr lang="en-US" altLang="ko-KR" b="1" u="sng"/>
-              <a:t>Cache Coherence </a:t>
+              <a:t>Cache Coherence</a:t>
             </a:r>
             <a:endParaRPr lang="ko-KR" altLang="en-US" b="1" u="sng"/>
           </a:p>
@@ -26348,10 +26433,10 @@
       </p:sp>
       <p:sp>
         <p:nvSpPr>
-          <p:cNvPr id="69634" name="내용 개체 틀 2">
+          <p:cNvPr id="68610" name="내용 개체 틀 2">
             <a:extLst>
               <a:ext uri="{FF2B5EF4-FFF2-40B4-BE49-F238E27FC236}">
-                <a16:creationId xmlns:a16="http://schemas.microsoft.com/office/drawing/2014/main" id="{0A6F0FCD-80F2-4123-0016-620D1B25CCA5}"/>
+                <a16:creationId xmlns:a16="http://schemas.microsoft.com/office/drawing/2014/main" id="{4C92C52A-2DC3-DA76-FB53-75353E8DFCFE}"/>
               </a:ext>
             </a:extLst>
           </p:cNvPr>
@@ -26362,54 +26447,63 @@
             <p:ph idx="1"/>
           </p:nvPr>
         </p:nvSpPr>
-        <p:spPr/>
+        <p:spPr>
+          <a:xfrm>
+            <a:off x="457200" y="1600200"/>
+            <a:ext cx="8362950" cy="4525963"/>
+          </a:xfrm>
+        </p:spPr>
         <p:txBody>
           <a:bodyPr/>
           <a:lstStyle/>
           <a:p>
             <a:r>
-              <a:rPr lang="en-US" altLang="ko-KR" b="1"/>
-              <a:t>Snooping cache coherence</a:t>
+              <a:rPr lang="en-US" altLang="ko-KR" sz="2800"/>
+              <a:t>the uniformity of shared resource data that ends up stored in multiple local caches </a:t>
+            </a:r>
+            <a:endParaRPr lang="ko-KR" altLang="en-US" sz="2800"/>
+          </a:p>
+          <a:p>
+            <a:endParaRPr lang="en-US" altLang="ko-KR" sz="2800"/>
+          </a:p>
+          <a:p>
+            <a:r>
+              <a:rPr lang="en-US" altLang="ko-KR" sz="2800"/>
+              <a:t>Problem: When a processor modifies a shared variable in local cache, different processors may have different value of the variable.</a:t>
             </a:r>
           </a:p>
           <a:p>
             <a:pPr lvl="1"/>
             <a:r>
-              <a:rPr lang="en-US" altLang="ko-KR"/>
-              <a:t>Send all requests for data to all processors</a:t>
+              <a:rPr lang="en-US" altLang="en-US" sz="2000"/>
+              <a:t>Copies of a variable can be present in multiple caches</a:t>
             </a:r>
           </a:p>
           <a:p>
             <a:pPr lvl="1"/>
             <a:r>
-              <a:rPr lang="en-US" altLang="ko-KR"/>
-              <a:t>Works well for small systems</a:t>
-            </a:r>
+              <a:rPr lang="en-US" altLang="en-US" sz="2000"/>
+              <a:t>A write by one processor may not become visible to others</a:t>
+            </a:r>
+          </a:p>
+          <a:p>
+            <a:pPr lvl="1"/>
+            <a:r>
+              <a:rPr lang="en-US" altLang="en-US" sz="2000"/>
+              <a:t>They'll keep accessing stale value in their caches</a:t>
+            </a:r>
+          </a:p>
+          <a:p>
+            <a:pPr lvl="1"/>
+            <a:r>
+              <a:rPr lang="en-US" altLang="en-US" sz="2000"/>
+              <a:t>Need to take actions to ensure visibility or cache coherence</a:t>
+            </a:r>
+            <a:endParaRPr lang="en-US" altLang="ko-KR" sz="2000"/>
           </a:p>
           <a:p>
             <a:pPr lvl="1"/>
             <a:endParaRPr lang="en-US" altLang="ko-KR"/>
-          </a:p>
-          <a:p>
-            <a:r>
-              <a:rPr lang="en-US" altLang="ko-KR" b="1"/>
-              <a:t>Directory-based cache coherence</a:t>
-            </a:r>
-          </a:p>
-          <a:p>
-            <a:pPr lvl="1"/>
-            <a:r>
-              <a:rPr lang="en-US" altLang="ko-KR"/>
-              <a:t>Keep track of what is being shared in a directory</a:t>
-            </a:r>
-          </a:p>
-          <a:p>
-            <a:pPr lvl="1"/>
-            <a:r>
-              <a:rPr lang="en-US" altLang="ko-KR"/>
-              <a:t>Send point-to-point requests to processors</a:t>
-            </a:r>
-            <a:endParaRPr lang="ko-KR" altLang="en-US"/>
           </a:p>
         </p:txBody>
       </p:sp>
@@ -26440,10 +26534,10 @@
       </p:grpSpPr>
       <p:sp>
         <p:nvSpPr>
-          <p:cNvPr id="62465" name="제목 1">
+          <p:cNvPr id="69633" name="제목 1">
             <a:extLst>
               <a:ext uri="{FF2B5EF4-FFF2-40B4-BE49-F238E27FC236}">
-                <a16:creationId xmlns:a16="http://schemas.microsoft.com/office/drawing/2014/main" id="{005C797D-A222-BCDE-00D0-DA821E7492C8}"/>
+                <a16:creationId xmlns:a16="http://schemas.microsoft.com/office/drawing/2014/main" id="{040247E4-D7F0-0A40-5B0E-678D8B3BED16}"/>
               </a:ext>
             </a:extLst>
           </p:cNvPr>
@@ -26461,7 +26555,7 @@
           <a:p>
             <a:r>
               <a:rPr lang="en-US" altLang="ko-KR" b="1" u="sng"/>
-              <a:t>Shared Memory Architecture</a:t>
+              <a:t>Cache Coherence </a:t>
             </a:r>
             <a:endParaRPr lang="ko-KR" altLang="en-US" b="1" u="sng"/>
           </a:p>
@@ -26469,10 +26563,10 @@
       </p:sp>
       <p:sp>
         <p:nvSpPr>
-          <p:cNvPr id="62466" name="내용 개체 틀 2">
+          <p:cNvPr id="69634" name="내용 개체 틀 2">
             <a:extLst>
               <a:ext uri="{FF2B5EF4-FFF2-40B4-BE49-F238E27FC236}">
-                <a16:creationId xmlns:a16="http://schemas.microsoft.com/office/drawing/2014/main" id="{0A0A75AB-5457-7E47-81E6-D115756CF4A0}"/>
+                <a16:creationId xmlns:a16="http://schemas.microsoft.com/office/drawing/2014/main" id="{0A6F0FCD-80F2-4123-0016-620D1B25CCA5}"/>
               </a:ext>
             </a:extLst>
           </p:cNvPr>
@@ -26489,60 +26583,48 @@
           <a:lstStyle/>
           <a:p>
             <a:r>
-              <a:rPr lang="en-US" altLang="ko-KR" sz="2400"/>
-              <a:t>all processors to access all memory as global address space. (UMA , NUMA)</a:t>
-            </a:r>
-          </a:p>
-          <a:p>
-            <a:r>
-              <a:rPr lang="en-US" altLang="ko-KR" sz="2400"/>
-              <a:t>Advantage</a:t>
+              <a:rPr lang="en-US" altLang="ko-KR" b="1"/>
+              <a:t>Snooping cache coherence</a:t>
             </a:r>
           </a:p>
           <a:p>
             <a:pPr lvl="1"/>
             <a:r>
-              <a:rPr lang="en-US" altLang="ko-KR" sz="1800"/>
-              <a:t>Global address space provides a user-friendly programming perspective to memory</a:t>
+              <a:rPr lang="en-US" altLang="ko-KR"/>
+              <a:t>Send all requests for data to all processors</a:t>
             </a:r>
           </a:p>
           <a:p>
             <a:pPr lvl="1"/>
             <a:r>
-              <a:rPr lang="en-US" altLang="ko-KR" sz="1800"/>
-              <a:t>Data sharing between tasks is both fast and uniform due to the proximity of memory to CPUs</a:t>
-            </a:r>
-          </a:p>
-          <a:p>
-            <a:r>
-              <a:rPr lang="en-US" altLang="ko-KR" sz="2400"/>
-              <a:t>Disadvantage</a:t>
+              <a:rPr lang="en-US" altLang="ko-KR"/>
+              <a:t>Works well for small systems</a:t>
             </a:r>
           </a:p>
           <a:p>
             <a:pPr lvl="1"/>
-            <a:r>
-              <a:rPr lang="en-US" altLang="ko-KR" sz="1800"/>
-              <a:t>Primary disadvantage is the lack of scalability between memory and CPUs</a:t>
+            <a:endParaRPr lang="en-US" altLang="ko-KR"/>
+          </a:p>
+          <a:p>
+            <a:r>
+              <a:rPr lang="en-US" altLang="ko-KR" b="1"/>
+              <a:t>Directory-based cache coherence</a:t>
             </a:r>
           </a:p>
           <a:p>
             <a:pPr lvl="1"/>
             <a:r>
-              <a:rPr lang="en-US" altLang="ko-KR" sz="1800"/>
-              <a:t>Programmer responsibility for synchronization</a:t>
+              <a:rPr lang="en-US" altLang="ko-KR"/>
+              <a:t>Keep track of what is being shared in a directory</a:t>
             </a:r>
           </a:p>
           <a:p>
             <a:pPr lvl="1"/>
             <a:r>
-              <a:rPr lang="en-US" altLang="ko-KR" sz="1800"/>
-              <a:t>Expense: it becomes increasingly difficult and expensive to design and produce shared memory machines with ever increasing numbers of processors.</a:t>
-            </a:r>
-          </a:p>
-          <a:p>
-            <a:pPr lvl="1"/>
-            <a:endParaRPr lang="ko-KR" altLang="en-US" sz="2000"/>
+              <a:rPr lang="en-US" altLang="ko-KR"/>
+              <a:t>Send point-to-point requests to processors</a:t>
+            </a:r>
+            <a:endParaRPr lang="ko-KR" altLang="en-US"/>
           </a:p>
         </p:txBody>
       </p:sp>
@@ -26573,10 +26655,10 @@
       </p:grpSpPr>
       <p:sp>
         <p:nvSpPr>
-          <p:cNvPr id="63489" name="제목 1">
+          <p:cNvPr id="62465" name="제목 1">
             <a:extLst>
               <a:ext uri="{FF2B5EF4-FFF2-40B4-BE49-F238E27FC236}">
-                <a16:creationId xmlns:a16="http://schemas.microsoft.com/office/drawing/2014/main" id="{F02FDD7A-0F32-223C-BFF0-03A221CD424B}"/>
+                <a16:creationId xmlns:a16="http://schemas.microsoft.com/office/drawing/2014/main" id="{005C797D-A222-BCDE-00D0-DA821E7492C8}"/>
               </a:ext>
             </a:extLst>
           </p:cNvPr>
@@ -26593,19 +26675,19 @@
           <a:lstStyle/>
           <a:p>
             <a:r>
-              <a:rPr lang="en-US" altLang="ko-KR" sz="4000" b="1" u="sng"/>
-              <a:t>Distributed Memory Architecture</a:t>
-            </a:r>
-            <a:endParaRPr lang="ko-KR" altLang="en-US" sz="4000" b="1" u="sng"/>
+              <a:rPr lang="en-US" altLang="ko-KR" b="1" u="sng"/>
+              <a:t>Shared Memory Architecture</a:t>
+            </a:r>
+            <a:endParaRPr lang="ko-KR" altLang="en-US" b="1" u="sng"/>
           </a:p>
         </p:txBody>
       </p:sp>
       <p:sp>
         <p:nvSpPr>
-          <p:cNvPr id="63490" name="내용 개체 틀 2">
+          <p:cNvPr id="62466" name="내용 개체 틀 2">
             <a:extLst>
               <a:ext uri="{FF2B5EF4-FFF2-40B4-BE49-F238E27FC236}">
-                <a16:creationId xmlns:a16="http://schemas.microsoft.com/office/drawing/2014/main" id="{0AE12259-2364-34FB-F312-AFC2F6182ABD}"/>
+                <a16:creationId xmlns:a16="http://schemas.microsoft.com/office/drawing/2014/main" id="{0A0A75AB-5457-7E47-81E6-D115756CF4A0}"/>
               </a:ext>
             </a:extLst>
           </p:cNvPr>
@@ -26622,146 +26704,63 @@
           <a:lstStyle/>
           <a:p>
             <a:r>
-              <a:rPr lang="en-US" altLang="ko-KR" sz="2800"/>
-              <a:t>Characteristics</a:t>
+              <a:rPr lang="en-US" altLang="ko-KR" sz="2400"/>
+              <a:t>all processors to access all memory as global address space. (UMA , NUMA)</a:t>
+            </a:r>
+          </a:p>
+          <a:p>
+            <a:r>
+              <a:rPr lang="en-US" altLang="ko-KR" sz="2400"/>
+              <a:t>Advantage</a:t>
             </a:r>
           </a:p>
           <a:p>
             <a:pPr lvl="1"/>
             <a:r>
-              <a:rPr lang="en-US" altLang="ko-KR" sz="2000"/>
-              <a:t>Only private(local) memory</a:t>
+              <a:rPr lang="en-US" altLang="ko-KR" sz="1800"/>
+              <a:t>Global address space provides a user-friendly programming perspective to memory</a:t>
             </a:r>
           </a:p>
           <a:p>
             <a:pPr lvl="1"/>
             <a:r>
-              <a:rPr lang="en-US" altLang="ko-KR" sz="2000"/>
-              <a:t>Independent</a:t>
+              <a:rPr lang="en-US" altLang="ko-KR" sz="1800"/>
+              <a:t>Data sharing between tasks is both fast and uniform due to the proximity of memory to CPUs</a:t>
+            </a:r>
+          </a:p>
+          <a:p>
+            <a:r>
+              <a:rPr lang="en-US" altLang="ko-KR" sz="2400"/>
+              <a:t>Disadvantage</a:t>
             </a:r>
           </a:p>
           <a:p>
             <a:pPr lvl="1"/>
             <a:r>
-              <a:rPr lang="en-US" altLang="ko-KR" sz="2000"/>
-              <a:t>require a communication network to connect inter-processor memory</a:t>
-            </a:r>
-          </a:p>
-          <a:p>
-            <a:r>
-              <a:rPr lang="en-US" altLang="ko-KR" sz="2800"/>
-              <a:t>Advantages</a:t>
+              <a:rPr lang="en-US" altLang="ko-KR" sz="1800"/>
+              <a:t>Primary disadvantage is the lack of scalability between memory and CPUs</a:t>
             </a:r>
           </a:p>
           <a:p>
             <a:pPr lvl="1"/>
             <a:r>
-              <a:rPr lang="en-US" altLang="ko-KR" sz="2000"/>
-              <a:t>Scalable (processors, memory)</a:t>
+              <a:rPr lang="en-US" altLang="ko-KR" sz="1800"/>
+              <a:t>Programmer responsibility for synchronization</a:t>
             </a:r>
           </a:p>
           <a:p>
             <a:pPr lvl="1"/>
             <a:r>
-              <a:rPr lang="en-US" altLang="ko-KR" sz="2000"/>
-              <a:t>Cost effective </a:t>
-            </a:r>
-          </a:p>
-          <a:p>
-            <a:r>
-              <a:rPr lang="en-US" altLang="ko-KR" sz="2800"/>
-              <a:t>Disadvantages</a:t>
+              <a:rPr lang="en-US" altLang="ko-KR" sz="1800"/>
+              <a:t>Expense: it becomes increasingly difficult and expensive to design and produce shared memory machines with ever increasing numbers of processors.</a:t>
             </a:r>
           </a:p>
           <a:p>
             <a:pPr lvl="1"/>
-            <a:r>
-              <a:rPr lang="en-US" altLang="ko-KR" sz="2000"/>
-              <a:t>Programmer responsibility of data communication</a:t>
-            </a:r>
-          </a:p>
-          <a:p>
-            <a:pPr lvl="1"/>
-            <a:r>
-              <a:rPr lang="en-US" altLang="ko-KR" sz="2000"/>
-              <a:t>No global memory access</a:t>
-            </a:r>
-          </a:p>
-          <a:p>
-            <a:pPr lvl="1"/>
-            <a:r>
-              <a:rPr lang="en-US" altLang="ko-KR" sz="2000"/>
-              <a:t>Non-uniform memory access time</a:t>
-            </a:r>
-          </a:p>
-          <a:p>
-            <a:endParaRPr lang="en-US" altLang="ko-KR" sz="2800"/>
-          </a:p>
-          <a:p>
-            <a:endParaRPr lang="ko-KR" altLang="en-US" sz="2800"/>
+            <a:endParaRPr lang="ko-KR" altLang="en-US" sz="2000"/>
           </a:p>
         </p:txBody>
       </p:sp>
-      <p:pic>
-        <p:nvPicPr>
-          <p:cNvPr id="63491" name="Picture 2">
-            <a:extLst>
-              <a:ext uri="{FF2B5EF4-FFF2-40B4-BE49-F238E27FC236}">
-                <a16:creationId xmlns:a16="http://schemas.microsoft.com/office/drawing/2014/main" id="{43737C21-6B83-1751-68C9-10DAB81BCDF4}"/>
-              </a:ext>
-            </a:extLst>
-          </p:cNvPr>
-          <p:cNvPicPr>
-            <a:picLocks noChangeAspect="1" noChangeArrowheads="1"/>
-          </p:cNvPicPr>
-          <p:nvPr/>
-        </p:nvPicPr>
-        <p:blipFill>
-          <a:blip r:embed="rId2">
-            <a:extLst>
-              <a:ext uri="{28A0092B-C50C-407E-A947-70E740481C1C}">
-                <a14:useLocalDpi xmlns:a14="http://schemas.microsoft.com/office/drawing/2010/main" val="0"/>
-              </a:ext>
-            </a:extLst>
-          </a:blip>
-          <a:srcRect/>
-          <a:stretch>
-            <a:fillRect/>
-          </a:stretch>
-        </p:blipFill>
-        <p:spPr bwMode="auto">
-          <a:xfrm>
-            <a:off x="6084888" y="1412875"/>
-            <a:ext cx="3059112" cy="1238250"/>
-          </a:xfrm>
-          <a:prstGeom prst="rect">
-            <a:avLst/>
-          </a:prstGeom>
-          <a:noFill/>
-          <a:ln>
-            <a:noFill/>
-          </a:ln>
-          <a:extLst>
-            <a:ext uri="{909E8E84-426E-40DD-AFC4-6F175D3DCCD1}">
-              <a14:hiddenFill xmlns:a14="http://schemas.microsoft.com/office/drawing/2010/main">
-                <a:solidFill>
-                  <a:srgbClr val="FFFFFF"/>
-                </a:solidFill>
-              </a14:hiddenFill>
-            </a:ext>
-            <a:ext uri="{91240B29-F687-4F45-9708-019B960494DF}">
-              <a14:hiddenLine xmlns:a14="http://schemas.microsoft.com/office/drawing/2010/main" w="9525">
-                <a:solidFill>
-                  <a:srgbClr val="000000"/>
-                </a:solidFill>
-                <a:miter lim="800000"/>
-                <a:headEnd/>
-                <a:tailEnd/>
-              </a14:hiddenLine>
-            </a:ext>
-          </a:extLst>
-        </p:spPr>
-      </p:pic>
     </p:spTree>
   </p:cSld>
   <p:clrMapOvr>
@@ -26789,10 +26788,10 @@
       </p:grpSpPr>
       <p:sp>
         <p:nvSpPr>
-          <p:cNvPr id="64513" name="제목 1">
+          <p:cNvPr id="63489" name="제목 1">
             <a:extLst>
               <a:ext uri="{FF2B5EF4-FFF2-40B4-BE49-F238E27FC236}">
-                <a16:creationId xmlns:a16="http://schemas.microsoft.com/office/drawing/2014/main" id="{CF5FA555-5F8B-7C81-6285-041EED456CEE}"/>
+                <a16:creationId xmlns:a16="http://schemas.microsoft.com/office/drawing/2014/main" id="{F02FDD7A-0F32-223C-BFF0-03A221CD424B}"/>
               </a:ext>
             </a:extLst>
           </p:cNvPr>
@@ -26809,19 +26808,19 @@
           <a:lstStyle/>
           <a:p>
             <a:r>
-              <a:rPr lang="en-US" altLang="ko-KR" b="1" u="sng"/>
-              <a:t>Hybrid Architecture</a:t>
-            </a:r>
-            <a:endParaRPr lang="ko-KR" altLang="en-US" b="1" u="sng"/>
+              <a:rPr lang="en-US" altLang="ko-KR" sz="4000" b="1" u="sng"/>
+              <a:t>Distributed Memory Architecture</a:t>
+            </a:r>
+            <a:endParaRPr lang="ko-KR" altLang="en-US" sz="4000" b="1" u="sng"/>
           </a:p>
         </p:txBody>
       </p:sp>
       <p:sp>
         <p:nvSpPr>
-          <p:cNvPr id="64514" name="내용 개체 틀 2">
+          <p:cNvPr id="63490" name="내용 개체 틀 2">
             <a:extLst>
               <a:ext uri="{FF2B5EF4-FFF2-40B4-BE49-F238E27FC236}">
-                <a16:creationId xmlns:a16="http://schemas.microsoft.com/office/drawing/2014/main" id="{0E4CE25D-B182-A118-6C42-E2E8407123B1}"/>
+                <a16:creationId xmlns:a16="http://schemas.microsoft.com/office/drawing/2014/main" id="{0AE12259-2364-34FB-F312-AFC2F6182ABD}"/>
               </a:ext>
             </a:extLst>
           </p:cNvPr>
@@ -26837,56 +26836,93 @@
           <a:bodyPr/>
           <a:lstStyle/>
           <a:p>
-            <a:endParaRPr lang="en-US" altLang="ko-KR"/>
-          </a:p>
-          <a:p>
-            <a:endParaRPr lang="en-US" altLang="ko-KR"/>
-          </a:p>
-          <a:p>
-            <a:endParaRPr lang="en-US" altLang="ko-KR"/>
-          </a:p>
-          <a:p>
-            <a:endParaRPr lang="en-US" altLang="ko-KR"/>
-          </a:p>
-          <a:p>
-            <a:r>
-              <a:rPr lang="en-US" altLang="ko-KR"/>
-              <a:t>Advantages/Disadvantage</a:t>
+            <a:r>
+              <a:rPr lang="en-US" altLang="ko-KR" sz="2800"/>
+              <a:t>Characteristics</a:t>
             </a:r>
           </a:p>
           <a:p>
             <a:pPr lvl="1"/>
             <a:r>
-              <a:rPr lang="en-US" altLang="ko-KR"/>
-              <a:t>Combination of Shared/Distributed architecture</a:t>
+              <a:rPr lang="en-US" altLang="ko-KR" sz="2000"/>
+              <a:t>Only private(local) memory</a:t>
             </a:r>
           </a:p>
           <a:p>
             <a:pPr lvl="1"/>
             <a:r>
-              <a:rPr lang="en-US" altLang="ko-KR"/>
-              <a:t>Scalable</a:t>
+              <a:rPr lang="en-US" altLang="ko-KR" sz="2000"/>
+              <a:t>Independent</a:t>
             </a:r>
           </a:p>
           <a:p>
             <a:pPr lvl="1"/>
             <a:r>
-              <a:rPr lang="en-US" altLang="ko-KR"/>
-              <a:t>Increased programmer complexity</a:t>
+              <a:rPr lang="en-US" altLang="ko-KR" sz="2000"/>
+              <a:t>require a communication network to connect inter-processor memory</a:t>
+            </a:r>
+          </a:p>
+          <a:p>
+            <a:r>
+              <a:rPr lang="en-US" altLang="ko-KR" sz="2800"/>
+              <a:t>Advantages</a:t>
             </a:r>
           </a:p>
           <a:p>
             <a:pPr lvl="1"/>
-            <a:endParaRPr lang="ko-KR" altLang="en-US"/>
+            <a:r>
+              <a:rPr lang="en-US" altLang="ko-KR" sz="2000"/>
+              <a:t>Scalable (processors, memory)</a:t>
+            </a:r>
+          </a:p>
+          <a:p>
+            <a:pPr lvl="1"/>
+            <a:r>
+              <a:rPr lang="en-US" altLang="ko-KR" sz="2000"/>
+              <a:t>Cost effective </a:t>
+            </a:r>
+          </a:p>
+          <a:p>
+            <a:r>
+              <a:rPr lang="en-US" altLang="ko-KR" sz="2800"/>
+              <a:t>Disadvantages</a:t>
+            </a:r>
+          </a:p>
+          <a:p>
+            <a:pPr lvl="1"/>
+            <a:r>
+              <a:rPr lang="en-US" altLang="ko-KR" sz="2000"/>
+              <a:t>Programmer responsibility of data communication</a:t>
+            </a:r>
+          </a:p>
+          <a:p>
+            <a:pPr lvl="1"/>
+            <a:r>
+              <a:rPr lang="en-US" altLang="ko-KR" sz="2000"/>
+              <a:t>No global memory access</a:t>
+            </a:r>
+          </a:p>
+          <a:p>
+            <a:pPr lvl="1"/>
+            <a:r>
+              <a:rPr lang="en-US" altLang="ko-KR" sz="2000"/>
+              <a:t>Non-uniform memory access time</a:t>
+            </a:r>
+          </a:p>
+          <a:p>
+            <a:endParaRPr lang="en-US" altLang="ko-KR" sz="2800"/>
+          </a:p>
+          <a:p>
+            <a:endParaRPr lang="ko-KR" altLang="en-US" sz="2800"/>
           </a:p>
         </p:txBody>
       </p:sp>
       <p:pic>
         <p:nvPicPr>
-          <p:cNvPr id="64515" name="Picture 2" descr="Hybrid memory architecture">
+          <p:cNvPr id="63491" name="Picture 2">
             <a:extLst>
               <a:ext uri="{FF2B5EF4-FFF2-40B4-BE49-F238E27FC236}">
-                <a16:creationId xmlns:a16="http://schemas.microsoft.com/office/drawing/2014/main" id="{0A7844DE-5CDF-7384-0FF8-D429BF787974}"/>
+                <a16:creationId xmlns:a16="http://schemas.microsoft.com/office/drawing/2014/main" id="{43737C21-6B83-1751-68C9-10DAB81BCDF4}"/>
               </a:ext>
             </a:extLst>
           </p:cNvPr>
@@ -26910,68 +26946,8 @@
         </p:blipFill>
         <p:spPr bwMode="auto">
           <a:xfrm>
-            <a:off x="539750" y="1916113"/>
-            <a:ext cx="3889375" cy="1576387"/>
-          </a:xfrm>
-          <a:prstGeom prst="rect">
-            <a:avLst/>
-          </a:prstGeom>
-          <a:noFill/>
-          <a:ln>
-            <a:noFill/>
-          </a:ln>
-          <a:extLst>
-            <a:ext uri="{909E8E84-426E-40DD-AFC4-6F175D3DCCD1}">
-              <a14:hiddenFill xmlns:a14="http://schemas.microsoft.com/office/drawing/2010/main">
-                <a:solidFill>
-                  <a:srgbClr val="FFFFFF"/>
-                </a:solidFill>
-              </a14:hiddenFill>
-            </a:ext>
-            <a:ext uri="{91240B29-F687-4F45-9708-019B960494DF}">
-              <a14:hiddenLine xmlns:a14="http://schemas.microsoft.com/office/drawing/2010/main" w="9525">
-                <a:solidFill>
-                  <a:srgbClr val="000000"/>
-                </a:solidFill>
-                <a:miter lim="800000"/>
-                <a:headEnd/>
-                <a:tailEnd/>
-              </a14:hiddenLine>
-            </a:ext>
-          </a:extLst>
-        </p:spPr>
-      </p:pic>
-      <p:pic>
-        <p:nvPicPr>
-          <p:cNvPr id="64516" name="Picture 4" descr="Hybrid memory architecture">
-            <a:extLst>
-              <a:ext uri="{FF2B5EF4-FFF2-40B4-BE49-F238E27FC236}">
-                <a16:creationId xmlns:a16="http://schemas.microsoft.com/office/drawing/2014/main" id="{C3894869-301F-61F7-69BA-2E6B702BABCE}"/>
-              </a:ext>
-            </a:extLst>
-          </p:cNvPr>
-          <p:cNvPicPr>
-            <a:picLocks noChangeAspect="1" noChangeArrowheads="1"/>
-          </p:cNvPicPr>
-          <p:nvPr/>
-        </p:nvPicPr>
-        <p:blipFill>
-          <a:blip r:embed="rId3">
-            <a:extLst>
-              <a:ext uri="{28A0092B-C50C-407E-A947-70E740481C1C}">
-                <a14:useLocalDpi xmlns:a14="http://schemas.microsoft.com/office/drawing/2010/main" val="0"/>
-              </a:ext>
-            </a:extLst>
-          </a:blip>
-          <a:srcRect/>
-          <a:stretch>
-            <a:fillRect/>
-          </a:stretch>
-        </p:blipFill>
-        <p:spPr bwMode="auto">
-          <a:xfrm>
-            <a:off x="4500563" y="1862138"/>
-            <a:ext cx="4033837" cy="1633537"/>
+            <a:off x="6084888" y="1412875"/>
+            <a:ext cx="3059112" cy="1238250"/>
           </a:xfrm>
           <a:prstGeom prst="rect">
             <a:avLst/>
@@ -27028,10 +27004,10 @@
       </p:grpSpPr>
       <p:sp>
         <p:nvSpPr>
-          <p:cNvPr id="65537" name="제목 1">
+          <p:cNvPr id="64513" name="제목 1">
             <a:extLst>
               <a:ext uri="{FF2B5EF4-FFF2-40B4-BE49-F238E27FC236}">
-                <a16:creationId xmlns:a16="http://schemas.microsoft.com/office/drawing/2014/main" id="{6E9B27EE-EE2D-D38D-718E-9AEAC10BF108}"/>
+                <a16:creationId xmlns:a16="http://schemas.microsoft.com/office/drawing/2014/main" id="{CF5FA555-5F8B-7C81-6285-041EED456CEE}"/>
               </a:ext>
             </a:extLst>
           </p:cNvPr>
@@ -27042,19 +27018,14 @@
             <p:ph type="title"/>
           </p:nvPr>
         </p:nvSpPr>
-        <p:spPr>
-          <a:xfrm>
-            <a:off x="457200" y="115888"/>
-            <a:ext cx="8229600" cy="1143000"/>
-          </a:xfrm>
-        </p:spPr>
+        <p:spPr/>
         <p:txBody>
           <a:bodyPr/>
           <a:lstStyle/>
           <a:p>
             <a:r>
               <a:rPr lang="en-US" altLang="ko-KR" b="1" u="sng"/>
-              <a:t>Example of Parallel Program</a:t>
+              <a:t>Hybrid Architecture</a:t>
             </a:r>
             <a:endParaRPr lang="ko-KR" altLang="en-US" b="1" u="sng"/>
           </a:p>
@@ -27062,10 +27033,10 @@
       </p:sp>
       <p:sp>
         <p:nvSpPr>
-          <p:cNvPr id="65538" name="내용 개체 틀 2">
+          <p:cNvPr id="64514" name="내용 개체 틀 2">
             <a:extLst>
               <a:ext uri="{FF2B5EF4-FFF2-40B4-BE49-F238E27FC236}">
-                <a16:creationId xmlns:a16="http://schemas.microsoft.com/office/drawing/2014/main" id="{05F34A85-D735-10A2-D9C0-2E2955103DA2}"/>
+                <a16:creationId xmlns:a16="http://schemas.microsoft.com/office/drawing/2014/main" id="{0E4CE25D-B182-A118-6C42-E2E8407123B1}"/>
               </a:ext>
             </a:extLst>
           </p:cNvPr>
@@ -27081,16 +27052,56 @@
           <a:bodyPr/>
           <a:lstStyle/>
           <a:p>
+            <a:endParaRPr lang="en-US" altLang="ko-KR"/>
+          </a:p>
+          <a:p>
+            <a:endParaRPr lang="en-US" altLang="ko-KR"/>
+          </a:p>
+          <a:p>
+            <a:endParaRPr lang="en-US" altLang="ko-KR"/>
+          </a:p>
+          <a:p>
+            <a:endParaRPr lang="en-US" altLang="ko-KR"/>
+          </a:p>
+          <a:p>
+            <a:r>
+              <a:rPr lang="en-US" altLang="ko-KR"/>
+              <a:t>Advantages/Disadvantage</a:t>
+            </a:r>
+          </a:p>
+          <a:p>
+            <a:pPr lvl="1"/>
+            <a:r>
+              <a:rPr lang="en-US" altLang="ko-KR"/>
+              <a:t>Combination of Shared/Distributed architecture</a:t>
+            </a:r>
+          </a:p>
+          <a:p>
+            <a:pPr lvl="1"/>
+            <a:r>
+              <a:rPr lang="en-US" altLang="ko-KR"/>
+              <a:t>Scalable</a:t>
+            </a:r>
+          </a:p>
+          <a:p>
+            <a:pPr lvl="1"/>
+            <a:r>
+              <a:rPr lang="en-US" altLang="ko-KR"/>
+              <a:t>Increased programmer complexity</a:t>
+            </a:r>
+          </a:p>
+          <a:p>
+            <a:pPr lvl="1"/>
             <a:endParaRPr lang="ko-KR" altLang="en-US"/>
           </a:p>
         </p:txBody>
       </p:sp>
       <p:pic>
         <p:nvPicPr>
-          <p:cNvPr id="65539" name="Picture 3">
+          <p:cNvPr id="64515" name="Picture 2" descr="Hybrid memory architecture">
             <a:extLst>
               <a:ext uri="{FF2B5EF4-FFF2-40B4-BE49-F238E27FC236}">
-                <a16:creationId xmlns:a16="http://schemas.microsoft.com/office/drawing/2014/main" id="{CE4DD824-90C5-AF54-AF6D-C83A2E103873}"/>
+                <a16:creationId xmlns:a16="http://schemas.microsoft.com/office/drawing/2014/main" id="{0A7844DE-5CDF-7384-0FF8-D429BF787974}"/>
               </a:ext>
             </a:extLst>
           </p:cNvPr>
@@ -27114,8 +27125,68 @@
         </p:blipFill>
         <p:spPr bwMode="auto">
           <a:xfrm>
-            <a:off x="179388" y="1120775"/>
-            <a:ext cx="8785225" cy="5586413"/>
+            <a:off x="539750" y="1916113"/>
+            <a:ext cx="3889375" cy="1576387"/>
+          </a:xfrm>
+          <a:prstGeom prst="rect">
+            <a:avLst/>
+          </a:prstGeom>
+          <a:noFill/>
+          <a:ln>
+            <a:noFill/>
+          </a:ln>
+          <a:extLst>
+            <a:ext uri="{909E8E84-426E-40DD-AFC4-6F175D3DCCD1}">
+              <a14:hiddenFill xmlns:a14="http://schemas.microsoft.com/office/drawing/2010/main">
+                <a:solidFill>
+                  <a:srgbClr val="FFFFFF"/>
+                </a:solidFill>
+              </a14:hiddenFill>
+            </a:ext>
+            <a:ext uri="{91240B29-F687-4F45-9708-019B960494DF}">
+              <a14:hiddenLine xmlns:a14="http://schemas.microsoft.com/office/drawing/2010/main" w="9525">
+                <a:solidFill>
+                  <a:srgbClr val="000000"/>
+                </a:solidFill>
+                <a:miter lim="800000"/>
+                <a:headEnd/>
+                <a:tailEnd/>
+              </a14:hiddenLine>
+            </a:ext>
+          </a:extLst>
+        </p:spPr>
+      </p:pic>
+      <p:pic>
+        <p:nvPicPr>
+          <p:cNvPr id="64516" name="Picture 4" descr="Hybrid memory architecture">
+            <a:extLst>
+              <a:ext uri="{FF2B5EF4-FFF2-40B4-BE49-F238E27FC236}">
+                <a16:creationId xmlns:a16="http://schemas.microsoft.com/office/drawing/2014/main" id="{C3894869-301F-61F7-69BA-2E6B702BABCE}"/>
+              </a:ext>
+            </a:extLst>
+          </p:cNvPr>
+          <p:cNvPicPr>
+            <a:picLocks noChangeAspect="1" noChangeArrowheads="1"/>
+          </p:cNvPicPr>
+          <p:nvPr/>
+        </p:nvPicPr>
+        <p:blipFill>
+          <a:blip r:embed="rId3">
+            <a:extLst>
+              <a:ext uri="{28A0092B-C50C-407E-A947-70E740481C1C}">
+                <a14:useLocalDpi xmlns:a14="http://schemas.microsoft.com/office/drawing/2010/main" val="0"/>
+              </a:ext>
+            </a:extLst>
+          </a:blip>
+          <a:srcRect/>
+          <a:stretch>
+            <a:fillRect/>
+          </a:stretch>
+        </p:blipFill>
+        <p:spPr bwMode="auto">
+          <a:xfrm>
+            <a:off x="4500563" y="1862138"/>
+            <a:ext cx="4033837" cy="1633537"/>
           </a:xfrm>
           <a:prstGeom prst="rect">
             <a:avLst/>
@@ -27172,6 +27243,150 @@
       </p:grpSpPr>
       <p:sp>
         <p:nvSpPr>
+          <p:cNvPr id="65537" name="제목 1">
+            <a:extLst>
+              <a:ext uri="{FF2B5EF4-FFF2-40B4-BE49-F238E27FC236}">
+                <a16:creationId xmlns:a16="http://schemas.microsoft.com/office/drawing/2014/main" id="{6E9B27EE-EE2D-D38D-718E-9AEAC10BF108}"/>
+              </a:ext>
+            </a:extLst>
+          </p:cNvPr>
+          <p:cNvSpPr>
+            <a:spLocks noGrp="1" noChangeArrowheads="1"/>
+          </p:cNvSpPr>
+          <p:nvPr>
+            <p:ph type="title"/>
+          </p:nvPr>
+        </p:nvSpPr>
+        <p:spPr>
+          <a:xfrm>
+            <a:off x="457200" y="115888"/>
+            <a:ext cx="8229600" cy="1143000"/>
+          </a:xfrm>
+        </p:spPr>
+        <p:txBody>
+          <a:bodyPr/>
+          <a:lstStyle/>
+          <a:p>
+            <a:r>
+              <a:rPr lang="en-US" altLang="ko-KR" b="1" u="sng"/>
+              <a:t>Example of Parallel Program</a:t>
+            </a:r>
+            <a:endParaRPr lang="ko-KR" altLang="en-US" b="1" u="sng"/>
+          </a:p>
+        </p:txBody>
+      </p:sp>
+      <p:sp>
+        <p:nvSpPr>
+          <p:cNvPr id="65538" name="내용 개체 틀 2">
+            <a:extLst>
+              <a:ext uri="{FF2B5EF4-FFF2-40B4-BE49-F238E27FC236}">
+                <a16:creationId xmlns:a16="http://schemas.microsoft.com/office/drawing/2014/main" id="{05F34A85-D735-10A2-D9C0-2E2955103DA2}"/>
+              </a:ext>
+            </a:extLst>
+          </p:cNvPr>
+          <p:cNvSpPr>
+            <a:spLocks noGrp="1" noChangeArrowheads="1"/>
+          </p:cNvSpPr>
+          <p:nvPr>
+            <p:ph idx="1"/>
+          </p:nvPr>
+        </p:nvSpPr>
+        <p:spPr/>
+        <p:txBody>
+          <a:bodyPr/>
+          <a:lstStyle/>
+          <a:p>
+            <a:endParaRPr lang="ko-KR" altLang="en-US"/>
+          </a:p>
+        </p:txBody>
+      </p:sp>
+      <p:pic>
+        <p:nvPicPr>
+          <p:cNvPr id="65539" name="Picture 3">
+            <a:extLst>
+              <a:ext uri="{FF2B5EF4-FFF2-40B4-BE49-F238E27FC236}">
+                <a16:creationId xmlns:a16="http://schemas.microsoft.com/office/drawing/2014/main" id="{CE4DD824-90C5-AF54-AF6D-C83A2E103873}"/>
+              </a:ext>
+            </a:extLst>
+          </p:cNvPr>
+          <p:cNvPicPr>
+            <a:picLocks noChangeAspect="1" noChangeArrowheads="1"/>
+          </p:cNvPicPr>
+          <p:nvPr/>
+        </p:nvPicPr>
+        <p:blipFill>
+          <a:blip r:embed="rId2">
+            <a:extLst>
+              <a:ext uri="{28A0092B-C50C-407E-A947-70E740481C1C}">
+                <a14:useLocalDpi xmlns:a14="http://schemas.microsoft.com/office/drawing/2010/main" val="0"/>
+              </a:ext>
+            </a:extLst>
+          </a:blip>
+          <a:srcRect/>
+          <a:stretch>
+            <a:fillRect/>
+          </a:stretch>
+        </p:blipFill>
+        <p:spPr bwMode="auto">
+          <a:xfrm>
+            <a:off x="179388" y="1120775"/>
+            <a:ext cx="8785225" cy="5586413"/>
+          </a:xfrm>
+          <a:prstGeom prst="rect">
+            <a:avLst/>
+          </a:prstGeom>
+          <a:noFill/>
+          <a:ln>
+            <a:noFill/>
+          </a:ln>
+          <a:extLst>
+            <a:ext uri="{909E8E84-426E-40DD-AFC4-6F175D3DCCD1}">
+              <a14:hiddenFill xmlns:a14="http://schemas.microsoft.com/office/drawing/2010/main">
+                <a:solidFill>
+                  <a:srgbClr val="FFFFFF"/>
+                </a:solidFill>
+              </a14:hiddenFill>
+            </a:ext>
+            <a:ext uri="{91240B29-F687-4F45-9708-019B960494DF}">
+              <a14:hiddenLine xmlns:a14="http://schemas.microsoft.com/office/drawing/2010/main" w="9525">
+                <a:solidFill>
+                  <a:srgbClr val="000000"/>
+                </a:solidFill>
+                <a:miter lim="800000"/>
+                <a:headEnd/>
+                <a:tailEnd/>
+              </a14:hiddenLine>
+            </a:ext>
+          </a:extLst>
+        </p:spPr>
+      </p:pic>
+    </p:spTree>
+  </p:cSld>
+  <p:clrMapOvr>
+    <a:masterClrMapping/>
+  </p:clrMapOvr>
+</p:sld>
+</file>
+
+<file path=ppt/slides/slide56.xml><?xml version="1.0" encoding="utf-8"?>
+<p:sld xmlns:a="http://schemas.openxmlformats.org/drawingml/2006/main" xmlns:r="http://schemas.openxmlformats.org/officeDocument/2006/relationships" xmlns:p="http://schemas.openxmlformats.org/presentationml/2006/main">
+  <p:cSld>
+    <p:spTree>
+      <p:nvGrpSpPr>
+        <p:cNvPr id="1" name=""/>
+        <p:cNvGrpSpPr/>
+        <p:nvPr/>
+      </p:nvGrpSpPr>
+      <p:grpSpPr>
+        <a:xfrm>
+          <a:off x="0" y="0"/>
+          <a:ext cx="0" cy="0"/>
+          <a:chOff x="0" y="0"/>
+          <a:chExt cx="0" cy="0"/>
+        </a:xfrm>
+      </p:grpSpPr>
+      <p:sp>
+        <p:nvSpPr>
           <p:cNvPr id="66561" name="제목 1">
             <a:extLst>
               <a:ext uri="{FF2B5EF4-FFF2-40B4-BE49-F238E27FC236}">
@@ -27766,15 +27981,15 @@
       </p:grpSpPr>
       <p:sp>
         <p:nvSpPr>
-          <p:cNvPr id="21505" name="제목 1">
+          <p:cNvPr id="2" name="제목 1">
             <a:extLst>
               <a:ext uri="{FF2B5EF4-FFF2-40B4-BE49-F238E27FC236}">
-                <a16:creationId xmlns:a16="http://schemas.microsoft.com/office/drawing/2014/main" id="{FE5F8C6C-D7AF-C1F6-2B5D-2D895584EAE1}"/>
+                <a16:creationId xmlns:a16="http://schemas.microsoft.com/office/drawing/2014/main" id="{B5D1CC9E-128E-53FC-E3AB-68D172EBE513}"/>
               </a:ext>
             </a:extLst>
           </p:cNvPr>
           <p:cNvSpPr>
-            <a:spLocks noGrp="1" noChangeArrowheads="1"/>
+            <a:spLocks noGrp="1"/>
           </p:cNvSpPr>
           <p:nvPr>
             <p:ph type="title"/>
@@ -27786,132 +28001,163 @@
           <a:lstStyle/>
           <a:p>
             <a:r>
-              <a:rPr lang="en-US" altLang="ko-KR" b="1" u="sng"/>
-              <a:t>Creating a Parallel Program</a:t>
-            </a:r>
-            <a:endParaRPr lang="ko-KR" altLang="en-US" b="1" u="sng"/>
+              <a:rPr lang="en-US" altLang="ko-Kore-KR" b="1" u="sng" dirty="0"/>
+              <a:t>Parallel Program Models</a:t>
+            </a:r>
+            <a:endParaRPr kumimoji="1" lang="ko-Kore-KR" altLang="en-US" b="1" u="sng" dirty="0"/>
           </a:p>
         </p:txBody>
       </p:sp>
       <p:sp>
         <p:nvSpPr>
-          <p:cNvPr id="21506" name="내용 개체 틀 2">
+          <p:cNvPr id="3" name="내용 개체 틀 2">
             <a:extLst>
               <a:ext uri="{FF2B5EF4-FFF2-40B4-BE49-F238E27FC236}">
-                <a16:creationId xmlns:a16="http://schemas.microsoft.com/office/drawing/2014/main" id="{455918B8-B0EC-B49F-C93A-C2DC3FABC9DF}"/>
+                <a16:creationId xmlns:a16="http://schemas.microsoft.com/office/drawing/2014/main" id="{3BF64174-29ED-7C2E-AB05-97BFD14078F8}"/>
               </a:ext>
             </a:extLst>
           </p:cNvPr>
           <p:cNvSpPr>
-            <a:spLocks noGrp="1" noChangeArrowheads="1"/>
+            <a:spLocks noGrp="1"/>
           </p:cNvSpPr>
           <p:nvPr>
             <p:ph idx="1"/>
           </p:nvPr>
         </p:nvSpPr>
-        <p:spPr>
-          <a:xfrm>
-            <a:off x="457200" y="4941888"/>
-            <a:ext cx="8229600" cy="1223962"/>
-          </a:xfrm>
-        </p:spPr>
+        <p:spPr/>
         <p:txBody>
           <a:bodyPr/>
           <a:lstStyle/>
           <a:p>
-            <a:pPr marL="514350" indent="-514350">
-              <a:buFont typeface="Wingdings" pitchFamily="2" charset="2"/>
-              <a:buAutoNum type="arabicPeriod"/>
+            <a:r>
+              <a:rPr kumimoji="1" lang="en-US" altLang="ko-Kore-KR" dirty="0"/>
+              <a:t>SPMD (Single Program Multiple Data)</a:t>
+            </a:r>
+          </a:p>
+          <a:p>
+            <a:pPr lvl="1"/>
+            <a:r>
+              <a:rPr lang="en-US" altLang="ko-Kore-KR" sz="2400" dirty="0"/>
+              <a:t>All tasks execute their copy of </a:t>
+            </a:r>
+          </a:p>
+          <a:p>
+            <a:pPr marL="457200" lvl="1" indent="0">
+              <a:buNone/>
             </a:pPr>
             <a:r>
-              <a:rPr lang="en-US" altLang="ko-KR" sz="2400"/>
-              <a:t>Decomposition</a:t>
-            </a:r>
-          </a:p>
-          <a:p>
-            <a:pPr marL="514350" indent="-514350">
-              <a:buFont typeface="Wingdings" pitchFamily="2" charset="2"/>
-              <a:buAutoNum type="arabicPeriod"/>
+              <a:rPr lang="en-US" altLang="ko-Kore-KR" sz="2400" dirty="0"/>
+              <a:t>  the same program simultaneously</a:t>
+            </a:r>
+          </a:p>
+          <a:p>
+            <a:pPr lvl="1"/>
+            <a:r>
+              <a:rPr lang="en-US" altLang="ko-Kore-KR" sz="2400" dirty="0"/>
+              <a:t>All tasks may use different data</a:t>
+            </a:r>
+          </a:p>
+          <a:p>
+            <a:endParaRPr lang="en-US" altLang="ko-Kore-KR" dirty="0"/>
+          </a:p>
+          <a:p>
+            <a:r>
+              <a:rPr kumimoji="1" lang="en-US" altLang="ko-Kore-KR" dirty="0"/>
+              <a:t>MPMD (Multiple Program Multiple Data)</a:t>
+            </a:r>
+          </a:p>
+          <a:p>
+            <a:pPr lvl="1"/>
+            <a:r>
+              <a:rPr lang="en-US" altLang="ko-Kore-KR" sz="2400" dirty="0"/>
+              <a:t>Tasks may execute different </a:t>
+            </a:r>
+          </a:p>
+          <a:p>
+            <a:pPr marL="457200" lvl="1" indent="0">
+              <a:buNone/>
             </a:pPr>
             <a:r>
-              <a:rPr lang="en-US" altLang="ko-KR" sz="2400"/>
-              <a:t>Assignment</a:t>
-            </a:r>
-          </a:p>
-          <a:p>
-            <a:pPr marL="514350" indent="-514350">
-              <a:buFont typeface="Wingdings" pitchFamily="2" charset="2"/>
-              <a:buAutoNum type="arabicPeriod"/>
-            </a:pPr>
-            <a:r>
-              <a:rPr lang="en-US" altLang="ko-KR" sz="2400"/>
-              <a:t>Orchestration/Mapping</a:t>
-            </a:r>
-            <a:endParaRPr lang="ko-KR" altLang="en-US" sz="2400"/>
+              <a:rPr lang="en-US" altLang="ko-Kore-KR" sz="2400" dirty="0"/>
+              <a:t>  programs simultaneously</a:t>
+            </a:r>
+          </a:p>
+          <a:p>
+            <a:pPr lvl="1"/>
+            <a:r>
+              <a:rPr kumimoji="1" lang="en-US" altLang="ko-Kore-KR" sz="2400" dirty="0"/>
+              <a:t>All tasks may use different data</a:t>
+            </a:r>
+            <a:endParaRPr kumimoji="1" lang="ko-Kore-KR" altLang="en-US" sz="2400" dirty="0"/>
           </a:p>
         </p:txBody>
       </p:sp>
       <p:pic>
         <p:nvPicPr>
-          <p:cNvPr id="21507" name="Picture 2">
+          <p:cNvPr id="4" name="그림 3">
             <a:extLst>
               <a:ext uri="{FF2B5EF4-FFF2-40B4-BE49-F238E27FC236}">
-                <a16:creationId xmlns:a16="http://schemas.microsoft.com/office/drawing/2014/main" id="{1F0FC42E-82EE-C22D-1C29-C6688CF695F0}"/>
+                <a16:creationId xmlns:a16="http://schemas.microsoft.com/office/drawing/2014/main" id="{6FC78114-D6F4-618A-ADD3-24C1FC8D3CE8}"/>
               </a:ext>
             </a:extLst>
           </p:cNvPr>
           <p:cNvPicPr>
-            <a:picLocks noChangeAspect="1" noChangeArrowheads="1"/>
+            <a:picLocks noChangeAspect="1"/>
           </p:cNvPicPr>
           <p:nvPr/>
         </p:nvPicPr>
         <p:blipFill>
-          <a:blip r:embed="rId2">
-            <a:extLst>
-              <a:ext uri="{28A0092B-C50C-407E-A947-70E740481C1C}">
-                <a14:useLocalDpi xmlns:a14="http://schemas.microsoft.com/office/drawing/2010/main" val="0"/>
-              </a:ext>
-            </a:extLst>
-          </a:blip>
-          <a:srcRect/>
+          <a:blip r:embed="rId2"/>
           <a:stretch>
             <a:fillRect/>
           </a:stretch>
         </p:blipFill>
-        <p:spPr bwMode="auto">
+        <p:spPr>
           <a:xfrm>
-            <a:off x="971550" y="1341438"/>
-            <a:ext cx="7221538" cy="3516312"/>
+            <a:off x="6243750" y="2143850"/>
+            <a:ext cx="2900250" cy="1202176"/>
           </a:xfrm>
           <a:prstGeom prst="rect">
             <a:avLst/>
           </a:prstGeom>
-          <a:noFill/>
-          <a:ln>
-            <a:noFill/>
-          </a:ln>
-          <a:extLst>
-            <a:ext uri="{909E8E84-426E-40DD-AFC4-6F175D3DCCD1}">
-              <a14:hiddenFill xmlns:a14="http://schemas.microsoft.com/office/drawing/2010/main">
-                <a:solidFill>
-                  <a:srgbClr val="FFFFFF"/>
-                </a:solidFill>
-              </a14:hiddenFill>
-            </a:ext>
-            <a:ext uri="{91240B29-F687-4F45-9708-019B960494DF}">
-              <a14:hiddenLine xmlns:a14="http://schemas.microsoft.com/office/drawing/2010/main" w="9525">
-                <a:solidFill>
-                  <a:srgbClr val="000000"/>
-                </a:solidFill>
-                <a:miter lim="800000"/>
-                <a:headEnd/>
-                <a:tailEnd/>
-              </a14:hiddenLine>
-            </a:ext>
-          </a:extLst>
+        </p:spPr>
+      </p:pic>
+      <p:pic>
+        <p:nvPicPr>
+          <p:cNvPr id="5" name="그림 4">
+            <a:extLst>
+              <a:ext uri="{FF2B5EF4-FFF2-40B4-BE49-F238E27FC236}">
+                <a16:creationId xmlns:a16="http://schemas.microsoft.com/office/drawing/2014/main" id="{5F2B1407-9BE4-0292-1049-6D4AC78411B4}"/>
+              </a:ext>
+            </a:extLst>
+          </p:cNvPr>
+          <p:cNvPicPr>
+            <a:picLocks noChangeAspect="1"/>
+          </p:cNvPicPr>
+          <p:nvPr/>
+        </p:nvPicPr>
+        <p:blipFill>
+          <a:blip r:embed="rId3"/>
+          <a:stretch>
+            <a:fillRect/>
+          </a:stretch>
+        </p:blipFill>
+        <p:spPr>
+          <a:xfrm>
+            <a:off x="6243750" y="4560715"/>
+            <a:ext cx="2900250" cy="1202177"/>
+          </a:xfrm>
+          <a:prstGeom prst="rect">
+            <a:avLst/>
+          </a:prstGeom>
         </p:spPr>
       </p:pic>
     </p:spTree>
+    <p:extLst>
+      <p:ext uri="{BB962C8B-B14F-4D97-AF65-F5344CB8AC3E}">
+        <p14:creationId xmlns:p14="http://schemas.microsoft.com/office/powerpoint/2010/main" val="4251172262"/>
+      </p:ext>
+    </p:extLst>
   </p:cSld>
   <p:clrMapOvr>
     <a:masterClrMapping/>
@@ -27938,10 +28184,10 @@
       </p:grpSpPr>
       <p:sp>
         <p:nvSpPr>
-          <p:cNvPr id="22529" name="제목 1">
+          <p:cNvPr id="21505" name="제목 1">
             <a:extLst>
               <a:ext uri="{FF2B5EF4-FFF2-40B4-BE49-F238E27FC236}">
-                <a16:creationId xmlns:a16="http://schemas.microsoft.com/office/drawing/2014/main" id="{F43A70CC-6E7B-12BC-D14F-4D568C2E4A4F}"/>
+                <a16:creationId xmlns:a16="http://schemas.microsoft.com/office/drawing/2014/main" id="{FE5F8C6C-D7AF-C1F6-2B5D-2D895584EAE1}"/>
               </a:ext>
             </a:extLst>
           </p:cNvPr>
@@ -27959,7 +28205,7 @@
           <a:p>
             <a:r>
               <a:rPr lang="en-US" altLang="ko-KR" b="1" u="sng"/>
-              <a:t>Decomposition</a:t>
+              <a:t>Creating a Parallel Program</a:t>
             </a:r>
             <a:endParaRPr lang="ko-KR" altLang="en-US" b="1" u="sng"/>
           </a:p>
@@ -27967,10 +28213,10 @@
       </p:sp>
       <p:sp>
         <p:nvSpPr>
-          <p:cNvPr id="22530" name="내용 개체 틀 2">
+          <p:cNvPr id="21506" name="내용 개체 틀 2">
             <a:extLst>
               <a:ext uri="{FF2B5EF4-FFF2-40B4-BE49-F238E27FC236}">
-                <a16:creationId xmlns:a16="http://schemas.microsoft.com/office/drawing/2014/main" id="{7973E5FC-9CA8-D29C-ADB0-0BCCF19E830A}"/>
+                <a16:creationId xmlns:a16="http://schemas.microsoft.com/office/drawing/2014/main" id="{455918B8-B0EC-B49F-C93A-C2DC3FABC9DF}"/>
               </a:ext>
             </a:extLst>
           </p:cNvPr>
@@ -27981,31 +28227,54 @@
             <p:ph idx="1"/>
           </p:nvPr>
         </p:nvSpPr>
-        <p:spPr/>
+        <p:spPr>
+          <a:xfrm>
+            <a:off x="457200" y="4941888"/>
+            <a:ext cx="8229600" cy="1223962"/>
+          </a:xfrm>
+        </p:spPr>
         <p:txBody>
           <a:bodyPr/>
           <a:lstStyle/>
           <a:p>
-            <a:r>
-              <a:rPr lang="en-US" altLang="ko-KR"/>
-              <a:t>Break up computation into tasks to be divided among processes</a:t>
-            </a:r>
-          </a:p>
-          <a:p>
-            <a:r>
-              <a:rPr lang="en-US" altLang="ko-KR"/>
-              <a:t>identify concurrency and decide level at which to exploit it</a:t>
-            </a:r>
-            <a:endParaRPr lang="ko-KR" altLang="en-US"/>
+            <a:pPr marL="514350" indent="-514350">
+              <a:buFont typeface="Wingdings" pitchFamily="2" charset="2"/>
+              <a:buAutoNum type="arabicPeriod"/>
+            </a:pPr>
+            <a:r>
+              <a:rPr lang="en-US" altLang="ko-KR" sz="2400"/>
+              <a:t>Decomposition</a:t>
+            </a:r>
+          </a:p>
+          <a:p>
+            <a:pPr marL="514350" indent="-514350">
+              <a:buFont typeface="Wingdings" pitchFamily="2" charset="2"/>
+              <a:buAutoNum type="arabicPeriod"/>
+            </a:pPr>
+            <a:r>
+              <a:rPr lang="en-US" altLang="ko-KR" sz="2400"/>
+              <a:t>Assignment</a:t>
+            </a:r>
+          </a:p>
+          <a:p>
+            <a:pPr marL="514350" indent="-514350">
+              <a:buFont typeface="Wingdings" pitchFamily="2" charset="2"/>
+              <a:buAutoNum type="arabicPeriod"/>
+            </a:pPr>
+            <a:r>
+              <a:rPr lang="en-US" altLang="ko-KR" sz="2400"/>
+              <a:t>Orchestration/Mapping</a:t>
+            </a:r>
+            <a:endParaRPr lang="ko-KR" altLang="en-US" sz="2400"/>
           </a:p>
         </p:txBody>
       </p:sp>
       <p:pic>
         <p:nvPicPr>
-          <p:cNvPr id="22531" name="Picture 4">
+          <p:cNvPr id="21507" name="Picture 2">
             <a:extLst>
               <a:ext uri="{FF2B5EF4-FFF2-40B4-BE49-F238E27FC236}">
-                <a16:creationId xmlns:a16="http://schemas.microsoft.com/office/drawing/2014/main" id="{DF9F1759-5D28-C6D9-071D-8F6090B35331}"/>
+                <a16:creationId xmlns:a16="http://schemas.microsoft.com/office/drawing/2014/main" id="{1F0FC42E-82EE-C22D-1C29-C6688CF695F0}"/>
               </a:ext>
             </a:extLst>
           </p:cNvPr>
@@ -28022,75 +28291,15 @@
               </a:ext>
             </a:extLst>
           </a:blip>
-          <a:srcRect t="48595"/>
+          <a:srcRect/>
           <a:stretch>
             <a:fillRect/>
           </a:stretch>
         </p:blipFill>
         <p:spPr bwMode="auto">
           <a:xfrm>
-            <a:off x="250825" y="4221163"/>
-            <a:ext cx="4233863" cy="1944687"/>
-          </a:xfrm>
-          <a:prstGeom prst="rect">
-            <a:avLst/>
-          </a:prstGeom>
-          <a:noFill/>
-          <a:ln>
-            <a:noFill/>
-          </a:ln>
-          <a:extLst>
-            <a:ext uri="{909E8E84-426E-40DD-AFC4-6F175D3DCCD1}">
-              <a14:hiddenFill xmlns:a14="http://schemas.microsoft.com/office/drawing/2010/main">
-                <a:solidFill>
-                  <a:srgbClr val="FFFFFF"/>
-                </a:solidFill>
-              </a14:hiddenFill>
-            </a:ext>
-            <a:ext uri="{91240B29-F687-4F45-9708-019B960494DF}">
-              <a14:hiddenLine xmlns:a14="http://schemas.microsoft.com/office/drawing/2010/main" w="9525">
-                <a:solidFill>
-                  <a:srgbClr val="000000"/>
-                </a:solidFill>
-                <a:miter lim="800000"/>
-                <a:headEnd/>
-                <a:tailEnd/>
-              </a14:hiddenLine>
-            </a:ext>
-          </a:extLst>
-        </p:spPr>
-      </p:pic>
-      <p:pic>
-        <p:nvPicPr>
-          <p:cNvPr id="22532" name="Picture 5">
-            <a:extLst>
-              <a:ext uri="{FF2B5EF4-FFF2-40B4-BE49-F238E27FC236}">
-                <a16:creationId xmlns:a16="http://schemas.microsoft.com/office/drawing/2014/main" id="{A93BCB6F-A310-5C8E-7CDA-5DE62459BFE4}"/>
-              </a:ext>
-            </a:extLst>
-          </p:cNvPr>
-          <p:cNvPicPr>
-            <a:picLocks noChangeAspect="1" noChangeArrowheads="1"/>
-          </p:cNvPicPr>
-          <p:nvPr/>
-        </p:nvPicPr>
-        <p:blipFill>
-          <a:blip r:embed="rId3">
-            <a:extLst>
-              <a:ext uri="{28A0092B-C50C-407E-A947-70E740481C1C}">
-                <a14:useLocalDpi xmlns:a14="http://schemas.microsoft.com/office/drawing/2010/main" val="0"/>
-              </a:ext>
-            </a:extLst>
-          </a:blip>
-          <a:srcRect t="47406"/>
-          <a:stretch>
-            <a:fillRect/>
-          </a:stretch>
-        </p:blipFill>
-        <p:spPr bwMode="auto">
-          <a:xfrm>
-            <a:off x="4965700" y="4076700"/>
-            <a:ext cx="3854450" cy="2376488"/>
+            <a:off x="971550" y="1341438"/>
+            <a:ext cx="7221538" cy="3516312"/>
           </a:xfrm>
           <a:prstGeom prst="rect">
             <a:avLst/>
@@ -28147,10 +28356,10 @@
       </p:grpSpPr>
       <p:sp>
         <p:nvSpPr>
-          <p:cNvPr id="23553" name="제목 1">
+          <p:cNvPr id="22529" name="제목 1">
             <a:extLst>
               <a:ext uri="{FF2B5EF4-FFF2-40B4-BE49-F238E27FC236}">
-                <a16:creationId xmlns:a16="http://schemas.microsoft.com/office/drawing/2014/main" id="{0926298B-34D0-1CEB-55D1-DBD5765141D0}"/>
+                <a16:creationId xmlns:a16="http://schemas.microsoft.com/office/drawing/2014/main" id="{F43A70CC-6E7B-12BC-D14F-4D568C2E4A4F}"/>
               </a:ext>
             </a:extLst>
           </p:cNvPr>
@@ -28168,7 +28377,7 @@
           <a:p>
             <a:r>
               <a:rPr lang="en-US" altLang="ko-KR" b="1" u="sng"/>
-              <a:t>Domain Decomposition</a:t>
+              <a:t>Decomposition</a:t>
             </a:r>
             <a:endParaRPr lang="ko-KR" altLang="en-US" b="1" u="sng"/>
           </a:p>
@@ -28176,10 +28385,10 @@
       </p:sp>
       <p:sp>
         <p:nvSpPr>
-          <p:cNvPr id="23554" name="내용 개체 틀 2">
+          <p:cNvPr id="22530" name="내용 개체 틀 2">
             <a:extLst>
               <a:ext uri="{FF2B5EF4-FFF2-40B4-BE49-F238E27FC236}">
-                <a16:creationId xmlns:a16="http://schemas.microsoft.com/office/drawing/2014/main" id="{0517F6C2-F231-7FD7-B25B-6E575F733FE5}"/>
+                <a16:creationId xmlns:a16="http://schemas.microsoft.com/office/drawing/2014/main" id="{7973E5FC-9CA8-D29C-ADB0-0BCCF19E830A}"/>
               </a:ext>
             </a:extLst>
           </p:cNvPr>
@@ -28190,36 +28399,31 @@
             <p:ph idx="1"/>
           </p:nvPr>
         </p:nvSpPr>
-        <p:spPr>
-          <a:xfrm>
-            <a:off x="457200" y="1600200"/>
-            <a:ext cx="8686800" cy="4525963"/>
-          </a:xfrm>
-        </p:spPr>
+        <p:spPr/>
         <p:txBody>
           <a:bodyPr/>
           <a:lstStyle/>
           <a:p>
             <a:r>
-              <a:rPr lang="en-US" altLang="ko-KR" sz="2400"/>
-              <a:t>data associated with a problem is decomposed. </a:t>
-            </a:r>
-          </a:p>
-          <a:p>
-            <a:r>
-              <a:rPr lang="en-US" altLang="ko-KR" sz="2400"/>
-              <a:t>Each parallel task then works on a portion of data.</a:t>
-            </a:r>
-            <a:endParaRPr lang="ko-KR" altLang="en-US" sz="2400"/>
+              <a:rPr lang="en-US" altLang="ko-KR"/>
+              <a:t>Break up computation into tasks to be divided among processes</a:t>
+            </a:r>
+          </a:p>
+          <a:p>
+            <a:r>
+              <a:rPr lang="en-US" altLang="ko-KR"/>
+              <a:t>identify concurrency and decide level at which to exploit it</a:t>
+            </a:r>
+            <a:endParaRPr lang="ko-KR" altLang="en-US"/>
           </a:p>
         </p:txBody>
       </p:sp>
       <p:pic>
         <p:nvPicPr>
-          <p:cNvPr id="23555" name="Picture 2" descr="https://computing.llnl.gov/tutorials/parallel_comp/images/domain_decomp.gif">
+          <p:cNvPr id="22531" name="Picture 4">
             <a:extLst>
               <a:ext uri="{FF2B5EF4-FFF2-40B4-BE49-F238E27FC236}">
-                <a16:creationId xmlns:a16="http://schemas.microsoft.com/office/drawing/2014/main" id="{17A8E93E-3DC3-C840-21D7-26A226C6B827}"/>
+                <a16:creationId xmlns:a16="http://schemas.microsoft.com/office/drawing/2014/main" id="{DF9F1759-5D28-C6D9-071D-8F6090B35331}"/>
               </a:ext>
             </a:extLst>
           </p:cNvPr>
@@ -28236,15 +28440,15 @@
               </a:ext>
             </a:extLst>
           </a:blip>
-          <a:srcRect/>
+          <a:srcRect t="48595"/>
           <a:stretch>
             <a:fillRect/>
           </a:stretch>
         </p:blipFill>
         <p:spPr bwMode="auto">
           <a:xfrm>
-            <a:off x="468313" y="2852738"/>
-            <a:ext cx="3130550" cy="1743075"/>
+            <a:off x="250825" y="4221163"/>
+            <a:ext cx="4233863" cy="1944687"/>
           </a:xfrm>
           <a:prstGeom prst="rect">
             <a:avLst/>
@@ -28276,10 +28480,10 @@
       </p:pic>
       <p:pic>
         <p:nvPicPr>
-          <p:cNvPr id="23556" name="Picture 4" descr="https://computing.llnl.gov/tutorials/parallel_comp/images/distributions.gif">
+          <p:cNvPr id="22532" name="Picture 5">
             <a:extLst>
               <a:ext uri="{FF2B5EF4-FFF2-40B4-BE49-F238E27FC236}">
-                <a16:creationId xmlns:a16="http://schemas.microsoft.com/office/drawing/2014/main" id="{BAAE90CA-50B2-D2FF-9E9E-309965580103}"/>
+                <a16:creationId xmlns:a16="http://schemas.microsoft.com/office/drawing/2014/main" id="{A93BCB6F-A310-5C8E-7CDA-5DE62459BFE4}"/>
               </a:ext>
             </a:extLst>
           </p:cNvPr>
@@ -28296,15 +28500,15 @@
               </a:ext>
             </a:extLst>
           </a:blip>
-          <a:srcRect/>
+          <a:srcRect t="47406"/>
           <a:stretch>
             <a:fillRect/>
           </a:stretch>
         </p:blipFill>
         <p:spPr bwMode="auto">
           <a:xfrm>
-            <a:off x="3708400" y="2636838"/>
-            <a:ext cx="4781550" cy="3676650"/>
+            <a:off x="4965700" y="4076700"/>
+            <a:ext cx="3854450" cy="2376488"/>
           </a:xfrm>
           <a:prstGeom prst="rect">
             <a:avLst/>

--- a/multicore03-updated.pptx
+++ b/multicore03-updated.pptx
@@ -5,7 +5,7 @@
     <p:sldMasterId id="2147483655" r:id="rId1"/>
   </p:sldMasterIdLst>
   <p:notesMasterIdLst>
-    <p:notesMasterId r:id="rId58"/>
+    <p:notesMasterId r:id="rId59"/>
   </p:notesMasterIdLst>
   <p:sldIdLst>
     <p:sldId id="346" r:id="rId2"/>
@@ -15,55 +15,56 @@
     <p:sldId id="353" r:id="rId6"/>
     <p:sldId id="355" r:id="rId7"/>
     <p:sldId id="366" r:id="rId8"/>
-    <p:sldId id="337" r:id="rId9"/>
-    <p:sldId id="336" r:id="rId10"/>
-    <p:sldId id="349" r:id="rId11"/>
-    <p:sldId id="350" r:id="rId12"/>
-    <p:sldId id="338" r:id="rId13"/>
-    <p:sldId id="339" r:id="rId14"/>
-    <p:sldId id="340" r:id="rId15"/>
-    <p:sldId id="308" r:id="rId16"/>
-    <p:sldId id="313" r:id="rId17"/>
-    <p:sldId id="314" r:id="rId18"/>
-    <p:sldId id="315" r:id="rId19"/>
-    <p:sldId id="316" r:id="rId20"/>
-    <p:sldId id="364" r:id="rId21"/>
-    <p:sldId id="365" r:id="rId22"/>
-    <p:sldId id="317" r:id="rId23"/>
-    <p:sldId id="310" r:id="rId24"/>
-    <p:sldId id="319" r:id="rId25"/>
-    <p:sldId id="318" r:id="rId26"/>
-    <p:sldId id="361" r:id="rId27"/>
-    <p:sldId id="323" r:id="rId28"/>
-    <p:sldId id="360" r:id="rId29"/>
-    <p:sldId id="320" r:id="rId30"/>
-    <p:sldId id="321" r:id="rId31"/>
-    <p:sldId id="322" r:id="rId32"/>
-    <p:sldId id="324" r:id="rId33"/>
-    <p:sldId id="325" r:id="rId34"/>
-    <p:sldId id="356" r:id="rId35"/>
-    <p:sldId id="357" r:id="rId36"/>
-    <p:sldId id="358" r:id="rId37"/>
-    <p:sldId id="326" r:id="rId38"/>
-    <p:sldId id="327" r:id="rId39"/>
-    <p:sldId id="328" r:id="rId40"/>
-    <p:sldId id="329" r:id="rId41"/>
-    <p:sldId id="330" r:id="rId42"/>
-    <p:sldId id="331" r:id="rId43"/>
-    <p:sldId id="332" r:id="rId44"/>
-    <p:sldId id="333" r:id="rId45"/>
-    <p:sldId id="359" r:id="rId46"/>
-    <p:sldId id="311" r:id="rId47"/>
-    <p:sldId id="335" r:id="rId48"/>
-    <p:sldId id="343" r:id="rId49"/>
-    <p:sldId id="344" r:id="rId50"/>
-    <p:sldId id="362" r:id="rId51"/>
-    <p:sldId id="363" r:id="rId52"/>
-    <p:sldId id="345" r:id="rId53"/>
-    <p:sldId id="347" r:id="rId54"/>
-    <p:sldId id="348" r:id="rId55"/>
-    <p:sldId id="341" r:id="rId56"/>
-    <p:sldId id="342" r:id="rId57"/>
+    <p:sldId id="271" r:id="rId9"/>
+    <p:sldId id="337" r:id="rId10"/>
+    <p:sldId id="336" r:id="rId11"/>
+    <p:sldId id="349" r:id="rId12"/>
+    <p:sldId id="350" r:id="rId13"/>
+    <p:sldId id="338" r:id="rId14"/>
+    <p:sldId id="339" r:id="rId15"/>
+    <p:sldId id="340" r:id="rId16"/>
+    <p:sldId id="308" r:id="rId17"/>
+    <p:sldId id="313" r:id="rId18"/>
+    <p:sldId id="314" r:id="rId19"/>
+    <p:sldId id="315" r:id="rId20"/>
+    <p:sldId id="316" r:id="rId21"/>
+    <p:sldId id="364" r:id="rId22"/>
+    <p:sldId id="365" r:id="rId23"/>
+    <p:sldId id="317" r:id="rId24"/>
+    <p:sldId id="310" r:id="rId25"/>
+    <p:sldId id="319" r:id="rId26"/>
+    <p:sldId id="318" r:id="rId27"/>
+    <p:sldId id="361" r:id="rId28"/>
+    <p:sldId id="323" r:id="rId29"/>
+    <p:sldId id="360" r:id="rId30"/>
+    <p:sldId id="320" r:id="rId31"/>
+    <p:sldId id="321" r:id="rId32"/>
+    <p:sldId id="322" r:id="rId33"/>
+    <p:sldId id="324" r:id="rId34"/>
+    <p:sldId id="325" r:id="rId35"/>
+    <p:sldId id="356" r:id="rId36"/>
+    <p:sldId id="357" r:id="rId37"/>
+    <p:sldId id="358" r:id="rId38"/>
+    <p:sldId id="326" r:id="rId39"/>
+    <p:sldId id="327" r:id="rId40"/>
+    <p:sldId id="328" r:id="rId41"/>
+    <p:sldId id="329" r:id="rId42"/>
+    <p:sldId id="330" r:id="rId43"/>
+    <p:sldId id="331" r:id="rId44"/>
+    <p:sldId id="332" r:id="rId45"/>
+    <p:sldId id="333" r:id="rId46"/>
+    <p:sldId id="359" r:id="rId47"/>
+    <p:sldId id="311" r:id="rId48"/>
+    <p:sldId id="335" r:id="rId49"/>
+    <p:sldId id="343" r:id="rId50"/>
+    <p:sldId id="344" r:id="rId51"/>
+    <p:sldId id="362" r:id="rId52"/>
+    <p:sldId id="363" r:id="rId53"/>
+    <p:sldId id="345" r:id="rId54"/>
+    <p:sldId id="347" r:id="rId55"/>
+    <p:sldId id="348" r:id="rId56"/>
+    <p:sldId id="341" r:id="rId57"/>
+    <p:sldId id="342" r:id="rId58"/>
   </p:sldIdLst>
   <p:sldSz cx="9144000" cy="6858000" type="screen4x3"/>
   <p:notesSz cx="7099300" cy="10234613"/>
@@ -3611,6 +3612,448 @@
 </p:sldLayout>
 </file>
 
+<file path=ppt/slideLayouts/slideLayout13.xml><?xml version="1.0" encoding="utf-8"?>
+<p:sldLayout xmlns:a="http://schemas.openxmlformats.org/drawingml/2006/main" xmlns:r="http://schemas.openxmlformats.org/officeDocument/2006/relationships" xmlns:p="http://schemas.openxmlformats.org/presentationml/2006/main" userDrawn="1">
+  <p:cSld name="Comparison">
+    <p:spTree>
+      <p:nvGrpSpPr>
+        <p:cNvPr id="1" name=""/>
+        <p:cNvGrpSpPr/>
+        <p:nvPr/>
+      </p:nvGrpSpPr>
+      <p:grpSpPr>
+        <a:xfrm>
+          <a:off x="0" y="0"/>
+          <a:ext cx="0" cy="0"/>
+          <a:chOff x="0" y="0"/>
+          <a:chExt cx="0" cy="0"/>
+        </a:xfrm>
+      </p:grpSpPr>
+      <p:sp>
+        <p:nvSpPr>
+          <p:cNvPr id="3" name="Text Placeholder 2"/>
+          <p:cNvSpPr>
+            <a:spLocks noGrp="1"/>
+          </p:cNvSpPr>
+          <p:nvPr>
+            <p:ph type="body" idx="1"/>
+          </p:nvPr>
+        </p:nvSpPr>
+        <p:spPr>
+          <a:xfrm>
+            <a:off x="629842" y="514897"/>
+            <a:ext cx="3868340" cy="645898"/>
+          </a:xfrm>
+        </p:spPr>
+        <p:txBody>
+          <a:bodyPr anchor="b"/>
+          <a:lstStyle>
+            <a:lvl1pPr marL="0" indent="0" algn="ctr">
+              <a:buNone/>
+              <a:defRPr sz="2000" b="1"/>
+            </a:lvl1pPr>
+            <a:lvl2pPr marL="457200" indent="0">
+              <a:buNone/>
+              <a:defRPr sz="2000" b="1"/>
+            </a:lvl2pPr>
+            <a:lvl3pPr marL="914400" indent="0">
+              <a:buNone/>
+              <a:defRPr sz="1800" b="1"/>
+            </a:lvl3pPr>
+            <a:lvl4pPr marL="1371600" indent="0">
+              <a:buNone/>
+              <a:defRPr sz="1600" b="1"/>
+            </a:lvl4pPr>
+            <a:lvl5pPr marL="1828800" indent="0">
+              <a:buNone/>
+              <a:defRPr sz="1600" b="1"/>
+            </a:lvl5pPr>
+            <a:lvl6pPr marL="2286000" indent="0">
+              <a:buNone/>
+              <a:defRPr sz="1600" b="1"/>
+            </a:lvl6pPr>
+            <a:lvl7pPr marL="2743200" indent="0">
+              <a:buNone/>
+              <a:defRPr sz="1600" b="1"/>
+            </a:lvl7pPr>
+            <a:lvl8pPr marL="3200400" indent="0">
+              <a:buNone/>
+              <a:defRPr sz="1600" b="1"/>
+            </a:lvl8pPr>
+            <a:lvl9pPr marL="3657600" indent="0">
+              <a:buNone/>
+              <a:defRPr sz="1600" b="1"/>
+            </a:lvl9pPr>
+          </a:lstStyle>
+          <a:p>
+            <a:pPr lvl="0"/>
+            <a:r>
+              <a:rPr lang="en-US" dirty="0"/>
+              <a:t>Edit Master text styles</a:t>
+            </a:r>
+          </a:p>
+        </p:txBody>
+      </p:sp>
+      <p:sp>
+        <p:nvSpPr>
+          <p:cNvPr id="4" name="Content Placeholder 3"/>
+          <p:cNvSpPr>
+            <a:spLocks noGrp="1"/>
+          </p:cNvSpPr>
+          <p:nvPr>
+            <p:ph sz="half" idx="2"/>
+          </p:nvPr>
+        </p:nvSpPr>
+        <p:spPr>
+          <a:xfrm>
+            <a:off x="629842" y="1248402"/>
+            <a:ext cx="3868340" cy="5261907"/>
+          </a:xfrm>
+        </p:spPr>
+        <p:txBody>
+          <a:bodyPr/>
+          <a:lstStyle>
+            <a:lvl1pPr>
+              <a:defRPr sz="2000"/>
+            </a:lvl1pPr>
+            <a:lvl2pPr>
+              <a:defRPr sz="1800"/>
+            </a:lvl2pPr>
+            <a:lvl3pPr>
+              <a:defRPr sz="1600"/>
+            </a:lvl3pPr>
+            <a:lvl4pPr>
+              <a:defRPr sz="1400"/>
+            </a:lvl4pPr>
+            <a:lvl5pPr>
+              <a:defRPr sz="1400"/>
+            </a:lvl5pPr>
+          </a:lstStyle>
+          <a:p>
+            <a:pPr lvl="0"/>
+            <a:r>
+              <a:rPr lang="en-US" dirty="0"/>
+              <a:t>Edit Master text styles</a:t>
+            </a:r>
+          </a:p>
+          <a:p>
+            <a:pPr lvl="1"/>
+            <a:r>
+              <a:rPr lang="en-US" dirty="0"/>
+              <a:t>Second level</a:t>
+            </a:r>
+          </a:p>
+          <a:p>
+            <a:pPr lvl="2"/>
+            <a:r>
+              <a:rPr lang="en-US" dirty="0"/>
+              <a:t>Third level</a:t>
+            </a:r>
+          </a:p>
+          <a:p>
+            <a:pPr lvl="3"/>
+            <a:r>
+              <a:rPr lang="en-US" dirty="0"/>
+              <a:t>Fourth level</a:t>
+            </a:r>
+          </a:p>
+          <a:p>
+            <a:pPr lvl="4"/>
+            <a:r>
+              <a:rPr lang="en-US" dirty="0"/>
+              <a:t>Fifth level</a:t>
+            </a:r>
+          </a:p>
+        </p:txBody>
+      </p:sp>
+      <p:sp>
+        <p:nvSpPr>
+          <p:cNvPr id="5" name="Text Placeholder 4"/>
+          <p:cNvSpPr>
+            <a:spLocks noGrp="1"/>
+          </p:cNvSpPr>
+          <p:nvPr>
+            <p:ph type="body" sz="quarter" idx="3"/>
+          </p:nvPr>
+        </p:nvSpPr>
+        <p:spPr>
+          <a:xfrm>
+            <a:off x="4629150" y="514897"/>
+            <a:ext cx="3887391" cy="645898"/>
+          </a:xfrm>
+        </p:spPr>
+        <p:txBody>
+          <a:bodyPr anchor="b"/>
+          <a:lstStyle>
+            <a:lvl1pPr marL="0" indent="0" algn="ctr">
+              <a:buNone/>
+              <a:defRPr sz="2000" b="1"/>
+            </a:lvl1pPr>
+            <a:lvl2pPr marL="457200" indent="0">
+              <a:buNone/>
+              <a:defRPr sz="2000" b="1"/>
+            </a:lvl2pPr>
+            <a:lvl3pPr marL="914400" indent="0">
+              <a:buNone/>
+              <a:defRPr sz="1800" b="1"/>
+            </a:lvl3pPr>
+            <a:lvl4pPr marL="1371600" indent="0">
+              <a:buNone/>
+              <a:defRPr sz="1600" b="1"/>
+            </a:lvl4pPr>
+            <a:lvl5pPr marL="1828800" indent="0">
+              <a:buNone/>
+              <a:defRPr sz="1600" b="1"/>
+            </a:lvl5pPr>
+            <a:lvl6pPr marL="2286000" indent="0">
+              <a:buNone/>
+              <a:defRPr sz="1600" b="1"/>
+            </a:lvl6pPr>
+            <a:lvl7pPr marL="2743200" indent="0">
+              <a:buNone/>
+              <a:defRPr sz="1600" b="1"/>
+            </a:lvl7pPr>
+            <a:lvl8pPr marL="3200400" indent="0">
+              <a:buNone/>
+              <a:defRPr sz="1600" b="1"/>
+            </a:lvl8pPr>
+            <a:lvl9pPr marL="3657600" indent="0">
+              <a:buNone/>
+              <a:defRPr sz="1600" b="1"/>
+            </a:lvl9pPr>
+          </a:lstStyle>
+          <a:p>
+            <a:pPr lvl="0"/>
+            <a:r>
+              <a:rPr lang="en-US"/>
+              <a:t>Edit Master text styles</a:t>
+            </a:r>
+          </a:p>
+        </p:txBody>
+      </p:sp>
+      <p:sp>
+        <p:nvSpPr>
+          <p:cNvPr id="6" name="Content Placeholder 5"/>
+          <p:cNvSpPr>
+            <a:spLocks noGrp="1"/>
+          </p:cNvSpPr>
+          <p:nvPr>
+            <p:ph sz="quarter" idx="4"/>
+          </p:nvPr>
+        </p:nvSpPr>
+        <p:spPr>
+          <a:xfrm>
+            <a:off x="4629150" y="1248402"/>
+            <a:ext cx="3887391" cy="5261907"/>
+          </a:xfrm>
+        </p:spPr>
+        <p:txBody>
+          <a:bodyPr/>
+          <a:lstStyle>
+            <a:lvl1pPr>
+              <a:defRPr sz="2000"/>
+            </a:lvl1pPr>
+            <a:lvl2pPr>
+              <a:defRPr sz="1800"/>
+            </a:lvl2pPr>
+            <a:lvl3pPr>
+              <a:defRPr sz="1600"/>
+            </a:lvl3pPr>
+            <a:lvl4pPr>
+              <a:defRPr sz="1400"/>
+            </a:lvl4pPr>
+            <a:lvl5pPr>
+              <a:defRPr sz="1400"/>
+            </a:lvl5pPr>
+          </a:lstStyle>
+          <a:p>
+            <a:pPr lvl="0"/>
+            <a:r>
+              <a:rPr lang="en-US" dirty="0"/>
+              <a:t>Edit Master text styles</a:t>
+            </a:r>
+          </a:p>
+          <a:p>
+            <a:pPr lvl="1"/>
+            <a:r>
+              <a:rPr lang="en-US" dirty="0"/>
+              <a:t>Second level</a:t>
+            </a:r>
+          </a:p>
+          <a:p>
+            <a:pPr lvl="2"/>
+            <a:r>
+              <a:rPr lang="en-US" dirty="0"/>
+              <a:t>Third level</a:t>
+            </a:r>
+          </a:p>
+          <a:p>
+            <a:pPr lvl="3"/>
+            <a:r>
+              <a:rPr lang="en-US" dirty="0"/>
+              <a:t>Fourth level</a:t>
+            </a:r>
+          </a:p>
+          <a:p>
+            <a:pPr lvl="4"/>
+            <a:r>
+              <a:rPr lang="en-US" dirty="0"/>
+              <a:t>Fifth level</a:t>
+            </a:r>
+          </a:p>
+        </p:txBody>
+      </p:sp>
+      <p:sp>
+        <p:nvSpPr>
+          <p:cNvPr id="10" name="Text Placeholder 2">
+            <a:extLst>
+              <a:ext uri="{FF2B5EF4-FFF2-40B4-BE49-F238E27FC236}">
+                <a16:creationId xmlns:a16="http://schemas.microsoft.com/office/drawing/2014/main" id="{71011D6E-2CED-4BBC-A66B-38F7B0BDDCF4}"/>
+              </a:ext>
+            </a:extLst>
+          </p:cNvPr>
+          <p:cNvSpPr>
+            <a:spLocks noGrp="1"/>
+          </p:cNvSpPr>
+          <p:nvPr>
+            <p:ph type="body" idx="13"/>
+          </p:nvPr>
+        </p:nvSpPr>
+        <p:spPr>
+          <a:xfrm>
+            <a:off x="1018908" y="43891"/>
+            <a:ext cx="7886700" cy="453544"/>
+          </a:xfrm>
+          <a:prstGeom prst="rect">
+            <a:avLst/>
+          </a:prstGeom>
+        </p:spPr>
+        <p:txBody>
+          <a:bodyPr/>
+          <a:lstStyle>
+            <a:lvl1pPr marL="0" indent="0">
+              <a:buNone/>
+              <a:defRPr sz="2400">
+                <a:solidFill>
+                  <a:schemeClr val="bg1"/>
+                </a:solidFill>
+              </a:defRPr>
+            </a:lvl1pPr>
+            <a:lvl2pPr marL="457200" indent="0">
+              <a:buNone/>
+              <a:defRPr sz="2000">
+                <a:solidFill>
+                  <a:schemeClr val="tx1">
+                    <a:tint val="75000"/>
+                  </a:schemeClr>
+                </a:solidFill>
+              </a:defRPr>
+            </a:lvl2pPr>
+            <a:lvl3pPr marL="914400" indent="0">
+              <a:buNone/>
+              <a:defRPr sz="1800">
+                <a:solidFill>
+                  <a:schemeClr val="tx1">
+                    <a:tint val="75000"/>
+                  </a:schemeClr>
+                </a:solidFill>
+              </a:defRPr>
+            </a:lvl3pPr>
+            <a:lvl4pPr marL="1371600" indent="0">
+              <a:buNone/>
+              <a:defRPr sz="1600">
+                <a:solidFill>
+                  <a:schemeClr val="tx1">
+                    <a:tint val="75000"/>
+                  </a:schemeClr>
+                </a:solidFill>
+              </a:defRPr>
+            </a:lvl4pPr>
+            <a:lvl5pPr marL="1828800" indent="0">
+              <a:buNone/>
+              <a:defRPr sz="1600">
+                <a:solidFill>
+                  <a:schemeClr val="tx1">
+                    <a:tint val="75000"/>
+                  </a:schemeClr>
+                </a:solidFill>
+              </a:defRPr>
+            </a:lvl5pPr>
+            <a:lvl6pPr marL="2286000" indent="0">
+              <a:buNone/>
+              <a:defRPr sz="1600">
+                <a:solidFill>
+                  <a:schemeClr val="tx1">
+                    <a:tint val="75000"/>
+                  </a:schemeClr>
+                </a:solidFill>
+              </a:defRPr>
+            </a:lvl6pPr>
+            <a:lvl7pPr marL="2743200" indent="0">
+              <a:buNone/>
+              <a:defRPr sz="1600">
+                <a:solidFill>
+                  <a:schemeClr val="tx1">
+                    <a:tint val="75000"/>
+                  </a:schemeClr>
+                </a:solidFill>
+              </a:defRPr>
+            </a:lvl7pPr>
+            <a:lvl8pPr marL="3200400" indent="0">
+              <a:buNone/>
+              <a:defRPr sz="1600">
+                <a:solidFill>
+                  <a:schemeClr val="tx1">
+                    <a:tint val="75000"/>
+                  </a:schemeClr>
+                </a:solidFill>
+              </a:defRPr>
+            </a:lvl8pPr>
+            <a:lvl9pPr marL="3657600" indent="0">
+              <a:buNone/>
+              <a:defRPr sz="1600">
+                <a:solidFill>
+                  <a:schemeClr val="tx1">
+                    <a:tint val="75000"/>
+                  </a:schemeClr>
+                </a:solidFill>
+              </a:defRPr>
+            </a:lvl9pPr>
+          </a:lstStyle>
+          <a:p>
+            <a:pPr lvl="0"/>
+            <a:r>
+              <a:rPr lang="en-US" dirty="0"/>
+              <a:t>Click to edit Master text styles</a:t>
+            </a:r>
+          </a:p>
+        </p:txBody>
+      </p:sp>
+    </p:spTree>
+    <p:extLst>
+      <p:ext uri="{BB962C8B-B14F-4D97-AF65-F5344CB8AC3E}">
+        <p14:creationId xmlns:p14="http://schemas.microsoft.com/office/powerpoint/2010/main" val="289827292"/>
+      </p:ext>
+    </p:extLst>
+  </p:cSld>
+  <p:clrMapOvr>
+    <a:masterClrMapping/>
+  </p:clrMapOvr>
+  <mc:AlternateContent xmlns:mc="http://schemas.openxmlformats.org/markup-compatibility/2006" xmlns:p14="http://schemas.microsoft.com/office/powerpoint/2010/main">
+    <mc:Choice Requires="p14">
+      <p:transition spd="med" p14:dur="700">
+        <p:fade/>
+      </p:transition>
+    </mc:Choice>
+    <mc:Fallback xmlns="">
+      <p:transition spd="med">
+        <p:fade/>
+      </p:transition>
+    </mc:Fallback>
+  </mc:AlternateContent>
+</p:sldLayout>
+</file>
+
 <file path=ppt/slideLayouts/slideLayout2.xml><?xml version="1.0" encoding="utf-8"?>
 <p:sldLayout xmlns:a="http://schemas.openxmlformats.org/drawingml/2006/main" xmlns:r="http://schemas.openxmlformats.org/officeDocument/2006/relationships" xmlns:p="http://schemas.openxmlformats.org/presentationml/2006/main" type="obj" preserve="1">
   <p:cSld name="제목 및 내용">
@@ -8180,6 +8623,7 @@
     <p:sldLayoutId id="2147484015" r:id="rId10"/>
     <p:sldLayoutId id="2147484016" r:id="rId11"/>
     <p:sldLayoutId id="2147484017" r:id="rId12"/>
+    <p:sldLayoutId id="2147484019" r:id="rId13"/>
   </p:sldLayoutIdLst>
   <p:txStyles>
     <p:titleStyle>
@@ -8926,8 +9370,16 @@
               <a:buNone/>
             </a:pPr>
             <a:r>
-              <a:rPr lang="en-US" altLang="ko-KR" sz="1200"/>
-              <a:t>Courtesy : MIT Prof. Amarasinghe and Dr. Rabbah’s course note</a:t>
+              <a:rPr lang="en-US" altLang="ko-KR" sz="1200" dirty="0"/>
+              <a:t>Courtesy : MIT Prof. </a:t>
+            </a:r>
+            <a:r>
+              <a:rPr lang="en-US" altLang="ko-KR" sz="1200" dirty="0" err="1"/>
+              <a:t>Amarasinghe</a:t>
+            </a:r>
+            <a:r>
+              <a:rPr lang="en-US" altLang="ko-KR" sz="1200" dirty="0"/>
+              <a:t> and Dr. Rabbah’s course note</a:t>
             </a:r>
           </a:p>
           <a:p>
@@ -8941,10 +9393,10 @@
               <a:buNone/>
             </a:pPr>
             <a:r>
-              <a:rPr lang="en-US" altLang="ko-KR" sz="1200"/>
+              <a:rPr lang="en-US" altLang="ko-KR" sz="1200" dirty="0"/>
               <a:t>               Introduction to Parallel Computing (Blaise Barney, LLNL)</a:t>
             </a:r>
-            <a:endParaRPr lang="ko-KR" altLang="en-US" sz="1200"/>
+            <a:endParaRPr lang="ko-KR" altLang="en-US" sz="1200" dirty="0"/>
           </a:p>
         </p:txBody>
       </p:sp>
@@ -8958,6 +9410,215 @@
 </file>
 
 <file path=ppt/slides/slide10.xml><?xml version="1.0" encoding="utf-8"?>
+<p:sld xmlns:a="http://schemas.openxmlformats.org/drawingml/2006/main" xmlns:r="http://schemas.openxmlformats.org/officeDocument/2006/relationships" xmlns:p="http://schemas.openxmlformats.org/presentationml/2006/main">
+  <p:cSld>
+    <p:spTree>
+      <p:nvGrpSpPr>
+        <p:cNvPr id="1" name=""/>
+        <p:cNvGrpSpPr/>
+        <p:nvPr/>
+      </p:nvGrpSpPr>
+      <p:grpSpPr>
+        <a:xfrm>
+          <a:off x="0" y="0"/>
+          <a:ext cx="0" cy="0"/>
+          <a:chOff x="0" y="0"/>
+          <a:chExt cx="0" cy="0"/>
+        </a:xfrm>
+      </p:grpSpPr>
+      <p:sp>
+        <p:nvSpPr>
+          <p:cNvPr id="22529" name="제목 1">
+            <a:extLst>
+              <a:ext uri="{FF2B5EF4-FFF2-40B4-BE49-F238E27FC236}">
+                <a16:creationId xmlns:a16="http://schemas.microsoft.com/office/drawing/2014/main" id="{F43A70CC-6E7B-12BC-D14F-4D568C2E4A4F}"/>
+              </a:ext>
+            </a:extLst>
+          </p:cNvPr>
+          <p:cNvSpPr>
+            <a:spLocks noGrp="1" noChangeArrowheads="1"/>
+          </p:cNvSpPr>
+          <p:nvPr>
+            <p:ph type="title"/>
+          </p:nvPr>
+        </p:nvSpPr>
+        <p:spPr/>
+        <p:txBody>
+          <a:bodyPr/>
+          <a:lstStyle/>
+          <a:p>
+            <a:r>
+              <a:rPr lang="en-US" altLang="ko-KR" b="1" u="sng"/>
+              <a:t>Decomposition</a:t>
+            </a:r>
+            <a:endParaRPr lang="ko-KR" altLang="en-US" b="1" u="sng"/>
+          </a:p>
+        </p:txBody>
+      </p:sp>
+      <p:sp>
+        <p:nvSpPr>
+          <p:cNvPr id="22530" name="내용 개체 틀 2">
+            <a:extLst>
+              <a:ext uri="{FF2B5EF4-FFF2-40B4-BE49-F238E27FC236}">
+                <a16:creationId xmlns:a16="http://schemas.microsoft.com/office/drawing/2014/main" id="{7973E5FC-9CA8-D29C-ADB0-0BCCF19E830A}"/>
+              </a:ext>
+            </a:extLst>
+          </p:cNvPr>
+          <p:cNvSpPr>
+            <a:spLocks noGrp="1" noChangeArrowheads="1"/>
+          </p:cNvSpPr>
+          <p:nvPr>
+            <p:ph idx="1"/>
+          </p:nvPr>
+        </p:nvSpPr>
+        <p:spPr/>
+        <p:txBody>
+          <a:bodyPr/>
+          <a:lstStyle/>
+          <a:p>
+            <a:r>
+              <a:rPr lang="en-US" altLang="ko-KR"/>
+              <a:t>Break up computation into tasks to be divided among processes</a:t>
+            </a:r>
+          </a:p>
+          <a:p>
+            <a:r>
+              <a:rPr lang="en-US" altLang="ko-KR"/>
+              <a:t>identify concurrency and decide level at which to exploit it</a:t>
+            </a:r>
+            <a:endParaRPr lang="ko-KR" altLang="en-US"/>
+          </a:p>
+        </p:txBody>
+      </p:sp>
+      <p:pic>
+        <p:nvPicPr>
+          <p:cNvPr id="22531" name="Picture 4">
+            <a:extLst>
+              <a:ext uri="{FF2B5EF4-FFF2-40B4-BE49-F238E27FC236}">
+                <a16:creationId xmlns:a16="http://schemas.microsoft.com/office/drawing/2014/main" id="{DF9F1759-5D28-C6D9-071D-8F6090B35331}"/>
+              </a:ext>
+            </a:extLst>
+          </p:cNvPr>
+          <p:cNvPicPr>
+            <a:picLocks noChangeAspect="1" noChangeArrowheads="1"/>
+          </p:cNvPicPr>
+          <p:nvPr/>
+        </p:nvPicPr>
+        <p:blipFill>
+          <a:blip r:embed="rId2">
+            <a:extLst>
+              <a:ext uri="{28A0092B-C50C-407E-A947-70E740481C1C}">
+                <a14:useLocalDpi xmlns:a14="http://schemas.microsoft.com/office/drawing/2010/main" val="0"/>
+              </a:ext>
+            </a:extLst>
+          </a:blip>
+          <a:srcRect t="48595"/>
+          <a:stretch>
+            <a:fillRect/>
+          </a:stretch>
+        </p:blipFill>
+        <p:spPr bwMode="auto">
+          <a:xfrm>
+            <a:off x="250825" y="4221163"/>
+            <a:ext cx="4233863" cy="1944687"/>
+          </a:xfrm>
+          <a:prstGeom prst="rect">
+            <a:avLst/>
+          </a:prstGeom>
+          <a:noFill/>
+          <a:ln>
+            <a:noFill/>
+          </a:ln>
+          <a:extLst>
+            <a:ext uri="{909E8E84-426E-40DD-AFC4-6F175D3DCCD1}">
+              <a14:hiddenFill xmlns:a14="http://schemas.microsoft.com/office/drawing/2010/main">
+                <a:solidFill>
+                  <a:srgbClr val="FFFFFF"/>
+                </a:solidFill>
+              </a14:hiddenFill>
+            </a:ext>
+            <a:ext uri="{91240B29-F687-4F45-9708-019B960494DF}">
+              <a14:hiddenLine xmlns:a14="http://schemas.microsoft.com/office/drawing/2010/main" w="9525">
+                <a:solidFill>
+                  <a:srgbClr val="000000"/>
+                </a:solidFill>
+                <a:miter lim="800000"/>
+                <a:headEnd/>
+                <a:tailEnd/>
+              </a14:hiddenLine>
+            </a:ext>
+          </a:extLst>
+        </p:spPr>
+      </p:pic>
+      <p:pic>
+        <p:nvPicPr>
+          <p:cNvPr id="22532" name="Picture 5">
+            <a:extLst>
+              <a:ext uri="{FF2B5EF4-FFF2-40B4-BE49-F238E27FC236}">
+                <a16:creationId xmlns:a16="http://schemas.microsoft.com/office/drawing/2014/main" id="{A93BCB6F-A310-5C8E-7CDA-5DE62459BFE4}"/>
+              </a:ext>
+            </a:extLst>
+          </p:cNvPr>
+          <p:cNvPicPr>
+            <a:picLocks noChangeAspect="1" noChangeArrowheads="1"/>
+          </p:cNvPicPr>
+          <p:nvPr/>
+        </p:nvPicPr>
+        <p:blipFill>
+          <a:blip r:embed="rId3">
+            <a:extLst>
+              <a:ext uri="{28A0092B-C50C-407E-A947-70E740481C1C}">
+                <a14:useLocalDpi xmlns:a14="http://schemas.microsoft.com/office/drawing/2010/main" val="0"/>
+              </a:ext>
+            </a:extLst>
+          </a:blip>
+          <a:srcRect t="47406"/>
+          <a:stretch>
+            <a:fillRect/>
+          </a:stretch>
+        </p:blipFill>
+        <p:spPr bwMode="auto">
+          <a:xfrm>
+            <a:off x="4965700" y="4076700"/>
+            <a:ext cx="3854450" cy="2376488"/>
+          </a:xfrm>
+          <a:prstGeom prst="rect">
+            <a:avLst/>
+          </a:prstGeom>
+          <a:noFill/>
+          <a:ln>
+            <a:noFill/>
+          </a:ln>
+          <a:extLst>
+            <a:ext uri="{909E8E84-426E-40DD-AFC4-6F175D3DCCD1}">
+              <a14:hiddenFill xmlns:a14="http://schemas.microsoft.com/office/drawing/2010/main">
+                <a:solidFill>
+                  <a:srgbClr val="FFFFFF"/>
+                </a:solidFill>
+              </a14:hiddenFill>
+            </a:ext>
+            <a:ext uri="{91240B29-F687-4F45-9708-019B960494DF}">
+              <a14:hiddenLine xmlns:a14="http://schemas.microsoft.com/office/drawing/2010/main" w="9525">
+                <a:solidFill>
+                  <a:srgbClr val="000000"/>
+                </a:solidFill>
+                <a:miter lim="800000"/>
+                <a:headEnd/>
+                <a:tailEnd/>
+              </a14:hiddenLine>
+            </a:ext>
+          </a:extLst>
+        </p:spPr>
+      </p:pic>
+    </p:spTree>
+  </p:cSld>
+  <p:clrMapOvr>
+    <a:masterClrMapping/>
+  </p:clrMapOvr>
+</p:sld>
+</file>
+
+<file path=ppt/slides/slide11.xml><?xml version="1.0" encoding="utf-8"?>
 <p:sld xmlns:a="http://schemas.openxmlformats.org/drawingml/2006/main" xmlns:r="http://schemas.openxmlformats.org/officeDocument/2006/relationships" xmlns:p="http://schemas.openxmlformats.org/presentationml/2006/main">
   <p:cSld>
     <p:spTree>
@@ -9171,7 +9832,7 @@
 </p:sld>
 </file>
 
-<file path=ppt/slides/slide11.xml><?xml version="1.0" encoding="utf-8"?>
+<file path=ppt/slides/slide12.xml><?xml version="1.0" encoding="utf-8"?>
 <p:sld xmlns:a="http://schemas.openxmlformats.org/drawingml/2006/main" xmlns:r="http://schemas.openxmlformats.org/officeDocument/2006/relationships" xmlns:p="http://schemas.openxmlformats.org/presentationml/2006/main">
   <p:cSld>
     <p:spTree>
@@ -9326,7 +9987,7 @@
 </p:sld>
 </file>
 
-<file path=ppt/slides/slide12.xml><?xml version="1.0" encoding="utf-8"?>
+<file path=ppt/slides/slide13.xml><?xml version="1.0" encoding="utf-8"?>
 <p:sld xmlns:a="http://schemas.openxmlformats.org/drawingml/2006/main" xmlns:r="http://schemas.openxmlformats.org/officeDocument/2006/relationships" xmlns:p="http://schemas.openxmlformats.org/presentationml/2006/main">
   <p:cSld>
     <p:spTree>
@@ -9459,7 +10120,7 @@
 </p:sld>
 </file>
 
-<file path=ppt/slides/slide13.xml><?xml version="1.0" encoding="utf-8"?>
+<file path=ppt/slides/slide14.xml><?xml version="1.0" encoding="utf-8"?>
 <p:sld xmlns:a="http://schemas.openxmlformats.org/drawingml/2006/main" xmlns:r="http://schemas.openxmlformats.org/officeDocument/2006/relationships" xmlns:p="http://schemas.openxmlformats.org/presentationml/2006/main">
   <p:cSld>
     <p:spTree>
@@ -9571,7 +10232,7 @@
 </p:sld>
 </file>
 
-<file path=ppt/slides/slide14.xml><?xml version="1.0" encoding="utf-8"?>
+<file path=ppt/slides/slide15.xml><?xml version="1.0" encoding="utf-8"?>
 <p:sld xmlns:a="http://schemas.openxmlformats.org/drawingml/2006/main" xmlns:r="http://schemas.openxmlformats.org/officeDocument/2006/relationships" xmlns:p="http://schemas.openxmlformats.org/presentationml/2006/main">
   <p:cSld>
     <p:spTree>
@@ -9686,7 +10347,7 @@
 </p:sld>
 </file>
 
-<file path=ppt/slides/slide15.xml><?xml version="1.0" encoding="utf-8"?>
+<file path=ppt/slides/slide16.xml><?xml version="1.0" encoding="utf-8"?>
 <p:sld xmlns:a="http://schemas.openxmlformats.org/drawingml/2006/main" xmlns:r="http://schemas.openxmlformats.org/officeDocument/2006/relationships" xmlns:p="http://schemas.openxmlformats.org/presentationml/2006/main">
   <p:cSld>
     <p:spTree>
@@ -9833,7 +10494,7 @@
 </p:sld>
 </file>
 
-<file path=ppt/slides/slide16.xml><?xml version="1.0" encoding="utf-8"?>
+<file path=ppt/slides/slide17.xml><?xml version="1.0" encoding="utf-8"?>
 <p:sld xmlns:a="http://schemas.openxmlformats.org/drawingml/2006/main" xmlns:r="http://schemas.openxmlformats.org/officeDocument/2006/relationships" xmlns:p="http://schemas.openxmlformats.org/presentationml/2006/main">
   <p:cSld>
     <p:spTree>
@@ -9976,7 +10637,7 @@
 </p:sld>
 </file>
 
-<file path=ppt/slides/slide17.xml><?xml version="1.0" encoding="utf-8"?>
+<file path=ppt/slides/slide18.xml><?xml version="1.0" encoding="utf-8"?>
 <p:sld xmlns:a="http://schemas.openxmlformats.org/drawingml/2006/main" xmlns:r="http://schemas.openxmlformats.org/officeDocument/2006/relationships" xmlns:p="http://schemas.openxmlformats.org/presentationml/2006/main">
   <p:cSld>
     <p:spTree>
@@ -10154,7 +10815,7 @@
 </p:sld>
 </file>
 
-<file path=ppt/slides/slide18.xml><?xml version="1.0" encoding="utf-8"?>
+<file path=ppt/slides/slide19.xml><?xml version="1.0" encoding="utf-8"?>
 <p:sld xmlns:a="http://schemas.openxmlformats.org/drawingml/2006/main" xmlns:r="http://schemas.openxmlformats.org/officeDocument/2006/relationships" xmlns:p="http://schemas.openxmlformats.org/presentationml/2006/main">
   <p:cSld>
     <p:spTree>
@@ -10301,107 +10962,6 @@
           </a:extLst>
         </p:spPr>
       </p:pic>
-    </p:spTree>
-  </p:cSld>
-  <p:clrMapOvr>
-    <a:masterClrMapping/>
-  </p:clrMapOvr>
-</p:sld>
-</file>
-
-<file path=ppt/slides/slide19.xml><?xml version="1.0" encoding="utf-8"?>
-<p:sld xmlns:a="http://schemas.openxmlformats.org/drawingml/2006/main" xmlns:r="http://schemas.openxmlformats.org/officeDocument/2006/relationships" xmlns:p="http://schemas.openxmlformats.org/presentationml/2006/main">
-  <p:cSld>
-    <p:spTree>
-      <p:nvGrpSpPr>
-        <p:cNvPr id="1" name=""/>
-        <p:cNvGrpSpPr/>
-        <p:nvPr/>
-      </p:nvGrpSpPr>
-      <p:grpSpPr>
-        <a:xfrm>
-          <a:off x="0" y="0"/>
-          <a:ext cx="0" cy="0"/>
-          <a:chOff x="0" y="0"/>
-          <a:chExt cx="0" cy="0"/>
-        </a:xfrm>
-      </p:grpSpPr>
-      <p:sp>
-        <p:nvSpPr>
-          <p:cNvPr id="32769" name="제목 1">
-            <a:extLst>
-              <a:ext uri="{FF2B5EF4-FFF2-40B4-BE49-F238E27FC236}">
-                <a16:creationId xmlns:a16="http://schemas.microsoft.com/office/drawing/2014/main" id="{5640B87C-FF60-186A-B5A2-3AC96FD1F97B}"/>
-              </a:ext>
-            </a:extLst>
-          </p:cNvPr>
-          <p:cNvSpPr>
-            <a:spLocks noGrp="1" noChangeArrowheads="1"/>
-          </p:cNvSpPr>
-          <p:nvPr>
-            <p:ph type="title"/>
-          </p:nvPr>
-        </p:nvSpPr>
-        <p:spPr/>
-        <p:txBody>
-          <a:bodyPr/>
-          <a:lstStyle/>
-          <a:p>
-            <a:r>
-              <a:rPr lang="en-US" altLang="ko-KR" b="1" u="sng"/>
-              <a:t>Implications of Amdahl’s Law</a:t>
-            </a:r>
-            <a:endParaRPr lang="ko-KR" altLang="en-US"/>
-          </a:p>
-        </p:txBody>
-      </p:sp>
-      <p:sp>
-        <p:nvSpPr>
-          <p:cNvPr id="32770" name="내용 개체 틀 2">
-            <a:extLst>
-              <a:ext uri="{FF2B5EF4-FFF2-40B4-BE49-F238E27FC236}">
-                <a16:creationId xmlns:a16="http://schemas.microsoft.com/office/drawing/2014/main" id="{D10F90B0-5706-95CD-4283-B865D7AB78A1}"/>
-              </a:ext>
-            </a:extLst>
-          </p:cNvPr>
-          <p:cNvSpPr>
-            <a:spLocks noGrp="1" noChangeArrowheads="1"/>
-          </p:cNvSpPr>
-          <p:nvPr>
-            <p:ph idx="1"/>
-          </p:nvPr>
-        </p:nvSpPr>
-        <p:spPr/>
-        <p:txBody>
-          <a:bodyPr/>
-          <a:lstStyle/>
-          <a:p>
-            <a:r>
-              <a:rPr lang="en-US" altLang="ko-KR" sz="2400" dirty="0"/>
-              <a:t>Speedup tends to 1/(1-p) as number of processors tends to infinity</a:t>
-            </a:r>
-          </a:p>
-          <a:p>
-            <a:endParaRPr lang="en-US" altLang="ko-KR" sz="2400" dirty="0"/>
-          </a:p>
-          <a:p>
-            <a:r>
-              <a:rPr lang="en-US" altLang="ko-KR" sz="2400" dirty="0"/>
-              <a:t>Even if the parallel part speeds up perfectly           performance is limited by the sequential part</a:t>
-            </a:r>
-          </a:p>
-          <a:p>
-            <a:endParaRPr lang="en-US" altLang="ko-KR" sz="2400" dirty="0"/>
-          </a:p>
-          <a:p>
-            <a:r>
-              <a:rPr lang="en-US" altLang="ko-KR" sz="2400" dirty="0"/>
-              <a:t>Parallel programming is worthwhile when programs have a lot of work that is parallel in nature</a:t>
-            </a:r>
-            <a:endParaRPr lang="ko-KR" altLang="en-US" sz="2400" dirty="0"/>
-          </a:p>
-        </p:txBody>
-      </p:sp>
     </p:spTree>
   </p:cSld>
   <p:clrMapOvr>
@@ -10568,6 +11128,107 @@
 </file>
 
 <file path=ppt/slides/slide20.xml><?xml version="1.0" encoding="utf-8"?>
+<p:sld xmlns:a="http://schemas.openxmlformats.org/drawingml/2006/main" xmlns:r="http://schemas.openxmlformats.org/officeDocument/2006/relationships" xmlns:p="http://schemas.openxmlformats.org/presentationml/2006/main">
+  <p:cSld>
+    <p:spTree>
+      <p:nvGrpSpPr>
+        <p:cNvPr id="1" name=""/>
+        <p:cNvGrpSpPr/>
+        <p:nvPr/>
+      </p:nvGrpSpPr>
+      <p:grpSpPr>
+        <a:xfrm>
+          <a:off x="0" y="0"/>
+          <a:ext cx="0" cy="0"/>
+          <a:chOff x="0" y="0"/>
+          <a:chExt cx="0" cy="0"/>
+        </a:xfrm>
+      </p:grpSpPr>
+      <p:sp>
+        <p:nvSpPr>
+          <p:cNvPr id="32769" name="제목 1">
+            <a:extLst>
+              <a:ext uri="{FF2B5EF4-FFF2-40B4-BE49-F238E27FC236}">
+                <a16:creationId xmlns:a16="http://schemas.microsoft.com/office/drawing/2014/main" id="{5640B87C-FF60-186A-B5A2-3AC96FD1F97B}"/>
+              </a:ext>
+            </a:extLst>
+          </p:cNvPr>
+          <p:cNvSpPr>
+            <a:spLocks noGrp="1" noChangeArrowheads="1"/>
+          </p:cNvSpPr>
+          <p:nvPr>
+            <p:ph type="title"/>
+          </p:nvPr>
+        </p:nvSpPr>
+        <p:spPr/>
+        <p:txBody>
+          <a:bodyPr/>
+          <a:lstStyle/>
+          <a:p>
+            <a:r>
+              <a:rPr lang="en-US" altLang="ko-KR" b="1" u="sng"/>
+              <a:t>Implications of Amdahl’s Law</a:t>
+            </a:r>
+            <a:endParaRPr lang="ko-KR" altLang="en-US"/>
+          </a:p>
+        </p:txBody>
+      </p:sp>
+      <p:sp>
+        <p:nvSpPr>
+          <p:cNvPr id="32770" name="내용 개체 틀 2">
+            <a:extLst>
+              <a:ext uri="{FF2B5EF4-FFF2-40B4-BE49-F238E27FC236}">
+                <a16:creationId xmlns:a16="http://schemas.microsoft.com/office/drawing/2014/main" id="{D10F90B0-5706-95CD-4283-B865D7AB78A1}"/>
+              </a:ext>
+            </a:extLst>
+          </p:cNvPr>
+          <p:cNvSpPr>
+            <a:spLocks noGrp="1" noChangeArrowheads="1"/>
+          </p:cNvSpPr>
+          <p:nvPr>
+            <p:ph idx="1"/>
+          </p:nvPr>
+        </p:nvSpPr>
+        <p:spPr/>
+        <p:txBody>
+          <a:bodyPr/>
+          <a:lstStyle/>
+          <a:p>
+            <a:r>
+              <a:rPr lang="en-US" altLang="ko-KR" sz="2400" dirty="0"/>
+              <a:t>Speedup tends to 1/(1-p) as number of processors tends to infinity</a:t>
+            </a:r>
+          </a:p>
+          <a:p>
+            <a:endParaRPr lang="en-US" altLang="ko-KR" sz="2400" dirty="0"/>
+          </a:p>
+          <a:p>
+            <a:r>
+              <a:rPr lang="en-US" altLang="ko-KR" sz="2400" dirty="0"/>
+              <a:t>Even if the parallel part speeds up perfectly           performance is limited by the sequential part</a:t>
+            </a:r>
+          </a:p>
+          <a:p>
+            <a:endParaRPr lang="en-US" altLang="ko-KR" sz="2400" dirty="0"/>
+          </a:p>
+          <a:p>
+            <a:r>
+              <a:rPr lang="en-US" altLang="ko-KR" sz="2400" dirty="0"/>
+              <a:t>Parallel programming is worthwhile when programs have a lot of work that is parallel in nature</a:t>
+            </a:r>
+            <a:endParaRPr lang="ko-KR" altLang="en-US" sz="2400" dirty="0"/>
+          </a:p>
+        </p:txBody>
+      </p:sp>
+    </p:spTree>
+  </p:cSld>
+  <p:clrMapOvr>
+    <a:masterClrMapping/>
+  </p:clrMapOvr>
+</p:sld>
+</file>
+
+<file path=ppt/slides/slide21.xml><?xml version="1.0" encoding="utf-8"?>
 <p:sld xmlns:a="http://schemas.openxmlformats.org/drawingml/2006/main" xmlns:r="http://schemas.openxmlformats.org/officeDocument/2006/relationships" xmlns:p="http://schemas.openxmlformats.org/presentationml/2006/main">
   <p:cSld>
     <p:spTree>
@@ -10868,7 +11529,7 @@
 </p:sld>
 </file>
 
-<file path=ppt/slides/slide21.xml><?xml version="1.0" encoding="utf-8"?>
+<file path=ppt/slides/slide22.xml><?xml version="1.0" encoding="utf-8"?>
 <p:sld xmlns:a="http://schemas.openxmlformats.org/drawingml/2006/main" xmlns:r="http://schemas.openxmlformats.org/officeDocument/2006/relationships" xmlns:p="http://schemas.openxmlformats.org/presentationml/2006/main">
   <p:cSld>
     <p:spTree>
@@ -11120,7 +11781,7 @@
 </p:sld>
 </file>
 
-<file path=ppt/slides/slide22.xml><?xml version="1.0" encoding="utf-8"?>
+<file path=ppt/slides/slide23.xml><?xml version="1.0" encoding="utf-8"?>
 <p:sld xmlns:a="http://schemas.openxmlformats.org/drawingml/2006/main" xmlns:r="http://schemas.openxmlformats.org/officeDocument/2006/relationships" xmlns:p="http://schemas.openxmlformats.org/presentationml/2006/main">
   <p:cSld>
     <p:spTree>
@@ -11491,7 +12152,7 @@
 </p:sld>
 </file>
 
-<file path=ppt/slides/slide23.xml><?xml version="1.0" encoding="utf-8"?>
+<file path=ppt/slides/slide24.xml><?xml version="1.0" encoding="utf-8"?>
 <p:sld xmlns:a="http://schemas.openxmlformats.org/drawingml/2006/main" xmlns:r="http://schemas.openxmlformats.org/officeDocument/2006/relationships" xmlns:p="http://schemas.openxmlformats.org/presentationml/2006/main">
   <p:cSld>
     <p:spTree>
@@ -11605,7 +12266,7 @@
 </p:sld>
 </file>
 
-<file path=ppt/slides/slide24.xml><?xml version="1.0" encoding="utf-8"?>
+<file path=ppt/slides/slide25.xml><?xml version="1.0" encoding="utf-8"?>
 <p:sld xmlns:a="http://schemas.openxmlformats.org/drawingml/2006/main" xmlns:r="http://schemas.openxmlformats.org/officeDocument/2006/relationships" xmlns:p="http://schemas.openxmlformats.org/presentationml/2006/main">
   <p:cSld>
     <p:spTree>
@@ -11728,7 +12389,7 @@
 </p:sld>
 </file>
 
-<file path=ppt/slides/slide25.xml><?xml version="1.0" encoding="utf-8"?>
+<file path=ppt/slides/slide26.xml><?xml version="1.0" encoding="utf-8"?>
 <p:sld xmlns:a="http://schemas.openxmlformats.org/drawingml/2006/main" xmlns:r="http://schemas.openxmlformats.org/officeDocument/2006/relationships" xmlns:p="http://schemas.openxmlformats.org/presentationml/2006/main">
   <p:cSld>
     <p:spTree>
@@ -11995,7 +12656,7 @@
 </p:sld>
 </file>
 
-<file path=ppt/slides/slide26.xml><?xml version="1.0" encoding="utf-8"?>
+<file path=ppt/slides/slide27.xml><?xml version="1.0" encoding="utf-8"?>
 <p:sld xmlns:a="http://schemas.openxmlformats.org/drawingml/2006/main" xmlns:r="http://schemas.openxmlformats.org/officeDocument/2006/relationships" xmlns:p="http://schemas.openxmlformats.org/presentationml/2006/main">
   <p:cSld>
     <p:spTree>
@@ -12090,7 +12751,7 @@
 </p:sld>
 </file>
 
-<file path=ppt/slides/slide27.xml><?xml version="1.0" encoding="utf-8"?>
+<file path=ppt/slides/slide28.xml><?xml version="1.0" encoding="utf-8"?>
 <p:sld xmlns:a="http://schemas.openxmlformats.org/drawingml/2006/main" xmlns:r="http://schemas.openxmlformats.org/officeDocument/2006/relationships" xmlns:p="http://schemas.openxmlformats.org/presentationml/2006/main">
   <p:cSld>
     <p:spTree>
@@ -12248,7 +12909,7 @@
 </p:sld>
 </file>
 
-<file path=ppt/slides/slide28.xml><?xml version="1.0" encoding="utf-8"?>
+<file path=ppt/slides/slide29.xml><?xml version="1.0" encoding="utf-8"?>
 <p:sld xmlns:a="http://schemas.openxmlformats.org/drawingml/2006/main" xmlns:r="http://schemas.openxmlformats.org/officeDocument/2006/relationships" xmlns:p="http://schemas.openxmlformats.org/presentationml/2006/main">
   <p:cSld>
     <p:spTree>
@@ -12352,161 +13013,6 @@
           </a:p>
         </p:txBody>
       </p:sp>
-    </p:spTree>
-  </p:cSld>
-  <p:clrMapOvr>
-    <a:masterClrMapping/>
-  </p:clrMapOvr>
-</p:sld>
-</file>
-
-<file path=ppt/slides/slide29.xml><?xml version="1.0" encoding="utf-8"?>
-<p:sld xmlns:a="http://schemas.openxmlformats.org/drawingml/2006/main" xmlns:r="http://schemas.openxmlformats.org/officeDocument/2006/relationships" xmlns:p="http://schemas.openxmlformats.org/presentationml/2006/main">
-  <p:cSld>
-    <p:spTree>
-      <p:nvGrpSpPr>
-        <p:cNvPr id="1" name=""/>
-        <p:cNvGrpSpPr/>
-        <p:nvPr/>
-      </p:nvGrpSpPr>
-      <p:grpSpPr>
-        <a:xfrm>
-          <a:off x="0" y="0"/>
-          <a:ext cx="0" cy="0"/>
-          <a:chOff x="0" y="0"/>
-          <a:chExt cx="0" cy="0"/>
-        </a:xfrm>
-      </p:grpSpPr>
-      <p:sp>
-        <p:nvSpPr>
-          <p:cNvPr id="40961" name="제목 6">
-            <a:extLst>
-              <a:ext uri="{FF2B5EF4-FFF2-40B4-BE49-F238E27FC236}">
-                <a16:creationId xmlns:a16="http://schemas.microsoft.com/office/drawing/2014/main" id="{FDDB823E-27CE-564A-E756-6C8A6930B80D}"/>
-              </a:ext>
-            </a:extLst>
-          </p:cNvPr>
-          <p:cNvSpPr>
-            <a:spLocks noGrp="1" noChangeArrowheads="1"/>
-          </p:cNvSpPr>
-          <p:nvPr>
-            <p:ph type="title"/>
-          </p:nvPr>
-        </p:nvSpPr>
-        <p:spPr/>
-        <p:txBody>
-          <a:bodyPr/>
-          <a:lstStyle/>
-          <a:p>
-            <a:r>
-              <a:rPr lang="en-US" altLang="ko-KR" b="1" u="sng"/>
-              <a:t>Load Balancing Problem</a:t>
-            </a:r>
-            <a:endParaRPr lang="ko-KR" altLang="en-US" b="1" u="sng"/>
-          </a:p>
-        </p:txBody>
-      </p:sp>
-      <p:sp>
-        <p:nvSpPr>
-          <p:cNvPr id="40962" name="내용 개체 틀 7">
-            <a:extLst>
-              <a:ext uri="{FF2B5EF4-FFF2-40B4-BE49-F238E27FC236}">
-                <a16:creationId xmlns:a16="http://schemas.microsoft.com/office/drawing/2014/main" id="{4EB28171-9265-E5F8-C4A8-70D940676E03}"/>
-              </a:ext>
-            </a:extLst>
-          </p:cNvPr>
-          <p:cNvSpPr>
-            <a:spLocks noGrp="1" noChangeArrowheads="1"/>
-          </p:cNvSpPr>
-          <p:nvPr>
-            <p:ph idx="1"/>
-          </p:nvPr>
-        </p:nvSpPr>
-        <p:spPr>
-          <a:xfrm>
-            <a:off x="457200" y="1600200"/>
-            <a:ext cx="8362950" cy="4525963"/>
-          </a:xfrm>
-        </p:spPr>
-        <p:txBody>
-          <a:bodyPr/>
-          <a:lstStyle/>
-          <a:p>
-            <a:r>
-              <a:rPr lang="en-US" altLang="ko-KR" sz="2400"/>
-              <a:t>Processors that finish early have to wait for the processor with the largest amount of work to complete</a:t>
-            </a:r>
-          </a:p>
-          <a:p>
-            <a:pPr lvl="1"/>
-            <a:r>
-              <a:rPr lang="en-US" altLang="ko-KR" sz="2000"/>
-              <a:t>Leads to idle time, lowers utilization</a:t>
-            </a:r>
-            <a:endParaRPr lang="ko-KR" altLang="en-US" sz="2000"/>
-          </a:p>
-        </p:txBody>
-      </p:sp>
-      <p:pic>
-        <p:nvPicPr>
-          <p:cNvPr id="40963" name="Picture 2">
-            <a:extLst>
-              <a:ext uri="{FF2B5EF4-FFF2-40B4-BE49-F238E27FC236}">
-                <a16:creationId xmlns:a16="http://schemas.microsoft.com/office/drawing/2014/main" id="{A97914FB-6487-595C-9C45-B2F36AF81B35}"/>
-              </a:ext>
-            </a:extLst>
-          </p:cNvPr>
-          <p:cNvPicPr>
-            <a:picLocks noChangeAspect="1" noChangeArrowheads="1"/>
-          </p:cNvPicPr>
-          <p:nvPr/>
-        </p:nvPicPr>
-        <p:blipFill>
-          <a:blip r:embed="rId2">
-            <a:extLst>
-              <a:ext uri="{28A0092B-C50C-407E-A947-70E740481C1C}">
-                <a14:useLocalDpi xmlns:a14="http://schemas.microsoft.com/office/drawing/2010/main" val="0"/>
-              </a:ext>
-            </a:extLst>
-          </a:blip>
-          <a:srcRect/>
-          <a:stretch>
-            <a:fillRect/>
-          </a:stretch>
-        </p:blipFill>
-        <p:spPr bwMode="auto">
-          <a:xfrm>
-            <a:off x="179388" y="2890838"/>
-            <a:ext cx="8856662" cy="3851275"/>
-          </a:xfrm>
-          <a:prstGeom prst="rect">
-            <a:avLst/>
-          </a:prstGeom>
-          <a:noFill/>
-          <a:ln>
-            <a:noFill/>
-          </a:ln>
-          <a:extLst>
-            <a:ext uri="{909E8E84-426E-40DD-AFC4-6F175D3DCCD1}">
-              <a14:hiddenFill xmlns:a14="http://schemas.microsoft.com/office/drawing/2010/main">
-                <a:solidFill>
-                  <a:srgbClr val="FFFFFF"/>
-                </a:solidFill>
-              </a14:hiddenFill>
-            </a:ext>
-            <a:ext uri="{91240B29-F687-4F45-9708-019B960494DF}">
-              <a14:hiddenLine xmlns:a14="http://schemas.microsoft.com/office/drawing/2010/main" w="9525">
-                <a:solidFill>
-                  <a:srgbClr val="000000"/>
-                </a:solidFill>
-                <a:miter lim="800000"/>
-                <a:headEnd/>
-                <a:tailEnd/>
-              </a14:hiddenLine>
-            </a:ext>
-          </a:extLst>
-        </p:spPr>
-      </p:pic>
     </p:spTree>
   </p:cSld>
   <p:clrMapOvr>
@@ -12688,6 +13194,161 @@
       </p:grpSpPr>
       <p:sp>
         <p:nvSpPr>
+          <p:cNvPr id="40961" name="제목 6">
+            <a:extLst>
+              <a:ext uri="{FF2B5EF4-FFF2-40B4-BE49-F238E27FC236}">
+                <a16:creationId xmlns:a16="http://schemas.microsoft.com/office/drawing/2014/main" id="{FDDB823E-27CE-564A-E756-6C8A6930B80D}"/>
+              </a:ext>
+            </a:extLst>
+          </p:cNvPr>
+          <p:cNvSpPr>
+            <a:spLocks noGrp="1" noChangeArrowheads="1"/>
+          </p:cNvSpPr>
+          <p:nvPr>
+            <p:ph type="title"/>
+          </p:nvPr>
+        </p:nvSpPr>
+        <p:spPr/>
+        <p:txBody>
+          <a:bodyPr/>
+          <a:lstStyle/>
+          <a:p>
+            <a:r>
+              <a:rPr lang="en-US" altLang="ko-KR" b="1" u="sng"/>
+              <a:t>Load Balancing Problem</a:t>
+            </a:r>
+            <a:endParaRPr lang="ko-KR" altLang="en-US" b="1" u="sng"/>
+          </a:p>
+        </p:txBody>
+      </p:sp>
+      <p:sp>
+        <p:nvSpPr>
+          <p:cNvPr id="40962" name="내용 개체 틀 7">
+            <a:extLst>
+              <a:ext uri="{FF2B5EF4-FFF2-40B4-BE49-F238E27FC236}">
+                <a16:creationId xmlns:a16="http://schemas.microsoft.com/office/drawing/2014/main" id="{4EB28171-9265-E5F8-C4A8-70D940676E03}"/>
+              </a:ext>
+            </a:extLst>
+          </p:cNvPr>
+          <p:cNvSpPr>
+            <a:spLocks noGrp="1" noChangeArrowheads="1"/>
+          </p:cNvSpPr>
+          <p:nvPr>
+            <p:ph idx="1"/>
+          </p:nvPr>
+        </p:nvSpPr>
+        <p:spPr>
+          <a:xfrm>
+            <a:off x="457200" y="1600200"/>
+            <a:ext cx="8362950" cy="4525963"/>
+          </a:xfrm>
+        </p:spPr>
+        <p:txBody>
+          <a:bodyPr/>
+          <a:lstStyle/>
+          <a:p>
+            <a:r>
+              <a:rPr lang="en-US" altLang="ko-KR" sz="2400"/>
+              <a:t>Processors that finish early have to wait for the processor with the largest amount of work to complete</a:t>
+            </a:r>
+          </a:p>
+          <a:p>
+            <a:pPr lvl="1"/>
+            <a:r>
+              <a:rPr lang="en-US" altLang="ko-KR" sz="2000"/>
+              <a:t>Leads to idle time, lowers utilization</a:t>
+            </a:r>
+            <a:endParaRPr lang="ko-KR" altLang="en-US" sz="2000"/>
+          </a:p>
+        </p:txBody>
+      </p:sp>
+      <p:pic>
+        <p:nvPicPr>
+          <p:cNvPr id="40963" name="Picture 2">
+            <a:extLst>
+              <a:ext uri="{FF2B5EF4-FFF2-40B4-BE49-F238E27FC236}">
+                <a16:creationId xmlns:a16="http://schemas.microsoft.com/office/drawing/2014/main" id="{A97914FB-6487-595C-9C45-B2F36AF81B35}"/>
+              </a:ext>
+            </a:extLst>
+          </p:cNvPr>
+          <p:cNvPicPr>
+            <a:picLocks noChangeAspect="1" noChangeArrowheads="1"/>
+          </p:cNvPicPr>
+          <p:nvPr/>
+        </p:nvPicPr>
+        <p:blipFill>
+          <a:blip r:embed="rId2">
+            <a:extLst>
+              <a:ext uri="{28A0092B-C50C-407E-A947-70E740481C1C}">
+                <a14:useLocalDpi xmlns:a14="http://schemas.microsoft.com/office/drawing/2010/main" val="0"/>
+              </a:ext>
+            </a:extLst>
+          </a:blip>
+          <a:srcRect/>
+          <a:stretch>
+            <a:fillRect/>
+          </a:stretch>
+        </p:blipFill>
+        <p:spPr bwMode="auto">
+          <a:xfrm>
+            <a:off x="179388" y="2890838"/>
+            <a:ext cx="8856662" cy="3851275"/>
+          </a:xfrm>
+          <a:prstGeom prst="rect">
+            <a:avLst/>
+          </a:prstGeom>
+          <a:noFill/>
+          <a:ln>
+            <a:noFill/>
+          </a:ln>
+          <a:extLst>
+            <a:ext uri="{909E8E84-426E-40DD-AFC4-6F175D3DCCD1}">
+              <a14:hiddenFill xmlns:a14="http://schemas.microsoft.com/office/drawing/2010/main">
+                <a:solidFill>
+                  <a:srgbClr val="FFFFFF"/>
+                </a:solidFill>
+              </a14:hiddenFill>
+            </a:ext>
+            <a:ext uri="{91240B29-F687-4F45-9708-019B960494DF}">
+              <a14:hiddenLine xmlns:a14="http://schemas.microsoft.com/office/drawing/2010/main" w="9525">
+                <a:solidFill>
+                  <a:srgbClr val="000000"/>
+                </a:solidFill>
+                <a:miter lim="800000"/>
+                <a:headEnd/>
+                <a:tailEnd/>
+              </a14:hiddenLine>
+            </a:ext>
+          </a:extLst>
+        </p:spPr>
+      </p:pic>
+    </p:spTree>
+  </p:cSld>
+  <p:clrMapOvr>
+    <a:masterClrMapping/>
+  </p:clrMapOvr>
+</p:sld>
+</file>
+
+<file path=ppt/slides/slide31.xml><?xml version="1.0" encoding="utf-8"?>
+<p:sld xmlns:a="http://schemas.openxmlformats.org/drawingml/2006/main" xmlns:r="http://schemas.openxmlformats.org/officeDocument/2006/relationships" xmlns:p="http://schemas.openxmlformats.org/presentationml/2006/main">
+  <p:cSld>
+    <p:spTree>
+      <p:nvGrpSpPr>
+        <p:cNvPr id="1" name=""/>
+        <p:cNvGrpSpPr/>
+        <p:nvPr/>
+      </p:nvGrpSpPr>
+      <p:grpSpPr>
+        <a:xfrm>
+          <a:off x="0" y="0"/>
+          <a:ext cx="0" cy="0"/>
+          <a:chOff x="0" y="0"/>
+          <a:chExt cx="0" cy="0"/>
+        </a:xfrm>
+      </p:grpSpPr>
+      <p:sp>
+        <p:nvSpPr>
           <p:cNvPr id="41985" name="제목 1">
             <a:extLst>
               <a:ext uri="{FF2B5EF4-FFF2-40B4-BE49-F238E27FC236}">
@@ -12858,7 +13519,7 @@
 </p:sld>
 </file>
 
-<file path=ppt/slides/slide31.xml><?xml version="1.0" encoding="utf-8"?>
+<file path=ppt/slides/slide32.xml><?xml version="1.0" encoding="utf-8"?>
 <p:sld xmlns:a="http://schemas.openxmlformats.org/drawingml/2006/main" xmlns:r="http://schemas.openxmlformats.org/officeDocument/2006/relationships" xmlns:p="http://schemas.openxmlformats.org/presentationml/2006/main">
   <p:cSld>
     <p:spTree>
@@ -13019,7 +13680,7 @@
 </p:sld>
 </file>
 
-<file path=ppt/slides/slide32.xml><?xml version="1.0" encoding="utf-8"?>
+<file path=ppt/slides/slide33.xml><?xml version="1.0" encoding="utf-8"?>
 <p:sld xmlns:a="http://schemas.openxmlformats.org/drawingml/2006/main" xmlns:r="http://schemas.openxmlformats.org/officeDocument/2006/relationships" xmlns:p="http://schemas.openxmlformats.org/presentationml/2006/main">
   <p:cSld>
     <p:spTree>
@@ -13144,7 +13805,7 @@
 </p:sld>
 </file>
 
-<file path=ppt/slides/slide33.xml><?xml version="1.0" encoding="utf-8"?>
+<file path=ppt/slides/slide34.xml><?xml version="1.0" encoding="utf-8"?>
 <p:sld xmlns:a="http://schemas.openxmlformats.org/drawingml/2006/main" xmlns:r="http://schemas.openxmlformats.org/officeDocument/2006/relationships" xmlns:p="http://schemas.openxmlformats.org/presentationml/2006/main">
   <p:cSld>
     <p:spTree>
@@ -13255,7 +13916,7 @@
 </p:sld>
 </file>
 
-<file path=ppt/slides/slide34.xml><?xml version="1.0" encoding="utf-8"?>
+<file path=ppt/slides/slide35.xml><?xml version="1.0" encoding="utf-8"?>
 <p:sld xmlns:a="http://schemas.openxmlformats.org/drawingml/2006/main" xmlns:r="http://schemas.openxmlformats.org/officeDocument/2006/relationships" xmlns:p="http://schemas.openxmlformats.org/presentationml/2006/main">
   <p:cSld>
     <p:spTree>
@@ -13351,7 +14012,7 @@
 </p:sld>
 </file>
 
-<file path=ppt/slides/slide35.xml><?xml version="1.0" encoding="utf-8"?>
+<file path=ppt/slides/slide36.xml><?xml version="1.0" encoding="utf-8"?>
 <p:sld xmlns:a="http://schemas.openxmlformats.org/drawingml/2006/main" xmlns:r="http://schemas.openxmlformats.org/officeDocument/2006/relationships" xmlns:p="http://schemas.openxmlformats.org/presentationml/2006/main">
   <p:cSld>
     <p:spTree>
@@ -13476,7 +14137,7 @@
 </p:sld>
 </file>
 
-<file path=ppt/slides/slide36.xml><?xml version="1.0" encoding="utf-8"?>
+<file path=ppt/slides/slide37.xml><?xml version="1.0" encoding="utf-8"?>
 <p:sld xmlns:a="http://schemas.openxmlformats.org/drawingml/2006/main" xmlns:r="http://schemas.openxmlformats.org/officeDocument/2006/relationships" xmlns:p="http://schemas.openxmlformats.org/presentationml/2006/main">
   <p:cSld>
     <p:spTree>
@@ -13656,7 +14317,7 @@
 </p:sld>
 </file>
 
-<file path=ppt/slides/slide37.xml><?xml version="1.0" encoding="utf-8"?>
+<file path=ppt/slides/slide38.xml><?xml version="1.0" encoding="utf-8"?>
 <p:sld xmlns:a="http://schemas.openxmlformats.org/drawingml/2006/main" xmlns:r="http://schemas.openxmlformats.org/officeDocument/2006/relationships" xmlns:p="http://schemas.openxmlformats.org/presentationml/2006/main">
   <p:cSld>
     <p:spTree>
@@ -13781,7 +14442,7 @@
 </p:sld>
 </file>
 
-<file path=ppt/slides/slide38.xml><?xml version="1.0" encoding="utf-8"?>
+<file path=ppt/slides/slide39.xml><?xml version="1.0" encoding="utf-8"?>
 <p:sld xmlns:a="http://schemas.openxmlformats.org/drawingml/2006/main" xmlns:r="http://schemas.openxmlformats.org/officeDocument/2006/relationships" xmlns:p="http://schemas.openxmlformats.org/presentationml/2006/main">
   <p:cSld>
     <p:spTree>
@@ -13931,145 +14592,6 @@
           <a:xfrm>
             <a:off x="5572125" y="2708275"/>
             <a:ext cx="3319463" cy="1368425"/>
-          </a:xfrm>
-          <a:prstGeom prst="rect">
-            <a:avLst/>
-          </a:prstGeom>
-          <a:noFill/>
-          <a:ln>
-            <a:noFill/>
-          </a:ln>
-          <a:extLst>
-            <a:ext uri="{909E8E84-426E-40DD-AFC4-6F175D3DCCD1}">
-              <a14:hiddenFill xmlns:a14="http://schemas.microsoft.com/office/drawing/2010/main">
-                <a:solidFill>
-                  <a:srgbClr val="FFFFFF"/>
-                </a:solidFill>
-              </a14:hiddenFill>
-            </a:ext>
-            <a:ext uri="{91240B29-F687-4F45-9708-019B960494DF}">
-              <a14:hiddenLine xmlns:a14="http://schemas.microsoft.com/office/drawing/2010/main" w="9525">
-                <a:solidFill>
-                  <a:srgbClr val="000000"/>
-                </a:solidFill>
-                <a:miter lim="800000"/>
-                <a:headEnd/>
-                <a:tailEnd/>
-              </a14:hiddenLine>
-            </a:ext>
-          </a:extLst>
-        </p:spPr>
-      </p:pic>
-    </p:spTree>
-  </p:cSld>
-  <p:clrMapOvr>
-    <a:masterClrMapping/>
-  </p:clrMapOvr>
-</p:sld>
-</file>
-
-<file path=ppt/slides/slide39.xml><?xml version="1.0" encoding="utf-8"?>
-<p:sld xmlns:a="http://schemas.openxmlformats.org/drawingml/2006/main" xmlns:r="http://schemas.openxmlformats.org/officeDocument/2006/relationships" xmlns:p="http://schemas.openxmlformats.org/presentationml/2006/main">
-  <p:cSld>
-    <p:spTree>
-      <p:nvGrpSpPr>
-        <p:cNvPr id="1" name=""/>
-        <p:cNvGrpSpPr/>
-        <p:nvPr/>
-      </p:nvGrpSpPr>
-      <p:grpSpPr>
-        <a:xfrm>
-          <a:off x="0" y="0"/>
-          <a:ext cx="0" cy="0"/>
-          <a:chOff x="0" y="0"/>
-          <a:chExt cx="0" cy="0"/>
-        </a:xfrm>
-      </p:grpSpPr>
-      <p:sp>
-        <p:nvSpPr>
-          <p:cNvPr id="51201" name="제목 1">
-            <a:extLst>
-              <a:ext uri="{FF2B5EF4-FFF2-40B4-BE49-F238E27FC236}">
-                <a16:creationId xmlns:a16="http://schemas.microsoft.com/office/drawing/2014/main" id="{7257064B-F115-0903-384E-B520467C3EFF}"/>
-              </a:ext>
-            </a:extLst>
-          </p:cNvPr>
-          <p:cNvSpPr>
-            <a:spLocks noGrp="1" noChangeArrowheads="1"/>
-          </p:cNvSpPr>
-          <p:nvPr>
-            <p:ph type="title"/>
-          </p:nvPr>
-        </p:nvSpPr>
-        <p:spPr/>
-        <p:txBody>
-          <a:bodyPr/>
-          <a:lstStyle/>
-          <a:p>
-            <a:r>
-              <a:rPr lang="en-US" altLang="ko-KR" sz="3200" b="1" u="sng"/>
-              <a:t>Synchronous vs. Asynchronous Messages</a:t>
-            </a:r>
-            <a:endParaRPr lang="ko-KR" altLang="en-US" sz="3200" u="sng"/>
-          </a:p>
-        </p:txBody>
-      </p:sp>
-      <p:sp>
-        <p:nvSpPr>
-          <p:cNvPr id="51202" name="내용 개체 틀 2">
-            <a:extLst>
-              <a:ext uri="{FF2B5EF4-FFF2-40B4-BE49-F238E27FC236}">
-                <a16:creationId xmlns:a16="http://schemas.microsoft.com/office/drawing/2014/main" id="{324B7CC1-AE38-99AC-7352-621DDB6E8EBA}"/>
-              </a:ext>
-            </a:extLst>
-          </p:cNvPr>
-          <p:cNvSpPr>
-            <a:spLocks noGrp="1" noChangeArrowheads="1"/>
-          </p:cNvSpPr>
-          <p:nvPr>
-            <p:ph idx="1"/>
-          </p:nvPr>
-        </p:nvSpPr>
-        <p:spPr/>
-        <p:txBody>
-          <a:bodyPr/>
-          <a:lstStyle/>
-          <a:p>
-            <a:endParaRPr lang="ko-KR" altLang="en-US"/>
-          </a:p>
-        </p:txBody>
-      </p:sp>
-      <p:pic>
-        <p:nvPicPr>
-          <p:cNvPr id="51203" name="Picture 2">
-            <a:extLst>
-              <a:ext uri="{FF2B5EF4-FFF2-40B4-BE49-F238E27FC236}">
-                <a16:creationId xmlns:a16="http://schemas.microsoft.com/office/drawing/2014/main" id="{E634FE97-0B86-431C-503D-8D08E70B9A95}"/>
-              </a:ext>
-            </a:extLst>
-          </p:cNvPr>
-          <p:cNvPicPr>
-            <a:picLocks noChangeAspect="1" noChangeArrowheads="1"/>
-          </p:cNvPicPr>
-          <p:nvPr/>
-        </p:nvPicPr>
-        <p:blipFill>
-          <a:blip r:embed="rId2">
-            <a:extLst>
-              <a:ext uri="{28A0092B-C50C-407E-A947-70E740481C1C}">
-                <a14:useLocalDpi xmlns:a14="http://schemas.microsoft.com/office/drawing/2010/main" val="0"/>
-              </a:ext>
-            </a:extLst>
-          </a:blip>
-          <a:srcRect/>
-          <a:stretch>
-            <a:fillRect/>
-          </a:stretch>
-        </p:blipFill>
-        <p:spPr bwMode="auto">
-          <a:xfrm>
-            <a:off x="468313" y="1341438"/>
-            <a:ext cx="8170862" cy="5313362"/>
           </a:xfrm>
           <a:prstGeom prst="rect">
             <a:avLst/>
@@ -14653,6 +15175,145 @@
       </p:grpSpPr>
       <p:sp>
         <p:nvSpPr>
+          <p:cNvPr id="51201" name="제목 1">
+            <a:extLst>
+              <a:ext uri="{FF2B5EF4-FFF2-40B4-BE49-F238E27FC236}">
+                <a16:creationId xmlns:a16="http://schemas.microsoft.com/office/drawing/2014/main" id="{7257064B-F115-0903-384E-B520467C3EFF}"/>
+              </a:ext>
+            </a:extLst>
+          </p:cNvPr>
+          <p:cNvSpPr>
+            <a:spLocks noGrp="1" noChangeArrowheads="1"/>
+          </p:cNvSpPr>
+          <p:nvPr>
+            <p:ph type="title"/>
+          </p:nvPr>
+        </p:nvSpPr>
+        <p:spPr/>
+        <p:txBody>
+          <a:bodyPr/>
+          <a:lstStyle/>
+          <a:p>
+            <a:r>
+              <a:rPr lang="en-US" altLang="ko-KR" sz="3200" b="1" u="sng"/>
+              <a:t>Synchronous vs. Asynchronous Messages</a:t>
+            </a:r>
+            <a:endParaRPr lang="ko-KR" altLang="en-US" sz="3200" u="sng"/>
+          </a:p>
+        </p:txBody>
+      </p:sp>
+      <p:sp>
+        <p:nvSpPr>
+          <p:cNvPr id="51202" name="내용 개체 틀 2">
+            <a:extLst>
+              <a:ext uri="{FF2B5EF4-FFF2-40B4-BE49-F238E27FC236}">
+                <a16:creationId xmlns:a16="http://schemas.microsoft.com/office/drawing/2014/main" id="{324B7CC1-AE38-99AC-7352-621DDB6E8EBA}"/>
+              </a:ext>
+            </a:extLst>
+          </p:cNvPr>
+          <p:cNvSpPr>
+            <a:spLocks noGrp="1" noChangeArrowheads="1"/>
+          </p:cNvSpPr>
+          <p:nvPr>
+            <p:ph idx="1"/>
+          </p:nvPr>
+        </p:nvSpPr>
+        <p:spPr/>
+        <p:txBody>
+          <a:bodyPr/>
+          <a:lstStyle/>
+          <a:p>
+            <a:endParaRPr lang="ko-KR" altLang="en-US"/>
+          </a:p>
+        </p:txBody>
+      </p:sp>
+      <p:pic>
+        <p:nvPicPr>
+          <p:cNvPr id="51203" name="Picture 2">
+            <a:extLst>
+              <a:ext uri="{FF2B5EF4-FFF2-40B4-BE49-F238E27FC236}">
+                <a16:creationId xmlns:a16="http://schemas.microsoft.com/office/drawing/2014/main" id="{E634FE97-0B86-431C-503D-8D08E70B9A95}"/>
+              </a:ext>
+            </a:extLst>
+          </p:cNvPr>
+          <p:cNvPicPr>
+            <a:picLocks noChangeAspect="1" noChangeArrowheads="1"/>
+          </p:cNvPicPr>
+          <p:nvPr/>
+        </p:nvPicPr>
+        <p:blipFill>
+          <a:blip r:embed="rId2">
+            <a:extLst>
+              <a:ext uri="{28A0092B-C50C-407E-A947-70E740481C1C}">
+                <a14:useLocalDpi xmlns:a14="http://schemas.microsoft.com/office/drawing/2010/main" val="0"/>
+              </a:ext>
+            </a:extLst>
+          </a:blip>
+          <a:srcRect/>
+          <a:stretch>
+            <a:fillRect/>
+          </a:stretch>
+        </p:blipFill>
+        <p:spPr bwMode="auto">
+          <a:xfrm>
+            <a:off x="468313" y="1341438"/>
+            <a:ext cx="8170862" cy="5313362"/>
+          </a:xfrm>
+          <a:prstGeom prst="rect">
+            <a:avLst/>
+          </a:prstGeom>
+          <a:noFill/>
+          <a:ln>
+            <a:noFill/>
+          </a:ln>
+          <a:extLst>
+            <a:ext uri="{909E8E84-426E-40DD-AFC4-6F175D3DCCD1}">
+              <a14:hiddenFill xmlns:a14="http://schemas.microsoft.com/office/drawing/2010/main">
+                <a:solidFill>
+                  <a:srgbClr val="FFFFFF"/>
+                </a:solidFill>
+              </a14:hiddenFill>
+            </a:ext>
+            <a:ext uri="{91240B29-F687-4F45-9708-019B960494DF}">
+              <a14:hiddenLine xmlns:a14="http://schemas.microsoft.com/office/drawing/2010/main" w="9525">
+                <a:solidFill>
+                  <a:srgbClr val="000000"/>
+                </a:solidFill>
+                <a:miter lim="800000"/>
+                <a:headEnd/>
+                <a:tailEnd/>
+              </a14:hiddenLine>
+            </a:ext>
+          </a:extLst>
+        </p:spPr>
+      </p:pic>
+    </p:spTree>
+  </p:cSld>
+  <p:clrMapOvr>
+    <a:masterClrMapping/>
+  </p:clrMapOvr>
+</p:sld>
+</file>
+
+<file path=ppt/slides/slide41.xml><?xml version="1.0" encoding="utf-8"?>
+<p:sld xmlns:a="http://schemas.openxmlformats.org/drawingml/2006/main" xmlns:r="http://schemas.openxmlformats.org/officeDocument/2006/relationships" xmlns:p="http://schemas.openxmlformats.org/presentationml/2006/main">
+  <p:cSld>
+    <p:spTree>
+      <p:nvGrpSpPr>
+        <p:cNvPr id="1" name=""/>
+        <p:cNvGrpSpPr/>
+        <p:nvPr/>
+      </p:nvGrpSpPr>
+      <p:grpSpPr>
+        <a:xfrm>
+          <a:off x="0" y="0"/>
+          <a:ext cx="0" cy="0"/>
+          <a:chOff x="0" y="0"/>
+          <a:chExt cx="0" cy="0"/>
+        </a:xfrm>
+      </p:grpSpPr>
+      <p:sp>
+        <p:nvSpPr>
           <p:cNvPr id="52225" name="제목 1">
             <a:extLst>
               <a:ext uri="{FF2B5EF4-FFF2-40B4-BE49-F238E27FC236}">
@@ -14773,7 +15434,7 @@
 </p:sld>
 </file>
 
-<file path=ppt/slides/slide41.xml><?xml version="1.0" encoding="utf-8"?>
+<file path=ppt/slides/slide42.xml><?xml version="1.0" encoding="utf-8"?>
 <p:sld xmlns:a="http://schemas.openxmlformats.org/drawingml/2006/main" xmlns:r="http://schemas.openxmlformats.org/officeDocument/2006/relationships" xmlns:p="http://schemas.openxmlformats.org/presentationml/2006/main">
   <p:cSld>
     <p:spTree>
@@ -14912,7 +15573,7 @@
 </p:sld>
 </file>
 
-<file path=ppt/slides/slide42.xml><?xml version="1.0" encoding="utf-8"?>
+<file path=ppt/slides/slide43.xml><?xml version="1.0" encoding="utf-8"?>
 <p:sld xmlns:a="http://schemas.openxmlformats.org/drawingml/2006/main" xmlns:r="http://schemas.openxmlformats.org/officeDocument/2006/relationships" xmlns:p="http://schemas.openxmlformats.org/presentationml/2006/main">
   <p:cSld>
     <p:spTree>
@@ -15050,7 +15711,7 @@
 </p:sld>
 </file>
 
-<file path=ppt/slides/slide43.xml><?xml version="1.0" encoding="utf-8"?>
+<file path=ppt/slides/slide44.xml><?xml version="1.0" encoding="utf-8"?>
 <p:sld xmlns:a="http://schemas.openxmlformats.org/drawingml/2006/main" xmlns:r="http://schemas.openxmlformats.org/officeDocument/2006/relationships" xmlns:p="http://schemas.openxmlformats.org/presentationml/2006/main">
   <p:cSld>
     <p:spTree>
@@ -15189,7 +15850,7 @@
 </p:sld>
 </file>
 
-<file path=ppt/slides/slide44.xml><?xml version="1.0" encoding="utf-8"?>
+<file path=ppt/slides/slide45.xml><?xml version="1.0" encoding="utf-8"?>
 <p:sld xmlns:a="http://schemas.openxmlformats.org/drawingml/2006/main" xmlns:r="http://schemas.openxmlformats.org/officeDocument/2006/relationships" xmlns:p="http://schemas.openxmlformats.org/presentationml/2006/main">
   <p:cSld>
     <p:spTree>
@@ -15328,7 +15989,7 @@
 </p:sld>
 </file>
 
-<file path=ppt/slides/slide45.xml><?xml version="1.0" encoding="utf-8"?>
+<file path=ppt/slides/slide46.xml><?xml version="1.0" encoding="utf-8"?>
 <p:sld xmlns:a="http://schemas.openxmlformats.org/drawingml/2006/main" xmlns:r="http://schemas.openxmlformats.org/officeDocument/2006/relationships" xmlns:p="http://schemas.openxmlformats.org/presentationml/2006/main">
   <p:cSld>
     <p:spTree>
@@ -15457,7 +16118,7 @@
 </p:sld>
 </file>
 
-<file path=ppt/slides/slide46.xml><?xml version="1.0" encoding="utf-8"?>
+<file path=ppt/slides/slide47.xml><?xml version="1.0" encoding="utf-8"?>
 <p:sld xmlns:a="http://schemas.openxmlformats.org/drawingml/2006/main" xmlns:r="http://schemas.openxmlformats.org/officeDocument/2006/relationships" xmlns:p="http://schemas.openxmlformats.org/presentationml/2006/main">
   <p:cSld>
     <p:spTree>
@@ -25701,7 +26362,7 @@
 </p:sld>
 </file>
 
-<file path=ppt/slides/slide47.xml><?xml version="1.0" encoding="utf-8"?>
+<file path=ppt/slides/slide48.xml><?xml version="1.0" encoding="utf-8"?>
 <p:sld xmlns:a="http://schemas.openxmlformats.org/drawingml/2006/main" xmlns:r="http://schemas.openxmlformats.org/officeDocument/2006/relationships" xmlns:p="http://schemas.openxmlformats.org/presentationml/2006/main">
   <p:cSld>
     <p:spTree>
@@ -25847,7 +26508,7 @@
 </p:sld>
 </file>
 
-<file path=ppt/slides/slide48.xml><?xml version="1.0" encoding="utf-8"?>
+<file path=ppt/slides/slide49.xml><?xml version="1.0" encoding="utf-8"?>
 <p:sld xmlns:a="http://schemas.openxmlformats.org/drawingml/2006/main" xmlns:r="http://schemas.openxmlformats.org/officeDocument/2006/relationships" xmlns:p="http://schemas.openxmlformats.org/presentationml/2006/main">
   <p:cSld>
     <p:spTree>
@@ -25931,274 +26592,6 @@
           <a:xfrm>
             <a:off x="684213" y="1587500"/>
             <a:ext cx="7920037" cy="4797425"/>
-          </a:xfrm>
-          <a:prstGeom prst="rect">
-            <a:avLst/>
-          </a:prstGeom>
-          <a:noFill/>
-          <a:ln>
-            <a:noFill/>
-          </a:ln>
-          <a:extLst>
-            <a:ext uri="{909E8E84-426E-40DD-AFC4-6F175D3DCCD1}">
-              <a14:hiddenFill xmlns:a14="http://schemas.microsoft.com/office/drawing/2010/main">
-                <a:solidFill>
-                  <a:srgbClr val="FFFFFF"/>
-                </a:solidFill>
-              </a14:hiddenFill>
-            </a:ext>
-            <a:ext uri="{91240B29-F687-4F45-9708-019B960494DF}">
-              <a14:hiddenLine xmlns:a14="http://schemas.microsoft.com/office/drawing/2010/main" w="9525">
-                <a:solidFill>
-                  <a:srgbClr val="000000"/>
-                </a:solidFill>
-                <a:miter lim="800000"/>
-                <a:headEnd/>
-                <a:tailEnd/>
-              </a14:hiddenLine>
-            </a:ext>
-          </a:extLst>
-        </p:spPr>
-      </p:pic>
-    </p:spTree>
-  </p:cSld>
-  <p:clrMapOvr>
-    <a:masterClrMapping/>
-  </p:clrMapOvr>
-</p:sld>
-</file>
-
-<file path=ppt/slides/slide49.xml><?xml version="1.0" encoding="utf-8"?>
-<p:sld xmlns:a="http://schemas.openxmlformats.org/drawingml/2006/main" xmlns:r="http://schemas.openxmlformats.org/officeDocument/2006/relationships" xmlns:p="http://schemas.openxmlformats.org/presentationml/2006/main">
-  <p:cSld>
-    <p:spTree>
-      <p:nvGrpSpPr>
-        <p:cNvPr id="1" name=""/>
-        <p:cNvGrpSpPr/>
-        <p:nvPr/>
-      </p:nvGrpSpPr>
-      <p:grpSpPr>
-        <a:xfrm>
-          <a:off x="0" y="0"/>
-          <a:ext cx="0" cy="0"/>
-          <a:chOff x="0" y="0"/>
-          <a:chExt cx="0" cy="0"/>
-        </a:xfrm>
-      </p:grpSpPr>
-      <p:sp>
-        <p:nvSpPr>
-          <p:cNvPr id="61441" name="제목 1">
-            <a:extLst>
-              <a:ext uri="{FF2B5EF4-FFF2-40B4-BE49-F238E27FC236}">
-                <a16:creationId xmlns:a16="http://schemas.microsoft.com/office/drawing/2014/main" id="{C0498088-5A1E-47F1-5CAC-B1472D36C201}"/>
-              </a:ext>
-            </a:extLst>
-          </p:cNvPr>
-          <p:cNvSpPr>
-            <a:spLocks noGrp="1" noChangeArrowheads="1"/>
-          </p:cNvSpPr>
-          <p:nvPr>
-            <p:ph type="title"/>
-          </p:nvPr>
-        </p:nvSpPr>
-        <p:spPr/>
-        <p:txBody>
-          <a:bodyPr/>
-          <a:lstStyle/>
-          <a:p>
-            <a:r>
-              <a:rPr lang="en-US" altLang="ko-KR" sz="3600" b="1" u="sng"/>
-              <a:t>Memory Access Latency in</a:t>
-            </a:r>
-            <a:br>
-              <a:rPr lang="en-US" altLang="ko-KR" sz="3600" b="1" u="sng"/>
-            </a:br>
-            <a:r>
-              <a:rPr lang="en-US" altLang="ko-KR" sz="3600" b="1" u="sng"/>
-              <a:t>Shared Memory Architectures</a:t>
-            </a:r>
-            <a:endParaRPr lang="ko-KR" altLang="en-US" sz="3600" u="sng"/>
-          </a:p>
-        </p:txBody>
-      </p:sp>
-      <p:sp>
-        <p:nvSpPr>
-          <p:cNvPr id="61442" name="내용 개체 틀 2">
-            <a:extLst>
-              <a:ext uri="{FF2B5EF4-FFF2-40B4-BE49-F238E27FC236}">
-                <a16:creationId xmlns:a16="http://schemas.microsoft.com/office/drawing/2014/main" id="{9554494D-70C2-0A6F-797D-253AAC6182C2}"/>
-              </a:ext>
-            </a:extLst>
-          </p:cNvPr>
-          <p:cNvSpPr>
-            <a:spLocks noGrp="1" noChangeArrowheads="1"/>
-          </p:cNvSpPr>
-          <p:nvPr>
-            <p:ph idx="1"/>
-          </p:nvPr>
-        </p:nvSpPr>
-        <p:spPr/>
-        <p:txBody>
-          <a:bodyPr/>
-          <a:lstStyle/>
-          <a:p>
-            <a:r>
-              <a:rPr lang="en-US" altLang="ko-KR" sz="2400"/>
-              <a:t>Uniform Memory Access (UMA)</a:t>
-            </a:r>
-          </a:p>
-          <a:p>
-            <a:pPr lvl="1"/>
-            <a:r>
-              <a:rPr lang="en-US" altLang="ko-KR" sz="1800"/>
-              <a:t>Centrally located memory</a:t>
-            </a:r>
-          </a:p>
-          <a:p>
-            <a:pPr lvl="1"/>
-            <a:r>
-              <a:rPr lang="en-US" altLang="ko-KR" sz="1800"/>
-              <a:t>All processors are equidistant (access times)</a:t>
-            </a:r>
-          </a:p>
-          <a:p>
-            <a:endParaRPr lang="en-US" altLang="ko-KR" sz="2400"/>
-          </a:p>
-          <a:p>
-            <a:r>
-              <a:rPr lang="en-US" altLang="ko-KR" sz="2400"/>
-              <a:t>Non-Uniform Access (NUMA)</a:t>
-            </a:r>
-          </a:p>
-          <a:p>
-            <a:pPr lvl="1"/>
-            <a:r>
-              <a:rPr lang="en-US" altLang="ko-KR" sz="1800"/>
-              <a:t>Physically partitioned but accessible by all</a:t>
-            </a:r>
-          </a:p>
-          <a:p>
-            <a:pPr lvl="1"/>
-            <a:r>
-              <a:rPr lang="en-US" altLang="ko-KR" sz="1800"/>
-              <a:t>Processors have the same address space</a:t>
-            </a:r>
-          </a:p>
-          <a:p>
-            <a:pPr lvl="1"/>
-            <a:r>
-              <a:rPr lang="en-US" altLang="ko-KR" sz="1800"/>
-              <a:t>Placement of data affects performance</a:t>
-            </a:r>
-          </a:p>
-          <a:p>
-            <a:pPr lvl="1"/>
-            <a:r>
-              <a:rPr lang="en-US" altLang="ko-KR" sz="1800"/>
-              <a:t>CC-NUMA (</a:t>
-            </a:r>
-            <a:r>
-              <a:rPr lang="en-US" altLang="ko-KR" sz="1800" b="1"/>
-              <a:t>Cache-Coherent</a:t>
-            </a:r>
-            <a:r>
-              <a:rPr lang="en-US" altLang="ko-KR" sz="1800"/>
-              <a:t> NUMA)</a:t>
-            </a:r>
-          </a:p>
-        </p:txBody>
-      </p:sp>
-      <p:pic>
-        <p:nvPicPr>
-          <p:cNvPr id="61443" name="Picture 2">
-            <a:extLst>
-              <a:ext uri="{FF2B5EF4-FFF2-40B4-BE49-F238E27FC236}">
-                <a16:creationId xmlns:a16="http://schemas.microsoft.com/office/drawing/2014/main" id="{0CC103FC-B9B9-E75B-2B94-24C164FB7334}"/>
-              </a:ext>
-            </a:extLst>
-          </p:cNvPr>
-          <p:cNvPicPr>
-            <a:picLocks noChangeAspect="1" noChangeArrowheads="1"/>
-          </p:cNvPicPr>
-          <p:nvPr/>
-        </p:nvPicPr>
-        <p:blipFill>
-          <a:blip r:embed="rId2">
-            <a:extLst>
-              <a:ext uri="{28A0092B-C50C-407E-A947-70E740481C1C}">
-                <a14:useLocalDpi xmlns:a14="http://schemas.microsoft.com/office/drawing/2010/main" val="0"/>
-              </a:ext>
-            </a:extLst>
-          </a:blip>
-          <a:srcRect/>
-          <a:stretch>
-            <a:fillRect/>
-          </a:stretch>
-        </p:blipFill>
-        <p:spPr bwMode="auto">
-          <a:xfrm>
-            <a:off x="1042988" y="4941888"/>
-            <a:ext cx="2379662" cy="1727200"/>
-          </a:xfrm>
-          <a:prstGeom prst="rect">
-            <a:avLst/>
-          </a:prstGeom>
-          <a:noFill/>
-          <a:ln>
-            <a:noFill/>
-          </a:ln>
-          <a:extLst>
-            <a:ext uri="{909E8E84-426E-40DD-AFC4-6F175D3DCCD1}">
-              <a14:hiddenFill xmlns:a14="http://schemas.microsoft.com/office/drawing/2010/main">
-                <a:solidFill>
-                  <a:srgbClr val="FFFFFF"/>
-                </a:solidFill>
-              </a14:hiddenFill>
-            </a:ext>
-            <a:ext uri="{91240B29-F687-4F45-9708-019B960494DF}">
-              <a14:hiddenLine xmlns:a14="http://schemas.microsoft.com/office/drawing/2010/main" w="9525">
-                <a:solidFill>
-                  <a:srgbClr val="000000"/>
-                </a:solidFill>
-                <a:miter lim="800000"/>
-                <a:headEnd/>
-                <a:tailEnd/>
-              </a14:hiddenLine>
-            </a:ext>
-          </a:extLst>
-        </p:spPr>
-      </p:pic>
-      <p:pic>
-        <p:nvPicPr>
-          <p:cNvPr id="61444" name="Picture 3">
-            <a:extLst>
-              <a:ext uri="{FF2B5EF4-FFF2-40B4-BE49-F238E27FC236}">
-                <a16:creationId xmlns:a16="http://schemas.microsoft.com/office/drawing/2014/main" id="{29090A67-A125-7BE0-35E3-1FB87D0D480E}"/>
-              </a:ext>
-            </a:extLst>
-          </p:cNvPr>
-          <p:cNvPicPr>
-            <a:picLocks noChangeAspect="1" noChangeArrowheads="1"/>
-          </p:cNvPicPr>
-          <p:nvPr/>
-        </p:nvPicPr>
-        <p:blipFill>
-          <a:blip r:embed="rId3">
-            <a:extLst>
-              <a:ext uri="{28A0092B-C50C-407E-A947-70E740481C1C}">
-                <a14:useLocalDpi xmlns:a14="http://schemas.microsoft.com/office/drawing/2010/main" val="0"/>
-              </a:ext>
-            </a:extLst>
-          </a:blip>
-          <a:srcRect/>
-          <a:stretch>
-            <a:fillRect/>
-          </a:stretch>
-        </p:blipFill>
-        <p:spPr bwMode="auto">
-          <a:xfrm>
-            <a:off x="3922713" y="5084763"/>
-            <a:ext cx="3097212" cy="1563687"/>
           </a:xfrm>
           <a:prstGeom prst="rect">
             <a:avLst/>
@@ -26404,6 +26797,274 @@
       </p:grpSpPr>
       <p:sp>
         <p:nvSpPr>
+          <p:cNvPr id="61441" name="제목 1">
+            <a:extLst>
+              <a:ext uri="{FF2B5EF4-FFF2-40B4-BE49-F238E27FC236}">
+                <a16:creationId xmlns:a16="http://schemas.microsoft.com/office/drawing/2014/main" id="{C0498088-5A1E-47F1-5CAC-B1472D36C201}"/>
+              </a:ext>
+            </a:extLst>
+          </p:cNvPr>
+          <p:cNvSpPr>
+            <a:spLocks noGrp="1" noChangeArrowheads="1"/>
+          </p:cNvSpPr>
+          <p:nvPr>
+            <p:ph type="title"/>
+          </p:nvPr>
+        </p:nvSpPr>
+        <p:spPr/>
+        <p:txBody>
+          <a:bodyPr/>
+          <a:lstStyle/>
+          <a:p>
+            <a:r>
+              <a:rPr lang="en-US" altLang="ko-KR" sz="3600" b="1" u="sng"/>
+              <a:t>Memory Access Latency in</a:t>
+            </a:r>
+            <a:br>
+              <a:rPr lang="en-US" altLang="ko-KR" sz="3600" b="1" u="sng"/>
+            </a:br>
+            <a:r>
+              <a:rPr lang="en-US" altLang="ko-KR" sz="3600" b="1" u="sng"/>
+              <a:t>Shared Memory Architectures</a:t>
+            </a:r>
+            <a:endParaRPr lang="ko-KR" altLang="en-US" sz="3600" u="sng"/>
+          </a:p>
+        </p:txBody>
+      </p:sp>
+      <p:sp>
+        <p:nvSpPr>
+          <p:cNvPr id="61442" name="내용 개체 틀 2">
+            <a:extLst>
+              <a:ext uri="{FF2B5EF4-FFF2-40B4-BE49-F238E27FC236}">
+                <a16:creationId xmlns:a16="http://schemas.microsoft.com/office/drawing/2014/main" id="{9554494D-70C2-0A6F-797D-253AAC6182C2}"/>
+              </a:ext>
+            </a:extLst>
+          </p:cNvPr>
+          <p:cNvSpPr>
+            <a:spLocks noGrp="1" noChangeArrowheads="1"/>
+          </p:cNvSpPr>
+          <p:nvPr>
+            <p:ph idx="1"/>
+          </p:nvPr>
+        </p:nvSpPr>
+        <p:spPr/>
+        <p:txBody>
+          <a:bodyPr/>
+          <a:lstStyle/>
+          <a:p>
+            <a:r>
+              <a:rPr lang="en-US" altLang="ko-KR" sz="2400"/>
+              <a:t>Uniform Memory Access (UMA)</a:t>
+            </a:r>
+          </a:p>
+          <a:p>
+            <a:pPr lvl="1"/>
+            <a:r>
+              <a:rPr lang="en-US" altLang="ko-KR" sz="1800"/>
+              <a:t>Centrally located memory</a:t>
+            </a:r>
+          </a:p>
+          <a:p>
+            <a:pPr lvl="1"/>
+            <a:r>
+              <a:rPr lang="en-US" altLang="ko-KR" sz="1800"/>
+              <a:t>All processors are equidistant (access times)</a:t>
+            </a:r>
+          </a:p>
+          <a:p>
+            <a:endParaRPr lang="en-US" altLang="ko-KR" sz="2400"/>
+          </a:p>
+          <a:p>
+            <a:r>
+              <a:rPr lang="en-US" altLang="ko-KR" sz="2400"/>
+              <a:t>Non-Uniform Access (NUMA)</a:t>
+            </a:r>
+          </a:p>
+          <a:p>
+            <a:pPr lvl="1"/>
+            <a:r>
+              <a:rPr lang="en-US" altLang="ko-KR" sz="1800"/>
+              <a:t>Physically partitioned but accessible by all</a:t>
+            </a:r>
+          </a:p>
+          <a:p>
+            <a:pPr lvl="1"/>
+            <a:r>
+              <a:rPr lang="en-US" altLang="ko-KR" sz="1800"/>
+              <a:t>Processors have the same address space</a:t>
+            </a:r>
+          </a:p>
+          <a:p>
+            <a:pPr lvl="1"/>
+            <a:r>
+              <a:rPr lang="en-US" altLang="ko-KR" sz="1800"/>
+              <a:t>Placement of data affects performance</a:t>
+            </a:r>
+          </a:p>
+          <a:p>
+            <a:pPr lvl="1"/>
+            <a:r>
+              <a:rPr lang="en-US" altLang="ko-KR" sz="1800"/>
+              <a:t>CC-NUMA (</a:t>
+            </a:r>
+            <a:r>
+              <a:rPr lang="en-US" altLang="ko-KR" sz="1800" b="1"/>
+              <a:t>Cache-Coherent</a:t>
+            </a:r>
+            <a:r>
+              <a:rPr lang="en-US" altLang="ko-KR" sz="1800"/>
+              <a:t> NUMA)</a:t>
+            </a:r>
+          </a:p>
+        </p:txBody>
+      </p:sp>
+      <p:pic>
+        <p:nvPicPr>
+          <p:cNvPr id="61443" name="Picture 2">
+            <a:extLst>
+              <a:ext uri="{FF2B5EF4-FFF2-40B4-BE49-F238E27FC236}">
+                <a16:creationId xmlns:a16="http://schemas.microsoft.com/office/drawing/2014/main" id="{0CC103FC-B9B9-E75B-2B94-24C164FB7334}"/>
+              </a:ext>
+            </a:extLst>
+          </p:cNvPr>
+          <p:cNvPicPr>
+            <a:picLocks noChangeAspect="1" noChangeArrowheads="1"/>
+          </p:cNvPicPr>
+          <p:nvPr/>
+        </p:nvPicPr>
+        <p:blipFill>
+          <a:blip r:embed="rId2">
+            <a:extLst>
+              <a:ext uri="{28A0092B-C50C-407E-A947-70E740481C1C}">
+                <a14:useLocalDpi xmlns:a14="http://schemas.microsoft.com/office/drawing/2010/main" val="0"/>
+              </a:ext>
+            </a:extLst>
+          </a:blip>
+          <a:srcRect/>
+          <a:stretch>
+            <a:fillRect/>
+          </a:stretch>
+        </p:blipFill>
+        <p:spPr bwMode="auto">
+          <a:xfrm>
+            <a:off x="1042988" y="4941888"/>
+            <a:ext cx="2379662" cy="1727200"/>
+          </a:xfrm>
+          <a:prstGeom prst="rect">
+            <a:avLst/>
+          </a:prstGeom>
+          <a:noFill/>
+          <a:ln>
+            <a:noFill/>
+          </a:ln>
+          <a:extLst>
+            <a:ext uri="{909E8E84-426E-40DD-AFC4-6F175D3DCCD1}">
+              <a14:hiddenFill xmlns:a14="http://schemas.microsoft.com/office/drawing/2010/main">
+                <a:solidFill>
+                  <a:srgbClr val="FFFFFF"/>
+                </a:solidFill>
+              </a14:hiddenFill>
+            </a:ext>
+            <a:ext uri="{91240B29-F687-4F45-9708-019B960494DF}">
+              <a14:hiddenLine xmlns:a14="http://schemas.microsoft.com/office/drawing/2010/main" w="9525">
+                <a:solidFill>
+                  <a:srgbClr val="000000"/>
+                </a:solidFill>
+                <a:miter lim="800000"/>
+                <a:headEnd/>
+                <a:tailEnd/>
+              </a14:hiddenLine>
+            </a:ext>
+          </a:extLst>
+        </p:spPr>
+      </p:pic>
+      <p:pic>
+        <p:nvPicPr>
+          <p:cNvPr id="61444" name="Picture 3">
+            <a:extLst>
+              <a:ext uri="{FF2B5EF4-FFF2-40B4-BE49-F238E27FC236}">
+                <a16:creationId xmlns:a16="http://schemas.microsoft.com/office/drawing/2014/main" id="{29090A67-A125-7BE0-35E3-1FB87D0D480E}"/>
+              </a:ext>
+            </a:extLst>
+          </p:cNvPr>
+          <p:cNvPicPr>
+            <a:picLocks noChangeAspect="1" noChangeArrowheads="1"/>
+          </p:cNvPicPr>
+          <p:nvPr/>
+        </p:nvPicPr>
+        <p:blipFill>
+          <a:blip r:embed="rId3">
+            <a:extLst>
+              <a:ext uri="{28A0092B-C50C-407E-A947-70E740481C1C}">
+                <a14:useLocalDpi xmlns:a14="http://schemas.microsoft.com/office/drawing/2010/main" val="0"/>
+              </a:ext>
+            </a:extLst>
+          </a:blip>
+          <a:srcRect/>
+          <a:stretch>
+            <a:fillRect/>
+          </a:stretch>
+        </p:blipFill>
+        <p:spPr bwMode="auto">
+          <a:xfrm>
+            <a:off x="3922713" y="5084763"/>
+            <a:ext cx="3097212" cy="1563687"/>
+          </a:xfrm>
+          <a:prstGeom prst="rect">
+            <a:avLst/>
+          </a:prstGeom>
+          <a:noFill/>
+          <a:ln>
+            <a:noFill/>
+          </a:ln>
+          <a:extLst>
+            <a:ext uri="{909E8E84-426E-40DD-AFC4-6F175D3DCCD1}">
+              <a14:hiddenFill xmlns:a14="http://schemas.microsoft.com/office/drawing/2010/main">
+                <a:solidFill>
+                  <a:srgbClr val="FFFFFF"/>
+                </a:solidFill>
+              </a14:hiddenFill>
+            </a:ext>
+            <a:ext uri="{91240B29-F687-4F45-9708-019B960494DF}">
+              <a14:hiddenLine xmlns:a14="http://schemas.microsoft.com/office/drawing/2010/main" w="9525">
+                <a:solidFill>
+                  <a:srgbClr val="000000"/>
+                </a:solidFill>
+                <a:miter lim="800000"/>
+                <a:headEnd/>
+                <a:tailEnd/>
+              </a14:hiddenLine>
+            </a:ext>
+          </a:extLst>
+        </p:spPr>
+      </p:pic>
+    </p:spTree>
+  </p:cSld>
+  <p:clrMapOvr>
+    <a:masterClrMapping/>
+  </p:clrMapOvr>
+</p:sld>
+</file>
+
+<file path=ppt/slides/slide51.xml><?xml version="1.0" encoding="utf-8"?>
+<p:sld xmlns:a="http://schemas.openxmlformats.org/drawingml/2006/main" xmlns:r="http://schemas.openxmlformats.org/officeDocument/2006/relationships" xmlns:p="http://schemas.openxmlformats.org/presentationml/2006/main">
+  <p:cSld>
+    <p:spTree>
+      <p:nvGrpSpPr>
+        <p:cNvPr id="1" name=""/>
+        <p:cNvGrpSpPr/>
+        <p:nvPr/>
+      </p:nvGrpSpPr>
+      <p:grpSpPr>
+        <a:xfrm>
+          <a:off x="0" y="0"/>
+          <a:ext cx="0" cy="0"/>
+          <a:chOff x="0" y="0"/>
+          <a:chExt cx="0" cy="0"/>
+        </a:xfrm>
+      </p:grpSpPr>
+      <p:sp>
+        <p:nvSpPr>
           <p:cNvPr id="68609" name="제목 1">
             <a:extLst>
               <a:ext uri="{FF2B5EF4-FFF2-40B4-BE49-F238E27FC236}">
@@ -26515,7 +27176,7 @@
 </p:sld>
 </file>
 
-<file path=ppt/slides/slide51.xml><?xml version="1.0" encoding="utf-8"?>
+<file path=ppt/slides/slide52.xml><?xml version="1.0" encoding="utf-8"?>
 <p:sld xmlns:a="http://schemas.openxmlformats.org/drawingml/2006/main" xmlns:r="http://schemas.openxmlformats.org/officeDocument/2006/relationships" xmlns:p="http://schemas.openxmlformats.org/presentationml/2006/main">
   <p:cSld>
     <p:spTree>
@@ -26636,7 +27297,7 @@
 </p:sld>
 </file>
 
-<file path=ppt/slides/slide52.xml><?xml version="1.0" encoding="utf-8"?>
+<file path=ppt/slides/slide53.xml><?xml version="1.0" encoding="utf-8"?>
 <p:sld xmlns:a="http://schemas.openxmlformats.org/drawingml/2006/main" xmlns:r="http://schemas.openxmlformats.org/officeDocument/2006/relationships" xmlns:p="http://schemas.openxmlformats.org/presentationml/2006/main">
   <p:cSld>
     <p:spTree>
@@ -26769,7 +27430,7 @@
 </p:sld>
 </file>
 
-<file path=ppt/slides/slide53.xml><?xml version="1.0" encoding="utf-8"?>
+<file path=ppt/slides/slide54.xml><?xml version="1.0" encoding="utf-8"?>
 <p:sld xmlns:a="http://schemas.openxmlformats.org/drawingml/2006/main" xmlns:r="http://schemas.openxmlformats.org/officeDocument/2006/relationships" xmlns:p="http://schemas.openxmlformats.org/presentationml/2006/main">
   <p:cSld>
     <p:spTree>
@@ -26985,7 +27646,7 @@
 </p:sld>
 </file>
 
-<file path=ppt/slides/slide54.xml><?xml version="1.0" encoding="utf-8"?>
+<file path=ppt/slides/slide55.xml><?xml version="1.0" encoding="utf-8"?>
 <p:sld xmlns:a="http://schemas.openxmlformats.org/drawingml/2006/main" xmlns:r="http://schemas.openxmlformats.org/officeDocument/2006/relationships" xmlns:p="http://schemas.openxmlformats.org/presentationml/2006/main">
   <p:cSld>
     <p:spTree>
@@ -27224,7 +27885,7 @@
 </p:sld>
 </file>
 
-<file path=ppt/slides/slide55.xml><?xml version="1.0" encoding="utf-8"?>
+<file path=ppt/slides/slide56.xml><?xml version="1.0" encoding="utf-8"?>
 <p:sld xmlns:a="http://schemas.openxmlformats.org/drawingml/2006/main" xmlns:r="http://schemas.openxmlformats.org/officeDocument/2006/relationships" xmlns:p="http://schemas.openxmlformats.org/presentationml/2006/main">
   <p:cSld>
     <p:spTree>
@@ -27368,7 +28029,7 @@
 </p:sld>
 </file>
 
-<file path=ppt/slides/slide56.xml><?xml version="1.0" encoding="utf-8"?>
+<file path=ppt/slides/slide57.xml><?xml version="1.0" encoding="utf-8"?>
 <p:sld xmlns:a="http://schemas.openxmlformats.org/drawingml/2006/main" xmlns:r="http://schemas.openxmlformats.org/officeDocument/2006/relationships" xmlns:p="http://schemas.openxmlformats.org/presentationml/2006/main">
   <p:cSld>
     <p:spTree>
@@ -28184,6 +28845,5767 @@
       </p:grpSpPr>
       <p:sp>
         <p:nvSpPr>
+          <p:cNvPr id="3" name="Content Placeholder 2"/>
+          <p:cNvSpPr>
+            <a:spLocks noGrp="1"/>
+          </p:cNvSpPr>
+          <p:nvPr>
+            <p:ph type="body" idx="1"/>
+          </p:nvPr>
+        </p:nvSpPr>
+        <p:spPr>
+          <a:xfrm>
+            <a:off x="629842" y="838886"/>
+            <a:ext cx="3868340" cy="645898"/>
+          </a:xfrm>
+        </p:spPr>
+        <p:txBody>
+          <a:bodyPr>
+            <a:noAutofit/>
+          </a:bodyPr>
+          <a:lstStyle/>
+          <a:p>
+            <a:pPr algn="ctr"/>
+            <a:r>
+              <a:rPr lang="en-US" u="sng" dirty="0"/>
+              <a:t>Task Parallelism</a:t>
+            </a:r>
+          </a:p>
+        </p:txBody>
+      </p:sp>
+      <p:sp>
+        <p:nvSpPr>
+          <p:cNvPr id="4" name="Content Placeholder 3"/>
+          <p:cNvSpPr>
+            <a:spLocks noGrp="1"/>
+          </p:cNvSpPr>
+          <p:nvPr>
+            <p:ph sz="half" idx="2"/>
+          </p:nvPr>
+        </p:nvSpPr>
+        <p:spPr>
+          <a:xfrm>
+            <a:off x="629842" y="1479461"/>
+            <a:ext cx="3868340" cy="5261907"/>
+          </a:xfrm>
+        </p:spPr>
+        <p:txBody>
+          <a:bodyPr>
+            <a:noAutofit/>
+          </a:bodyPr>
+          <a:lstStyle/>
+          <a:p>
+            <a:r>
+              <a:rPr lang="en-US" dirty="0"/>
+              <a:t>Different operations performed on same or different data</a:t>
+            </a:r>
+          </a:p>
+          <a:p>
+            <a:r>
+              <a:rPr lang="en-US" dirty="0"/>
+              <a:t>Usually a modest number of tasks unleashing a modest amount of parallelism</a:t>
+            </a:r>
+          </a:p>
+        </p:txBody>
+      </p:sp>
+      <p:sp>
+        <p:nvSpPr>
+          <p:cNvPr id="5" name="Text Placeholder 4"/>
+          <p:cNvSpPr>
+            <a:spLocks noGrp="1"/>
+          </p:cNvSpPr>
+          <p:nvPr>
+            <p:ph type="body" sz="quarter" idx="3"/>
+          </p:nvPr>
+        </p:nvSpPr>
+        <p:spPr>
+          <a:xfrm>
+            <a:off x="4629150" y="836712"/>
+            <a:ext cx="3887391" cy="645898"/>
+          </a:xfrm>
+        </p:spPr>
+        <p:txBody>
+          <a:bodyPr/>
+          <a:lstStyle/>
+          <a:p>
+            <a:pPr algn="ctr"/>
+            <a:r>
+              <a:rPr lang="en-US" u="sng" dirty="0"/>
+              <a:t>Data Parallelism</a:t>
+            </a:r>
+          </a:p>
+        </p:txBody>
+      </p:sp>
+      <p:sp>
+        <p:nvSpPr>
+          <p:cNvPr id="6" name="Content Placeholder 5"/>
+          <p:cNvSpPr>
+            <a:spLocks noGrp="1"/>
+          </p:cNvSpPr>
+          <p:nvPr>
+            <p:ph sz="quarter" idx="4"/>
+          </p:nvPr>
+        </p:nvSpPr>
+        <p:spPr>
+          <a:xfrm>
+            <a:off x="4629150" y="1484784"/>
+            <a:ext cx="3887391" cy="5261907"/>
+          </a:xfrm>
+        </p:spPr>
+        <p:txBody>
+          <a:bodyPr>
+            <a:noAutofit/>
+          </a:bodyPr>
+          <a:lstStyle/>
+          <a:p>
+            <a:r>
+              <a:rPr lang="en-US" dirty="0"/>
+              <a:t>Same operations performed on different data</a:t>
+            </a:r>
+          </a:p>
+          <a:p>
+            <a:r>
+              <a:rPr lang="en-US" dirty="0"/>
+              <a:t>Potentially massive amounts of data unleashing massive amounts of parallelism</a:t>
+            </a:r>
+          </a:p>
+          <a:p>
+            <a:pPr lvl="1"/>
+            <a:r>
+              <a:rPr lang="en-US" dirty="0"/>
+              <a:t>Most suitable for GPUs</a:t>
+            </a:r>
+          </a:p>
+        </p:txBody>
+      </p:sp>
+      <p:sp>
+        <p:nvSpPr>
+          <p:cNvPr id="7" name="Text Placeholder 6"/>
+          <p:cNvSpPr>
+            <a:spLocks noGrp="1"/>
+          </p:cNvSpPr>
+          <p:nvPr>
+            <p:ph type="body" idx="13"/>
+          </p:nvPr>
+        </p:nvSpPr>
+        <p:spPr>
+          <a:xfrm>
+            <a:off x="827584" y="455176"/>
+            <a:ext cx="7886700" cy="453544"/>
+          </a:xfrm>
+        </p:spPr>
+        <p:txBody>
+          <a:bodyPr/>
+          <a:lstStyle/>
+          <a:p>
+            <a:r>
+              <a:rPr lang="en-US" sz="3200" b="1" u="sng" dirty="0">
+                <a:solidFill>
+                  <a:schemeClr val="tx1"/>
+                </a:solidFill>
+              </a:rPr>
+              <a:t>Types of Parallelism</a:t>
+            </a:r>
+          </a:p>
+        </p:txBody>
+      </p:sp>
+      <p:grpSp>
+        <p:nvGrpSpPr>
+          <p:cNvPr id="73" name="Group 72"/>
+          <p:cNvGrpSpPr/>
+          <p:nvPr/>
+        </p:nvGrpSpPr>
+        <p:grpSpPr>
+          <a:xfrm>
+            <a:off x="1018908" y="3541834"/>
+            <a:ext cx="2616988" cy="1787931"/>
+            <a:chOff x="1018908" y="3541834"/>
+            <a:chExt cx="2616988" cy="1787931"/>
+          </a:xfrm>
+        </p:grpSpPr>
+        <p:sp>
+          <p:nvSpPr>
+            <p:cNvPr id="2" name="Oval 1"/>
+            <p:cNvSpPr>
+              <a:spLocks noChangeAspect="1"/>
+            </p:cNvSpPr>
+            <p:nvPr/>
+          </p:nvSpPr>
+          <p:spPr>
+            <a:xfrm>
+              <a:off x="1018908" y="4689685"/>
+              <a:ext cx="640080" cy="640080"/>
+            </a:xfrm>
+            <a:prstGeom prst="ellipse">
+              <a:avLst/>
+            </a:prstGeom>
+            <a:solidFill>
+              <a:schemeClr val="accent6">
+                <a:lumMod val="20000"/>
+                <a:lumOff val="80000"/>
+              </a:schemeClr>
+            </a:solidFill>
+          </p:spPr>
+          <p:style>
+            <a:lnRef idx="2">
+              <a:schemeClr val="accent6"/>
+            </a:lnRef>
+            <a:fillRef idx="1">
+              <a:schemeClr val="lt1"/>
+            </a:fillRef>
+            <a:effectRef idx="0">
+              <a:schemeClr val="accent6"/>
+            </a:effectRef>
+            <a:fontRef idx="minor">
+              <a:schemeClr val="dk1"/>
+            </a:fontRef>
+          </p:style>
+          <p:txBody>
+            <a:bodyPr lIns="0" tIns="0" rIns="0" bIns="0" rtlCol="0" anchor="ctr"/>
+            <a:lstStyle/>
+            <a:p>
+              <a:pPr algn="ctr"/>
+              <a:r>
+                <a:rPr lang="en-US" sz="1600" dirty="0"/>
+                <a:t>Task A</a:t>
+              </a:r>
+            </a:p>
+          </p:txBody>
+        </p:sp>
+        <p:sp>
+          <p:nvSpPr>
+            <p:cNvPr id="9" name="Regular Pentagon 8"/>
+            <p:cNvSpPr>
+              <a:spLocks noChangeAspect="1"/>
+            </p:cNvSpPr>
+            <p:nvPr/>
+          </p:nvSpPr>
+          <p:spPr>
+            <a:xfrm>
+              <a:off x="2911546" y="4689685"/>
+              <a:ext cx="724350" cy="640080"/>
+            </a:xfrm>
+            <a:prstGeom prst="pentagon">
+              <a:avLst/>
+            </a:prstGeom>
+            <a:solidFill>
+              <a:schemeClr val="accent2">
+                <a:lumMod val="20000"/>
+                <a:lumOff val="80000"/>
+              </a:schemeClr>
+            </a:solidFill>
+          </p:spPr>
+          <p:style>
+            <a:lnRef idx="2">
+              <a:schemeClr val="accent2"/>
+            </a:lnRef>
+            <a:fillRef idx="1">
+              <a:schemeClr val="lt1"/>
+            </a:fillRef>
+            <a:effectRef idx="0">
+              <a:schemeClr val="accent2"/>
+            </a:effectRef>
+            <a:fontRef idx="minor">
+              <a:schemeClr val="dk1"/>
+            </a:fontRef>
+          </p:style>
+          <p:txBody>
+            <a:bodyPr lIns="0" tIns="0" rIns="0" bIns="0" rtlCol="0" anchor="ctr"/>
+            <a:lstStyle/>
+            <a:p>
+              <a:pPr algn="ctr"/>
+              <a:r>
+                <a:rPr lang="en-US" sz="1600" dirty="0"/>
+                <a:t>Task C</a:t>
+              </a:r>
+            </a:p>
+          </p:txBody>
+        </p:sp>
+        <p:sp>
+          <p:nvSpPr>
+            <p:cNvPr id="10" name="Plaque 9"/>
+            <p:cNvSpPr>
+              <a:spLocks noChangeAspect="1"/>
+            </p:cNvSpPr>
+            <p:nvPr/>
+          </p:nvSpPr>
+          <p:spPr>
+            <a:xfrm>
+              <a:off x="1948416" y="4689685"/>
+              <a:ext cx="640080" cy="640080"/>
+            </a:xfrm>
+            <a:prstGeom prst="plaque">
+              <a:avLst/>
+            </a:prstGeom>
+            <a:solidFill>
+              <a:schemeClr val="accent4">
+                <a:lumMod val="20000"/>
+                <a:lumOff val="80000"/>
+              </a:schemeClr>
+            </a:solidFill>
+          </p:spPr>
+          <p:style>
+            <a:lnRef idx="2">
+              <a:schemeClr val="accent4"/>
+            </a:lnRef>
+            <a:fillRef idx="1">
+              <a:schemeClr val="lt1"/>
+            </a:fillRef>
+            <a:effectRef idx="0">
+              <a:schemeClr val="accent4"/>
+            </a:effectRef>
+            <a:fontRef idx="minor">
+              <a:schemeClr val="dk1"/>
+            </a:fontRef>
+          </p:style>
+          <p:txBody>
+            <a:bodyPr lIns="0" tIns="0" rIns="0" bIns="0" rtlCol="0" anchor="ctr"/>
+            <a:lstStyle/>
+            <a:p>
+              <a:pPr algn="ctr"/>
+              <a:r>
+                <a:rPr lang="en-US" sz="1600" dirty="0"/>
+                <a:t>Task B</a:t>
+              </a:r>
+            </a:p>
+          </p:txBody>
+        </p:sp>
+        <p:sp>
+          <p:nvSpPr>
+            <p:cNvPr id="11" name="Rectangle 10"/>
+            <p:cNvSpPr>
+              <a:spLocks noChangeAspect="1"/>
+            </p:cNvSpPr>
+            <p:nvPr/>
+          </p:nvSpPr>
+          <p:spPr>
+            <a:xfrm>
+              <a:off x="1483662" y="3541834"/>
+              <a:ext cx="640080" cy="640080"/>
+            </a:xfrm>
+            <a:prstGeom prst="rect">
+              <a:avLst/>
+            </a:prstGeom>
+          </p:spPr>
+          <p:style>
+            <a:lnRef idx="2">
+              <a:schemeClr val="dk1"/>
+            </a:lnRef>
+            <a:fillRef idx="1">
+              <a:schemeClr val="lt1"/>
+            </a:fillRef>
+            <a:effectRef idx="0">
+              <a:schemeClr val="dk1"/>
+            </a:effectRef>
+            <a:fontRef idx="minor">
+              <a:schemeClr val="dk1"/>
+            </a:fontRef>
+          </p:style>
+          <p:txBody>
+            <a:bodyPr lIns="0" tIns="0" rIns="0" bIns="0" rtlCol="0" anchor="ctr"/>
+            <a:lstStyle/>
+            <a:p>
+              <a:pPr algn="ctr"/>
+              <a:r>
+                <a:rPr lang="en-US" dirty="0"/>
+                <a:t>Data 1</a:t>
+              </a:r>
+            </a:p>
+          </p:txBody>
+        </p:sp>
+        <p:sp>
+          <p:nvSpPr>
+            <p:cNvPr id="12" name="Rectangle 11"/>
+            <p:cNvSpPr>
+              <a:spLocks noChangeAspect="1"/>
+            </p:cNvSpPr>
+            <p:nvPr/>
+          </p:nvSpPr>
+          <p:spPr>
+            <a:xfrm>
+              <a:off x="2927548" y="3541834"/>
+              <a:ext cx="640080" cy="640080"/>
+            </a:xfrm>
+            <a:prstGeom prst="rect">
+              <a:avLst/>
+            </a:prstGeom>
+          </p:spPr>
+          <p:style>
+            <a:lnRef idx="2">
+              <a:schemeClr val="dk1"/>
+            </a:lnRef>
+            <a:fillRef idx="1">
+              <a:schemeClr val="lt1"/>
+            </a:fillRef>
+            <a:effectRef idx="0">
+              <a:schemeClr val="dk1"/>
+            </a:effectRef>
+            <a:fontRef idx="minor">
+              <a:schemeClr val="dk1"/>
+            </a:fontRef>
+          </p:style>
+          <p:txBody>
+            <a:bodyPr lIns="0" tIns="0" rIns="0" bIns="0" rtlCol="0" anchor="ctr"/>
+            <a:lstStyle/>
+            <a:p>
+              <a:pPr algn="ctr"/>
+              <a:r>
+                <a:rPr lang="en-US" dirty="0"/>
+                <a:t>Data 2</a:t>
+              </a:r>
+            </a:p>
+          </p:txBody>
+        </p:sp>
+        <p:cxnSp>
+          <p:nvCxnSpPr>
+            <p:cNvPr id="14" name="Straight Arrow Connector 13"/>
+            <p:cNvCxnSpPr>
+              <a:stCxn id="11" idx="2"/>
+              <a:endCxn id="2" idx="0"/>
+            </p:cNvCxnSpPr>
+            <p:nvPr/>
+          </p:nvCxnSpPr>
+          <p:spPr>
+            <a:xfrm flipH="1">
+              <a:off x="1338948" y="4181914"/>
+              <a:ext cx="464754" cy="507771"/>
+            </a:xfrm>
+            <a:prstGeom prst="straightConnector1">
+              <a:avLst/>
+            </a:prstGeom>
+            <a:ln>
+              <a:tailEnd type="triangle"/>
+            </a:ln>
+          </p:spPr>
+          <p:style>
+            <a:lnRef idx="1">
+              <a:schemeClr val="dk1"/>
+            </a:lnRef>
+            <a:fillRef idx="0">
+              <a:schemeClr val="dk1"/>
+            </a:fillRef>
+            <a:effectRef idx="0">
+              <a:schemeClr val="dk1"/>
+            </a:effectRef>
+            <a:fontRef idx="minor">
+              <a:schemeClr val="tx1"/>
+            </a:fontRef>
+          </p:style>
+        </p:cxnSp>
+        <p:cxnSp>
+          <p:nvCxnSpPr>
+            <p:cNvPr id="15" name="Straight Arrow Connector 14"/>
+            <p:cNvCxnSpPr>
+              <a:stCxn id="11" idx="2"/>
+              <a:endCxn id="10" idx="0"/>
+            </p:cNvCxnSpPr>
+            <p:nvPr/>
+          </p:nvCxnSpPr>
+          <p:spPr>
+            <a:xfrm>
+              <a:off x="1803702" y="4181914"/>
+              <a:ext cx="464754" cy="507771"/>
+            </a:xfrm>
+            <a:prstGeom prst="straightConnector1">
+              <a:avLst/>
+            </a:prstGeom>
+            <a:ln>
+              <a:tailEnd type="triangle"/>
+            </a:ln>
+          </p:spPr>
+          <p:style>
+            <a:lnRef idx="1">
+              <a:schemeClr val="dk1"/>
+            </a:lnRef>
+            <a:fillRef idx="0">
+              <a:schemeClr val="dk1"/>
+            </a:fillRef>
+            <a:effectRef idx="0">
+              <a:schemeClr val="dk1"/>
+            </a:effectRef>
+            <a:fontRef idx="minor">
+              <a:schemeClr val="tx1"/>
+            </a:fontRef>
+          </p:style>
+        </p:cxnSp>
+        <p:cxnSp>
+          <p:nvCxnSpPr>
+            <p:cNvPr id="18" name="Straight Arrow Connector 17"/>
+            <p:cNvCxnSpPr>
+              <a:cxnSpLocks/>
+              <a:stCxn id="12" idx="2"/>
+              <a:endCxn id="9" idx="0"/>
+            </p:cNvCxnSpPr>
+            <p:nvPr/>
+          </p:nvCxnSpPr>
+          <p:spPr>
+            <a:xfrm>
+              <a:off x="3247588" y="4181914"/>
+              <a:ext cx="26133" cy="507771"/>
+            </a:xfrm>
+            <a:prstGeom prst="straightConnector1">
+              <a:avLst/>
+            </a:prstGeom>
+            <a:ln>
+              <a:tailEnd type="triangle"/>
+            </a:ln>
+          </p:spPr>
+          <p:style>
+            <a:lnRef idx="1">
+              <a:schemeClr val="dk1"/>
+            </a:lnRef>
+            <a:fillRef idx="0">
+              <a:schemeClr val="dk1"/>
+            </a:fillRef>
+            <a:effectRef idx="0">
+              <a:schemeClr val="dk1"/>
+            </a:effectRef>
+            <a:fontRef idx="minor">
+              <a:schemeClr val="tx1"/>
+            </a:fontRef>
+          </p:style>
+        </p:cxnSp>
+      </p:grpSp>
+      <p:grpSp>
+        <p:nvGrpSpPr>
+          <p:cNvPr id="75" name="Group 74"/>
+          <p:cNvGrpSpPr/>
+          <p:nvPr/>
+        </p:nvGrpSpPr>
+        <p:grpSpPr>
+          <a:xfrm>
+            <a:off x="1293228" y="5571707"/>
+            <a:ext cx="2000080" cy="731520"/>
+            <a:chOff x="1293228" y="5571707"/>
+            <a:chExt cx="2000080" cy="731520"/>
+          </a:xfrm>
+        </p:grpSpPr>
+        <p:sp>
+          <p:nvSpPr>
+            <p:cNvPr id="22" name="Freeform 21"/>
+            <p:cNvSpPr/>
+            <p:nvPr/>
+          </p:nvSpPr>
+          <p:spPr>
+            <a:xfrm>
+              <a:off x="1293228" y="5571707"/>
+              <a:ext cx="91440" cy="731520"/>
+            </a:xfrm>
+            <a:custGeom>
+              <a:avLst/>
+              <a:gdLst>
+                <a:gd name="connsiteX0" fmla="*/ 127000 w 196850"/>
+                <a:gd name="connsiteY0" fmla="*/ 0 h 1625600"/>
+                <a:gd name="connsiteX1" fmla="*/ 82550 w 196850"/>
+                <a:gd name="connsiteY1" fmla="*/ 38100 h 1625600"/>
+                <a:gd name="connsiteX2" fmla="*/ 50800 w 196850"/>
+                <a:gd name="connsiteY2" fmla="*/ 76200 h 1625600"/>
+                <a:gd name="connsiteX3" fmla="*/ 19050 w 196850"/>
+                <a:gd name="connsiteY3" fmla="*/ 133350 h 1625600"/>
+                <a:gd name="connsiteX4" fmla="*/ 0 w 196850"/>
+                <a:gd name="connsiteY4" fmla="*/ 196850 h 1625600"/>
+                <a:gd name="connsiteX5" fmla="*/ 25400 w 196850"/>
+                <a:gd name="connsiteY5" fmla="*/ 323850 h 1625600"/>
+                <a:gd name="connsiteX6" fmla="*/ 50800 w 196850"/>
+                <a:gd name="connsiteY6" fmla="*/ 361950 h 1625600"/>
+                <a:gd name="connsiteX7" fmla="*/ 82550 w 196850"/>
+                <a:gd name="connsiteY7" fmla="*/ 393700 h 1625600"/>
+                <a:gd name="connsiteX8" fmla="*/ 101600 w 196850"/>
+                <a:gd name="connsiteY8" fmla="*/ 400050 h 1625600"/>
+                <a:gd name="connsiteX9" fmla="*/ 165100 w 196850"/>
+                <a:gd name="connsiteY9" fmla="*/ 476250 h 1625600"/>
+                <a:gd name="connsiteX10" fmla="*/ 177800 w 196850"/>
+                <a:gd name="connsiteY10" fmla="*/ 495300 h 1625600"/>
+                <a:gd name="connsiteX11" fmla="*/ 184150 w 196850"/>
+                <a:gd name="connsiteY11" fmla="*/ 514350 h 1625600"/>
+                <a:gd name="connsiteX12" fmla="*/ 190500 w 196850"/>
+                <a:gd name="connsiteY12" fmla="*/ 552450 h 1625600"/>
+                <a:gd name="connsiteX13" fmla="*/ 196850 w 196850"/>
+                <a:gd name="connsiteY13" fmla="*/ 577850 h 1625600"/>
+                <a:gd name="connsiteX14" fmla="*/ 190500 w 196850"/>
+                <a:gd name="connsiteY14" fmla="*/ 660400 h 1625600"/>
+                <a:gd name="connsiteX15" fmla="*/ 158750 w 196850"/>
+                <a:gd name="connsiteY15" fmla="*/ 717550 h 1625600"/>
+                <a:gd name="connsiteX16" fmla="*/ 139700 w 196850"/>
+                <a:gd name="connsiteY16" fmla="*/ 736600 h 1625600"/>
+                <a:gd name="connsiteX17" fmla="*/ 107950 w 196850"/>
+                <a:gd name="connsiteY17" fmla="*/ 768350 h 1625600"/>
+                <a:gd name="connsiteX18" fmla="*/ 95250 w 196850"/>
+                <a:gd name="connsiteY18" fmla="*/ 787400 h 1625600"/>
+                <a:gd name="connsiteX19" fmla="*/ 88900 w 196850"/>
+                <a:gd name="connsiteY19" fmla="*/ 806450 h 1625600"/>
+                <a:gd name="connsiteX20" fmla="*/ 69850 w 196850"/>
+                <a:gd name="connsiteY20" fmla="*/ 819150 h 1625600"/>
+                <a:gd name="connsiteX21" fmla="*/ 44450 w 196850"/>
+                <a:gd name="connsiteY21" fmla="*/ 863600 h 1625600"/>
+                <a:gd name="connsiteX22" fmla="*/ 31750 w 196850"/>
+                <a:gd name="connsiteY22" fmla="*/ 882650 h 1625600"/>
+                <a:gd name="connsiteX23" fmla="*/ 19050 w 196850"/>
+                <a:gd name="connsiteY23" fmla="*/ 927100 h 1625600"/>
+                <a:gd name="connsiteX24" fmla="*/ 31750 w 196850"/>
+                <a:gd name="connsiteY24" fmla="*/ 1060450 h 1625600"/>
+                <a:gd name="connsiteX25" fmla="*/ 63500 w 196850"/>
+                <a:gd name="connsiteY25" fmla="*/ 1092200 h 1625600"/>
+                <a:gd name="connsiteX26" fmla="*/ 76200 w 196850"/>
+                <a:gd name="connsiteY26" fmla="*/ 1111250 h 1625600"/>
+                <a:gd name="connsiteX27" fmla="*/ 114300 w 196850"/>
+                <a:gd name="connsiteY27" fmla="*/ 1136650 h 1625600"/>
+                <a:gd name="connsiteX28" fmla="*/ 120650 w 196850"/>
+                <a:gd name="connsiteY28" fmla="*/ 1155700 h 1625600"/>
+                <a:gd name="connsiteX29" fmla="*/ 139700 w 196850"/>
+                <a:gd name="connsiteY29" fmla="*/ 1168400 h 1625600"/>
+                <a:gd name="connsiteX30" fmla="*/ 165100 w 196850"/>
+                <a:gd name="connsiteY30" fmla="*/ 1187450 h 1625600"/>
+                <a:gd name="connsiteX31" fmla="*/ 190500 w 196850"/>
+                <a:gd name="connsiteY31" fmla="*/ 1225550 h 1625600"/>
+                <a:gd name="connsiteX32" fmla="*/ 196850 w 196850"/>
+                <a:gd name="connsiteY32" fmla="*/ 1250950 h 1625600"/>
+                <a:gd name="connsiteX33" fmla="*/ 190500 w 196850"/>
+                <a:gd name="connsiteY33" fmla="*/ 1339850 h 1625600"/>
+                <a:gd name="connsiteX34" fmla="*/ 171450 w 196850"/>
+                <a:gd name="connsiteY34" fmla="*/ 1403350 h 1625600"/>
+                <a:gd name="connsiteX35" fmla="*/ 158750 w 196850"/>
+                <a:gd name="connsiteY35" fmla="*/ 1422400 h 1625600"/>
+                <a:gd name="connsiteX36" fmla="*/ 152400 w 196850"/>
+                <a:gd name="connsiteY36" fmla="*/ 1441450 h 1625600"/>
+                <a:gd name="connsiteX37" fmla="*/ 127000 w 196850"/>
+                <a:gd name="connsiteY37" fmla="*/ 1498600 h 1625600"/>
+                <a:gd name="connsiteX38" fmla="*/ 95250 w 196850"/>
+                <a:gd name="connsiteY38" fmla="*/ 1555750 h 1625600"/>
+                <a:gd name="connsiteX39" fmla="*/ 95250 w 196850"/>
+                <a:gd name="connsiteY39" fmla="*/ 1625600 h 1625600"/>
+              </a:gdLst>
+              <a:ahLst/>
+              <a:cxnLst>
+                <a:cxn ang="0">
+                  <a:pos x="connsiteX0" y="connsiteY0"/>
+                </a:cxn>
+                <a:cxn ang="0">
+                  <a:pos x="connsiteX1" y="connsiteY1"/>
+                </a:cxn>
+                <a:cxn ang="0">
+                  <a:pos x="connsiteX2" y="connsiteY2"/>
+                </a:cxn>
+                <a:cxn ang="0">
+                  <a:pos x="connsiteX3" y="connsiteY3"/>
+                </a:cxn>
+                <a:cxn ang="0">
+                  <a:pos x="connsiteX4" y="connsiteY4"/>
+                </a:cxn>
+                <a:cxn ang="0">
+                  <a:pos x="connsiteX5" y="connsiteY5"/>
+                </a:cxn>
+                <a:cxn ang="0">
+                  <a:pos x="connsiteX6" y="connsiteY6"/>
+                </a:cxn>
+                <a:cxn ang="0">
+                  <a:pos x="connsiteX7" y="connsiteY7"/>
+                </a:cxn>
+                <a:cxn ang="0">
+                  <a:pos x="connsiteX8" y="connsiteY8"/>
+                </a:cxn>
+                <a:cxn ang="0">
+                  <a:pos x="connsiteX9" y="connsiteY9"/>
+                </a:cxn>
+                <a:cxn ang="0">
+                  <a:pos x="connsiteX10" y="connsiteY10"/>
+                </a:cxn>
+                <a:cxn ang="0">
+                  <a:pos x="connsiteX11" y="connsiteY11"/>
+                </a:cxn>
+                <a:cxn ang="0">
+                  <a:pos x="connsiteX12" y="connsiteY12"/>
+                </a:cxn>
+                <a:cxn ang="0">
+                  <a:pos x="connsiteX13" y="connsiteY13"/>
+                </a:cxn>
+                <a:cxn ang="0">
+                  <a:pos x="connsiteX14" y="connsiteY14"/>
+                </a:cxn>
+                <a:cxn ang="0">
+                  <a:pos x="connsiteX15" y="connsiteY15"/>
+                </a:cxn>
+                <a:cxn ang="0">
+                  <a:pos x="connsiteX16" y="connsiteY16"/>
+                </a:cxn>
+                <a:cxn ang="0">
+                  <a:pos x="connsiteX17" y="connsiteY17"/>
+                </a:cxn>
+                <a:cxn ang="0">
+                  <a:pos x="connsiteX18" y="connsiteY18"/>
+                </a:cxn>
+                <a:cxn ang="0">
+                  <a:pos x="connsiteX19" y="connsiteY19"/>
+                </a:cxn>
+                <a:cxn ang="0">
+                  <a:pos x="connsiteX20" y="connsiteY20"/>
+                </a:cxn>
+                <a:cxn ang="0">
+                  <a:pos x="connsiteX21" y="connsiteY21"/>
+                </a:cxn>
+                <a:cxn ang="0">
+                  <a:pos x="connsiteX22" y="connsiteY22"/>
+                </a:cxn>
+                <a:cxn ang="0">
+                  <a:pos x="connsiteX23" y="connsiteY23"/>
+                </a:cxn>
+                <a:cxn ang="0">
+                  <a:pos x="connsiteX24" y="connsiteY24"/>
+                </a:cxn>
+                <a:cxn ang="0">
+                  <a:pos x="connsiteX25" y="connsiteY25"/>
+                </a:cxn>
+                <a:cxn ang="0">
+                  <a:pos x="connsiteX26" y="connsiteY26"/>
+                </a:cxn>
+                <a:cxn ang="0">
+                  <a:pos x="connsiteX27" y="connsiteY27"/>
+                </a:cxn>
+                <a:cxn ang="0">
+                  <a:pos x="connsiteX28" y="connsiteY28"/>
+                </a:cxn>
+                <a:cxn ang="0">
+                  <a:pos x="connsiteX29" y="connsiteY29"/>
+                </a:cxn>
+                <a:cxn ang="0">
+                  <a:pos x="connsiteX30" y="connsiteY30"/>
+                </a:cxn>
+                <a:cxn ang="0">
+                  <a:pos x="connsiteX31" y="connsiteY31"/>
+                </a:cxn>
+                <a:cxn ang="0">
+                  <a:pos x="connsiteX32" y="connsiteY32"/>
+                </a:cxn>
+                <a:cxn ang="0">
+                  <a:pos x="connsiteX33" y="connsiteY33"/>
+                </a:cxn>
+                <a:cxn ang="0">
+                  <a:pos x="connsiteX34" y="connsiteY34"/>
+                </a:cxn>
+                <a:cxn ang="0">
+                  <a:pos x="connsiteX35" y="connsiteY35"/>
+                </a:cxn>
+                <a:cxn ang="0">
+                  <a:pos x="connsiteX36" y="connsiteY36"/>
+                </a:cxn>
+                <a:cxn ang="0">
+                  <a:pos x="connsiteX37" y="connsiteY37"/>
+                </a:cxn>
+                <a:cxn ang="0">
+                  <a:pos x="connsiteX38" y="connsiteY38"/>
+                </a:cxn>
+                <a:cxn ang="0">
+                  <a:pos x="connsiteX39" y="connsiteY39"/>
+                </a:cxn>
+              </a:cxnLst>
+              <a:rect l="l" t="t" r="r" b="b"/>
+              <a:pathLst>
+                <a:path w="196850" h="1625600">
+                  <a:moveTo>
+                    <a:pt x="127000" y="0"/>
+                  </a:moveTo>
+                  <a:cubicBezTo>
+                    <a:pt x="72901" y="32460"/>
+                    <a:pt x="111869" y="2917"/>
+                    <a:pt x="82550" y="38100"/>
+                  </a:cubicBezTo>
+                  <a:cubicBezTo>
+                    <a:pt x="68308" y="55190"/>
+                    <a:pt x="59809" y="55930"/>
+                    <a:pt x="50800" y="76200"/>
+                  </a:cubicBezTo>
+                  <a:cubicBezTo>
+                    <a:pt x="25936" y="132143"/>
+                    <a:pt x="53821" y="98579"/>
+                    <a:pt x="19050" y="133350"/>
+                  </a:cubicBezTo>
+                  <a:cubicBezTo>
+                    <a:pt x="3590" y="179729"/>
+                    <a:pt x="9597" y="158463"/>
+                    <a:pt x="0" y="196850"/>
+                  </a:cubicBezTo>
+                  <a:cubicBezTo>
+                    <a:pt x="14593" y="299002"/>
+                    <a:pt x="3234" y="257352"/>
+                    <a:pt x="25400" y="323850"/>
+                  </a:cubicBezTo>
+                  <a:cubicBezTo>
+                    <a:pt x="30227" y="338330"/>
+                    <a:pt x="42333" y="349250"/>
+                    <a:pt x="50800" y="361950"/>
+                  </a:cubicBezTo>
+                  <a:cubicBezTo>
+                    <a:pt x="63500" y="381000"/>
+                    <a:pt x="61383" y="383117"/>
+                    <a:pt x="82550" y="393700"/>
+                  </a:cubicBezTo>
+                  <a:cubicBezTo>
+                    <a:pt x="88537" y="396693"/>
+                    <a:pt x="95250" y="397933"/>
+                    <a:pt x="101600" y="400050"/>
+                  </a:cubicBezTo>
+                  <a:cubicBezTo>
+                    <a:pt x="150493" y="448943"/>
+                    <a:pt x="129737" y="423206"/>
+                    <a:pt x="165100" y="476250"/>
+                  </a:cubicBezTo>
+                  <a:cubicBezTo>
+                    <a:pt x="169333" y="482600"/>
+                    <a:pt x="175387" y="488060"/>
+                    <a:pt x="177800" y="495300"/>
+                  </a:cubicBezTo>
+                  <a:cubicBezTo>
+                    <a:pt x="179917" y="501650"/>
+                    <a:pt x="182698" y="507816"/>
+                    <a:pt x="184150" y="514350"/>
+                  </a:cubicBezTo>
+                  <a:cubicBezTo>
+                    <a:pt x="186943" y="526919"/>
+                    <a:pt x="187975" y="539825"/>
+                    <a:pt x="190500" y="552450"/>
+                  </a:cubicBezTo>
+                  <a:cubicBezTo>
+                    <a:pt x="192212" y="561008"/>
+                    <a:pt x="194733" y="569383"/>
+                    <a:pt x="196850" y="577850"/>
+                  </a:cubicBezTo>
+                  <a:cubicBezTo>
+                    <a:pt x="194733" y="605367"/>
+                    <a:pt x="193923" y="633015"/>
+                    <a:pt x="190500" y="660400"/>
+                  </a:cubicBezTo>
+                  <a:cubicBezTo>
+                    <a:pt x="188219" y="678652"/>
+                    <a:pt x="167578" y="708722"/>
+                    <a:pt x="158750" y="717550"/>
+                  </a:cubicBezTo>
+                  <a:cubicBezTo>
+                    <a:pt x="152400" y="723900"/>
+                    <a:pt x="145449" y="729701"/>
+                    <a:pt x="139700" y="736600"/>
+                  </a:cubicBezTo>
+                  <a:cubicBezTo>
+                    <a:pt x="113242" y="768350"/>
+                    <a:pt x="142875" y="745067"/>
+                    <a:pt x="107950" y="768350"/>
+                  </a:cubicBezTo>
+                  <a:cubicBezTo>
+                    <a:pt x="103717" y="774700"/>
+                    <a:pt x="98663" y="780574"/>
+                    <a:pt x="95250" y="787400"/>
+                  </a:cubicBezTo>
+                  <a:cubicBezTo>
+                    <a:pt x="92257" y="793387"/>
+                    <a:pt x="93081" y="801223"/>
+                    <a:pt x="88900" y="806450"/>
+                  </a:cubicBezTo>
+                  <a:cubicBezTo>
+                    <a:pt x="84132" y="812409"/>
+                    <a:pt x="76200" y="814917"/>
+                    <a:pt x="69850" y="819150"/>
+                  </a:cubicBezTo>
+                  <a:cubicBezTo>
+                    <a:pt x="38908" y="865562"/>
+                    <a:pt x="76676" y="807204"/>
+                    <a:pt x="44450" y="863600"/>
+                  </a:cubicBezTo>
+                  <a:cubicBezTo>
+                    <a:pt x="40664" y="870226"/>
+                    <a:pt x="35163" y="875824"/>
+                    <a:pt x="31750" y="882650"/>
+                  </a:cubicBezTo>
+                  <a:cubicBezTo>
+                    <a:pt x="27195" y="891760"/>
+                    <a:pt x="21085" y="918962"/>
+                    <a:pt x="19050" y="927100"/>
+                  </a:cubicBezTo>
+                  <a:cubicBezTo>
+                    <a:pt x="19267" y="930136"/>
+                    <a:pt x="24826" y="1037369"/>
+                    <a:pt x="31750" y="1060450"/>
+                  </a:cubicBezTo>
+                  <a:cubicBezTo>
+                    <a:pt x="37042" y="1078089"/>
+                    <a:pt x="49742" y="1083028"/>
+                    <a:pt x="63500" y="1092200"/>
+                  </a:cubicBezTo>
+                  <a:cubicBezTo>
+                    <a:pt x="67733" y="1098550"/>
+                    <a:pt x="70457" y="1106224"/>
+                    <a:pt x="76200" y="1111250"/>
+                  </a:cubicBezTo>
+                  <a:cubicBezTo>
+                    <a:pt x="87687" y="1121301"/>
+                    <a:pt x="114300" y="1136650"/>
+                    <a:pt x="114300" y="1136650"/>
+                  </a:cubicBezTo>
+                  <a:cubicBezTo>
+                    <a:pt x="116417" y="1143000"/>
+                    <a:pt x="116469" y="1150473"/>
+                    <a:pt x="120650" y="1155700"/>
+                  </a:cubicBezTo>
+                  <a:cubicBezTo>
+                    <a:pt x="125418" y="1161659"/>
+                    <a:pt x="133490" y="1163964"/>
+                    <a:pt x="139700" y="1168400"/>
+                  </a:cubicBezTo>
+                  <a:cubicBezTo>
+                    <a:pt x="148312" y="1174551"/>
+                    <a:pt x="158069" y="1179540"/>
+                    <a:pt x="165100" y="1187450"/>
+                  </a:cubicBezTo>
+                  <a:cubicBezTo>
+                    <a:pt x="175241" y="1198858"/>
+                    <a:pt x="190500" y="1225550"/>
+                    <a:pt x="190500" y="1225550"/>
+                  </a:cubicBezTo>
+                  <a:cubicBezTo>
+                    <a:pt x="192617" y="1234017"/>
+                    <a:pt x="196850" y="1242223"/>
+                    <a:pt x="196850" y="1250950"/>
+                  </a:cubicBezTo>
+                  <a:cubicBezTo>
+                    <a:pt x="196850" y="1280659"/>
+                    <a:pt x="193781" y="1310323"/>
+                    <a:pt x="190500" y="1339850"/>
+                  </a:cubicBezTo>
+                  <a:cubicBezTo>
+                    <a:pt x="188901" y="1354245"/>
+                    <a:pt x="174642" y="1393773"/>
+                    <a:pt x="171450" y="1403350"/>
+                  </a:cubicBezTo>
+                  <a:cubicBezTo>
+                    <a:pt x="169037" y="1410590"/>
+                    <a:pt x="162163" y="1415574"/>
+                    <a:pt x="158750" y="1422400"/>
+                  </a:cubicBezTo>
+                  <a:cubicBezTo>
+                    <a:pt x="155757" y="1428387"/>
+                    <a:pt x="155393" y="1435463"/>
+                    <a:pt x="152400" y="1441450"/>
+                  </a:cubicBezTo>
+                  <a:cubicBezTo>
+                    <a:pt x="122211" y="1501827"/>
+                    <a:pt x="159765" y="1400306"/>
+                    <a:pt x="127000" y="1498600"/>
+                  </a:cubicBezTo>
+                  <a:cubicBezTo>
+                    <a:pt x="119404" y="1521388"/>
+                    <a:pt x="96991" y="1531377"/>
+                    <a:pt x="95250" y="1555750"/>
+                  </a:cubicBezTo>
+                  <a:cubicBezTo>
+                    <a:pt x="93591" y="1578974"/>
+                    <a:pt x="95250" y="1602317"/>
+                    <a:pt x="95250" y="1625600"/>
+                  </a:cubicBezTo>
+                </a:path>
+              </a:pathLst>
+            </a:custGeom>
+            <a:ln w="28575">
+              <a:headEnd type="none" w="med" len="med"/>
+              <a:tailEnd type="triangle" w="med" len="med"/>
+            </a:ln>
+          </p:spPr>
+          <p:style>
+            <a:lnRef idx="1">
+              <a:schemeClr val="dk1"/>
+            </a:lnRef>
+            <a:fillRef idx="0">
+              <a:schemeClr val="dk1"/>
+            </a:fillRef>
+            <a:effectRef idx="0">
+              <a:schemeClr val="dk1"/>
+            </a:effectRef>
+            <a:fontRef idx="minor">
+              <a:schemeClr val="tx1"/>
+            </a:fontRef>
+          </p:style>
+          <p:txBody>
+            <a:bodyPr rtlCol="0" anchor="ctr"/>
+            <a:lstStyle/>
+            <a:p>
+              <a:pPr algn="ctr"/>
+              <a:endParaRPr lang="en-US">
+                <a:ln w="12700">
+                  <a:solidFill>
+                    <a:schemeClr val="tx1"/>
+                  </a:solidFill>
+                </a:ln>
+              </a:endParaRPr>
+            </a:p>
+          </p:txBody>
+        </p:sp>
+        <p:sp>
+          <p:nvSpPr>
+            <p:cNvPr id="23" name="Freeform 22"/>
+            <p:cNvSpPr/>
+            <p:nvPr/>
+          </p:nvSpPr>
+          <p:spPr>
+            <a:xfrm>
+              <a:off x="2222736" y="5571707"/>
+              <a:ext cx="91440" cy="731520"/>
+            </a:xfrm>
+            <a:custGeom>
+              <a:avLst/>
+              <a:gdLst>
+                <a:gd name="connsiteX0" fmla="*/ 127000 w 196850"/>
+                <a:gd name="connsiteY0" fmla="*/ 0 h 1625600"/>
+                <a:gd name="connsiteX1" fmla="*/ 82550 w 196850"/>
+                <a:gd name="connsiteY1" fmla="*/ 38100 h 1625600"/>
+                <a:gd name="connsiteX2" fmla="*/ 50800 w 196850"/>
+                <a:gd name="connsiteY2" fmla="*/ 76200 h 1625600"/>
+                <a:gd name="connsiteX3" fmla="*/ 19050 w 196850"/>
+                <a:gd name="connsiteY3" fmla="*/ 133350 h 1625600"/>
+                <a:gd name="connsiteX4" fmla="*/ 0 w 196850"/>
+                <a:gd name="connsiteY4" fmla="*/ 196850 h 1625600"/>
+                <a:gd name="connsiteX5" fmla="*/ 25400 w 196850"/>
+                <a:gd name="connsiteY5" fmla="*/ 323850 h 1625600"/>
+                <a:gd name="connsiteX6" fmla="*/ 50800 w 196850"/>
+                <a:gd name="connsiteY6" fmla="*/ 361950 h 1625600"/>
+                <a:gd name="connsiteX7" fmla="*/ 82550 w 196850"/>
+                <a:gd name="connsiteY7" fmla="*/ 393700 h 1625600"/>
+                <a:gd name="connsiteX8" fmla="*/ 101600 w 196850"/>
+                <a:gd name="connsiteY8" fmla="*/ 400050 h 1625600"/>
+                <a:gd name="connsiteX9" fmla="*/ 165100 w 196850"/>
+                <a:gd name="connsiteY9" fmla="*/ 476250 h 1625600"/>
+                <a:gd name="connsiteX10" fmla="*/ 177800 w 196850"/>
+                <a:gd name="connsiteY10" fmla="*/ 495300 h 1625600"/>
+                <a:gd name="connsiteX11" fmla="*/ 184150 w 196850"/>
+                <a:gd name="connsiteY11" fmla="*/ 514350 h 1625600"/>
+                <a:gd name="connsiteX12" fmla="*/ 190500 w 196850"/>
+                <a:gd name="connsiteY12" fmla="*/ 552450 h 1625600"/>
+                <a:gd name="connsiteX13" fmla="*/ 196850 w 196850"/>
+                <a:gd name="connsiteY13" fmla="*/ 577850 h 1625600"/>
+                <a:gd name="connsiteX14" fmla="*/ 190500 w 196850"/>
+                <a:gd name="connsiteY14" fmla="*/ 660400 h 1625600"/>
+                <a:gd name="connsiteX15" fmla="*/ 158750 w 196850"/>
+                <a:gd name="connsiteY15" fmla="*/ 717550 h 1625600"/>
+                <a:gd name="connsiteX16" fmla="*/ 139700 w 196850"/>
+                <a:gd name="connsiteY16" fmla="*/ 736600 h 1625600"/>
+                <a:gd name="connsiteX17" fmla="*/ 107950 w 196850"/>
+                <a:gd name="connsiteY17" fmla="*/ 768350 h 1625600"/>
+                <a:gd name="connsiteX18" fmla="*/ 95250 w 196850"/>
+                <a:gd name="connsiteY18" fmla="*/ 787400 h 1625600"/>
+                <a:gd name="connsiteX19" fmla="*/ 88900 w 196850"/>
+                <a:gd name="connsiteY19" fmla="*/ 806450 h 1625600"/>
+                <a:gd name="connsiteX20" fmla="*/ 69850 w 196850"/>
+                <a:gd name="connsiteY20" fmla="*/ 819150 h 1625600"/>
+                <a:gd name="connsiteX21" fmla="*/ 44450 w 196850"/>
+                <a:gd name="connsiteY21" fmla="*/ 863600 h 1625600"/>
+                <a:gd name="connsiteX22" fmla="*/ 31750 w 196850"/>
+                <a:gd name="connsiteY22" fmla="*/ 882650 h 1625600"/>
+                <a:gd name="connsiteX23" fmla="*/ 19050 w 196850"/>
+                <a:gd name="connsiteY23" fmla="*/ 927100 h 1625600"/>
+                <a:gd name="connsiteX24" fmla="*/ 31750 w 196850"/>
+                <a:gd name="connsiteY24" fmla="*/ 1060450 h 1625600"/>
+                <a:gd name="connsiteX25" fmla="*/ 63500 w 196850"/>
+                <a:gd name="connsiteY25" fmla="*/ 1092200 h 1625600"/>
+                <a:gd name="connsiteX26" fmla="*/ 76200 w 196850"/>
+                <a:gd name="connsiteY26" fmla="*/ 1111250 h 1625600"/>
+                <a:gd name="connsiteX27" fmla="*/ 114300 w 196850"/>
+                <a:gd name="connsiteY27" fmla="*/ 1136650 h 1625600"/>
+                <a:gd name="connsiteX28" fmla="*/ 120650 w 196850"/>
+                <a:gd name="connsiteY28" fmla="*/ 1155700 h 1625600"/>
+                <a:gd name="connsiteX29" fmla="*/ 139700 w 196850"/>
+                <a:gd name="connsiteY29" fmla="*/ 1168400 h 1625600"/>
+                <a:gd name="connsiteX30" fmla="*/ 165100 w 196850"/>
+                <a:gd name="connsiteY30" fmla="*/ 1187450 h 1625600"/>
+                <a:gd name="connsiteX31" fmla="*/ 190500 w 196850"/>
+                <a:gd name="connsiteY31" fmla="*/ 1225550 h 1625600"/>
+                <a:gd name="connsiteX32" fmla="*/ 196850 w 196850"/>
+                <a:gd name="connsiteY32" fmla="*/ 1250950 h 1625600"/>
+                <a:gd name="connsiteX33" fmla="*/ 190500 w 196850"/>
+                <a:gd name="connsiteY33" fmla="*/ 1339850 h 1625600"/>
+                <a:gd name="connsiteX34" fmla="*/ 171450 w 196850"/>
+                <a:gd name="connsiteY34" fmla="*/ 1403350 h 1625600"/>
+                <a:gd name="connsiteX35" fmla="*/ 158750 w 196850"/>
+                <a:gd name="connsiteY35" fmla="*/ 1422400 h 1625600"/>
+                <a:gd name="connsiteX36" fmla="*/ 152400 w 196850"/>
+                <a:gd name="connsiteY36" fmla="*/ 1441450 h 1625600"/>
+                <a:gd name="connsiteX37" fmla="*/ 127000 w 196850"/>
+                <a:gd name="connsiteY37" fmla="*/ 1498600 h 1625600"/>
+                <a:gd name="connsiteX38" fmla="*/ 95250 w 196850"/>
+                <a:gd name="connsiteY38" fmla="*/ 1555750 h 1625600"/>
+                <a:gd name="connsiteX39" fmla="*/ 95250 w 196850"/>
+                <a:gd name="connsiteY39" fmla="*/ 1625600 h 1625600"/>
+              </a:gdLst>
+              <a:ahLst/>
+              <a:cxnLst>
+                <a:cxn ang="0">
+                  <a:pos x="connsiteX0" y="connsiteY0"/>
+                </a:cxn>
+                <a:cxn ang="0">
+                  <a:pos x="connsiteX1" y="connsiteY1"/>
+                </a:cxn>
+                <a:cxn ang="0">
+                  <a:pos x="connsiteX2" y="connsiteY2"/>
+                </a:cxn>
+                <a:cxn ang="0">
+                  <a:pos x="connsiteX3" y="connsiteY3"/>
+                </a:cxn>
+                <a:cxn ang="0">
+                  <a:pos x="connsiteX4" y="connsiteY4"/>
+                </a:cxn>
+                <a:cxn ang="0">
+                  <a:pos x="connsiteX5" y="connsiteY5"/>
+                </a:cxn>
+                <a:cxn ang="0">
+                  <a:pos x="connsiteX6" y="connsiteY6"/>
+                </a:cxn>
+                <a:cxn ang="0">
+                  <a:pos x="connsiteX7" y="connsiteY7"/>
+                </a:cxn>
+                <a:cxn ang="0">
+                  <a:pos x="connsiteX8" y="connsiteY8"/>
+                </a:cxn>
+                <a:cxn ang="0">
+                  <a:pos x="connsiteX9" y="connsiteY9"/>
+                </a:cxn>
+                <a:cxn ang="0">
+                  <a:pos x="connsiteX10" y="connsiteY10"/>
+                </a:cxn>
+                <a:cxn ang="0">
+                  <a:pos x="connsiteX11" y="connsiteY11"/>
+                </a:cxn>
+                <a:cxn ang="0">
+                  <a:pos x="connsiteX12" y="connsiteY12"/>
+                </a:cxn>
+                <a:cxn ang="0">
+                  <a:pos x="connsiteX13" y="connsiteY13"/>
+                </a:cxn>
+                <a:cxn ang="0">
+                  <a:pos x="connsiteX14" y="connsiteY14"/>
+                </a:cxn>
+                <a:cxn ang="0">
+                  <a:pos x="connsiteX15" y="connsiteY15"/>
+                </a:cxn>
+                <a:cxn ang="0">
+                  <a:pos x="connsiteX16" y="connsiteY16"/>
+                </a:cxn>
+                <a:cxn ang="0">
+                  <a:pos x="connsiteX17" y="connsiteY17"/>
+                </a:cxn>
+                <a:cxn ang="0">
+                  <a:pos x="connsiteX18" y="connsiteY18"/>
+                </a:cxn>
+                <a:cxn ang="0">
+                  <a:pos x="connsiteX19" y="connsiteY19"/>
+                </a:cxn>
+                <a:cxn ang="0">
+                  <a:pos x="connsiteX20" y="connsiteY20"/>
+                </a:cxn>
+                <a:cxn ang="0">
+                  <a:pos x="connsiteX21" y="connsiteY21"/>
+                </a:cxn>
+                <a:cxn ang="0">
+                  <a:pos x="connsiteX22" y="connsiteY22"/>
+                </a:cxn>
+                <a:cxn ang="0">
+                  <a:pos x="connsiteX23" y="connsiteY23"/>
+                </a:cxn>
+                <a:cxn ang="0">
+                  <a:pos x="connsiteX24" y="connsiteY24"/>
+                </a:cxn>
+                <a:cxn ang="0">
+                  <a:pos x="connsiteX25" y="connsiteY25"/>
+                </a:cxn>
+                <a:cxn ang="0">
+                  <a:pos x="connsiteX26" y="connsiteY26"/>
+                </a:cxn>
+                <a:cxn ang="0">
+                  <a:pos x="connsiteX27" y="connsiteY27"/>
+                </a:cxn>
+                <a:cxn ang="0">
+                  <a:pos x="connsiteX28" y="connsiteY28"/>
+                </a:cxn>
+                <a:cxn ang="0">
+                  <a:pos x="connsiteX29" y="connsiteY29"/>
+                </a:cxn>
+                <a:cxn ang="0">
+                  <a:pos x="connsiteX30" y="connsiteY30"/>
+                </a:cxn>
+                <a:cxn ang="0">
+                  <a:pos x="connsiteX31" y="connsiteY31"/>
+                </a:cxn>
+                <a:cxn ang="0">
+                  <a:pos x="connsiteX32" y="connsiteY32"/>
+                </a:cxn>
+                <a:cxn ang="0">
+                  <a:pos x="connsiteX33" y="connsiteY33"/>
+                </a:cxn>
+                <a:cxn ang="0">
+                  <a:pos x="connsiteX34" y="connsiteY34"/>
+                </a:cxn>
+                <a:cxn ang="0">
+                  <a:pos x="connsiteX35" y="connsiteY35"/>
+                </a:cxn>
+                <a:cxn ang="0">
+                  <a:pos x="connsiteX36" y="connsiteY36"/>
+                </a:cxn>
+                <a:cxn ang="0">
+                  <a:pos x="connsiteX37" y="connsiteY37"/>
+                </a:cxn>
+                <a:cxn ang="0">
+                  <a:pos x="connsiteX38" y="connsiteY38"/>
+                </a:cxn>
+                <a:cxn ang="0">
+                  <a:pos x="connsiteX39" y="connsiteY39"/>
+                </a:cxn>
+              </a:cxnLst>
+              <a:rect l="l" t="t" r="r" b="b"/>
+              <a:pathLst>
+                <a:path w="196850" h="1625600">
+                  <a:moveTo>
+                    <a:pt x="127000" y="0"/>
+                  </a:moveTo>
+                  <a:cubicBezTo>
+                    <a:pt x="72901" y="32460"/>
+                    <a:pt x="111869" y="2917"/>
+                    <a:pt x="82550" y="38100"/>
+                  </a:cubicBezTo>
+                  <a:cubicBezTo>
+                    <a:pt x="68308" y="55190"/>
+                    <a:pt x="59809" y="55930"/>
+                    <a:pt x="50800" y="76200"/>
+                  </a:cubicBezTo>
+                  <a:cubicBezTo>
+                    <a:pt x="25936" y="132143"/>
+                    <a:pt x="53821" y="98579"/>
+                    <a:pt x="19050" y="133350"/>
+                  </a:cubicBezTo>
+                  <a:cubicBezTo>
+                    <a:pt x="3590" y="179729"/>
+                    <a:pt x="9597" y="158463"/>
+                    <a:pt x="0" y="196850"/>
+                  </a:cubicBezTo>
+                  <a:cubicBezTo>
+                    <a:pt x="14593" y="299002"/>
+                    <a:pt x="3234" y="257352"/>
+                    <a:pt x="25400" y="323850"/>
+                  </a:cubicBezTo>
+                  <a:cubicBezTo>
+                    <a:pt x="30227" y="338330"/>
+                    <a:pt x="42333" y="349250"/>
+                    <a:pt x="50800" y="361950"/>
+                  </a:cubicBezTo>
+                  <a:cubicBezTo>
+                    <a:pt x="63500" y="381000"/>
+                    <a:pt x="61383" y="383117"/>
+                    <a:pt x="82550" y="393700"/>
+                  </a:cubicBezTo>
+                  <a:cubicBezTo>
+                    <a:pt x="88537" y="396693"/>
+                    <a:pt x="95250" y="397933"/>
+                    <a:pt x="101600" y="400050"/>
+                  </a:cubicBezTo>
+                  <a:cubicBezTo>
+                    <a:pt x="150493" y="448943"/>
+                    <a:pt x="129737" y="423206"/>
+                    <a:pt x="165100" y="476250"/>
+                  </a:cubicBezTo>
+                  <a:cubicBezTo>
+                    <a:pt x="169333" y="482600"/>
+                    <a:pt x="175387" y="488060"/>
+                    <a:pt x="177800" y="495300"/>
+                  </a:cubicBezTo>
+                  <a:cubicBezTo>
+                    <a:pt x="179917" y="501650"/>
+                    <a:pt x="182698" y="507816"/>
+                    <a:pt x="184150" y="514350"/>
+                  </a:cubicBezTo>
+                  <a:cubicBezTo>
+                    <a:pt x="186943" y="526919"/>
+                    <a:pt x="187975" y="539825"/>
+                    <a:pt x="190500" y="552450"/>
+                  </a:cubicBezTo>
+                  <a:cubicBezTo>
+                    <a:pt x="192212" y="561008"/>
+                    <a:pt x="194733" y="569383"/>
+                    <a:pt x="196850" y="577850"/>
+                  </a:cubicBezTo>
+                  <a:cubicBezTo>
+                    <a:pt x="194733" y="605367"/>
+                    <a:pt x="193923" y="633015"/>
+                    <a:pt x="190500" y="660400"/>
+                  </a:cubicBezTo>
+                  <a:cubicBezTo>
+                    <a:pt x="188219" y="678652"/>
+                    <a:pt x="167578" y="708722"/>
+                    <a:pt x="158750" y="717550"/>
+                  </a:cubicBezTo>
+                  <a:cubicBezTo>
+                    <a:pt x="152400" y="723900"/>
+                    <a:pt x="145449" y="729701"/>
+                    <a:pt x="139700" y="736600"/>
+                  </a:cubicBezTo>
+                  <a:cubicBezTo>
+                    <a:pt x="113242" y="768350"/>
+                    <a:pt x="142875" y="745067"/>
+                    <a:pt x="107950" y="768350"/>
+                  </a:cubicBezTo>
+                  <a:cubicBezTo>
+                    <a:pt x="103717" y="774700"/>
+                    <a:pt x="98663" y="780574"/>
+                    <a:pt x="95250" y="787400"/>
+                  </a:cubicBezTo>
+                  <a:cubicBezTo>
+                    <a:pt x="92257" y="793387"/>
+                    <a:pt x="93081" y="801223"/>
+                    <a:pt x="88900" y="806450"/>
+                  </a:cubicBezTo>
+                  <a:cubicBezTo>
+                    <a:pt x="84132" y="812409"/>
+                    <a:pt x="76200" y="814917"/>
+                    <a:pt x="69850" y="819150"/>
+                  </a:cubicBezTo>
+                  <a:cubicBezTo>
+                    <a:pt x="38908" y="865562"/>
+                    <a:pt x="76676" y="807204"/>
+                    <a:pt x="44450" y="863600"/>
+                  </a:cubicBezTo>
+                  <a:cubicBezTo>
+                    <a:pt x="40664" y="870226"/>
+                    <a:pt x="35163" y="875824"/>
+                    <a:pt x="31750" y="882650"/>
+                  </a:cubicBezTo>
+                  <a:cubicBezTo>
+                    <a:pt x="27195" y="891760"/>
+                    <a:pt x="21085" y="918962"/>
+                    <a:pt x="19050" y="927100"/>
+                  </a:cubicBezTo>
+                  <a:cubicBezTo>
+                    <a:pt x="19267" y="930136"/>
+                    <a:pt x="24826" y="1037369"/>
+                    <a:pt x="31750" y="1060450"/>
+                  </a:cubicBezTo>
+                  <a:cubicBezTo>
+                    <a:pt x="37042" y="1078089"/>
+                    <a:pt x="49742" y="1083028"/>
+                    <a:pt x="63500" y="1092200"/>
+                  </a:cubicBezTo>
+                  <a:cubicBezTo>
+                    <a:pt x="67733" y="1098550"/>
+                    <a:pt x="70457" y="1106224"/>
+                    <a:pt x="76200" y="1111250"/>
+                  </a:cubicBezTo>
+                  <a:cubicBezTo>
+                    <a:pt x="87687" y="1121301"/>
+                    <a:pt x="114300" y="1136650"/>
+                    <a:pt x="114300" y="1136650"/>
+                  </a:cubicBezTo>
+                  <a:cubicBezTo>
+                    <a:pt x="116417" y="1143000"/>
+                    <a:pt x="116469" y="1150473"/>
+                    <a:pt x="120650" y="1155700"/>
+                  </a:cubicBezTo>
+                  <a:cubicBezTo>
+                    <a:pt x="125418" y="1161659"/>
+                    <a:pt x="133490" y="1163964"/>
+                    <a:pt x="139700" y="1168400"/>
+                  </a:cubicBezTo>
+                  <a:cubicBezTo>
+                    <a:pt x="148312" y="1174551"/>
+                    <a:pt x="158069" y="1179540"/>
+                    <a:pt x="165100" y="1187450"/>
+                  </a:cubicBezTo>
+                  <a:cubicBezTo>
+                    <a:pt x="175241" y="1198858"/>
+                    <a:pt x="190500" y="1225550"/>
+                    <a:pt x="190500" y="1225550"/>
+                  </a:cubicBezTo>
+                  <a:cubicBezTo>
+                    <a:pt x="192617" y="1234017"/>
+                    <a:pt x="196850" y="1242223"/>
+                    <a:pt x="196850" y="1250950"/>
+                  </a:cubicBezTo>
+                  <a:cubicBezTo>
+                    <a:pt x="196850" y="1280659"/>
+                    <a:pt x="193781" y="1310323"/>
+                    <a:pt x="190500" y="1339850"/>
+                  </a:cubicBezTo>
+                  <a:cubicBezTo>
+                    <a:pt x="188901" y="1354245"/>
+                    <a:pt x="174642" y="1393773"/>
+                    <a:pt x="171450" y="1403350"/>
+                  </a:cubicBezTo>
+                  <a:cubicBezTo>
+                    <a:pt x="169037" y="1410590"/>
+                    <a:pt x="162163" y="1415574"/>
+                    <a:pt x="158750" y="1422400"/>
+                  </a:cubicBezTo>
+                  <a:cubicBezTo>
+                    <a:pt x="155757" y="1428387"/>
+                    <a:pt x="155393" y="1435463"/>
+                    <a:pt x="152400" y="1441450"/>
+                  </a:cubicBezTo>
+                  <a:cubicBezTo>
+                    <a:pt x="122211" y="1501827"/>
+                    <a:pt x="159765" y="1400306"/>
+                    <a:pt x="127000" y="1498600"/>
+                  </a:cubicBezTo>
+                  <a:cubicBezTo>
+                    <a:pt x="119404" y="1521388"/>
+                    <a:pt x="96991" y="1531377"/>
+                    <a:pt x="95250" y="1555750"/>
+                  </a:cubicBezTo>
+                  <a:cubicBezTo>
+                    <a:pt x="93591" y="1578974"/>
+                    <a:pt x="95250" y="1602317"/>
+                    <a:pt x="95250" y="1625600"/>
+                  </a:cubicBezTo>
+                </a:path>
+              </a:pathLst>
+            </a:custGeom>
+            <a:ln w="28575">
+              <a:headEnd type="none" w="med" len="med"/>
+              <a:tailEnd type="triangle" w="med" len="med"/>
+            </a:ln>
+          </p:spPr>
+          <p:style>
+            <a:lnRef idx="1">
+              <a:schemeClr val="dk1"/>
+            </a:lnRef>
+            <a:fillRef idx="0">
+              <a:schemeClr val="dk1"/>
+            </a:fillRef>
+            <a:effectRef idx="0">
+              <a:schemeClr val="dk1"/>
+            </a:effectRef>
+            <a:fontRef idx="minor">
+              <a:schemeClr val="tx1"/>
+            </a:fontRef>
+          </p:style>
+          <p:txBody>
+            <a:bodyPr rtlCol="0" anchor="ctr"/>
+            <a:lstStyle/>
+            <a:p>
+              <a:pPr algn="ctr"/>
+              <a:endParaRPr lang="en-US">
+                <a:ln w="12700">
+                  <a:solidFill>
+                    <a:schemeClr val="tx1"/>
+                  </a:solidFill>
+                </a:ln>
+              </a:endParaRPr>
+            </a:p>
+          </p:txBody>
+        </p:sp>
+        <p:sp>
+          <p:nvSpPr>
+            <p:cNvPr id="24" name="Freeform 23"/>
+            <p:cNvSpPr/>
+            <p:nvPr/>
+          </p:nvSpPr>
+          <p:spPr>
+            <a:xfrm>
+              <a:off x="3201868" y="5571707"/>
+              <a:ext cx="91440" cy="731520"/>
+            </a:xfrm>
+            <a:custGeom>
+              <a:avLst/>
+              <a:gdLst>
+                <a:gd name="connsiteX0" fmla="*/ 127000 w 196850"/>
+                <a:gd name="connsiteY0" fmla="*/ 0 h 1625600"/>
+                <a:gd name="connsiteX1" fmla="*/ 82550 w 196850"/>
+                <a:gd name="connsiteY1" fmla="*/ 38100 h 1625600"/>
+                <a:gd name="connsiteX2" fmla="*/ 50800 w 196850"/>
+                <a:gd name="connsiteY2" fmla="*/ 76200 h 1625600"/>
+                <a:gd name="connsiteX3" fmla="*/ 19050 w 196850"/>
+                <a:gd name="connsiteY3" fmla="*/ 133350 h 1625600"/>
+                <a:gd name="connsiteX4" fmla="*/ 0 w 196850"/>
+                <a:gd name="connsiteY4" fmla="*/ 196850 h 1625600"/>
+                <a:gd name="connsiteX5" fmla="*/ 25400 w 196850"/>
+                <a:gd name="connsiteY5" fmla="*/ 323850 h 1625600"/>
+                <a:gd name="connsiteX6" fmla="*/ 50800 w 196850"/>
+                <a:gd name="connsiteY6" fmla="*/ 361950 h 1625600"/>
+                <a:gd name="connsiteX7" fmla="*/ 82550 w 196850"/>
+                <a:gd name="connsiteY7" fmla="*/ 393700 h 1625600"/>
+                <a:gd name="connsiteX8" fmla="*/ 101600 w 196850"/>
+                <a:gd name="connsiteY8" fmla="*/ 400050 h 1625600"/>
+                <a:gd name="connsiteX9" fmla="*/ 165100 w 196850"/>
+                <a:gd name="connsiteY9" fmla="*/ 476250 h 1625600"/>
+                <a:gd name="connsiteX10" fmla="*/ 177800 w 196850"/>
+                <a:gd name="connsiteY10" fmla="*/ 495300 h 1625600"/>
+                <a:gd name="connsiteX11" fmla="*/ 184150 w 196850"/>
+                <a:gd name="connsiteY11" fmla="*/ 514350 h 1625600"/>
+                <a:gd name="connsiteX12" fmla="*/ 190500 w 196850"/>
+                <a:gd name="connsiteY12" fmla="*/ 552450 h 1625600"/>
+                <a:gd name="connsiteX13" fmla="*/ 196850 w 196850"/>
+                <a:gd name="connsiteY13" fmla="*/ 577850 h 1625600"/>
+                <a:gd name="connsiteX14" fmla="*/ 190500 w 196850"/>
+                <a:gd name="connsiteY14" fmla="*/ 660400 h 1625600"/>
+                <a:gd name="connsiteX15" fmla="*/ 158750 w 196850"/>
+                <a:gd name="connsiteY15" fmla="*/ 717550 h 1625600"/>
+                <a:gd name="connsiteX16" fmla="*/ 139700 w 196850"/>
+                <a:gd name="connsiteY16" fmla="*/ 736600 h 1625600"/>
+                <a:gd name="connsiteX17" fmla="*/ 107950 w 196850"/>
+                <a:gd name="connsiteY17" fmla="*/ 768350 h 1625600"/>
+                <a:gd name="connsiteX18" fmla="*/ 95250 w 196850"/>
+                <a:gd name="connsiteY18" fmla="*/ 787400 h 1625600"/>
+                <a:gd name="connsiteX19" fmla="*/ 88900 w 196850"/>
+                <a:gd name="connsiteY19" fmla="*/ 806450 h 1625600"/>
+                <a:gd name="connsiteX20" fmla="*/ 69850 w 196850"/>
+                <a:gd name="connsiteY20" fmla="*/ 819150 h 1625600"/>
+                <a:gd name="connsiteX21" fmla="*/ 44450 w 196850"/>
+                <a:gd name="connsiteY21" fmla="*/ 863600 h 1625600"/>
+                <a:gd name="connsiteX22" fmla="*/ 31750 w 196850"/>
+                <a:gd name="connsiteY22" fmla="*/ 882650 h 1625600"/>
+                <a:gd name="connsiteX23" fmla="*/ 19050 w 196850"/>
+                <a:gd name="connsiteY23" fmla="*/ 927100 h 1625600"/>
+                <a:gd name="connsiteX24" fmla="*/ 31750 w 196850"/>
+                <a:gd name="connsiteY24" fmla="*/ 1060450 h 1625600"/>
+                <a:gd name="connsiteX25" fmla="*/ 63500 w 196850"/>
+                <a:gd name="connsiteY25" fmla="*/ 1092200 h 1625600"/>
+                <a:gd name="connsiteX26" fmla="*/ 76200 w 196850"/>
+                <a:gd name="connsiteY26" fmla="*/ 1111250 h 1625600"/>
+                <a:gd name="connsiteX27" fmla="*/ 114300 w 196850"/>
+                <a:gd name="connsiteY27" fmla="*/ 1136650 h 1625600"/>
+                <a:gd name="connsiteX28" fmla="*/ 120650 w 196850"/>
+                <a:gd name="connsiteY28" fmla="*/ 1155700 h 1625600"/>
+                <a:gd name="connsiteX29" fmla="*/ 139700 w 196850"/>
+                <a:gd name="connsiteY29" fmla="*/ 1168400 h 1625600"/>
+                <a:gd name="connsiteX30" fmla="*/ 165100 w 196850"/>
+                <a:gd name="connsiteY30" fmla="*/ 1187450 h 1625600"/>
+                <a:gd name="connsiteX31" fmla="*/ 190500 w 196850"/>
+                <a:gd name="connsiteY31" fmla="*/ 1225550 h 1625600"/>
+                <a:gd name="connsiteX32" fmla="*/ 196850 w 196850"/>
+                <a:gd name="connsiteY32" fmla="*/ 1250950 h 1625600"/>
+                <a:gd name="connsiteX33" fmla="*/ 190500 w 196850"/>
+                <a:gd name="connsiteY33" fmla="*/ 1339850 h 1625600"/>
+                <a:gd name="connsiteX34" fmla="*/ 171450 w 196850"/>
+                <a:gd name="connsiteY34" fmla="*/ 1403350 h 1625600"/>
+                <a:gd name="connsiteX35" fmla="*/ 158750 w 196850"/>
+                <a:gd name="connsiteY35" fmla="*/ 1422400 h 1625600"/>
+                <a:gd name="connsiteX36" fmla="*/ 152400 w 196850"/>
+                <a:gd name="connsiteY36" fmla="*/ 1441450 h 1625600"/>
+                <a:gd name="connsiteX37" fmla="*/ 127000 w 196850"/>
+                <a:gd name="connsiteY37" fmla="*/ 1498600 h 1625600"/>
+                <a:gd name="connsiteX38" fmla="*/ 95250 w 196850"/>
+                <a:gd name="connsiteY38" fmla="*/ 1555750 h 1625600"/>
+                <a:gd name="connsiteX39" fmla="*/ 95250 w 196850"/>
+                <a:gd name="connsiteY39" fmla="*/ 1625600 h 1625600"/>
+              </a:gdLst>
+              <a:ahLst/>
+              <a:cxnLst>
+                <a:cxn ang="0">
+                  <a:pos x="connsiteX0" y="connsiteY0"/>
+                </a:cxn>
+                <a:cxn ang="0">
+                  <a:pos x="connsiteX1" y="connsiteY1"/>
+                </a:cxn>
+                <a:cxn ang="0">
+                  <a:pos x="connsiteX2" y="connsiteY2"/>
+                </a:cxn>
+                <a:cxn ang="0">
+                  <a:pos x="connsiteX3" y="connsiteY3"/>
+                </a:cxn>
+                <a:cxn ang="0">
+                  <a:pos x="connsiteX4" y="connsiteY4"/>
+                </a:cxn>
+                <a:cxn ang="0">
+                  <a:pos x="connsiteX5" y="connsiteY5"/>
+                </a:cxn>
+                <a:cxn ang="0">
+                  <a:pos x="connsiteX6" y="connsiteY6"/>
+                </a:cxn>
+                <a:cxn ang="0">
+                  <a:pos x="connsiteX7" y="connsiteY7"/>
+                </a:cxn>
+                <a:cxn ang="0">
+                  <a:pos x="connsiteX8" y="connsiteY8"/>
+                </a:cxn>
+                <a:cxn ang="0">
+                  <a:pos x="connsiteX9" y="connsiteY9"/>
+                </a:cxn>
+                <a:cxn ang="0">
+                  <a:pos x="connsiteX10" y="connsiteY10"/>
+                </a:cxn>
+                <a:cxn ang="0">
+                  <a:pos x="connsiteX11" y="connsiteY11"/>
+                </a:cxn>
+                <a:cxn ang="0">
+                  <a:pos x="connsiteX12" y="connsiteY12"/>
+                </a:cxn>
+                <a:cxn ang="0">
+                  <a:pos x="connsiteX13" y="connsiteY13"/>
+                </a:cxn>
+                <a:cxn ang="0">
+                  <a:pos x="connsiteX14" y="connsiteY14"/>
+                </a:cxn>
+                <a:cxn ang="0">
+                  <a:pos x="connsiteX15" y="connsiteY15"/>
+                </a:cxn>
+                <a:cxn ang="0">
+                  <a:pos x="connsiteX16" y="connsiteY16"/>
+                </a:cxn>
+                <a:cxn ang="0">
+                  <a:pos x="connsiteX17" y="connsiteY17"/>
+                </a:cxn>
+                <a:cxn ang="0">
+                  <a:pos x="connsiteX18" y="connsiteY18"/>
+                </a:cxn>
+                <a:cxn ang="0">
+                  <a:pos x="connsiteX19" y="connsiteY19"/>
+                </a:cxn>
+                <a:cxn ang="0">
+                  <a:pos x="connsiteX20" y="connsiteY20"/>
+                </a:cxn>
+                <a:cxn ang="0">
+                  <a:pos x="connsiteX21" y="connsiteY21"/>
+                </a:cxn>
+                <a:cxn ang="0">
+                  <a:pos x="connsiteX22" y="connsiteY22"/>
+                </a:cxn>
+                <a:cxn ang="0">
+                  <a:pos x="connsiteX23" y="connsiteY23"/>
+                </a:cxn>
+                <a:cxn ang="0">
+                  <a:pos x="connsiteX24" y="connsiteY24"/>
+                </a:cxn>
+                <a:cxn ang="0">
+                  <a:pos x="connsiteX25" y="connsiteY25"/>
+                </a:cxn>
+                <a:cxn ang="0">
+                  <a:pos x="connsiteX26" y="connsiteY26"/>
+                </a:cxn>
+                <a:cxn ang="0">
+                  <a:pos x="connsiteX27" y="connsiteY27"/>
+                </a:cxn>
+                <a:cxn ang="0">
+                  <a:pos x="connsiteX28" y="connsiteY28"/>
+                </a:cxn>
+                <a:cxn ang="0">
+                  <a:pos x="connsiteX29" y="connsiteY29"/>
+                </a:cxn>
+                <a:cxn ang="0">
+                  <a:pos x="connsiteX30" y="connsiteY30"/>
+                </a:cxn>
+                <a:cxn ang="0">
+                  <a:pos x="connsiteX31" y="connsiteY31"/>
+                </a:cxn>
+                <a:cxn ang="0">
+                  <a:pos x="connsiteX32" y="connsiteY32"/>
+                </a:cxn>
+                <a:cxn ang="0">
+                  <a:pos x="connsiteX33" y="connsiteY33"/>
+                </a:cxn>
+                <a:cxn ang="0">
+                  <a:pos x="connsiteX34" y="connsiteY34"/>
+                </a:cxn>
+                <a:cxn ang="0">
+                  <a:pos x="connsiteX35" y="connsiteY35"/>
+                </a:cxn>
+                <a:cxn ang="0">
+                  <a:pos x="connsiteX36" y="connsiteY36"/>
+                </a:cxn>
+                <a:cxn ang="0">
+                  <a:pos x="connsiteX37" y="connsiteY37"/>
+                </a:cxn>
+                <a:cxn ang="0">
+                  <a:pos x="connsiteX38" y="connsiteY38"/>
+                </a:cxn>
+                <a:cxn ang="0">
+                  <a:pos x="connsiteX39" y="connsiteY39"/>
+                </a:cxn>
+              </a:cxnLst>
+              <a:rect l="l" t="t" r="r" b="b"/>
+              <a:pathLst>
+                <a:path w="196850" h="1625600">
+                  <a:moveTo>
+                    <a:pt x="127000" y="0"/>
+                  </a:moveTo>
+                  <a:cubicBezTo>
+                    <a:pt x="72901" y="32460"/>
+                    <a:pt x="111869" y="2917"/>
+                    <a:pt x="82550" y="38100"/>
+                  </a:cubicBezTo>
+                  <a:cubicBezTo>
+                    <a:pt x="68308" y="55190"/>
+                    <a:pt x="59809" y="55930"/>
+                    <a:pt x="50800" y="76200"/>
+                  </a:cubicBezTo>
+                  <a:cubicBezTo>
+                    <a:pt x="25936" y="132143"/>
+                    <a:pt x="53821" y="98579"/>
+                    <a:pt x="19050" y="133350"/>
+                  </a:cubicBezTo>
+                  <a:cubicBezTo>
+                    <a:pt x="3590" y="179729"/>
+                    <a:pt x="9597" y="158463"/>
+                    <a:pt x="0" y="196850"/>
+                  </a:cubicBezTo>
+                  <a:cubicBezTo>
+                    <a:pt x="14593" y="299002"/>
+                    <a:pt x="3234" y="257352"/>
+                    <a:pt x="25400" y="323850"/>
+                  </a:cubicBezTo>
+                  <a:cubicBezTo>
+                    <a:pt x="30227" y="338330"/>
+                    <a:pt x="42333" y="349250"/>
+                    <a:pt x="50800" y="361950"/>
+                  </a:cubicBezTo>
+                  <a:cubicBezTo>
+                    <a:pt x="63500" y="381000"/>
+                    <a:pt x="61383" y="383117"/>
+                    <a:pt x="82550" y="393700"/>
+                  </a:cubicBezTo>
+                  <a:cubicBezTo>
+                    <a:pt x="88537" y="396693"/>
+                    <a:pt x="95250" y="397933"/>
+                    <a:pt x="101600" y="400050"/>
+                  </a:cubicBezTo>
+                  <a:cubicBezTo>
+                    <a:pt x="150493" y="448943"/>
+                    <a:pt x="129737" y="423206"/>
+                    <a:pt x="165100" y="476250"/>
+                  </a:cubicBezTo>
+                  <a:cubicBezTo>
+                    <a:pt x="169333" y="482600"/>
+                    <a:pt x="175387" y="488060"/>
+                    <a:pt x="177800" y="495300"/>
+                  </a:cubicBezTo>
+                  <a:cubicBezTo>
+                    <a:pt x="179917" y="501650"/>
+                    <a:pt x="182698" y="507816"/>
+                    <a:pt x="184150" y="514350"/>
+                  </a:cubicBezTo>
+                  <a:cubicBezTo>
+                    <a:pt x="186943" y="526919"/>
+                    <a:pt x="187975" y="539825"/>
+                    <a:pt x="190500" y="552450"/>
+                  </a:cubicBezTo>
+                  <a:cubicBezTo>
+                    <a:pt x="192212" y="561008"/>
+                    <a:pt x="194733" y="569383"/>
+                    <a:pt x="196850" y="577850"/>
+                  </a:cubicBezTo>
+                  <a:cubicBezTo>
+                    <a:pt x="194733" y="605367"/>
+                    <a:pt x="193923" y="633015"/>
+                    <a:pt x="190500" y="660400"/>
+                  </a:cubicBezTo>
+                  <a:cubicBezTo>
+                    <a:pt x="188219" y="678652"/>
+                    <a:pt x="167578" y="708722"/>
+                    <a:pt x="158750" y="717550"/>
+                  </a:cubicBezTo>
+                  <a:cubicBezTo>
+                    <a:pt x="152400" y="723900"/>
+                    <a:pt x="145449" y="729701"/>
+                    <a:pt x="139700" y="736600"/>
+                  </a:cubicBezTo>
+                  <a:cubicBezTo>
+                    <a:pt x="113242" y="768350"/>
+                    <a:pt x="142875" y="745067"/>
+                    <a:pt x="107950" y="768350"/>
+                  </a:cubicBezTo>
+                  <a:cubicBezTo>
+                    <a:pt x="103717" y="774700"/>
+                    <a:pt x="98663" y="780574"/>
+                    <a:pt x="95250" y="787400"/>
+                  </a:cubicBezTo>
+                  <a:cubicBezTo>
+                    <a:pt x="92257" y="793387"/>
+                    <a:pt x="93081" y="801223"/>
+                    <a:pt x="88900" y="806450"/>
+                  </a:cubicBezTo>
+                  <a:cubicBezTo>
+                    <a:pt x="84132" y="812409"/>
+                    <a:pt x="76200" y="814917"/>
+                    <a:pt x="69850" y="819150"/>
+                  </a:cubicBezTo>
+                  <a:cubicBezTo>
+                    <a:pt x="38908" y="865562"/>
+                    <a:pt x="76676" y="807204"/>
+                    <a:pt x="44450" y="863600"/>
+                  </a:cubicBezTo>
+                  <a:cubicBezTo>
+                    <a:pt x="40664" y="870226"/>
+                    <a:pt x="35163" y="875824"/>
+                    <a:pt x="31750" y="882650"/>
+                  </a:cubicBezTo>
+                  <a:cubicBezTo>
+                    <a:pt x="27195" y="891760"/>
+                    <a:pt x="21085" y="918962"/>
+                    <a:pt x="19050" y="927100"/>
+                  </a:cubicBezTo>
+                  <a:cubicBezTo>
+                    <a:pt x="19267" y="930136"/>
+                    <a:pt x="24826" y="1037369"/>
+                    <a:pt x="31750" y="1060450"/>
+                  </a:cubicBezTo>
+                  <a:cubicBezTo>
+                    <a:pt x="37042" y="1078089"/>
+                    <a:pt x="49742" y="1083028"/>
+                    <a:pt x="63500" y="1092200"/>
+                  </a:cubicBezTo>
+                  <a:cubicBezTo>
+                    <a:pt x="67733" y="1098550"/>
+                    <a:pt x="70457" y="1106224"/>
+                    <a:pt x="76200" y="1111250"/>
+                  </a:cubicBezTo>
+                  <a:cubicBezTo>
+                    <a:pt x="87687" y="1121301"/>
+                    <a:pt x="114300" y="1136650"/>
+                    <a:pt x="114300" y="1136650"/>
+                  </a:cubicBezTo>
+                  <a:cubicBezTo>
+                    <a:pt x="116417" y="1143000"/>
+                    <a:pt x="116469" y="1150473"/>
+                    <a:pt x="120650" y="1155700"/>
+                  </a:cubicBezTo>
+                  <a:cubicBezTo>
+                    <a:pt x="125418" y="1161659"/>
+                    <a:pt x="133490" y="1163964"/>
+                    <a:pt x="139700" y="1168400"/>
+                  </a:cubicBezTo>
+                  <a:cubicBezTo>
+                    <a:pt x="148312" y="1174551"/>
+                    <a:pt x="158069" y="1179540"/>
+                    <a:pt x="165100" y="1187450"/>
+                  </a:cubicBezTo>
+                  <a:cubicBezTo>
+                    <a:pt x="175241" y="1198858"/>
+                    <a:pt x="190500" y="1225550"/>
+                    <a:pt x="190500" y="1225550"/>
+                  </a:cubicBezTo>
+                  <a:cubicBezTo>
+                    <a:pt x="192617" y="1234017"/>
+                    <a:pt x="196850" y="1242223"/>
+                    <a:pt x="196850" y="1250950"/>
+                  </a:cubicBezTo>
+                  <a:cubicBezTo>
+                    <a:pt x="196850" y="1280659"/>
+                    <a:pt x="193781" y="1310323"/>
+                    <a:pt x="190500" y="1339850"/>
+                  </a:cubicBezTo>
+                  <a:cubicBezTo>
+                    <a:pt x="188901" y="1354245"/>
+                    <a:pt x="174642" y="1393773"/>
+                    <a:pt x="171450" y="1403350"/>
+                  </a:cubicBezTo>
+                  <a:cubicBezTo>
+                    <a:pt x="169037" y="1410590"/>
+                    <a:pt x="162163" y="1415574"/>
+                    <a:pt x="158750" y="1422400"/>
+                  </a:cubicBezTo>
+                  <a:cubicBezTo>
+                    <a:pt x="155757" y="1428387"/>
+                    <a:pt x="155393" y="1435463"/>
+                    <a:pt x="152400" y="1441450"/>
+                  </a:cubicBezTo>
+                  <a:cubicBezTo>
+                    <a:pt x="122211" y="1501827"/>
+                    <a:pt x="159765" y="1400306"/>
+                    <a:pt x="127000" y="1498600"/>
+                  </a:cubicBezTo>
+                  <a:cubicBezTo>
+                    <a:pt x="119404" y="1521388"/>
+                    <a:pt x="96991" y="1531377"/>
+                    <a:pt x="95250" y="1555750"/>
+                  </a:cubicBezTo>
+                  <a:cubicBezTo>
+                    <a:pt x="93591" y="1578974"/>
+                    <a:pt x="95250" y="1602317"/>
+                    <a:pt x="95250" y="1625600"/>
+                  </a:cubicBezTo>
+                </a:path>
+              </a:pathLst>
+            </a:custGeom>
+            <a:ln w="28575">
+              <a:headEnd type="none" w="med" len="med"/>
+              <a:tailEnd type="triangle" w="med" len="med"/>
+            </a:ln>
+          </p:spPr>
+          <p:style>
+            <a:lnRef idx="1">
+              <a:schemeClr val="dk1"/>
+            </a:lnRef>
+            <a:fillRef idx="0">
+              <a:schemeClr val="dk1"/>
+            </a:fillRef>
+            <a:effectRef idx="0">
+              <a:schemeClr val="dk1"/>
+            </a:effectRef>
+            <a:fontRef idx="minor">
+              <a:schemeClr val="tx1"/>
+            </a:fontRef>
+          </p:style>
+          <p:txBody>
+            <a:bodyPr rtlCol="0" anchor="ctr"/>
+            <a:lstStyle/>
+            <a:p>
+              <a:pPr algn="ctr"/>
+              <a:endParaRPr lang="en-US">
+                <a:ln w="12700">
+                  <a:solidFill>
+                    <a:schemeClr val="tx1"/>
+                  </a:solidFill>
+                </a:ln>
+              </a:endParaRPr>
+            </a:p>
+          </p:txBody>
+        </p:sp>
+      </p:grpSp>
+      <p:grpSp>
+        <p:nvGrpSpPr>
+          <p:cNvPr id="74" name="Group 73"/>
+          <p:cNvGrpSpPr/>
+          <p:nvPr/>
+        </p:nvGrpSpPr>
+        <p:grpSpPr>
+          <a:xfrm>
+            <a:off x="4787201" y="3541834"/>
+            <a:ext cx="3462655" cy="1787931"/>
+            <a:chOff x="4787201" y="3541834"/>
+            <a:chExt cx="3462655" cy="1787931"/>
+          </a:xfrm>
+        </p:grpSpPr>
+        <p:sp>
+          <p:nvSpPr>
+            <p:cNvPr id="27" name="Oval 26"/>
+            <p:cNvSpPr>
+              <a:spLocks noChangeAspect="1"/>
+            </p:cNvSpPr>
+            <p:nvPr/>
+          </p:nvSpPr>
+          <p:spPr>
+            <a:xfrm>
+              <a:off x="4787201" y="4689685"/>
+              <a:ext cx="640080" cy="640080"/>
+            </a:xfrm>
+            <a:prstGeom prst="ellipse">
+              <a:avLst/>
+            </a:prstGeom>
+            <a:solidFill>
+              <a:schemeClr val="accent6">
+                <a:lumMod val="20000"/>
+                <a:lumOff val="80000"/>
+              </a:schemeClr>
+            </a:solidFill>
+          </p:spPr>
+          <p:style>
+            <a:lnRef idx="2">
+              <a:schemeClr val="accent6"/>
+            </a:lnRef>
+            <a:fillRef idx="1">
+              <a:schemeClr val="lt1"/>
+            </a:fillRef>
+            <a:effectRef idx="0">
+              <a:schemeClr val="accent6"/>
+            </a:effectRef>
+            <a:fontRef idx="minor">
+              <a:schemeClr val="dk1"/>
+            </a:fontRef>
+          </p:style>
+          <p:txBody>
+            <a:bodyPr lIns="0" tIns="0" rIns="0" bIns="0" rtlCol="0" anchor="ctr"/>
+            <a:lstStyle/>
+            <a:p>
+              <a:pPr algn="ctr"/>
+              <a:r>
+                <a:rPr lang="en-US" sz="1600" dirty="0"/>
+                <a:t>Task A</a:t>
+              </a:r>
+            </a:p>
+          </p:txBody>
+        </p:sp>
+        <p:sp>
+          <p:nvSpPr>
+            <p:cNvPr id="30" name="Rectangle 29"/>
+            <p:cNvSpPr>
+              <a:spLocks noChangeAspect="1"/>
+            </p:cNvSpPr>
+            <p:nvPr/>
+          </p:nvSpPr>
+          <p:spPr>
+            <a:xfrm>
+              <a:off x="4787201" y="3541834"/>
+              <a:ext cx="640080" cy="640080"/>
+            </a:xfrm>
+            <a:prstGeom prst="rect">
+              <a:avLst/>
+            </a:prstGeom>
+          </p:spPr>
+          <p:style>
+            <a:lnRef idx="2">
+              <a:schemeClr val="dk1"/>
+            </a:lnRef>
+            <a:fillRef idx="1">
+              <a:schemeClr val="lt1"/>
+            </a:fillRef>
+            <a:effectRef idx="0">
+              <a:schemeClr val="dk1"/>
+            </a:effectRef>
+            <a:fontRef idx="minor">
+              <a:schemeClr val="dk1"/>
+            </a:fontRef>
+          </p:style>
+          <p:txBody>
+            <a:bodyPr lIns="0" tIns="0" rIns="0" bIns="0" rtlCol="0" anchor="ctr"/>
+            <a:lstStyle/>
+            <a:p>
+              <a:pPr algn="ctr"/>
+              <a:r>
+                <a:rPr lang="en-US" dirty="0"/>
+                <a:t>Data 1</a:t>
+              </a:r>
+            </a:p>
+          </p:txBody>
+        </p:sp>
+        <p:cxnSp>
+          <p:nvCxnSpPr>
+            <p:cNvPr id="32" name="Straight Arrow Connector 31"/>
+            <p:cNvCxnSpPr>
+              <a:stCxn id="30" idx="2"/>
+              <a:endCxn id="27" idx="0"/>
+            </p:cNvCxnSpPr>
+            <p:nvPr/>
+          </p:nvCxnSpPr>
+          <p:spPr>
+            <a:xfrm>
+              <a:off x="5107241" y="4181914"/>
+              <a:ext cx="0" cy="507771"/>
+            </a:xfrm>
+            <a:prstGeom prst="straightConnector1">
+              <a:avLst/>
+            </a:prstGeom>
+            <a:ln>
+              <a:tailEnd type="triangle"/>
+            </a:ln>
+          </p:spPr>
+          <p:style>
+            <a:lnRef idx="1">
+              <a:schemeClr val="dk1"/>
+            </a:lnRef>
+            <a:fillRef idx="0">
+              <a:schemeClr val="dk1"/>
+            </a:fillRef>
+            <a:effectRef idx="0">
+              <a:schemeClr val="dk1"/>
+            </a:effectRef>
+            <a:fontRef idx="minor">
+              <a:schemeClr val="tx1"/>
+            </a:fontRef>
+          </p:style>
+        </p:cxnSp>
+        <p:sp>
+          <p:nvSpPr>
+            <p:cNvPr id="53" name="Oval 52"/>
+            <p:cNvSpPr>
+              <a:spLocks noChangeAspect="1"/>
+            </p:cNvSpPr>
+            <p:nvPr/>
+          </p:nvSpPr>
+          <p:spPr>
+            <a:xfrm>
+              <a:off x="5492845" y="4689685"/>
+              <a:ext cx="640080" cy="640080"/>
+            </a:xfrm>
+            <a:prstGeom prst="ellipse">
+              <a:avLst/>
+            </a:prstGeom>
+            <a:solidFill>
+              <a:schemeClr val="accent6">
+                <a:lumMod val="20000"/>
+                <a:lumOff val="80000"/>
+              </a:schemeClr>
+            </a:solidFill>
+          </p:spPr>
+          <p:style>
+            <a:lnRef idx="2">
+              <a:schemeClr val="accent6"/>
+            </a:lnRef>
+            <a:fillRef idx="1">
+              <a:schemeClr val="lt1"/>
+            </a:fillRef>
+            <a:effectRef idx="0">
+              <a:schemeClr val="accent6"/>
+            </a:effectRef>
+            <a:fontRef idx="minor">
+              <a:schemeClr val="dk1"/>
+            </a:fontRef>
+          </p:style>
+          <p:txBody>
+            <a:bodyPr lIns="0" tIns="0" rIns="0" bIns="0" rtlCol="0" anchor="ctr"/>
+            <a:lstStyle/>
+            <a:p>
+              <a:pPr algn="ctr"/>
+              <a:r>
+                <a:rPr lang="en-US" sz="1600" dirty="0"/>
+                <a:t>Task A</a:t>
+              </a:r>
+            </a:p>
+          </p:txBody>
+        </p:sp>
+        <p:sp>
+          <p:nvSpPr>
+            <p:cNvPr id="54" name="Rectangle 53"/>
+            <p:cNvSpPr>
+              <a:spLocks noChangeAspect="1"/>
+            </p:cNvSpPr>
+            <p:nvPr/>
+          </p:nvSpPr>
+          <p:spPr>
+            <a:xfrm>
+              <a:off x="5492845" y="3541834"/>
+              <a:ext cx="640080" cy="640080"/>
+            </a:xfrm>
+            <a:prstGeom prst="rect">
+              <a:avLst/>
+            </a:prstGeom>
+          </p:spPr>
+          <p:style>
+            <a:lnRef idx="2">
+              <a:schemeClr val="dk1"/>
+            </a:lnRef>
+            <a:fillRef idx="1">
+              <a:schemeClr val="lt1"/>
+            </a:fillRef>
+            <a:effectRef idx="0">
+              <a:schemeClr val="dk1"/>
+            </a:effectRef>
+            <a:fontRef idx="minor">
+              <a:schemeClr val="dk1"/>
+            </a:fontRef>
+          </p:style>
+          <p:txBody>
+            <a:bodyPr lIns="0" tIns="0" rIns="0" bIns="0" rtlCol="0" anchor="ctr"/>
+            <a:lstStyle/>
+            <a:p>
+              <a:pPr algn="ctr"/>
+              <a:r>
+                <a:rPr lang="en-US" dirty="0"/>
+                <a:t>Data 2</a:t>
+              </a:r>
+            </a:p>
+          </p:txBody>
+        </p:sp>
+        <p:cxnSp>
+          <p:nvCxnSpPr>
+            <p:cNvPr id="55" name="Straight Arrow Connector 54"/>
+            <p:cNvCxnSpPr>
+              <a:stCxn id="54" idx="2"/>
+              <a:endCxn id="53" idx="0"/>
+            </p:cNvCxnSpPr>
+            <p:nvPr/>
+          </p:nvCxnSpPr>
+          <p:spPr>
+            <a:xfrm>
+              <a:off x="5812885" y="4181914"/>
+              <a:ext cx="0" cy="507771"/>
+            </a:xfrm>
+            <a:prstGeom prst="straightConnector1">
+              <a:avLst/>
+            </a:prstGeom>
+            <a:ln>
+              <a:tailEnd type="triangle"/>
+            </a:ln>
+          </p:spPr>
+          <p:style>
+            <a:lnRef idx="1">
+              <a:schemeClr val="dk1"/>
+            </a:lnRef>
+            <a:fillRef idx="0">
+              <a:schemeClr val="dk1"/>
+            </a:fillRef>
+            <a:effectRef idx="0">
+              <a:schemeClr val="dk1"/>
+            </a:effectRef>
+            <a:fontRef idx="minor">
+              <a:schemeClr val="tx1"/>
+            </a:fontRef>
+          </p:style>
+        </p:cxnSp>
+        <p:sp>
+          <p:nvSpPr>
+            <p:cNvPr id="58" name="Oval 57"/>
+            <p:cNvSpPr>
+              <a:spLocks noChangeAspect="1"/>
+            </p:cNvSpPr>
+            <p:nvPr/>
+          </p:nvSpPr>
+          <p:spPr>
+            <a:xfrm>
+              <a:off x="6198489" y="4689685"/>
+              <a:ext cx="640080" cy="640080"/>
+            </a:xfrm>
+            <a:prstGeom prst="ellipse">
+              <a:avLst/>
+            </a:prstGeom>
+            <a:solidFill>
+              <a:schemeClr val="accent6">
+                <a:lumMod val="20000"/>
+                <a:lumOff val="80000"/>
+              </a:schemeClr>
+            </a:solidFill>
+          </p:spPr>
+          <p:style>
+            <a:lnRef idx="2">
+              <a:schemeClr val="accent6"/>
+            </a:lnRef>
+            <a:fillRef idx="1">
+              <a:schemeClr val="lt1"/>
+            </a:fillRef>
+            <a:effectRef idx="0">
+              <a:schemeClr val="accent6"/>
+            </a:effectRef>
+            <a:fontRef idx="minor">
+              <a:schemeClr val="dk1"/>
+            </a:fontRef>
+          </p:style>
+          <p:txBody>
+            <a:bodyPr lIns="0" tIns="0" rIns="0" bIns="0" rtlCol="0" anchor="ctr"/>
+            <a:lstStyle/>
+            <a:p>
+              <a:pPr algn="ctr"/>
+              <a:r>
+                <a:rPr lang="en-US" sz="1600" dirty="0"/>
+                <a:t>Task A</a:t>
+              </a:r>
+            </a:p>
+          </p:txBody>
+        </p:sp>
+        <p:sp>
+          <p:nvSpPr>
+            <p:cNvPr id="59" name="Rectangle 58"/>
+            <p:cNvSpPr>
+              <a:spLocks noChangeAspect="1"/>
+            </p:cNvSpPr>
+            <p:nvPr/>
+          </p:nvSpPr>
+          <p:spPr>
+            <a:xfrm>
+              <a:off x="6198489" y="3541834"/>
+              <a:ext cx="640080" cy="640080"/>
+            </a:xfrm>
+            <a:prstGeom prst="rect">
+              <a:avLst/>
+            </a:prstGeom>
+          </p:spPr>
+          <p:style>
+            <a:lnRef idx="2">
+              <a:schemeClr val="dk1"/>
+            </a:lnRef>
+            <a:fillRef idx="1">
+              <a:schemeClr val="lt1"/>
+            </a:fillRef>
+            <a:effectRef idx="0">
+              <a:schemeClr val="dk1"/>
+            </a:effectRef>
+            <a:fontRef idx="minor">
+              <a:schemeClr val="dk1"/>
+            </a:fontRef>
+          </p:style>
+          <p:txBody>
+            <a:bodyPr lIns="0" tIns="0" rIns="0" bIns="0" rtlCol="0" anchor="ctr"/>
+            <a:lstStyle/>
+            <a:p>
+              <a:pPr algn="ctr"/>
+              <a:r>
+                <a:rPr lang="en-US" dirty="0"/>
+                <a:t>Data 3</a:t>
+              </a:r>
+            </a:p>
+          </p:txBody>
+        </p:sp>
+        <p:cxnSp>
+          <p:nvCxnSpPr>
+            <p:cNvPr id="60" name="Straight Arrow Connector 59"/>
+            <p:cNvCxnSpPr>
+              <a:stCxn id="59" idx="2"/>
+              <a:endCxn id="58" idx="0"/>
+            </p:cNvCxnSpPr>
+            <p:nvPr/>
+          </p:nvCxnSpPr>
+          <p:spPr>
+            <a:xfrm>
+              <a:off x="6518529" y="4181914"/>
+              <a:ext cx="0" cy="507771"/>
+            </a:xfrm>
+            <a:prstGeom prst="straightConnector1">
+              <a:avLst/>
+            </a:prstGeom>
+            <a:ln>
+              <a:tailEnd type="triangle"/>
+            </a:ln>
+          </p:spPr>
+          <p:style>
+            <a:lnRef idx="1">
+              <a:schemeClr val="dk1"/>
+            </a:lnRef>
+            <a:fillRef idx="0">
+              <a:schemeClr val="dk1"/>
+            </a:fillRef>
+            <a:effectRef idx="0">
+              <a:schemeClr val="dk1"/>
+            </a:effectRef>
+            <a:fontRef idx="minor">
+              <a:schemeClr val="tx1"/>
+            </a:fontRef>
+          </p:style>
+        </p:cxnSp>
+        <p:sp>
+          <p:nvSpPr>
+            <p:cNvPr id="63" name="Oval 62"/>
+            <p:cNvSpPr>
+              <a:spLocks noChangeAspect="1"/>
+            </p:cNvSpPr>
+            <p:nvPr/>
+          </p:nvSpPr>
+          <p:spPr>
+            <a:xfrm>
+              <a:off x="6904133" y="4689685"/>
+              <a:ext cx="640080" cy="640080"/>
+            </a:xfrm>
+            <a:prstGeom prst="ellipse">
+              <a:avLst/>
+            </a:prstGeom>
+            <a:solidFill>
+              <a:schemeClr val="accent6">
+                <a:lumMod val="20000"/>
+                <a:lumOff val="80000"/>
+              </a:schemeClr>
+            </a:solidFill>
+          </p:spPr>
+          <p:style>
+            <a:lnRef idx="2">
+              <a:schemeClr val="accent6"/>
+            </a:lnRef>
+            <a:fillRef idx="1">
+              <a:schemeClr val="lt1"/>
+            </a:fillRef>
+            <a:effectRef idx="0">
+              <a:schemeClr val="accent6"/>
+            </a:effectRef>
+            <a:fontRef idx="minor">
+              <a:schemeClr val="dk1"/>
+            </a:fontRef>
+          </p:style>
+          <p:txBody>
+            <a:bodyPr lIns="0" tIns="0" rIns="0" bIns="0" rtlCol="0" anchor="ctr"/>
+            <a:lstStyle/>
+            <a:p>
+              <a:pPr algn="ctr"/>
+              <a:r>
+                <a:rPr lang="en-US" sz="1600" dirty="0"/>
+                <a:t>Task A</a:t>
+              </a:r>
+            </a:p>
+          </p:txBody>
+        </p:sp>
+        <p:sp>
+          <p:nvSpPr>
+            <p:cNvPr id="64" name="Rectangle 63"/>
+            <p:cNvSpPr>
+              <a:spLocks noChangeAspect="1"/>
+            </p:cNvSpPr>
+            <p:nvPr/>
+          </p:nvSpPr>
+          <p:spPr>
+            <a:xfrm>
+              <a:off x="6904133" y="3541834"/>
+              <a:ext cx="640080" cy="640080"/>
+            </a:xfrm>
+            <a:prstGeom prst="rect">
+              <a:avLst/>
+            </a:prstGeom>
+          </p:spPr>
+          <p:style>
+            <a:lnRef idx="2">
+              <a:schemeClr val="dk1"/>
+            </a:lnRef>
+            <a:fillRef idx="1">
+              <a:schemeClr val="lt1"/>
+            </a:fillRef>
+            <a:effectRef idx="0">
+              <a:schemeClr val="dk1"/>
+            </a:effectRef>
+            <a:fontRef idx="minor">
+              <a:schemeClr val="dk1"/>
+            </a:fontRef>
+          </p:style>
+          <p:txBody>
+            <a:bodyPr lIns="0" tIns="0" rIns="0" bIns="0" rtlCol="0" anchor="ctr"/>
+            <a:lstStyle/>
+            <a:p>
+              <a:pPr algn="ctr"/>
+              <a:r>
+                <a:rPr lang="en-US" dirty="0"/>
+                <a:t>Data 4</a:t>
+              </a:r>
+            </a:p>
+          </p:txBody>
+        </p:sp>
+        <p:cxnSp>
+          <p:nvCxnSpPr>
+            <p:cNvPr id="65" name="Straight Arrow Connector 64"/>
+            <p:cNvCxnSpPr>
+              <a:stCxn id="64" idx="2"/>
+              <a:endCxn id="63" idx="0"/>
+            </p:cNvCxnSpPr>
+            <p:nvPr/>
+          </p:nvCxnSpPr>
+          <p:spPr>
+            <a:xfrm>
+              <a:off x="7224173" y="4181914"/>
+              <a:ext cx="0" cy="507771"/>
+            </a:xfrm>
+            <a:prstGeom prst="straightConnector1">
+              <a:avLst/>
+            </a:prstGeom>
+            <a:ln>
+              <a:tailEnd type="triangle"/>
+            </a:ln>
+          </p:spPr>
+          <p:style>
+            <a:lnRef idx="1">
+              <a:schemeClr val="dk1"/>
+            </a:lnRef>
+            <a:fillRef idx="0">
+              <a:schemeClr val="dk1"/>
+            </a:fillRef>
+            <a:effectRef idx="0">
+              <a:schemeClr val="dk1"/>
+            </a:effectRef>
+            <a:fontRef idx="minor">
+              <a:schemeClr val="tx1"/>
+            </a:fontRef>
+          </p:style>
+        </p:cxnSp>
+        <p:sp>
+          <p:nvSpPr>
+            <p:cNvPr id="68" name="Oval 67"/>
+            <p:cNvSpPr>
+              <a:spLocks noChangeAspect="1"/>
+            </p:cNvSpPr>
+            <p:nvPr/>
+          </p:nvSpPr>
+          <p:spPr>
+            <a:xfrm>
+              <a:off x="7609776" y="4689685"/>
+              <a:ext cx="640080" cy="640080"/>
+            </a:xfrm>
+            <a:prstGeom prst="ellipse">
+              <a:avLst/>
+            </a:prstGeom>
+            <a:solidFill>
+              <a:schemeClr val="accent6">
+                <a:lumMod val="20000"/>
+                <a:lumOff val="80000"/>
+              </a:schemeClr>
+            </a:solidFill>
+          </p:spPr>
+          <p:style>
+            <a:lnRef idx="2">
+              <a:schemeClr val="accent6"/>
+            </a:lnRef>
+            <a:fillRef idx="1">
+              <a:schemeClr val="lt1"/>
+            </a:fillRef>
+            <a:effectRef idx="0">
+              <a:schemeClr val="accent6"/>
+            </a:effectRef>
+            <a:fontRef idx="minor">
+              <a:schemeClr val="dk1"/>
+            </a:fontRef>
+          </p:style>
+          <p:txBody>
+            <a:bodyPr lIns="0" tIns="0" rIns="0" bIns="0" rtlCol="0" anchor="ctr"/>
+            <a:lstStyle/>
+            <a:p>
+              <a:pPr algn="ctr"/>
+              <a:r>
+                <a:rPr lang="en-US" sz="1600" dirty="0"/>
+                <a:t>Task A</a:t>
+              </a:r>
+            </a:p>
+          </p:txBody>
+        </p:sp>
+        <p:sp>
+          <p:nvSpPr>
+            <p:cNvPr id="69" name="Rectangle 68"/>
+            <p:cNvSpPr>
+              <a:spLocks noChangeAspect="1"/>
+            </p:cNvSpPr>
+            <p:nvPr/>
+          </p:nvSpPr>
+          <p:spPr>
+            <a:xfrm>
+              <a:off x="7609776" y="3541834"/>
+              <a:ext cx="640080" cy="640080"/>
+            </a:xfrm>
+            <a:prstGeom prst="rect">
+              <a:avLst/>
+            </a:prstGeom>
+          </p:spPr>
+          <p:style>
+            <a:lnRef idx="2">
+              <a:schemeClr val="dk1"/>
+            </a:lnRef>
+            <a:fillRef idx="1">
+              <a:schemeClr val="lt1"/>
+            </a:fillRef>
+            <a:effectRef idx="0">
+              <a:schemeClr val="dk1"/>
+            </a:effectRef>
+            <a:fontRef idx="minor">
+              <a:schemeClr val="dk1"/>
+            </a:fontRef>
+          </p:style>
+          <p:txBody>
+            <a:bodyPr lIns="0" tIns="0" rIns="0" bIns="0" rtlCol="0" anchor="ctr"/>
+            <a:lstStyle/>
+            <a:p>
+              <a:pPr algn="ctr"/>
+              <a:r>
+                <a:rPr lang="en-US" dirty="0"/>
+                <a:t>Data 5</a:t>
+              </a:r>
+            </a:p>
+          </p:txBody>
+        </p:sp>
+        <p:cxnSp>
+          <p:nvCxnSpPr>
+            <p:cNvPr id="70" name="Straight Arrow Connector 69"/>
+            <p:cNvCxnSpPr>
+              <a:stCxn id="69" idx="2"/>
+              <a:endCxn id="68" idx="0"/>
+            </p:cNvCxnSpPr>
+            <p:nvPr/>
+          </p:nvCxnSpPr>
+          <p:spPr>
+            <a:xfrm>
+              <a:off x="7929816" y="4181914"/>
+              <a:ext cx="0" cy="507771"/>
+            </a:xfrm>
+            <a:prstGeom prst="straightConnector1">
+              <a:avLst/>
+            </a:prstGeom>
+            <a:ln>
+              <a:tailEnd type="triangle"/>
+            </a:ln>
+          </p:spPr>
+          <p:style>
+            <a:lnRef idx="1">
+              <a:schemeClr val="dk1"/>
+            </a:lnRef>
+            <a:fillRef idx="0">
+              <a:schemeClr val="dk1"/>
+            </a:fillRef>
+            <a:effectRef idx="0">
+              <a:schemeClr val="dk1"/>
+            </a:effectRef>
+            <a:fontRef idx="minor">
+              <a:schemeClr val="tx1"/>
+            </a:fontRef>
+          </p:style>
+        </p:cxnSp>
+      </p:grpSp>
+      <p:grpSp>
+        <p:nvGrpSpPr>
+          <p:cNvPr id="76" name="Group 75"/>
+          <p:cNvGrpSpPr/>
+          <p:nvPr/>
+        </p:nvGrpSpPr>
+        <p:grpSpPr>
+          <a:xfrm>
+            <a:off x="5061521" y="5571707"/>
+            <a:ext cx="2914015" cy="731520"/>
+            <a:chOff x="5061521" y="5571707"/>
+            <a:chExt cx="2914015" cy="731520"/>
+          </a:xfrm>
+        </p:grpSpPr>
+        <p:sp>
+          <p:nvSpPr>
+            <p:cNvPr id="35" name="Freeform 34"/>
+            <p:cNvSpPr/>
+            <p:nvPr/>
+          </p:nvSpPr>
+          <p:spPr>
+            <a:xfrm>
+              <a:off x="5061521" y="5571707"/>
+              <a:ext cx="91440" cy="731520"/>
+            </a:xfrm>
+            <a:custGeom>
+              <a:avLst/>
+              <a:gdLst>
+                <a:gd name="connsiteX0" fmla="*/ 127000 w 196850"/>
+                <a:gd name="connsiteY0" fmla="*/ 0 h 1625600"/>
+                <a:gd name="connsiteX1" fmla="*/ 82550 w 196850"/>
+                <a:gd name="connsiteY1" fmla="*/ 38100 h 1625600"/>
+                <a:gd name="connsiteX2" fmla="*/ 50800 w 196850"/>
+                <a:gd name="connsiteY2" fmla="*/ 76200 h 1625600"/>
+                <a:gd name="connsiteX3" fmla="*/ 19050 w 196850"/>
+                <a:gd name="connsiteY3" fmla="*/ 133350 h 1625600"/>
+                <a:gd name="connsiteX4" fmla="*/ 0 w 196850"/>
+                <a:gd name="connsiteY4" fmla="*/ 196850 h 1625600"/>
+                <a:gd name="connsiteX5" fmla="*/ 25400 w 196850"/>
+                <a:gd name="connsiteY5" fmla="*/ 323850 h 1625600"/>
+                <a:gd name="connsiteX6" fmla="*/ 50800 w 196850"/>
+                <a:gd name="connsiteY6" fmla="*/ 361950 h 1625600"/>
+                <a:gd name="connsiteX7" fmla="*/ 82550 w 196850"/>
+                <a:gd name="connsiteY7" fmla="*/ 393700 h 1625600"/>
+                <a:gd name="connsiteX8" fmla="*/ 101600 w 196850"/>
+                <a:gd name="connsiteY8" fmla="*/ 400050 h 1625600"/>
+                <a:gd name="connsiteX9" fmla="*/ 165100 w 196850"/>
+                <a:gd name="connsiteY9" fmla="*/ 476250 h 1625600"/>
+                <a:gd name="connsiteX10" fmla="*/ 177800 w 196850"/>
+                <a:gd name="connsiteY10" fmla="*/ 495300 h 1625600"/>
+                <a:gd name="connsiteX11" fmla="*/ 184150 w 196850"/>
+                <a:gd name="connsiteY11" fmla="*/ 514350 h 1625600"/>
+                <a:gd name="connsiteX12" fmla="*/ 190500 w 196850"/>
+                <a:gd name="connsiteY12" fmla="*/ 552450 h 1625600"/>
+                <a:gd name="connsiteX13" fmla="*/ 196850 w 196850"/>
+                <a:gd name="connsiteY13" fmla="*/ 577850 h 1625600"/>
+                <a:gd name="connsiteX14" fmla="*/ 190500 w 196850"/>
+                <a:gd name="connsiteY14" fmla="*/ 660400 h 1625600"/>
+                <a:gd name="connsiteX15" fmla="*/ 158750 w 196850"/>
+                <a:gd name="connsiteY15" fmla="*/ 717550 h 1625600"/>
+                <a:gd name="connsiteX16" fmla="*/ 139700 w 196850"/>
+                <a:gd name="connsiteY16" fmla="*/ 736600 h 1625600"/>
+                <a:gd name="connsiteX17" fmla="*/ 107950 w 196850"/>
+                <a:gd name="connsiteY17" fmla="*/ 768350 h 1625600"/>
+                <a:gd name="connsiteX18" fmla="*/ 95250 w 196850"/>
+                <a:gd name="connsiteY18" fmla="*/ 787400 h 1625600"/>
+                <a:gd name="connsiteX19" fmla="*/ 88900 w 196850"/>
+                <a:gd name="connsiteY19" fmla="*/ 806450 h 1625600"/>
+                <a:gd name="connsiteX20" fmla="*/ 69850 w 196850"/>
+                <a:gd name="connsiteY20" fmla="*/ 819150 h 1625600"/>
+                <a:gd name="connsiteX21" fmla="*/ 44450 w 196850"/>
+                <a:gd name="connsiteY21" fmla="*/ 863600 h 1625600"/>
+                <a:gd name="connsiteX22" fmla="*/ 31750 w 196850"/>
+                <a:gd name="connsiteY22" fmla="*/ 882650 h 1625600"/>
+                <a:gd name="connsiteX23" fmla="*/ 19050 w 196850"/>
+                <a:gd name="connsiteY23" fmla="*/ 927100 h 1625600"/>
+                <a:gd name="connsiteX24" fmla="*/ 31750 w 196850"/>
+                <a:gd name="connsiteY24" fmla="*/ 1060450 h 1625600"/>
+                <a:gd name="connsiteX25" fmla="*/ 63500 w 196850"/>
+                <a:gd name="connsiteY25" fmla="*/ 1092200 h 1625600"/>
+                <a:gd name="connsiteX26" fmla="*/ 76200 w 196850"/>
+                <a:gd name="connsiteY26" fmla="*/ 1111250 h 1625600"/>
+                <a:gd name="connsiteX27" fmla="*/ 114300 w 196850"/>
+                <a:gd name="connsiteY27" fmla="*/ 1136650 h 1625600"/>
+                <a:gd name="connsiteX28" fmla="*/ 120650 w 196850"/>
+                <a:gd name="connsiteY28" fmla="*/ 1155700 h 1625600"/>
+                <a:gd name="connsiteX29" fmla="*/ 139700 w 196850"/>
+                <a:gd name="connsiteY29" fmla="*/ 1168400 h 1625600"/>
+                <a:gd name="connsiteX30" fmla="*/ 165100 w 196850"/>
+                <a:gd name="connsiteY30" fmla="*/ 1187450 h 1625600"/>
+                <a:gd name="connsiteX31" fmla="*/ 190500 w 196850"/>
+                <a:gd name="connsiteY31" fmla="*/ 1225550 h 1625600"/>
+                <a:gd name="connsiteX32" fmla="*/ 196850 w 196850"/>
+                <a:gd name="connsiteY32" fmla="*/ 1250950 h 1625600"/>
+                <a:gd name="connsiteX33" fmla="*/ 190500 w 196850"/>
+                <a:gd name="connsiteY33" fmla="*/ 1339850 h 1625600"/>
+                <a:gd name="connsiteX34" fmla="*/ 171450 w 196850"/>
+                <a:gd name="connsiteY34" fmla="*/ 1403350 h 1625600"/>
+                <a:gd name="connsiteX35" fmla="*/ 158750 w 196850"/>
+                <a:gd name="connsiteY35" fmla="*/ 1422400 h 1625600"/>
+                <a:gd name="connsiteX36" fmla="*/ 152400 w 196850"/>
+                <a:gd name="connsiteY36" fmla="*/ 1441450 h 1625600"/>
+                <a:gd name="connsiteX37" fmla="*/ 127000 w 196850"/>
+                <a:gd name="connsiteY37" fmla="*/ 1498600 h 1625600"/>
+                <a:gd name="connsiteX38" fmla="*/ 95250 w 196850"/>
+                <a:gd name="connsiteY38" fmla="*/ 1555750 h 1625600"/>
+                <a:gd name="connsiteX39" fmla="*/ 95250 w 196850"/>
+                <a:gd name="connsiteY39" fmla="*/ 1625600 h 1625600"/>
+              </a:gdLst>
+              <a:ahLst/>
+              <a:cxnLst>
+                <a:cxn ang="0">
+                  <a:pos x="connsiteX0" y="connsiteY0"/>
+                </a:cxn>
+                <a:cxn ang="0">
+                  <a:pos x="connsiteX1" y="connsiteY1"/>
+                </a:cxn>
+                <a:cxn ang="0">
+                  <a:pos x="connsiteX2" y="connsiteY2"/>
+                </a:cxn>
+                <a:cxn ang="0">
+                  <a:pos x="connsiteX3" y="connsiteY3"/>
+                </a:cxn>
+                <a:cxn ang="0">
+                  <a:pos x="connsiteX4" y="connsiteY4"/>
+                </a:cxn>
+                <a:cxn ang="0">
+                  <a:pos x="connsiteX5" y="connsiteY5"/>
+                </a:cxn>
+                <a:cxn ang="0">
+                  <a:pos x="connsiteX6" y="connsiteY6"/>
+                </a:cxn>
+                <a:cxn ang="0">
+                  <a:pos x="connsiteX7" y="connsiteY7"/>
+                </a:cxn>
+                <a:cxn ang="0">
+                  <a:pos x="connsiteX8" y="connsiteY8"/>
+                </a:cxn>
+                <a:cxn ang="0">
+                  <a:pos x="connsiteX9" y="connsiteY9"/>
+                </a:cxn>
+                <a:cxn ang="0">
+                  <a:pos x="connsiteX10" y="connsiteY10"/>
+                </a:cxn>
+                <a:cxn ang="0">
+                  <a:pos x="connsiteX11" y="connsiteY11"/>
+                </a:cxn>
+                <a:cxn ang="0">
+                  <a:pos x="connsiteX12" y="connsiteY12"/>
+                </a:cxn>
+                <a:cxn ang="0">
+                  <a:pos x="connsiteX13" y="connsiteY13"/>
+                </a:cxn>
+                <a:cxn ang="0">
+                  <a:pos x="connsiteX14" y="connsiteY14"/>
+                </a:cxn>
+                <a:cxn ang="0">
+                  <a:pos x="connsiteX15" y="connsiteY15"/>
+                </a:cxn>
+                <a:cxn ang="0">
+                  <a:pos x="connsiteX16" y="connsiteY16"/>
+                </a:cxn>
+                <a:cxn ang="0">
+                  <a:pos x="connsiteX17" y="connsiteY17"/>
+                </a:cxn>
+                <a:cxn ang="0">
+                  <a:pos x="connsiteX18" y="connsiteY18"/>
+                </a:cxn>
+                <a:cxn ang="0">
+                  <a:pos x="connsiteX19" y="connsiteY19"/>
+                </a:cxn>
+                <a:cxn ang="0">
+                  <a:pos x="connsiteX20" y="connsiteY20"/>
+                </a:cxn>
+                <a:cxn ang="0">
+                  <a:pos x="connsiteX21" y="connsiteY21"/>
+                </a:cxn>
+                <a:cxn ang="0">
+                  <a:pos x="connsiteX22" y="connsiteY22"/>
+                </a:cxn>
+                <a:cxn ang="0">
+                  <a:pos x="connsiteX23" y="connsiteY23"/>
+                </a:cxn>
+                <a:cxn ang="0">
+                  <a:pos x="connsiteX24" y="connsiteY24"/>
+                </a:cxn>
+                <a:cxn ang="0">
+                  <a:pos x="connsiteX25" y="connsiteY25"/>
+                </a:cxn>
+                <a:cxn ang="0">
+                  <a:pos x="connsiteX26" y="connsiteY26"/>
+                </a:cxn>
+                <a:cxn ang="0">
+                  <a:pos x="connsiteX27" y="connsiteY27"/>
+                </a:cxn>
+                <a:cxn ang="0">
+                  <a:pos x="connsiteX28" y="connsiteY28"/>
+                </a:cxn>
+                <a:cxn ang="0">
+                  <a:pos x="connsiteX29" y="connsiteY29"/>
+                </a:cxn>
+                <a:cxn ang="0">
+                  <a:pos x="connsiteX30" y="connsiteY30"/>
+                </a:cxn>
+                <a:cxn ang="0">
+                  <a:pos x="connsiteX31" y="connsiteY31"/>
+                </a:cxn>
+                <a:cxn ang="0">
+                  <a:pos x="connsiteX32" y="connsiteY32"/>
+                </a:cxn>
+                <a:cxn ang="0">
+                  <a:pos x="connsiteX33" y="connsiteY33"/>
+                </a:cxn>
+                <a:cxn ang="0">
+                  <a:pos x="connsiteX34" y="connsiteY34"/>
+                </a:cxn>
+                <a:cxn ang="0">
+                  <a:pos x="connsiteX35" y="connsiteY35"/>
+                </a:cxn>
+                <a:cxn ang="0">
+                  <a:pos x="connsiteX36" y="connsiteY36"/>
+                </a:cxn>
+                <a:cxn ang="0">
+                  <a:pos x="connsiteX37" y="connsiteY37"/>
+                </a:cxn>
+                <a:cxn ang="0">
+                  <a:pos x="connsiteX38" y="connsiteY38"/>
+                </a:cxn>
+                <a:cxn ang="0">
+                  <a:pos x="connsiteX39" y="connsiteY39"/>
+                </a:cxn>
+              </a:cxnLst>
+              <a:rect l="l" t="t" r="r" b="b"/>
+              <a:pathLst>
+                <a:path w="196850" h="1625600">
+                  <a:moveTo>
+                    <a:pt x="127000" y="0"/>
+                  </a:moveTo>
+                  <a:cubicBezTo>
+                    <a:pt x="72901" y="32460"/>
+                    <a:pt x="111869" y="2917"/>
+                    <a:pt x="82550" y="38100"/>
+                  </a:cubicBezTo>
+                  <a:cubicBezTo>
+                    <a:pt x="68308" y="55190"/>
+                    <a:pt x="59809" y="55930"/>
+                    <a:pt x="50800" y="76200"/>
+                  </a:cubicBezTo>
+                  <a:cubicBezTo>
+                    <a:pt x="25936" y="132143"/>
+                    <a:pt x="53821" y="98579"/>
+                    <a:pt x="19050" y="133350"/>
+                  </a:cubicBezTo>
+                  <a:cubicBezTo>
+                    <a:pt x="3590" y="179729"/>
+                    <a:pt x="9597" y="158463"/>
+                    <a:pt x="0" y="196850"/>
+                  </a:cubicBezTo>
+                  <a:cubicBezTo>
+                    <a:pt x="14593" y="299002"/>
+                    <a:pt x="3234" y="257352"/>
+                    <a:pt x="25400" y="323850"/>
+                  </a:cubicBezTo>
+                  <a:cubicBezTo>
+                    <a:pt x="30227" y="338330"/>
+                    <a:pt x="42333" y="349250"/>
+                    <a:pt x="50800" y="361950"/>
+                  </a:cubicBezTo>
+                  <a:cubicBezTo>
+                    <a:pt x="63500" y="381000"/>
+                    <a:pt x="61383" y="383117"/>
+                    <a:pt x="82550" y="393700"/>
+                  </a:cubicBezTo>
+                  <a:cubicBezTo>
+                    <a:pt x="88537" y="396693"/>
+                    <a:pt x="95250" y="397933"/>
+                    <a:pt x="101600" y="400050"/>
+                  </a:cubicBezTo>
+                  <a:cubicBezTo>
+                    <a:pt x="150493" y="448943"/>
+                    <a:pt x="129737" y="423206"/>
+                    <a:pt x="165100" y="476250"/>
+                  </a:cubicBezTo>
+                  <a:cubicBezTo>
+                    <a:pt x="169333" y="482600"/>
+                    <a:pt x="175387" y="488060"/>
+                    <a:pt x="177800" y="495300"/>
+                  </a:cubicBezTo>
+                  <a:cubicBezTo>
+                    <a:pt x="179917" y="501650"/>
+                    <a:pt x="182698" y="507816"/>
+                    <a:pt x="184150" y="514350"/>
+                  </a:cubicBezTo>
+                  <a:cubicBezTo>
+                    <a:pt x="186943" y="526919"/>
+                    <a:pt x="187975" y="539825"/>
+                    <a:pt x="190500" y="552450"/>
+                  </a:cubicBezTo>
+                  <a:cubicBezTo>
+                    <a:pt x="192212" y="561008"/>
+                    <a:pt x="194733" y="569383"/>
+                    <a:pt x="196850" y="577850"/>
+                  </a:cubicBezTo>
+                  <a:cubicBezTo>
+                    <a:pt x="194733" y="605367"/>
+                    <a:pt x="193923" y="633015"/>
+                    <a:pt x="190500" y="660400"/>
+                  </a:cubicBezTo>
+                  <a:cubicBezTo>
+                    <a:pt x="188219" y="678652"/>
+                    <a:pt x="167578" y="708722"/>
+                    <a:pt x="158750" y="717550"/>
+                  </a:cubicBezTo>
+                  <a:cubicBezTo>
+                    <a:pt x="152400" y="723900"/>
+                    <a:pt x="145449" y="729701"/>
+                    <a:pt x="139700" y="736600"/>
+                  </a:cubicBezTo>
+                  <a:cubicBezTo>
+                    <a:pt x="113242" y="768350"/>
+                    <a:pt x="142875" y="745067"/>
+                    <a:pt x="107950" y="768350"/>
+                  </a:cubicBezTo>
+                  <a:cubicBezTo>
+                    <a:pt x="103717" y="774700"/>
+                    <a:pt x="98663" y="780574"/>
+                    <a:pt x="95250" y="787400"/>
+                  </a:cubicBezTo>
+                  <a:cubicBezTo>
+                    <a:pt x="92257" y="793387"/>
+                    <a:pt x="93081" y="801223"/>
+                    <a:pt x="88900" y="806450"/>
+                  </a:cubicBezTo>
+                  <a:cubicBezTo>
+                    <a:pt x="84132" y="812409"/>
+                    <a:pt x="76200" y="814917"/>
+                    <a:pt x="69850" y="819150"/>
+                  </a:cubicBezTo>
+                  <a:cubicBezTo>
+                    <a:pt x="38908" y="865562"/>
+                    <a:pt x="76676" y="807204"/>
+                    <a:pt x="44450" y="863600"/>
+                  </a:cubicBezTo>
+                  <a:cubicBezTo>
+                    <a:pt x="40664" y="870226"/>
+                    <a:pt x="35163" y="875824"/>
+                    <a:pt x="31750" y="882650"/>
+                  </a:cubicBezTo>
+                  <a:cubicBezTo>
+                    <a:pt x="27195" y="891760"/>
+                    <a:pt x="21085" y="918962"/>
+                    <a:pt x="19050" y="927100"/>
+                  </a:cubicBezTo>
+                  <a:cubicBezTo>
+                    <a:pt x="19267" y="930136"/>
+                    <a:pt x="24826" y="1037369"/>
+                    <a:pt x="31750" y="1060450"/>
+                  </a:cubicBezTo>
+                  <a:cubicBezTo>
+                    <a:pt x="37042" y="1078089"/>
+                    <a:pt x="49742" y="1083028"/>
+                    <a:pt x="63500" y="1092200"/>
+                  </a:cubicBezTo>
+                  <a:cubicBezTo>
+                    <a:pt x="67733" y="1098550"/>
+                    <a:pt x="70457" y="1106224"/>
+                    <a:pt x="76200" y="1111250"/>
+                  </a:cubicBezTo>
+                  <a:cubicBezTo>
+                    <a:pt x="87687" y="1121301"/>
+                    <a:pt x="114300" y="1136650"/>
+                    <a:pt x="114300" y="1136650"/>
+                  </a:cubicBezTo>
+                  <a:cubicBezTo>
+                    <a:pt x="116417" y="1143000"/>
+                    <a:pt x="116469" y="1150473"/>
+                    <a:pt x="120650" y="1155700"/>
+                  </a:cubicBezTo>
+                  <a:cubicBezTo>
+                    <a:pt x="125418" y="1161659"/>
+                    <a:pt x="133490" y="1163964"/>
+                    <a:pt x="139700" y="1168400"/>
+                  </a:cubicBezTo>
+                  <a:cubicBezTo>
+                    <a:pt x="148312" y="1174551"/>
+                    <a:pt x="158069" y="1179540"/>
+                    <a:pt x="165100" y="1187450"/>
+                  </a:cubicBezTo>
+                  <a:cubicBezTo>
+                    <a:pt x="175241" y="1198858"/>
+                    <a:pt x="190500" y="1225550"/>
+                    <a:pt x="190500" y="1225550"/>
+                  </a:cubicBezTo>
+                  <a:cubicBezTo>
+                    <a:pt x="192617" y="1234017"/>
+                    <a:pt x="196850" y="1242223"/>
+                    <a:pt x="196850" y="1250950"/>
+                  </a:cubicBezTo>
+                  <a:cubicBezTo>
+                    <a:pt x="196850" y="1280659"/>
+                    <a:pt x="193781" y="1310323"/>
+                    <a:pt x="190500" y="1339850"/>
+                  </a:cubicBezTo>
+                  <a:cubicBezTo>
+                    <a:pt x="188901" y="1354245"/>
+                    <a:pt x="174642" y="1393773"/>
+                    <a:pt x="171450" y="1403350"/>
+                  </a:cubicBezTo>
+                  <a:cubicBezTo>
+                    <a:pt x="169037" y="1410590"/>
+                    <a:pt x="162163" y="1415574"/>
+                    <a:pt x="158750" y="1422400"/>
+                  </a:cubicBezTo>
+                  <a:cubicBezTo>
+                    <a:pt x="155757" y="1428387"/>
+                    <a:pt x="155393" y="1435463"/>
+                    <a:pt x="152400" y="1441450"/>
+                  </a:cubicBezTo>
+                  <a:cubicBezTo>
+                    <a:pt x="122211" y="1501827"/>
+                    <a:pt x="159765" y="1400306"/>
+                    <a:pt x="127000" y="1498600"/>
+                  </a:cubicBezTo>
+                  <a:cubicBezTo>
+                    <a:pt x="119404" y="1521388"/>
+                    <a:pt x="96991" y="1531377"/>
+                    <a:pt x="95250" y="1555750"/>
+                  </a:cubicBezTo>
+                  <a:cubicBezTo>
+                    <a:pt x="93591" y="1578974"/>
+                    <a:pt x="95250" y="1602317"/>
+                    <a:pt x="95250" y="1625600"/>
+                  </a:cubicBezTo>
+                </a:path>
+              </a:pathLst>
+            </a:custGeom>
+            <a:ln w="28575">
+              <a:headEnd type="none" w="med" len="med"/>
+              <a:tailEnd type="triangle" w="med" len="med"/>
+            </a:ln>
+          </p:spPr>
+          <p:style>
+            <a:lnRef idx="1">
+              <a:schemeClr val="dk1"/>
+            </a:lnRef>
+            <a:fillRef idx="0">
+              <a:schemeClr val="dk1"/>
+            </a:fillRef>
+            <a:effectRef idx="0">
+              <a:schemeClr val="dk1"/>
+            </a:effectRef>
+            <a:fontRef idx="minor">
+              <a:schemeClr val="tx1"/>
+            </a:fontRef>
+          </p:style>
+          <p:txBody>
+            <a:bodyPr rtlCol="0" anchor="ctr"/>
+            <a:lstStyle/>
+            <a:p>
+              <a:pPr algn="ctr"/>
+              <a:endParaRPr lang="en-US">
+                <a:ln w="12700">
+                  <a:solidFill>
+                    <a:schemeClr val="tx1"/>
+                  </a:solidFill>
+                </a:ln>
+              </a:endParaRPr>
+            </a:p>
+          </p:txBody>
+        </p:sp>
+        <p:sp>
+          <p:nvSpPr>
+            <p:cNvPr id="56" name="Freeform 55"/>
+            <p:cNvSpPr/>
+            <p:nvPr/>
+          </p:nvSpPr>
+          <p:spPr>
+            <a:xfrm>
+              <a:off x="5767165" y="5571707"/>
+              <a:ext cx="91440" cy="731520"/>
+            </a:xfrm>
+            <a:custGeom>
+              <a:avLst/>
+              <a:gdLst>
+                <a:gd name="connsiteX0" fmla="*/ 127000 w 196850"/>
+                <a:gd name="connsiteY0" fmla="*/ 0 h 1625600"/>
+                <a:gd name="connsiteX1" fmla="*/ 82550 w 196850"/>
+                <a:gd name="connsiteY1" fmla="*/ 38100 h 1625600"/>
+                <a:gd name="connsiteX2" fmla="*/ 50800 w 196850"/>
+                <a:gd name="connsiteY2" fmla="*/ 76200 h 1625600"/>
+                <a:gd name="connsiteX3" fmla="*/ 19050 w 196850"/>
+                <a:gd name="connsiteY3" fmla="*/ 133350 h 1625600"/>
+                <a:gd name="connsiteX4" fmla="*/ 0 w 196850"/>
+                <a:gd name="connsiteY4" fmla="*/ 196850 h 1625600"/>
+                <a:gd name="connsiteX5" fmla="*/ 25400 w 196850"/>
+                <a:gd name="connsiteY5" fmla="*/ 323850 h 1625600"/>
+                <a:gd name="connsiteX6" fmla="*/ 50800 w 196850"/>
+                <a:gd name="connsiteY6" fmla="*/ 361950 h 1625600"/>
+                <a:gd name="connsiteX7" fmla="*/ 82550 w 196850"/>
+                <a:gd name="connsiteY7" fmla="*/ 393700 h 1625600"/>
+                <a:gd name="connsiteX8" fmla="*/ 101600 w 196850"/>
+                <a:gd name="connsiteY8" fmla="*/ 400050 h 1625600"/>
+                <a:gd name="connsiteX9" fmla="*/ 165100 w 196850"/>
+                <a:gd name="connsiteY9" fmla="*/ 476250 h 1625600"/>
+                <a:gd name="connsiteX10" fmla="*/ 177800 w 196850"/>
+                <a:gd name="connsiteY10" fmla="*/ 495300 h 1625600"/>
+                <a:gd name="connsiteX11" fmla="*/ 184150 w 196850"/>
+                <a:gd name="connsiteY11" fmla="*/ 514350 h 1625600"/>
+                <a:gd name="connsiteX12" fmla="*/ 190500 w 196850"/>
+                <a:gd name="connsiteY12" fmla="*/ 552450 h 1625600"/>
+                <a:gd name="connsiteX13" fmla="*/ 196850 w 196850"/>
+                <a:gd name="connsiteY13" fmla="*/ 577850 h 1625600"/>
+                <a:gd name="connsiteX14" fmla="*/ 190500 w 196850"/>
+                <a:gd name="connsiteY14" fmla="*/ 660400 h 1625600"/>
+                <a:gd name="connsiteX15" fmla="*/ 158750 w 196850"/>
+                <a:gd name="connsiteY15" fmla="*/ 717550 h 1625600"/>
+                <a:gd name="connsiteX16" fmla="*/ 139700 w 196850"/>
+                <a:gd name="connsiteY16" fmla="*/ 736600 h 1625600"/>
+                <a:gd name="connsiteX17" fmla="*/ 107950 w 196850"/>
+                <a:gd name="connsiteY17" fmla="*/ 768350 h 1625600"/>
+                <a:gd name="connsiteX18" fmla="*/ 95250 w 196850"/>
+                <a:gd name="connsiteY18" fmla="*/ 787400 h 1625600"/>
+                <a:gd name="connsiteX19" fmla="*/ 88900 w 196850"/>
+                <a:gd name="connsiteY19" fmla="*/ 806450 h 1625600"/>
+                <a:gd name="connsiteX20" fmla="*/ 69850 w 196850"/>
+                <a:gd name="connsiteY20" fmla="*/ 819150 h 1625600"/>
+                <a:gd name="connsiteX21" fmla="*/ 44450 w 196850"/>
+                <a:gd name="connsiteY21" fmla="*/ 863600 h 1625600"/>
+                <a:gd name="connsiteX22" fmla="*/ 31750 w 196850"/>
+                <a:gd name="connsiteY22" fmla="*/ 882650 h 1625600"/>
+                <a:gd name="connsiteX23" fmla="*/ 19050 w 196850"/>
+                <a:gd name="connsiteY23" fmla="*/ 927100 h 1625600"/>
+                <a:gd name="connsiteX24" fmla="*/ 31750 w 196850"/>
+                <a:gd name="connsiteY24" fmla="*/ 1060450 h 1625600"/>
+                <a:gd name="connsiteX25" fmla="*/ 63500 w 196850"/>
+                <a:gd name="connsiteY25" fmla="*/ 1092200 h 1625600"/>
+                <a:gd name="connsiteX26" fmla="*/ 76200 w 196850"/>
+                <a:gd name="connsiteY26" fmla="*/ 1111250 h 1625600"/>
+                <a:gd name="connsiteX27" fmla="*/ 114300 w 196850"/>
+                <a:gd name="connsiteY27" fmla="*/ 1136650 h 1625600"/>
+                <a:gd name="connsiteX28" fmla="*/ 120650 w 196850"/>
+                <a:gd name="connsiteY28" fmla="*/ 1155700 h 1625600"/>
+                <a:gd name="connsiteX29" fmla="*/ 139700 w 196850"/>
+                <a:gd name="connsiteY29" fmla="*/ 1168400 h 1625600"/>
+                <a:gd name="connsiteX30" fmla="*/ 165100 w 196850"/>
+                <a:gd name="connsiteY30" fmla="*/ 1187450 h 1625600"/>
+                <a:gd name="connsiteX31" fmla="*/ 190500 w 196850"/>
+                <a:gd name="connsiteY31" fmla="*/ 1225550 h 1625600"/>
+                <a:gd name="connsiteX32" fmla="*/ 196850 w 196850"/>
+                <a:gd name="connsiteY32" fmla="*/ 1250950 h 1625600"/>
+                <a:gd name="connsiteX33" fmla="*/ 190500 w 196850"/>
+                <a:gd name="connsiteY33" fmla="*/ 1339850 h 1625600"/>
+                <a:gd name="connsiteX34" fmla="*/ 171450 w 196850"/>
+                <a:gd name="connsiteY34" fmla="*/ 1403350 h 1625600"/>
+                <a:gd name="connsiteX35" fmla="*/ 158750 w 196850"/>
+                <a:gd name="connsiteY35" fmla="*/ 1422400 h 1625600"/>
+                <a:gd name="connsiteX36" fmla="*/ 152400 w 196850"/>
+                <a:gd name="connsiteY36" fmla="*/ 1441450 h 1625600"/>
+                <a:gd name="connsiteX37" fmla="*/ 127000 w 196850"/>
+                <a:gd name="connsiteY37" fmla="*/ 1498600 h 1625600"/>
+                <a:gd name="connsiteX38" fmla="*/ 95250 w 196850"/>
+                <a:gd name="connsiteY38" fmla="*/ 1555750 h 1625600"/>
+                <a:gd name="connsiteX39" fmla="*/ 95250 w 196850"/>
+                <a:gd name="connsiteY39" fmla="*/ 1625600 h 1625600"/>
+              </a:gdLst>
+              <a:ahLst/>
+              <a:cxnLst>
+                <a:cxn ang="0">
+                  <a:pos x="connsiteX0" y="connsiteY0"/>
+                </a:cxn>
+                <a:cxn ang="0">
+                  <a:pos x="connsiteX1" y="connsiteY1"/>
+                </a:cxn>
+                <a:cxn ang="0">
+                  <a:pos x="connsiteX2" y="connsiteY2"/>
+                </a:cxn>
+                <a:cxn ang="0">
+                  <a:pos x="connsiteX3" y="connsiteY3"/>
+                </a:cxn>
+                <a:cxn ang="0">
+                  <a:pos x="connsiteX4" y="connsiteY4"/>
+                </a:cxn>
+                <a:cxn ang="0">
+                  <a:pos x="connsiteX5" y="connsiteY5"/>
+                </a:cxn>
+                <a:cxn ang="0">
+                  <a:pos x="connsiteX6" y="connsiteY6"/>
+                </a:cxn>
+                <a:cxn ang="0">
+                  <a:pos x="connsiteX7" y="connsiteY7"/>
+                </a:cxn>
+                <a:cxn ang="0">
+                  <a:pos x="connsiteX8" y="connsiteY8"/>
+                </a:cxn>
+                <a:cxn ang="0">
+                  <a:pos x="connsiteX9" y="connsiteY9"/>
+                </a:cxn>
+                <a:cxn ang="0">
+                  <a:pos x="connsiteX10" y="connsiteY10"/>
+                </a:cxn>
+                <a:cxn ang="0">
+                  <a:pos x="connsiteX11" y="connsiteY11"/>
+                </a:cxn>
+                <a:cxn ang="0">
+                  <a:pos x="connsiteX12" y="connsiteY12"/>
+                </a:cxn>
+                <a:cxn ang="0">
+                  <a:pos x="connsiteX13" y="connsiteY13"/>
+                </a:cxn>
+                <a:cxn ang="0">
+                  <a:pos x="connsiteX14" y="connsiteY14"/>
+                </a:cxn>
+                <a:cxn ang="0">
+                  <a:pos x="connsiteX15" y="connsiteY15"/>
+                </a:cxn>
+                <a:cxn ang="0">
+                  <a:pos x="connsiteX16" y="connsiteY16"/>
+                </a:cxn>
+                <a:cxn ang="0">
+                  <a:pos x="connsiteX17" y="connsiteY17"/>
+                </a:cxn>
+                <a:cxn ang="0">
+                  <a:pos x="connsiteX18" y="connsiteY18"/>
+                </a:cxn>
+                <a:cxn ang="0">
+                  <a:pos x="connsiteX19" y="connsiteY19"/>
+                </a:cxn>
+                <a:cxn ang="0">
+                  <a:pos x="connsiteX20" y="connsiteY20"/>
+                </a:cxn>
+                <a:cxn ang="0">
+                  <a:pos x="connsiteX21" y="connsiteY21"/>
+                </a:cxn>
+                <a:cxn ang="0">
+                  <a:pos x="connsiteX22" y="connsiteY22"/>
+                </a:cxn>
+                <a:cxn ang="0">
+                  <a:pos x="connsiteX23" y="connsiteY23"/>
+                </a:cxn>
+                <a:cxn ang="0">
+                  <a:pos x="connsiteX24" y="connsiteY24"/>
+                </a:cxn>
+                <a:cxn ang="0">
+                  <a:pos x="connsiteX25" y="connsiteY25"/>
+                </a:cxn>
+                <a:cxn ang="0">
+                  <a:pos x="connsiteX26" y="connsiteY26"/>
+                </a:cxn>
+                <a:cxn ang="0">
+                  <a:pos x="connsiteX27" y="connsiteY27"/>
+                </a:cxn>
+                <a:cxn ang="0">
+                  <a:pos x="connsiteX28" y="connsiteY28"/>
+                </a:cxn>
+                <a:cxn ang="0">
+                  <a:pos x="connsiteX29" y="connsiteY29"/>
+                </a:cxn>
+                <a:cxn ang="0">
+                  <a:pos x="connsiteX30" y="connsiteY30"/>
+                </a:cxn>
+                <a:cxn ang="0">
+                  <a:pos x="connsiteX31" y="connsiteY31"/>
+                </a:cxn>
+                <a:cxn ang="0">
+                  <a:pos x="connsiteX32" y="connsiteY32"/>
+                </a:cxn>
+                <a:cxn ang="0">
+                  <a:pos x="connsiteX33" y="connsiteY33"/>
+                </a:cxn>
+                <a:cxn ang="0">
+                  <a:pos x="connsiteX34" y="connsiteY34"/>
+                </a:cxn>
+                <a:cxn ang="0">
+                  <a:pos x="connsiteX35" y="connsiteY35"/>
+                </a:cxn>
+                <a:cxn ang="0">
+                  <a:pos x="connsiteX36" y="connsiteY36"/>
+                </a:cxn>
+                <a:cxn ang="0">
+                  <a:pos x="connsiteX37" y="connsiteY37"/>
+                </a:cxn>
+                <a:cxn ang="0">
+                  <a:pos x="connsiteX38" y="connsiteY38"/>
+                </a:cxn>
+                <a:cxn ang="0">
+                  <a:pos x="connsiteX39" y="connsiteY39"/>
+                </a:cxn>
+              </a:cxnLst>
+              <a:rect l="l" t="t" r="r" b="b"/>
+              <a:pathLst>
+                <a:path w="196850" h="1625600">
+                  <a:moveTo>
+                    <a:pt x="127000" y="0"/>
+                  </a:moveTo>
+                  <a:cubicBezTo>
+                    <a:pt x="72901" y="32460"/>
+                    <a:pt x="111869" y="2917"/>
+                    <a:pt x="82550" y="38100"/>
+                  </a:cubicBezTo>
+                  <a:cubicBezTo>
+                    <a:pt x="68308" y="55190"/>
+                    <a:pt x="59809" y="55930"/>
+                    <a:pt x="50800" y="76200"/>
+                  </a:cubicBezTo>
+                  <a:cubicBezTo>
+                    <a:pt x="25936" y="132143"/>
+                    <a:pt x="53821" y="98579"/>
+                    <a:pt x="19050" y="133350"/>
+                  </a:cubicBezTo>
+                  <a:cubicBezTo>
+                    <a:pt x="3590" y="179729"/>
+                    <a:pt x="9597" y="158463"/>
+                    <a:pt x="0" y="196850"/>
+                  </a:cubicBezTo>
+                  <a:cubicBezTo>
+                    <a:pt x="14593" y="299002"/>
+                    <a:pt x="3234" y="257352"/>
+                    <a:pt x="25400" y="323850"/>
+                  </a:cubicBezTo>
+                  <a:cubicBezTo>
+                    <a:pt x="30227" y="338330"/>
+                    <a:pt x="42333" y="349250"/>
+                    <a:pt x="50800" y="361950"/>
+                  </a:cubicBezTo>
+                  <a:cubicBezTo>
+                    <a:pt x="63500" y="381000"/>
+                    <a:pt x="61383" y="383117"/>
+                    <a:pt x="82550" y="393700"/>
+                  </a:cubicBezTo>
+                  <a:cubicBezTo>
+                    <a:pt x="88537" y="396693"/>
+                    <a:pt x="95250" y="397933"/>
+                    <a:pt x="101600" y="400050"/>
+                  </a:cubicBezTo>
+                  <a:cubicBezTo>
+                    <a:pt x="150493" y="448943"/>
+                    <a:pt x="129737" y="423206"/>
+                    <a:pt x="165100" y="476250"/>
+                  </a:cubicBezTo>
+                  <a:cubicBezTo>
+                    <a:pt x="169333" y="482600"/>
+                    <a:pt x="175387" y="488060"/>
+                    <a:pt x="177800" y="495300"/>
+                  </a:cubicBezTo>
+                  <a:cubicBezTo>
+                    <a:pt x="179917" y="501650"/>
+                    <a:pt x="182698" y="507816"/>
+                    <a:pt x="184150" y="514350"/>
+                  </a:cubicBezTo>
+                  <a:cubicBezTo>
+                    <a:pt x="186943" y="526919"/>
+                    <a:pt x="187975" y="539825"/>
+                    <a:pt x="190500" y="552450"/>
+                  </a:cubicBezTo>
+                  <a:cubicBezTo>
+                    <a:pt x="192212" y="561008"/>
+                    <a:pt x="194733" y="569383"/>
+                    <a:pt x="196850" y="577850"/>
+                  </a:cubicBezTo>
+                  <a:cubicBezTo>
+                    <a:pt x="194733" y="605367"/>
+                    <a:pt x="193923" y="633015"/>
+                    <a:pt x="190500" y="660400"/>
+                  </a:cubicBezTo>
+                  <a:cubicBezTo>
+                    <a:pt x="188219" y="678652"/>
+                    <a:pt x="167578" y="708722"/>
+                    <a:pt x="158750" y="717550"/>
+                  </a:cubicBezTo>
+                  <a:cubicBezTo>
+                    <a:pt x="152400" y="723900"/>
+                    <a:pt x="145449" y="729701"/>
+                    <a:pt x="139700" y="736600"/>
+                  </a:cubicBezTo>
+                  <a:cubicBezTo>
+                    <a:pt x="113242" y="768350"/>
+                    <a:pt x="142875" y="745067"/>
+                    <a:pt x="107950" y="768350"/>
+                  </a:cubicBezTo>
+                  <a:cubicBezTo>
+                    <a:pt x="103717" y="774700"/>
+                    <a:pt x="98663" y="780574"/>
+                    <a:pt x="95250" y="787400"/>
+                  </a:cubicBezTo>
+                  <a:cubicBezTo>
+                    <a:pt x="92257" y="793387"/>
+                    <a:pt x="93081" y="801223"/>
+                    <a:pt x="88900" y="806450"/>
+                  </a:cubicBezTo>
+                  <a:cubicBezTo>
+                    <a:pt x="84132" y="812409"/>
+                    <a:pt x="76200" y="814917"/>
+                    <a:pt x="69850" y="819150"/>
+                  </a:cubicBezTo>
+                  <a:cubicBezTo>
+                    <a:pt x="38908" y="865562"/>
+                    <a:pt x="76676" y="807204"/>
+                    <a:pt x="44450" y="863600"/>
+                  </a:cubicBezTo>
+                  <a:cubicBezTo>
+                    <a:pt x="40664" y="870226"/>
+                    <a:pt x="35163" y="875824"/>
+                    <a:pt x="31750" y="882650"/>
+                  </a:cubicBezTo>
+                  <a:cubicBezTo>
+                    <a:pt x="27195" y="891760"/>
+                    <a:pt x="21085" y="918962"/>
+                    <a:pt x="19050" y="927100"/>
+                  </a:cubicBezTo>
+                  <a:cubicBezTo>
+                    <a:pt x="19267" y="930136"/>
+                    <a:pt x="24826" y="1037369"/>
+                    <a:pt x="31750" y="1060450"/>
+                  </a:cubicBezTo>
+                  <a:cubicBezTo>
+                    <a:pt x="37042" y="1078089"/>
+                    <a:pt x="49742" y="1083028"/>
+                    <a:pt x="63500" y="1092200"/>
+                  </a:cubicBezTo>
+                  <a:cubicBezTo>
+                    <a:pt x="67733" y="1098550"/>
+                    <a:pt x="70457" y="1106224"/>
+                    <a:pt x="76200" y="1111250"/>
+                  </a:cubicBezTo>
+                  <a:cubicBezTo>
+                    <a:pt x="87687" y="1121301"/>
+                    <a:pt x="114300" y="1136650"/>
+                    <a:pt x="114300" y="1136650"/>
+                  </a:cubicBezTo>
+                  <a:cubicBezTo>
+                    <a:pt x="116417" y="1143000"/>
+                    <a:pt x="116469" y="1150473"/>
+                    <a:pt x="120650" y="1155700"/>
+                  </a:cubicBezTo>
+                  <a:cubicBezTo>
+                    <a:pt x="125418" y="1161659"/>
+                    <a:pt x="133490" y="1163964"/>
+                    <a:pt x="139700" y="1168400"/>
+                  </a:cubicBezTo>
+                  <a:cubicBezTo>
+                    <a:pt x="148312" y="1174551"/>
+                    <a:pt x="158069" y="1179540"/>
+                    <a:pt x="165100" y="1187450"/>
+                  </a:cubicBezTo>
+                  <a:cubicBezTo>
+                    <a:pt x="175241" y="1198858"/>
+                    <a:pt x="190500" y="1225550"/>
+                    <a:pt x="190500" y="1225550"/>
+                  </a:cubicBezTo>
+                  <a:cubicBezTo>
+                    <a:pt x="192617" y="1234017"/>
+                    <a:pt x="196850" y="1242223"/>
+                    <a:pt x="196850" y="1250950"/>
+                  </a:cubicBezTo>
+                  <a:cubicBezTo>
+                    <a:pt x="196850" y="1280659"/>
+                    <a:pt x="193781" y="1310323"/>
+                    <a:pt x="190500" y="1339850"/>
+                  </a:cubicBezTo>
+                  <a:cubicBezTo>
+                    <a:pt x="188901" y="1354245"/>
+                    <a:pt x="174642" y="1393773"/>
+                    <a:pt x="171450" y="1403350"/>
+                  </a:cubicBezTo>
+                  <a:cubicBezTo>
+                    <a:pt x="169037" y="1410590"/>
+                    <a:pt x="162163" y="1415574"/>
+                    <a:pt x="158750" y="1422400"/>
+                  </a:cubicBezTo>
+                  <a:cubicBezTo>
+                    <a:pt x="155757" y="1428387"/>
+                    <a:pt x="155393" y="1435463"/>
+                    <a:pt x="152400" y="1441450"/>
+                  </a:cubicBezTo>
+                  <a:cubicBezTo>
+                    <a:pt x="122211" y="1501827"/>
+                    <a:pt x="159765" y="1400306"/>
+                    <a:pt x="127000" y="1498600"/>
+                  </a:cubicBezTo>
+                  <a:cubicBezTo>
+                    <a:pt x="119404" y="1521388"/>
+                    <a:pt x="96991" y="1531377"/>
+                    <a:pt x="95250" y="1555750"/>
+                  </a:cubicBezTo>
+                  <a:cubicBezTo>
+                    <a:pt x="93591" y="1578974"/>
+                    <a:pt x="95250" y="1602317"/>
+                    <a:pt x="95250" y="1625600"/>
+                  </a:cubicBezTo>
+                </a:path>
+              </a:pathLst>
+            </a:custGeom>
+            <a:ln w="28575">
+              <a:headEnd type="none" w="med" len="med"/>
+              <a:tailEnd type="triangle" w="med" len="med"/>
+            </a:ln>
+          </p:spPr>
+          <p:style>
+            <a:lnRef idx="1">
+              <a:schemeClr val="dk1"/>
+            </a:lnRef>
+            <a:fillRef idx="0">
+              <a:schemeClr val="dk1"/>
+            </a:fillRef>
+            <a:effectRef idx="0">
+              <a:schemeClr val="dk1"/>
+            </a:effectRef>
+            <a:fontRef idx="minor">
+              <a:schemeClr val="tx1"/>
+            </a:fontRef>
+          </p:style>
+          <p:txBody>
+            <a:bodyPr rtlCol="0" anchor="ctr"/>
+            <a:lstStyle/>
+            <a:p>
+              <a:pPr algn="ctr"/>
+              <a:endParaRPr lang="en-US">
+                <a:ln w="12700">
+                  <a:solidFill>
+                    <a:schemeClr val="tx1"/>
+                  </a:solidFill>
+                </a:ln>
+              </a:endParaRPr>
+            </a:p>
+          </p:txBody>
+        </p:sp>
+        <p:sp>
+          <p:nvSpPr>
+            <p:cNvPr id="61" name="Freeform 60"/>
+            <p:cNvSpPr/>
+            <p:nvPr/>
+          </p:nvSpPr>
+          <p:spPr>
+            <a:xfrm>
+              <a:off x="6472809" y="5571707"/>
+              <a:ext cx="91440" cy="731520"/>
+            </a:xfrm>
+            <a:custGeom>
+              <a:avLst/>
+              <a:gdLst>
+                <a:gd name="connsiteX0" fmla="*/ 127000 w 196850"/>
+                <a:gd name="connsiteY0" fmla="*/ 0 h 1625600"/>
+                <a:gd name="connsiteX1" fmla="*/ 82550 w 196850"/>
+                <a:gd name="connsiteY1" fmla="*/ 38100 h 1625600"/>
+                <a:gd name="connsiteX2" fmla="*/ 50800 w 196850"/>
+                <a:gd name="connsiteY2" fmla="*/ 76200 h 1625600"/>
+                <a:gd name="connsiteX3" fmla="*/ 19050 w 196850"/>
+                <a:gd name="connsiteY3" fmla="*/ 133350 h 1625600"/>
+                <a:gd name="connsiteX4" fmla="*/ 0 w 196850"/>
+                <a:gd name="connsiteY4" fmla="*/ 196850 h 1625600"/>
+                <a:gd name="connsiteX5" fmla="*/ 25400 w 196850"/>
+                <a:gd name="connsiteY5" fmla="*/ 323850 h 1625600"/>
+                <a:gd name="connsiteX6" fmla="*/ 50800 w 196850"/>
+                <a:gd name="connsiteY6" fmla="*/ 361950 h 1625600"/>
+                <a:gd name="connsiteX7" fmla="*/ 82550 w 196850"/>
+                <a:gd name="connsiteY7" fmla="*/ 393700 h 1625600"/>
+                <a:gd name="connsiteX8" fmla="*/ 101600 w 196850"/>
+                <a:gd name="connsiteY8" fmla="*/ 400050 h 1625600"/>
+                <a:gd name="connsiteX9" fmla="*/ 165100 w 196850"/>
+                <a:gd name="connsiteY9" fmla="*/ 476250 h 1625600"/>
+                <a:gd name="connsiteX10" fmla="*/ 177800 w 196850"/>
+                <a:gd name="connsiteY10" fmla="*/ 495300 h 1625600"/>
+                <a:gd name="connsiteX11" fmla="*/ 184150 w 196850"/>
+                <a:gd name="connsiteY11" fmla="*/ 514350 h 1625600"/>
+                <a:gd name="connsiteX12" fmla="*/ 190500 w 196850"/>
+                <a:gd name="connsiteY12" fmla="*/ 552450 h 1625600"/>
+                <a:gd name="connsiteX13" fmla="*/ 196850 w 196850"/>
+                <a:gd name="connsiteY13" fmla="*/ 577850 h 1625600"/>
+                <a:gd name="connsiteX14" fmla="*/ 190500 w 196850"/>
+                <a:gd name="connsiteY14" fmla="*/ 660400 h 1625600"/>
+                <a:gd name="connsiteX15" fmla="*/ 158750 w 196850"/>
+                <a:gd name="connsiteY15" fmla="*/ 717550 h 1625600"/>
+                <a:gd name="connsiteX16" fmla="*/ 139700 w 196850"/>
+                <a:gd name="connsiteY16" fmla="*/ 736600 h 1625600"/>
+                <a:gd name="connsiteX17" fmla="*/ 107950 w 196850"/>
+                <a:gd name="connsiteY17" fmla="*/ 768350 h 1625600"/>
+                <a:gd name="connsiteX18" fmla="*/ 95250 w 196850"/>
+                <a:gd name="connsiteY18" fmla="*/ 787400 h 1625600"/>
+                <a:gd name="connsiteX19" fmla="*/ 88900 w 196850"/>
+                <a:gd name="connsiteY19" fmla="*/ 806450 h 1625600"/>
+                <a:gd name="connsiteX20" fmla="*/ 69850 w 196850"/>
+                <a:gd name="connsiteY20" fmla="*/ 819150 h 1625600"/>
+                <a:gd name="connsiteX21" fmla="*/ 44450 w 196850"/>
+                <a:gd name="connsiteY21" fmla="*/ 863600 h 1625600"/>
+                <a:gd name="connsiteX22" fmla="*/ 31750 w 196850"/>
+                <a:gd name="connsiteY22" fmla="*/ 882650 h 1625600"/>
+                <a:gd name="connsiteX23" fmla="*/ 19050 w 196850"/>
+                <a:gd name="connsiteY23" fmla="*/ 927100 h 1625600"/>
+                <a:gd name="connsiteX24" fmla="*/ 31750 w 196850"/>
+                <a:gd name="connsiteY24" fmla="*/ 1060450 h 1625600"/>
+                <a:gd name="connsiteX25" fmla="*/ 63500 w 196850"/>
+                <a:gd name="connsiteY25" fmla="*/ 1092200 h 1625600"/>
+                <a:gd name="connsiteX26" fmla="*/ 76200 w 196850"/>
+                <a:gd name="connsiteY26" fmla="*/ 1111250 h 1625600"/>
+                <a:gd name="connsiteX27" fmla="*/ 114300 w 196850"/>
+                <a:gd name="connsiteY27" fmla="*/ 1136650 h 1625600"/>
+                <a:gd name="connsiteX28" fmla="*/ 120650 w 196850"/>
+                <a:gd name="connsiteY28" fmla="*/ 1155700 h 1625600"/>
+                <a:gd name="connsiteX29" fmla="*/ 139700 w 196850"/>
+                <a:gd name="connsiteY29" fmla="*/ 1168400 h 1625600"/>
+                <a:gd name="connsiteX30" fmla="*/ 165100 w 196850"/>
+                <a:gd name="connsiteY30" fmla="*/ 1187450 h 1625600"/>
+                <a:gd name="connsiteX31" fmla="*/ 190500 w 196850"/>
+                <a:gd name="connsiteY31" fmla="*/ 1225550 h 1625600"/>
+                <a:gd name="connsiteX32" fmla="*/ 196850 w 196850"/>
+                <a:gd name="connsiteY32" fmla="*/ 1250950 h 1625600"/>
+                <a:gd name="connsiteX33" fmla="*/ 190500 w 196850"/>
+                <a:gd name="connsiteY33" fmla="*/ 1339850 h 1625600"/>
+                <a:gd name="connsiteX34" fmla="*/ 171450 w 196850"/>
+                <a:gd name="connsiteY34" fmla="*/ 1403350 h 1625600"/>
+                <a:gd name="connsiteX35" fmla="*/ 158750 w 196850"/>
+                <a:gd name="connsiteY35" fmla="*/ 1422400 h 1625600"/>
+                <a:gd name="connsiteX36" fmla="*/ 152400 w 196850"/>
+                <a:gd name="connsiteY36" fmla="*/ 1441450 h 1625600"/>
+                <a:gd name="connsiteX37" fmla="*/ 127000 w 196850"/>
+                <a:gd name="connsiteY37" fmla="*/ 1498600 h 1625600"/>
+                <a:gd name="connsiteX38" fmla="*/ 95250 w 196850"/>
+                <a:gd name="connsiteY38" fmla="*/ 1555750 h 1625600"/>
+                <a:gd name="connsiteX39" fmla="*/ 95250 w 196850"/>
+                <a:gd name="connsiteY39" fmla="*/ 1625600 h 1625600"/>
+              </a:gdLst>
+              <a:ahLst/>
+              <a:cxnLst>
+                <a:cxn ang="0">
+                  <a:pos x="connsiteX0" y="connsiteY0"/>
+                </a:cxn>
+                <a:cxn ang="0">
+                  <a:pos x="connsiteX1" y="connsiteY1"/>
+                </a:cxn>
+                <a:cxn ang="0">
+                  <a:pos x="connsiteX2" y="connsiteY2"/>
+                </a:cxn>
+                <a:cxn ang="0">
+                  <a:pos x="connsiteX3" y="connsiteY3"/>
+                </a:cxn>
+                <a:cxn ang="0">
+                  <a:pos x="connsiteX4" y="connsiteY4"/>
+                </a:cxn>
+                <a:cxn ang="0">
+                  <a:pos x="connsiteX5" y="connsiteY5"/>
+                </a:cxn>
+                <a:cxn ang="0">
+                  <a:pos x="connsiteX6" y="connsiteY6"/>
+                </a:cxn>
+                <a:cxn ang="0">
+                  <a:pos x="connsiteX7" y="connsiteY7"/>
+                </a:cxn>
+                <a:cxn ang="0">
+                  <a:pos x="connsiteX8" y="connsiteY8"/>
+                </a:cxn>
+                <a:cxn ang="0">
+                  <a:pos x="connsiteX9" y="connsiteY9"/>
+                </a:cxn>
+                <a:cxn ang="0">
+                  <a:pos x="connsiteX10" y="connsiteY10"/>
+                </a:cxn>
+                <a:cxn ang="0">
+                  <a:pos x="connsiteX11" y="connsiteY11"/>
+                </a:cxn>
+                <a:cxn ang="0">
+                  <a:pos x="connsiteX12" y="connsiteY12"/>
+                </a:cxn>
+                <a:cxn ang="0">
+                  <a:pos x="connsiteX13" y="connsiteY13"/>
+                </a:cxn>
+                <a:cxn ang="0">
+                  <a:pos x="connsiteX14" y="connsiteY14"/>
+                </a:cxn>
+                <a:cxn ang="0">
+                  <a:pos x="connsiteX15" y="connsiteY15"/>
+                </a:cxn>
+                <a:cxn ang="0">
+                  <a:pos x="connsiteX16" y="connsiteY16"/>
+                </a:cxn>
+                <a:cxn ang="0">
+                  <a:pos x="connsiteX17" y="connsiteY17"/>
+                </a:cxn>
+                <a:cxn ang="0">
+                  <a:pos x="connsiteX18" y="connsiteY18"/>
+                </a:cxn>
+                <a:cxn ang="0">
+                  <a:pos x="connsiteX19" y="connsiteY19"/>
+                </a:cxn>
+                <a:cxn ang="0">
+                  <a:pos x="connsiteX20" y="connsiteY20"/>
+                </a:cxn>
+                <a:cxn ang="0">
+                  <a:pos x="connsiteX21" y="connsiteY21"/>
+                </a:cxn>
+                <a:cxn ang="0">
+                  <a:pos x="connsiteX22" y="connsiteY22"/>
+                </a:cxn>
+                <a:cxn ang="0">
+                  <a:pos x="connsiteX23" y="connsiteY23"/>
+                </a:cxn>
+                <a:cxn ang="0">
+                  <a:pos x="connsiteX24" y="connsiteY24"/>
+                </a:cxn>
+                <a:cxn ang="0">
+                  <a:pos x="connsiteX25" y="connsiteY25"/>
+                </a:cxn>
+                <a:cxn ang="0">
+                  <a:pos x="connsiteX26" y="connsiteY26"/>
+                </a:cxn>
+                <a:cxn ang="0">
+                  <a:pos x="connsiteX27" y="connsiteY27"/>
+                </a:cxn>
+                <a:cxn ang="0">
+                  <a:pos x="connsiteX28" y="connsiteY28"/>
+                </a:cxn>
+                <a:cxn ang="0">
+                  <a:pos x="connsiteX29" y="connsiteY29"/>
+                </a:cxn>
+                <a:cxn ang="0">
+                  <a:pos x="connsiteX30" y="connsiteY30"/>
+                </a:cxn>
+                <a:cxn ang="0">
+                  <a:pos x="connsiteX31" y="connsiteY31"/>
+                </a:cxn>
+                <a:cxn ang="0">
+                  <a:pos x="connsiteX32" y="connsiteY32"/>
+                </a:cxn>
+                <a:cxn ang="0">
+                  <a:pos x="connsiteX33" y="connsiteY33"/>
+                </a:cxn>
+                <a:cxn ang="0">
+                  <a:pos x="connsiteX34" y="connsiteY34"/>
+                </a:cxn>
+                <a:cxn ang="0">
+                  <a:pos x="connsiteX35" y="connsiteY35"/>
+                </a:cxn>
+                <a:cxn ang="0">
+                  <a:pos x="connsiteX36" y="connsiteY36"/>
+                </a:cxn>
+                <a:cxn ang="0">
+                  <a:pos x="connsiteX37" y="connsiteY37"/>
+                </a:cxn>
+                <a:cxn ang="0">
+                  <a:pos x="connsiteX38" y="connsiteY38"/>
+                </a:cxn>
+                <a:cxn ang="0">
+                  <a:pos x="connsiteX39" y="connsiteY39"/>
+                </a:cxn>
+              </a:cxnLst>
+              <a:rect l="l" t="t" r="r" b="b"/>
+              <a:pathLst>
+                <a:path w="196850" h="1625600">
+                  <a:moveTo>
+                    <a:pt x="127000" y="0"/>
+                  </a:moveTo>
+                  <a:cubicBezTo>
+                    <a:pt x="72901" y="32460"/>
+                    <a:pt x="111869" y="2917"/>
+                    <a:pt x="82550" y="38100"/>
+                  </a:cubicBezTo>
+                  <a:cubicBezTo>
+                    <a:pt x="68308" y="55190"/>
+                    <a:pt x="59809" y="55930"/>
+                    <a:pt x="50800" y="76200"/>
+                  </a:cubicBezTo>
+                  <a:cubicBezTo>
+                    <a:pt x="25936" y="132143"/>
+                    <a:pt x="53821" y="98579"/>
+                    <a:pt x="19050" y="133350"/>
+                  </a:cubicBezTo>
+                  <a:cubicBezTo>
+                    <a:pt x="3590" y="179729"/>
+                    <a:pt x="9597" y="158463"/>
+                    <a:pt x="0" y="196850"/>
+                  </a:cubicBezTo>
+                  <a:cubicBezTo>
+                    <a:pt x="14593" y="299002"/>
+                    <a:pt x="3234" y="257352"/>
+                    <a:pt x="25400" y="323850"/>
+                  </a:cubicBezTo>
+                  <a:cubicBezTo>
+                    <a:pt x="30227" y="338330"/>
+                    <a:pt x="42333" y="349250"/>
+                    <a:pt x="50800" y="361950"/>
+                  </a:cubicBezTo>
+                  <a:cubicBezTo>
+                    <a:pt x="63500" y="381000"/>
+                    <a:pt x="61383" y="383117"/>
+                    <a:pt x="82550" y="393700"/>
+                  </a:cubicBezTo>
+                  <a:cubicBezTo>
+                    <a:pt x="88537" y="396693"/>
+                    <a:pt x="95250" y="397933"/>
+                    <a:pt x="101600" y="400050"/>
+                  </a:cubicBezTo>
+                  <a:cubicBezTo>
+                    <a:pt x="150493" y="448943"/>
+                    <a:pt x="129737" y="423206"/>
+                    <a:pt x="165100" y="476250"/>
+                  </a:cubicBezTo>
+                  <a:cubicBezTo>
+                    <a:pt x="169333" y="482600"/>
+                    <a:pt x="175387" y="488060"/>
+                    <a:pt x="177800" y="495300"/>
+                  </a:cubicBezTo>
+                  <a:cubicBezTo>
+                    <a:pt x="179917" y="501650"/>
+                    <a:pt x="182698" y="507816"/>
+                    <a:pt x="184150" y="514350"/>
+                  </a:cubicBezTo>
+                  <a:cubicBezTo>
+                    <a:pt x="186943" y="526919"/>
+                    <a:pt x="187975" y="539825"/>
+                    <a:pt x="190500" y="552450"/>
+                  </a:cubicBezTo>
+                  <a:cubicBezTo>
+                    <a:pt x="192212" y="561008"/>
+                    <a:pt x="194733" y="569383"/>
+                    <a:pt x="196850" y="577850"/>
+                  </a:cubicBezTo>
+                  <a:cubicBezTo>
+                    <a:pt x="194733" y="605367"/>
+                    <a:pt x="193923" y="633015"/>
+                    <a:pt x="190500" y="660400"/>
+                  </a:cubicBezTo>
+                  <a:cubicBezTo>
+                    <a:pt x="188219" y="678652"/>
+                    <a:pt x="167578" y="708722"/>
+                    <a:pt x="158750" y="717550"/>
+                  </a:cubicBezTo>
+                  <a:cubicBezTo>
+                    <a:pt x="152400" y="723900"/>
+                    <a:pt x="145449" y="729701"/>
+                    <a:pt x="139700" y="736600"/>
+                  </a:cubicBezTo>
+                  <a:cubicBezTo>
+                    <a:pt x="113242" y="768350"/>
+                    <a:pt x="142875" y="745067"/>
+                    <a:pt x="107950" y="768350"/>
+                  </a:cubicBezTo>
+                  <a:cubicBezTo>
+                    <a:pt x="103717" y="774700"/>
+                    <a:pt x="98663" y="780574"/>
+                    <a:pt x="95250" y="787400"/>
+                  </a:cubicBezTo>
+                  <a:cubicBezTo>
+                    <a:pt x="92257" y="793387"/>
+                    <a:pt x="93081" y="801223"/>
+                    <a:pt x="88900" y="806450"/>
+                  </a:cubicBezTo>
+                  <a:cubicBezTo>
+                    <a:pt x="84132" y="812409"/>
+                    <a:pt x="76200" y="814917"/>
+                    <a:pt x="69850" y="819150"/>
+                  </a:cubicBezTo>
+                  <a:cubicBezTo>
+                    <a:pt x="38908" y="865562"/>
+                    <a:pt x="76676" y="807204"/>
+                    <a:pt x="44450" y="863600"/>
+                  </a:cubicBezTo>
+                  <a:cubicBezTo>
+                    <a:pt x="40664" y="870226"/>
+                    <a:pt x="35163" y="875824"/>
+                    <a:pt x="31750" y="882650"/>
+                  </a:cubicBezTo>
+                  <a:cubicBezTo>
+                    <a:pt x="27195" y="891760"/>
+                    <a:pt x="21085" y="918962"/>
+                    <a:pt x="19050" y="927100"/>
+                  </a:cubicBezTo>
+                  <a:cubicBezTo>
+                    <a:pt x="19267" y="930136"/>
+                    <a:pt x="24826" y="1037369"/>
+                    <a:pt x="31750" y="1060450"/>
+                  </a:cubicBezTo>
+                  <a:cubicBezTo>
+                    <a:pt x="37042" y="1078089"/>
+                    <a:pt x="49742" y="1083028"/>
+                    <a:pt x="63500" y="1092200"/>
+                  </a:cubicBezTo>
+                  <a:cubicBezTo>
+                    <a:pt x="67733" y="1098550"/>
+                    <a:pt x="70457" y="1106224"/>
+                    <a:pt x="76200" y="1111250"/>
+                  </a:cubicBezTo>
+                  <a:cubicBezTo>
+                    <a:pt x="87687" y="1121301"/>
+                    <a:pt x="114300" y="1136650"/>
+                    <a:pt x="114300" y="1136650"/>
+                  </a:cubicBezTo>
+                  <a:cubicBezTo>
+                    <a:pt x="116417" y="1143000"/>
+                    <a:pt x="116469" y="1150473"/>
+                    <a:pt x="120650" y="1155700"/>
+                  </a:cubicBezTo>
+                  <a:cubicBezTo>
+                    <a:pt x="125418" y="1161659"/>
+                    <a:pt x="133490" y="1163964"/>
+                    <a:pt x="139700" y="1168400"/>
+                  </a:cubicBezTo>
+                  <a:cubicBezTo>
+                    <a:pt x="148312" y="1174551"/>
+                    <a:pt x="158069" y="1179540"/>
+                    <a:pt x="165100" y="1187450"/>
+                  </a:cubicBezTo>
+                  <a:cubicBezTo>
+                    <a:pt x="175241" y="1198858"/>
+                    <a:pt x="190500" y="1225550"/>
+                    <a:pt x="190500" y="1225550"/>
+                  </a:cubicBezTo>
+                  <a:cubicBezTo>
+                    <a:pt x="192617" y="1234017"/>
+                    <a:pt x="196850" y="1242223"/>
+                    <a:pt x="196850" y="1250950"/>
+                  </a:cubicBezTo>
+                  <a:cubicBezTo>
+                    <a:pt x="196850" y="1280659"/>
+                    <a:pt x="193781" y="1310323"/>
+                    <a:pt x="190500" y="1339850"/>
+                  </a:cubicBezTo>
+                  <a:cubicBezTo>
+                    <a:pt x="188901" y="1354245"/>
+                    <a:pt x="174642" y="1393773"/>
+                    <a:pt x="171450" y="1403350"/>
+                  </a:cubicBezTo>
+                  <a:cubicBezTo>
+                    <a:pt x="169037" y="1410590"/>
+                    <a:pt x="162163" y="1415574"/>
+                    <a:pt x="158750" y="1422400"/>
+                  </a:cubicBezTo>
+                  <a:cubicBezTo>
+                    <a:pt x="155757" y="1428387"/>
+                    <a:pt x="155393" y="1435463"/>
+                    <a:pt x="152400" y="1441450"/>
+                  </a:cubicBezTo>
+                  <a:cubicBezTo>
+                    <a:pt x="122211" y="1501827"/>
+                    <a:pt x="159765" y="1400306"/>
+                    <a:pt x="127000" y="1498600"/>
+                  </a:cubicBezTo>
+                  <a:cubicBezTo>
+                    <a:pt x="119404" y="1521388"/>
+                    <a:pt x="96991" y="1531377"/>
+                    <a:pt x="95250" y="1555750"/>
+                  </a:cubicBezTo>
+                  <a:cubicBezTo>
+                    <a:pt x="93591" y="1578974"/>
+                    <a:pt x="95250" y="1602317"/>
+                    <a:pt x="95250" y="1625600"/>
+                  </a:cubicBezTo>
+                </a:path>
+              </a:pathLst>
+            </a:custGeom>
+            <a:ln w="28575">
+              <a:headEnd type="none" w="med" len="med"/>
+              <a:tailEnd type="triangle" w="med" len="med"/>
+            </a:ln>
+          </p:spPr>
+          <p:style>
+            <a:lnRef idx="1">
+              <a:schemeClr val="dk1"/>
+            </a:lnRef>
+            <a:fillRef idx="0">
+              <a:schemeClr val="dk1"/>
+            </a:fillRef>
+            <a:effectRef idx="0">
+              <a:schemeClr val="dk1"/>
+            </a:effectRef>
+            <a:fontRef idx="minor">
+              <a:schemeClr val="tx1"/>
+            </a:fontRef>
+          </p:style>
+          <p:txBody>
+            <a:bodyPr rtlCol="0" anchor="ctr"/>
+            <a:lstStyle/>
+            <a:p>
+              <a:pPr algn="ctr"/>
+              <a:endParaRPr lang="en-US">
+                <a:ln w="12700">
+                  <a:solidFill>
+                    <a:schemeClr val="tx1"/>
+                  </a:solidFill>
+                </a:ln>
+              </a:endParaRPr>
+            </a:p>
+          </p:txBody>
+        </p:sp>
+        <p:sp>
+          <p:nvSpPr>
+            <p:cNvPr id="66" name="Freeform 65"/>
+            <p:cNvSpPr/>
+            <p:nvPr/>
+          </p:nvSpPr>
+          <p:spPr>
+            <a:xfrm>
+              <a:off x="7178453" y="5571707"/>
+              <a:ext cx="91440" cy="731520"/>
+            </a:xfrm>
+            <a:custGeom>
+              <a:avLst/>
+              <a:gdLst>
+                <a:gd name="connsiteX0" fmla="*/ 127000 w 196850"/>
+                <a:gd name="connsiteY0" fmla="*/ 0 h 1625600"/>
+                <a:gd name="connsiteX1" fmla="*/ 82550 w 196850"/>
+                <a:gd name="connsiteY1" fmla="*/ 38100 h 1625600"/>
+                <a:gd name="connsiteX2" fmla="*/ 50800 w 196850"/>
+                <a:gd name="connsiteY2" fmla="*/ 76200 h 1625600"/>
+                <a:gd name="connsiteX3" fmla="*/ 19050 w 196850"/>
+                <a:gd name="connsiteY3" fmla="*/ 133350 h 1625600"/>
+                <a:gd name="connsiteX4" fmla="*/ 0 w 196850"/>
+                <a:gd name="connsiteY4" fmla="*/ 196850 h 1625600"/>
+                <a:gd name="connsiteX5" fmla="*/ 25400 w 196850"/>
+                <a:gd name="connsiteY5" fmla="*/ 323850 h 1625600"/>
+                <a:gd name="connsiteX6" fmla="*/ 50800 w 196850"/>
+                <a:gd name="connsiteY6" fmla="*/ 361950 h 1625600"/>
+                <a:gd name="connsiteX7" fmla="*/ 82550 w 196850"/>
+                <a:gd name="connsiteY7" fmla="*/ 393700 h 1625600"/>
+                <a:gd name="connsiteX8" fmla="*/ 101600 w 196850"/>
+                <a:gd name="connsiteY8" fmla="*/ 400050 h 1625600"/>
+                <a:gd name="connsiteX9" fmla="*/ 165100 w 196850"/>
+                <a:gd name="connsiteY9" fmla="*/ 476250 h 1625600"/>
+                <a:gd name="connsiteX10" fmla="*/ 177800 w 196850"/>
+                <a:gd name="connsiteY10" fmla="*/ 495300 h 1625600"/>
+                <a:gd name="connsiteX11" fmla="*/ 184150 w 196850"/>
+                <a:gd name="connsiteY11" fmla="*/ 514350 h 1625600"/>
+                <a:gd name="connsiteX12" fmla="*/ 190500 w 196850"/>
+                <a:gd name="connsiteY12" fmla="*/ 552450 h 1625600"/>
+                <a:gd name="connsiteX13" fmla="*/ 196850 w 196850"/>
+                <a:gd name="connsiteY13" fmla="*/ 577850 h 1625600"/>
+                <a:gd name="connsiteX14" fmla="*/ 190500 w 196850"/>
+                <a:gd name="connsiteY14" fmla="*/ 660400 h 1625600"/>
+                <a:gd name="connsiteX15" fmla="*/ 158750 w 196850"/>
+                <a:gd name="connsiteY15" fmla="*/ 717550 h 1625600"/>
+                <a:gd name="connsiteX16" fmla="*/ 139700 w 196850"/>
+                <a:gd name="connsiteY16" fmla="*/ 736600 h 1625600"/>
+                <a:gd name="connsiteX17" fmla="*/ 107950 w 196850"/>
+                <a:gd name="connsiteY17" fmla="*/ 768350 h 1625600"/>
+                <a:gd name="connsiteX18" fmla="*/ 95250 w 196850"/>
+                <a:gd name="connsiteY18" fmla="*/ 787400 h 1625600"/>
+                <a:gd name="connsiteX19" fmla="*/ 88900 w 196850"/>
+                <a:gd name="connsiteY19" fmla="*/ 806450 h 1625600"/>
+                <a:gd name="connsiteX20" fmla="*/ 69850 w 196850"/>
+                <a:gd name="connsiteY20" fmla="*/ 819150 h 1625600"/>
+                <a:gd name="connsiteX21" fmla="*/ 44450 w 196850"/>
+                <a:gd name="connsiteY21" fmla="*/ 863600 h 1625600"/>
+                <a:gd name="connsiteX22" fmla="*/ 31750 w 196850"/>
+                <a:gd name="connsiteY22" fmla="*/ 882650 h 1625600"/>
+                <a:gd name="connsiteX23" fmla="*/ 19050 w 196850"/>
+                <a:gd name="connsiteY23" fmla="*/ 927100 h 1625600"/>
+                <a:gd name="connsiteX24" fmla="*/ 31750 w 196850"/>
+                <a:gd name="connsiteY24" fmla="*/ 1060450 h 1625600"/>
+                <a:gd name="connsiteX25" fmla="*/ 63500 w 196850"/>
+                <a:gd name="connsiteY25" fmla="*/ 1092200 h 1625600"/>
+                <a:gd name="connsiteX26" fmla="*/ 76200 w 196850"/>
+                <a:gd name="connsiteY26" fmla="*/ 1111250 h 1625600"/>
+                <a:gd name="connsiteX27" fmla="*/ 114300 w 196850"/>
+                <a:gd name="connsiteY27" fmla="*/ 1136650 h 1625600"/>
+                <a:gd name="connsiteX28" fmla="*/ 120650 w 196850"/>
+                <a:gd name="connsiteY28" fmla="*/ 1155700 h 1625600"/>
+                <a:gd name="connsiteX29" fmla="*/ 139700 w 196850"/>
+                <a:gd name="connsiteY29" fmla="*/ 1168400 h 1625600"/>
+                <a:gd name="connsiteX30" fmla="*/ 165100 w 196850"/>
+                <a:gd name="connsiteY30" fmla="*/ 1187450 h 1625600"/>
+                <a:gd name="connsiteX31" fmla="*/ 190500 w 196850"/>
+                <a:gd name="connsiteY31" fmla="*/ 1225550 h 1625600"/>
+                <a:gd name="connsiteX32" fmla="*/ 196850 w 196850"/>
+                <a:gd name="connsiteY32" fmla="*/ 1250950 h 1625600"/>
+                <a:gd name="connsiteX33" fmla="*/ 190500 w 196850"/>
+                <a:gd name="connsiteY33" fmla="*/ 1339850 h 1625600"/>
+                <a:gd name="connsiteX34" fmla="*/ 171450 w 196850"/>
+                <a:gd name="connsiteY34" fmla="*/ 1403350 h 1625600"/>
+                <a:gd name="connsiteX35" fmla="*/ 158750 w 196850"/>
+                <a:gd name="connsiteY35" fmla="*/ 1422400 h 1625600"/>
+                <a:gd name="connsiteX36" fmla="*/ 152400 w 196850"/>
+                <a:gd name="connsiteY36" fmla="*/ 1441450 h 1625600"/>
+                <a:gd name="connsiteX37" fmla="*/ 127000 w 196850"/>
+                <a:gd name="connsiteY37" fmla="*/ 1498600 h 1625600"/>
+                <a:gd name="connsiteX38" fmla="*/ 95250 w 196850"/>
+                <a:gd name="connsiteY38" fmla="*/ 1555750 h 1625600"/>
+                <a:gd name="connsiteX39" fmla="*/ 95250 w 196850"/>
+                <a:gd name="connsiteY39" fmla="*/ 1625600 h 1625600"/>
+              </a:gdLst>
+              <a:ahLst/>
+              <a:cxnLst>
+                <a:cxn ang="0">
+                  <a:pos x="connsiteX0" y="connsiteY0"/>
+                </a:cxn>
+                <a:cxn ang="0">
+                  <a:pos x="connsiteX1" y="connsiteY1"/>
+                </a:cxn>
+                <a:cxn ang="0">
+                  <a:pos x="connsiteX2" y="connsiteY2"/>
+                </a:cxn>
+                <a:cxn ang="0">
+                  <a:pos x="connsiteX3" y="connsiteY3"/>
+                </a:cxn>
+                <a:cxn ang="0">
+                  <a:pos x="connsiteX4" y="connsiteY4"/>
+                </a:cxn>
+                <a:cxn ang="0">
+                  <a:pos x="connsiteX5" y="connsiteY5"/>
+                </a:cxn>
+                <a:cxn ang="0">
+                  <a:pos x="connsiteX6" y="connsiteY6"/>
+                </a:cxn>
+                <a:cxn ang="0">
+                  <a:pos x="connsiteX7" y="connsiteY7"/>
+                </a:cxn>
+                <a:cxn ang="0">
+                  <a:pos x="connsiteX8" y="connsiteY8"/>
+                </a:cxn>
+                <a:cxn ang="0">
+                  <a:pos x="connsiteX9" y="connsiteY9"/>
+                </a:cxn>
+                <a:cxn ang="0">
+                  <a:pos x="connsiteX10" y="connsiteY10"/>
+                </a:cxn>
+                <a:cxn ang="0">
+                  <a:pos x="connsiteX11" y="connsiteY11"/>
+                </a:cxn>
+                <a:cxn ang="0">
+                  <a:pos x="connsiteX12" y="connsiteY12"/>
+                </a:cxn>
+                <a:cxn ang="0">
+                  <a:pos x="connsiteX13" y="connsiteY13"/>
+                </a:cxn>
+                <a:cxn ang="0">
+                  <a:pos x="connsiteX14" y="connsiteY14"/>
+                </a:cxn>
+                <a:cxn ang="0">
+                  <a:pos x="connsiteX15" y="connsiteY15"/>
+                </a:cxn>
+                <a:cxn ang="0">
+                  <a:pos x="connsiteX16" y="connsiteY16"/>
+                </a:cxn>
+                <a:cxn ang="0">
+                  <a:pos x="connsiteX17" y="connsiteY17"/>
+                </a:cxn>
+                <a:cxn ang="0">
+                  <a:pos x="connsiteX18" y="connsiteY18"/>
+                </a:cxn>
+                <a:cxn ang="0">
+                  <a:pos x="connsiteX19" y="connsiteY19"/>
+                </a:cxn>
+                <a:cxn ang="0">
+                  <a:pos x="connsiteX20" y="connsiteY20"/>
+                </a:cxn>
+                <a:cxn ang="0">
+                  <a:pos x="connsiteX21" y="connsiteY21"/>
+                </a:cxn>
+                <a:cxn ang="0">
+                  <a:pos x="connsiteX22" y="connsiteY22"/>
+                </a:cxn>
+                <a:cxn ang="0">
+                  <a:pos x="connsiteX23" y="connsiteY23"/>
+                </a:cxn>
+                <a:cxn ang="0">
+                  <a:pos x="connsiteX24" y="connsiteY24"/>
+                </a:cxn>
+                <a:cxn ang="0">
+                  <a:pos x="connsiteX25" y="connsiteY25"/>
+                </a:cxn>
+                <a:cxn ang="0">
+                  <a:pos x="connsiteX26" y="connsiteY26"/>
+                </a:cxn>
+                <a:cxn ang="0">
+                  <a:pos x="connsiteX27" y="connsiteY27"/>
+                </a:cxn>
+                <a:cxn ang="0">
+                  <a:pos x="connsiteX28" y="connsiteY28"/>
+                </a:cxn>
+                <a:cxn ang="0">
+                  <a:pos x="connsiteX29" y="connsiteY29"/>
+                </a:cxn>
+                <a:cxn ang="0">
+                  <a:pos x="connsiteX30" y="connsiteY30"/>
+                </a:cxn>
+                <a:cxn ang="0">
+                  <a:pos x="connsiteX31" y="connsiteY31"/>
+                </a:cxn>
+                <a:cxn ang="0">
+                  <a:pos x="connsiteX32" y="connsiteY32"/>
+                </a:cxn>
+                <a:cxn ang="0">
+                  <a:pos x="connsiteX33" y="connsiteY33"/>
+                </a:cxn>
+                <a:cxn ang="0">
+                  <a:pos x="connsiteX34" y="connsiteY34"/>
+                </a:cxn>
+                <a:cxn ang="0">
+                  <a:pos x="connsiteX35" y="connsiteY35"/>
+                </a:cxn>
+                <a:cxn ang="0">
+                  <a:pos x="connsiteX36" y="connsiteY36"/>
+                </a:cxn>
+                <a:cxn ang="0">
+                  <a:pos x="connsiteX37" y="connsiteY37"/>
+                </a:cxn>
+                <a:cxn ang="0">
+                  <a:pos x="connsiteX38" y="connsiteY38"/>
+                </a:cxn>
+                <a:cxn ang="0">
+                  <a:pos x="connsiteX39" y="connsiteY39"/>
+                </a:cxn>
+              </a:cxnLst>
+              <a:rect l="l" t="t" r="r" b="b"/>
+              <a:pathLst>
+                <a:path w="196850" h="1625600">
+                  <a:moveTo>
+                    <a:pt x="127000" y="0"/>
+                  </a:moveTo>
+                  <a:cubicBezTo>
+                    <a:pt x="72901" y="32460"/>
+                    <a:pt x="111869" y="2917"/>
+                    <a:pt x="82550" y="38100"/>
+                  </a:cubicBezTo>
+                  <a:cubicBezTo>
+                    <a:pt x="68308" y="55190"/>
+                    <a:pt x="59809" y="55930"/>
+                    <a:pt x="50800" y="76200"/>
+                  </a:cubicBezTo>
+                  <a:cubicBezTo>
+                    <a:pt x="25936" y="132143"/>
+                    <a:pt x="53821" y="98579"/>
+                    <a:pt x="19050" y="133350"/>
+                  </a:cubicBezTo>
+                  <a:cubicBezTo>
+                    <a:pt x="3590" y="179729"/>
+                    <a:pt x="9597" y="158463"/>
+                    <a:pt x="0" y="196850"/>
+                  </a:cubicBezTo>
+                  <a:cubicBezTo>
+                    <a:pt x="14593" y="299002"/>
+                    <a:pt x="3234" y="257352"/>
+                    <a:pt x="25400" y="323850"/>
+                  </a:cubicBezTo>
+                  <a:cubicBezTo>
+                    <a:pt x="30227" y="338330"/>
+                    <a:pt x="42333" y="349250"/>
+                    <a:pt x="50800" y="361950"/>
+                  </a:cubicBezTo>
+                  <a:cubicBezTo>
+                    <a:pt x="63500" y="381000"/>
+                    <a:pt x="61383" y="383117"/>
+                    <a:pt x="82550" y="393700"/>
+                  </a:cubicBezTo>
+                  <a:cubicBezTo>
+                    <a:pt x="88537" y="396693"/>
+                    <a:pt x="95250" y="397933"/>
+                    <a:pt x="101600" y="400050"/>
+                  </a:cubicBezTo>
+                  <a:cubicBezTo>
+                    <a:pt x="150493" y="448943"/>
+                    <a:pt x="129737" y="423206"/>
+                    <a:pt x="165100" y="476250"/>
+                  </a:cubicBezTo>
+                  <a:cubicBezTo>
+                    <a:pt x="169333" y="482600"/>
+                    <a:pt x="175387" y="488060"/>
+                    <a:pt x="177800" y="495300"/>
+                  </a:cubicBezTo>
+                  <a:cubicBezTo>
+                    <a:pt x="179917" y="501650"/>
+                    <a:pt x="182698" y="507816"/>
+                    <a:pt x="184150" y="514350"/>
+                  </a:cubicBezTo>
+                  <a:cubicBezTo>
+                    <a:pt x="186943" y="526919"/>
+                    <a:pt x="187975" y="539825"/>
+                    <a:pt x="190500" y="552450"/>
+                  </a:cubicBezTo>
+                  <a:cubicBezTo>
+                    <a:pt x="192212" y="561008"/>
+                    <a:pt x="194733" y="569383"/>
+                    <a:pt x="196850" y="577850"/>
+                  </a:cubicBezTo>
+                  <a:cubicBezTo>
+                    <a:pt x="194733" y="605367"/>
+                    <a:pt x="193923" y="633015"/>
+                    <a:pt x="190500" y="660400"/>
+                  </a:cubicBezTo>
+                  <a:cubicBezTo>
+                    <a:pt x="188219" y="678652"/>
+                    <a:pt x="167578" y="708722"/>
+                    <a:pt x="158750" y="717550"/>
+                  </a:cubicBezTo>
+                  <a:cubicBezTo>
+                    <a:pt x="152400" y="723900"/>
+                    <a:pt x="145449" y="729701"/>
+                    <a:pt x="139700" y="736600"/>
+                  </a:cubicBezTo>
+                  <a:cubicBezTo>
+                    <a:pt x="113242" y="768350"/>
+                    <a:pt x="142875" y="745067"/>
+                    <a:pt x="107950" y="768350"/>
+                  </a:cubicBezTo>
+                  <a:cubicBezTo>
+                    <a:pt x="103717" y="774700"/>
+                    <a:pt x="98663" y="780574"/>
+                    <a:pt x="95250" y="787400"/>
+                  </a:cubicBezTo>
+                  <a:cubicBezTo>
+                    <a:pt x="92257" y="793387"/>
+                    <a:pt x="93081" y="801223"/>
+                    <a:pt x="88900" y="806450"/>
+                  </a:cubicBezTo>
+                  <a:cubicBezTo>
+                    <a:pt x="84132" y="812409"/>
+                    <a:pt x="76200" y="814917"/>
+                    <a:pt x="69850" y="819150"/>
+                  </a:cubicBezTo>
+                  <a:cubicBezTo>
+                    <a:pt x="38908" y="865562"/>
+                    <a:pt x="76676" y="807204"/>
+                    <a:pt x="44450" y="863600"/>
+                  </a:cubicBezTo>
+                  <a:cubicBezTo>
+                    <a:pt x="40664" y="870226"/>
+                    <a:pt x="35163" y="875824"/>
+                    <a:pt x="31750" y="882650"/>
+                  </a:cubicBezTo>
+                  <a:cubicBezTo>
+                    <a:pt x="27195" y="891760"/>
+                    <a:pt x="21085" y="918962"/>
+                    <a:pt x="19050" y="927100"/>
+                  </a:cubicBezTo>
+                  <a:cubicBezTo>
+                    <a:pt x="19267" y="930136"/>
+                    <a:pt x="24826" y="1037369"/>
+                    <a:pt x="31750" y="1060450"/>
+                  </a:cubicBezTo>
+                  <a:cubicBezTo>
+                    <a:pt x="37042" y="1078089"/>
+                    <a:pt x="49742" y="1083028"/>
+                    <a:pt x="63500" y="1092200"/>
+                  </a:cubicBezTo>
+                  <a:cubicBezTo>
+                    <a:pt x="67733" y="1098550"/>
+                    <a:pt x="70457" y="1106224"/>
+                    <a:pt x="76200" y="1111250"/>
+                  </a:cubicBezTo>
+                  <a:cubicBezTo>
+                    <a:pt x="87687" y="1121301"/>
+                    <a:pt x="114300" y="1136650"/>
+                    <a:pt x="114300" y="1136650"/>
+                  </a:cubicBezTo>
+                  <a:cubicBezTo>
+                    <a:pt x="116417" y="1143000"/>
+                    <a:pt x="116469" y="1150473"/>
+                    <a:pt x="120650" y="1155700"/>
+                  </a:cubicBezTo>
+                  <a:cubicBezTo>
+                    <a:pt x="125418" y="1161659"/>
+                    <a:pt x="133490" y="1163964"/>
+                    <a:pt x="139700" y="1168400"/>
+                  </a:cubicBezTo>
+                  <a:cubicBezTo>
+                    <a:pt x="148312" y="1174551"/>
+                    <a:pt x="158069" y="1179540"/>
+                    <a:pt x="165100" y="1187450"/>
+                  </a:cubicBezTo>
+                  <a:cubicBezTo>
+                    <a:pt x="175241" y="1198858"/>
+                    <a:pt x="190500" y="1225550"/>
+                    <a:pt x="190500" y="1225550"/>
+                  </a:cubicBezTo>
+                  <a:cubicBezTo>
+                    <a:pt x="192617" y="1234017"/>
+                    <a:pt x="196850" y="1242223"/>
+                    <a:pt x="196850" y="1250950"/>
+                  </a:cubicBezTo>
+                  <a:cubicBezTo>
+                    <a:pt x="196850" y="1280659"/>
+                    <a:pt x="193781" y="1310323"/>
+                    <a:pt x="190500" y="1339850"/>
+                  </a:cubicBezTo>
+                  <a:cubicBezTo>
+                    <a:pt x="188901" y="1354245"/>
+                    <a:pt x="174642" y="1393773"/>
+                    <a:pt x="171450" y="1403350"/>
+                  </a:cubicBezTo>
+                  <a:cubicBezTo>
+                    <a:pt x="169037" y="1410590"/>
+                    <a:pt x="162163" y="1415574"/>
+                    <a:pt x="158750" y="1422400"/>
+                  </a:cubicBezTo>
+                  <a:cubicBezTo>
+                    <a:pt x="155757" y="1428387"/>
+                    <a:pt x="155393" y="1435463"/>
+                    <a:pt x="152400" y="1441450"/>
+                  </a:cubicBezTo>
+                  <a:cubicBezTo>
+                    <a:pt x="122211" y="1501827"/>
+                    <a:pt x="159765" y="1400306"/>
+                    <a:pt x="127000" y="1498600"/>
+                  </a:cubicBezTo>
+                  <a:cubicBezTo>
+                    <a:pt x="119404" y="1521388"/>
+                    <a:pt x="96991" y="1531377"/>
+                    <a:pt x="95250" y="1555750"/>
+                  </a:cubicBezTo>
+                  <a:cubicBezTo>
+                    <a:pt x="93591" y="1578974"/>
+                    <a:pt x="95250" y="1602317"/>
+                    <a:pt x="95250" y="1625600"/>
+                  </a:cubicBezTo>
+                </a:path>
+              </a:pathLst>
+            </a:custGeom>
+            <a:ln w="28575">
+              <a:headEnd type="none" w="med" len="med"/>
+              <a:tailEnd type="triangle" w="med" len="med"/>
+            </a:ln>
+          </p:spPr>
+          <p:style>
+            <a:lnRef idx="1">
+              <a:schemeClr val="dk1"/>
+            </a:lnRef>
+            <a:fillRef idx="0">
+              <a:schemeClr val="dk1"/>
+            </a:fillRef>
+            <a:effectRef idx="0">
+              <a:schemeClr val="dk1"/>
+            </a:effectRef>
+            <a:fontRef idx="minor">
+              <a:schemeClr val="tx1"/>
+            </a:fontRef>
+          </p:style>
+          <p:txBody>
+            <a:bodyPr rtlCol="0" anchor="ctr"/>
+            <a:lstStyle/>
+            <a:p>
+              <a:pPr algn="ctr"/>
+              <a:endParaRPr lang="en-US">
+                <a:ln w="12700">
+                  <a:solidFill>
+                    <a:schemeClr val="tx1"/>
+                  </a:solidFill>
+                </a:ln>
+              </a:endParaRPr>
+            </a:p>
+          </p:txBody>
+        </p:sp>
+        <p:sp>
+          <p:nvSpPr>
+            <p:cNvPr id="71" name="Freeform 70"/>
+            <p:cNvSpPr/>
+            <p:nvPr/>
+          </p:nvSpPr>
+          <p:spPr>
+            <a:xfrm>
+              <a:off x="7884096" y="5571707"/>
+              <a:ext cx="91440" cy="731520"/>
+            </a:xfrm>
+            <a:custGeom>
+              <a:avLst/>
+              <a:gdLst>
+                <a:gd name="connsiteX0" fmla="*/ 127000 w 196850"/>
+                <a:gd name="connsiteY0" fmla="*/ 0 h 1625600"/>
+                <a:gd name="connsiteX1" fmla="*/ 82550 w 196850"/>
+                <a:gd name="connsiteY1" fmla="*/ 38100 h 1625600"/>
+                <a:gd name="connsiteX2" fmla="*/ 50800 w 196850"/>
+                <a:gd name="connsiteY2" fmla="*/ 76200 h 1625600"/>
+                <a:gd name="connsiteX3" fmla="*/ 19050 w 196850"/>
+                <a:gd name="connsiteY3" fmla="*/ 133350 h 1625600"/>
+                <a:gd name="connsiteX4" fmla="*/ 0 w 196850"/>
+                <a:gd name="connsiteY4" fmla="*/ 196850 h 1625600"/>
+                <a:gd name="connsiteX5" fmla="*/ 25400 w 196850"/>
+                <a:gd name="connsiteY5" fmla="*/ 323850 h 1625600"/>
+                <a:gd name="connsiteX6" fmla="*/ 50800 w 196850"/>
+                <a:gd name="connsiteY6" fmla="*/ 361950 h 1625600"/>
+                <a:gd name="connsiteX7" fmla="*/ 82550 w 196850"/>
+                <a:gd name="connsiteY7" fmla="*/ 393700 h 1625600"/>
+                <a:gd name="connsiteX8" fmla="*/ 101600 w 196850"/>
+                <a:gd name="connsiteY8" fmla="*/ 400050 h 1625600"/>
+                <a:gd name="connsiteX9" fmla="*/ 165100 w 196850"/>
+                <a:gd name="connsiteY9" fmla="*/ 476250 h 1625600"/>
+                <a:gd name="connsiteX10" fmla="*/ 177800 w 196850"/>
+                <a:gd name="connsiteY10" fmla="*/ 495300 h 1625600"/>
+                <a:gd name="connsiteX11" fmla="*/ 184150 w 196850"/>
+                <a:gd name="connsiteY11" fmla="*/ 514350 h 1625600"/>
+                <a:gd name="connsiteX12" fmla="*/ 190500 w 196850"/>
+                <a:gd name="connsiteY12" fmla="*/ 552450 h 1625600"/>
+                <a:gd name="connsiteX13" fmla="*/ 196850 w 196850"/>
+                <a:gd name="connsiteY13" fmla="*/ 577850 h 1625600"/>
+                <a:gd name="connsiteX14" fmla="*/ 190500 w 196850"/>
+                <a:gd name="connsiteY14" fmla="*/ 660400 h 1625600"/>
+                <a:gd name="connsiteX15" fmla="*/ 158750 w 196850"/>
+                <a:gd name="connsiteY15" fmla="*/ 717550 h 1625600"/>
+                <a:gd name="connsiteX16" fmla="*/ 139700 w 196850"/>
+                <a:gd name="connsiteY16" fmla="*/ 736600 h 1625600"/>
+                <a:gd name="connsiteX17" fmla="*/ 107950 w 196850"/>
+                <a:gd name="connsiteY17" fmla="*/ 768350 h 1625600"/>
+                <a:gd name="connsiteX18" fmla="*/ 95250 w 196850"/>
+                <a:gd name="connsiteY18" fmla="*/ 787400 h 1625600"/>
+                <a:gd name="connsiteX19" fmla="*/ 88900 w 196850"/>
+                <a:gd name="connsiteY19" fmla="*/ 806450 h 1625600"/>
+                <a:gd name="connsiteX20" fmla="*/ 69850 w 196850"/>
+                <a:gd name="connsiteY20" fmla="*/ 819150 h 1625600"/>
+                <a:gd name="connsiteX21" fmla="*/ 44450 w 196850"/>
+                <a:gd name="connsiteY21" fmla="*/ 863600 h 1625600"/>
+                <a:gd name="connsiteX22" fmla="*/ 31750 w 196850"/>
+                <a:gd name="connsiteY22" fmla="*/ 882650 h 1625600"/>
+                <a:gd name="connsiteX23" fmla="*/ 19050 w 196850"/>
+                <a:gd name="connsiteY23" fmla="*/ 927100 h 1625600"/>
+                <a:gd name="connsiteX24" fmla="*/ 31750 w 196850"/>
+                <a:gd name="connsiteY24" fmla="*/ 1060450 h 1625600"/>
+                <a:gd name="connsiteX25" fmla="*/ 63500 w 196850"/>
+                <a:gd name="connsiteY25" fmla="*/ 1092200 h 1625600"/>
+                <a:gd name="connsiteX26" fmla="*/ 76200 w 196850"/>
+                <a:gd name="connsiteY26" fmla="*/ 1111250 h 1625600"/>
+                <a:gd name="connsiteX27" fmla="*/ 114300 w 196850"/>
+                <a:gd name="connsiteY27" fmla="*/ 1136650 h 1625600"/>
+                <a:gd name="connsiteX28" fmla="*/ 120650 w 196850"/>
+                <a:gd name="connsiteY28" fmla="*/ 1155700 h 1625600"/>
+                <a:gd name="connsiteX29" fmla="*/ 139700 w 196850"/>
+                <a:gd name="connsiteY29" fmla="*/ 1168400 h 1625600"/>
+                <a:gd name="connsiteX30" fmla="*/ 165100 w 196850"/>
+                <a:gd name="connsiteY30" fmla="*/ 1187450 h 1625600"/>
+                <a:gd name="connsiteX31" fmla="*/ 190500 w 196850"/>
+                <a:gd name="connsiteY31" fmla="*/ 1225550 h 1625600"/>
+                <a:gd name="connsiteX32" fmla="*/ 196850 w 196850"/>
+                <a:gd name="connsiteY32" fmla="*/ 1250950 h 1625600"/>
+                <a:gd name="connsiteX33" fmla="*/ 190500 w 196850"/>
+                <a:gd name="connsiteY33" fmla="*/ 1339850 h 1625600"/>
+                <a:gd name="connsiteX34" fmla="*/ 171450 w 196850"/>
+                <a:gd name="connsiteY34" fmla="*/ 1403350 h 1625600"/>
+                <a:gd name="connsiteX35" fmla="*/ 158750 w 196850"/>
+                <a:gd name="connsiteY35" fmla="*/ 1422400 h 1625600"/>
+                <a:gd name="connsiteX36" fmla="*/ 152400 w 196850"/>
+                <a:gd name="connsiteY36" fmla="*/ 1441450 h 1625600"/>
+                <a:gd name="connsiteX37" fmla="*/ 127000 w 196850"/>
+                <a:gd name="connsiteY37" fmla="*/ 1498600 h 1625600"/>
+                <a:gd name="connsiteX38" fmla="*/ 95250 w 196850"/>
+                <a:gd name="connsiteY38" fmla="*/ 1555750 h 1625600"/>
+                <a:gd name="connsiteX39" fmla="*/ 95250 w 196850"/>
+                <a:gd name="connsiteY39" fmla="*/ 1625600 h 1625600"/>
+              </a:gdLst>
+              <a:ahLst/>
+              <a:cxnLst>
+                <a:cxn ang="0">
+                  <a:pos x="connsiteX0" y="connsiteY0"/>
+                </a:cxn>
+                <a:cxn ang="0">
+                  <a:pos x="connsiteX1" y="connsiteY1"/>
+                </a:cxn>
+                <a:cxn ang="0">
+                  <a:pos x="connsiteX2" y="connsiteY2"/>
+                </a:cxn>
+                <a:cxn ang="0">
+                  <a:pos x="connsiteX3" y="connsiteY3"/>
+                </a:cxn>
+                <a:cxn ang="0">
+                  <a:pos x="connsiteX4" y="connsiteY4"/>
+                </a:cxn>
+                <a:cxn ang="0">
+                  <a:pos x="connsiteX5" y="connsiteY5"/>
+                </a:cxn>
+                <a:cxn ang="0">
+                  <a:pos x="connsiteX6" y="connsiteY6"/>
+                </a:cxn>
+                <a:cxn ang="0">
+                  <a:pos x="connsiteX7" y="connsiteY7"/>
+                </a:cxn>
+                <a:cxn ang="0">
+                  <a:pos x="connsiteX8" y="connsiteY8"/>
+                </a:cxn>
+                <a:cxn ang="0">
+                  <a:pos x="connsiteX9" y="connsiteY9"/>
+                </a:cxn>
+                <a:cxn ang="0">
+                  <a:pos x="connsiteX10" y="connsiteY10"/>
+                </a:cxn>
+                <a:cxn ang="0">
+                  <a:pos x="connsiteX11" y="connsiteY11"/>
+                </a:cxn>
+                <a:cxn ang="0">
+                  <a:pos x="connsiteX12" y="connsiteY12"/>
+                </a:cxn>
+                <a:cxn ang="0">
+                  <a:pos x="connsiteX13" y="connsiteY13"/>
+                </a:cxn>
+                <a:cxn ang="0">
+                  <a:pos x="connsiteX14" y="connsiteY14"/>
+                </a:cxn>
+                <a:cxn ang="0">
+                  <a:pos x="connsiteX15" y="connsiteY15"/>
+                </a:cxn>
+                <a:cxn ang="0">
+                  <a:pos x="connsiteX16" y="connsiteY16"/>
+                </a:cxn>
+                <a:cxn ang="0">
+                  <a:pos x="connsiteX17" y="connsiteY17"/>
+                </a:cxn>
+                <a:cxn ang="0">
+                  <a:pos x="connsiteX18" y="connsiteY18"/>
+                </a:cxn>
+                <a:cxn ang="0">
+                  <a:pos x="connsiteX19" y="connsiteY19"/>
+                </a:cxn>
+                <a:cxn ang="0">
+                  <a:pos x="connsiteX20" y="connsiteY20"/>
+                </a:cxn>
+                <a:cxn ang="0">
+                  <a:pos x="connsiteX21" y="connsiteY21"/>
+                </a:cxn>
+                <a:cxn ang="0">
+                  <a:pos x="connsiteX22" y="connsiteY22"/>
+                </a:cxn>
+                <a:cxn ang="0">
+                  <a:pos x="connsiteX23" y="connsiteY23"/>
+                </a:cxn>
+                <a:cxn ang="0">
+                  <a:pos x="connsiteX24" y="connsiteY24"/>
+                </a:cxn>
+                <a:cxn ang="0">
+                  <a:pos x="connsiteX25" y="connsiteY25"/>
+                </a:cxn>
+                <a:cxn ang="0">
+                  <a:pos x="connsiteX26" y="connsiteY26"/>
+                </a:cxn>
+                <a:cxn ang="0">
+                  <a:pos x="connsiteX27" y="connsiteY27"/>
+                </a:cxn>
+                <a:cxn ang="0">
+                  <a:pos x="connsiteX28" y="connsiteY28"/>
+                </a:cxn>
+                <a:cxn ang="0">
+                  <a:pos x="connsiteX29" y="connsiteY29"/>
+                </a:cxn>
+                <a:cxn ang="0">
+                  <a:pos x="connsiteX30" y="connsiteY30"/>
+                </a:cxn>
+                <a:cxn ang="0">
+                  <a:pos x="connsiteX31" y="connsiteY31"/>
+                </a:cxn>
+                <a:cxn ang="0">
+                  <a:pos x="connsiteX32" y="connsiteY32"/>
+                </a:cxn>
+                <a:cxn ang="0">
+                  <a:pos x="connsiteX33" y="connsiteY33"/>
+                </a:cxn>
+                <a:cxn ang="0">
+                  <a:pos x="connsiteX34" y="connsiteY34"/>
+                </a:cxn>
+                <a:cxn ang="0">
+                  <a:pos x="connsiteX35" y="connsiteY35"/>
+                </a:cxn>
+                <a:cxn ang="0">
+                  <a:pos x="connsiteX36" y="connsiteY36"/>
+                </a:cxn>
+                <a:cxn ang="0">
+                  <a:pos x="connsiteX37" y="connsiteY37"/>
+                </a:cxn>
+                <a:cxn ang="0">
+                  <a:pos x="connsiteX38" y="connsiteY38"/>
+                </a:cxn>
+                <a:cxn ang="0">
+                  <a:pos x="connsiteX39" y="connsiteY39"/>
+                </a:cxn>
+              </a:cxnLst>
+              <a:rect l="l" t="t" r="r" b="b"/>
+              <a:pathLst>
+                <a:path w="196850" h="1625600">
+                  <a:moveTo>
+                    <a:pt x="127000" y="0"/>
+                  </a:moveTo>
+                  <a:cubicBezTo>
+                    <a:pt x="72901" y="32460"/>
+                    <a:pt x="111869" y="2917"/>
+                    <a:pt x="82550" y="38100"/>
+                  </a:cubicBezTo>
+                  <a:cubicBezTo>
+                    <a:pt x="68308" y="55190"/>
+                    <a:pt x="59809" y="55930"/>
+                    <a:pt x="50800" y="76200"/>
+                  </a:cubicBezTo>
+                  <a:cubicBezTo>
+                    <a:pt x="25936" y="132143"/>
+                    <a:pt x="53821" y="98579"/>
+                    <a:pt x="19050" y="133350"/>
+                  </a:cubicBezTo>
+                  <a:cubicBezTo>
+                    <a:pt x="3590" y="179729"/>
+                    <a:pt x="9597" y="158463"/>
+                    <a:pt x="0" y="196850"/>
+                  </a:cubicBezTo>
+                  <a:cubicBezTo>
+                    <a:pt x="14593" y="299002"/>
+                    <a:pt x="3234" y="257352"/>
+                    <a:pt x="25400" y="323850"/>
+                  </a:cubicBezTo>
+                  <a:cubicBezTo>
+                    <a:pt x="30227" y="338330"/>
+                    <a:pt x="42333" y="349250"/>
+                    <a:pt x="50800" y="361950"/>
+                  </a:cubicBezTo>
+                  <a:cubicBezTo>
+                    <a:pt x="63500" y="381000"/>
+                    <a:pt x="61383" y="383117"/>
+                    <a:pt x="82550" y="393700"/>
+                  </a:cubicBezTo>
+                  <a:cubicBezTo>
+                    <a:pt x="88537" y="396693"/>
+                    <a:pt x="95250" y="397933"/>
+                    <a:pt x="101600" y="400050"/>
+                  </a:cubicBezTo>
+                  <a:cubicBezTo>
+                    <a:pt x="150493" y="448943"/>
+                    <a:pt x="129737" y="423206"/>
+                    <a:pt x="165100" y="476250"/>
+                  </a:cubicBezTo>
+                  <a:cubicBezTo>
+                    <a:pt x="169333" y="482600"/>
+                    <a:pt x="175387" y="488060"/>
+                    <a:pt x="177800" y="495300"/>
+                  </a:cubicBezTo>
+                  <a:cubicBezTo>
+                    <a:pt x="179917" y="501650"/>
+                    <a:pt x="182698" y="507816"/>
+                    <a:pt x="184150" y="514350"/>
+                  </a:cubicBezTo>
+                  <a:cubicBezTo>
+                    <a:pt x="186943" y="526919"/>
+                    <a:pt x="187975" y="539825"/>
+                    <a:pt x="190500" y="552450"/>
+                  </a:cubicBezTo>
+                  <a:cubicBezTo>
+                    <a:pt x="192212" y="561008"/>
+                    <a:pt x="194733" y="569383"/>
+                    <a:pt x="196850" y="577850"/>
+                  </a:cubicBezTo>
+                  <a:cubicBezTo>
+                    <a:pt x="194733" y="605367"/>
+                    <a:pt x="193923" y="633015"/>
+                    <a:pt x="190500" y="660400"/>
+                  </a:cubicBezTo>
+                  <a:cubicBezTo>
+                    <a:pt x="188219" y="678652"/>
+                    <a:pt x="167578" y="708722"/>
+                    <a:pt x="158750" y="717550"/>
+                  </a:cubicBezTo>
+                  <a:cubicBezTo>
+                    <a:pt x="152400" y="723900"/>
+                    <a:pt x="145449" y="729701"/>
+                    <a:pt x="139700" y="736600"/>
+                  </a:cubicBezTo>
+                  <a:cubicBezTo>
+                    <a:pt x="113242" y="768350"/>
+                    <a:pt x="142875" y="745067"/>
+                    <a:pt x="107950" y="768350"/>
+                  </a:cubicBezTo>
+                  <a:cubicBezTo>
+                    <a:pt x="103717" y="774700"/>
+                    <a:pt x="98663" y="780574"/>
+                    <a:pt x="95250" y="787400"/>
+                  </a:cubicBezTo>
+                  <a:cubicBezTo>
+                    <a:pt x="92257" y="793387"/>
+                    <a:pt x="93081" y="801223"/>
+                    <a:pt x="88900" y="806450"/>
+                  </a:cubicBezTo>
+                  <a:cubicBezTo>
+                    <a:pt x="84132" y="812409"/>
+                    <a:pt x="76200" y="814917"/>
+                    <a:pt x="69850" y="819150"/>
+                  </a:cubicBezTo>
+                  <a:cubicBezTo>
+                    <a:pt x="38908" y="865562"/>
+                    <a:pt x="76676" y="807204"/>
+                    <a:pt x="44450" y="863600"/>
+                  </a:cubicBezTo>
+                  <a:cubicBezTo>
+                    <a:pt x="40664" y="870226"/>
+                    <a:pt x="35163" y="875824"/>
+                    <a:pt x="31750" y="882650"/>
+                  </a:cubicBezTo>
+                  <a:cubicBezTo>
+                    <a:pt x="27195" y="891760"/>
+                    <a:pt x="21085" y="918962"/>
+                    <a:pt x="19050" y="927100"/>
+                  </a:cubicBezTo>
+                  <a:cubicBezTo>
+                    <a:pt x="19267" y="930136"/>
+                    <a:pt x="24826" y="1037369"/>
+                    <a:pt x="31750" y="1060450"/>
+                  </a:cubicBezTo>
+                  <a:cubicBezTo>
+                    <a:pt x="37042" y="1078089"/>
+                    <a:pt x="49742" y="1083028"/>
+                    <a:pt x="63500" y="1092200"/>
+                  </a:cubicBezTo>
+                  <a:cubicBezTo>
+                    <a:pt x="67733" y="1098550"/>
+                    <a:pt x="70457" y="1106224"/>
+                    <a:pt x="76200" y="1111250"/>
+                  </a:cubicBezTo>
+                  <a:cubicBezTo>
+                    <a:pt x="87687" y="1121301"/>
+                    <a:pt x="114300" y="1136650"/>
+                    <a:pt x="114300" y="1136650"/>
+                  </a:cubicBezTo>
+                  <a:cubicBezTo>
+                    <a:pt x="116417" y="1143000"/>
+                    <a:pt x="116469" y="1150473"/>
+                    <a:pt x="120650" y="1155700"/>
+                  </a:cubicBezTo>
+                  <a:cubicBezTo>
+                    <a:pt x="125418" y="1161659"/>
+                    <a:pt x="133490" y="1163964"/>
+                    <a:pt x="139700" y="1168400"/>
+                  </a:cubicBezTo>
+                  <a:cubicBezTo>
+                    <a:pt x="148312" y="1174551"/>
+                    <a:pt x="158069" y="1179540"/>
+                    <a:pt x="165100" y="1187450"/>
+                  </a:cubicBezTo>
+                  <a:cubicBezTo>
+                    <a:pt x="175241" y="1198858"/>
+                    <a:pt x="190500" y="1225550"/>
+                    <a:pt x="190500" y="1225550"/>
+                  </a:cubicBezTo>
+                  <a:cubicBezTo>
+                    <a:pt x="192617" y="1234017"/>
+                    <a:pt x="196850" y="1242223"/>
+                    <a:pt x="196850" y="1250950"/>
+                  </a:cubicBezTo>
+                  <a:cubicBezTo>
+                    <a:pt x="196850" y="1280659"/>
+                    <a:pt x="193781" y="1310323"/>
+                    <a:pt x="190500" y="1339850"/>
+                  </a:cubicBezTo>
+                  <a:cubicBezTo>
+                    <a:pt x="188901" y="1354245"/>
+                    <a:pt x="174642" y="1393773"/>
+                    <a:pt x="171450" y="1403350"/>
+                  </a:cubicBezTo>
+                  <a:cubicBezTo>
+                    <a:pt x="169037" y="1410590"/>
+                    <a:pt x="162163" y="1415574"/>
+                    <a:pt x="158750" y="1422400"/>
+                  </a:cubicBezTo>
+                  <a:cubicBezTo>
+                    <a:pt x="155757" y="1428387"/>
+                    <a:pt x="155393" y="1435463"/>
+                    <a:pt x="152400" y="1441450"/>
+                  </a:cubicBezTo>
+                  <a:cubicBezTo>
+                    <a:pt x="122211" y="1501827"/>
+                    <a:pt x="159765" y="1400306"/>
+                    <a:pt x="127000" y="1498600"/>
+                  </a:cubicBezTo>
+                  <a:cubicBezTo>
+                    <a:pt x="119404" y="1521388"/>
+                    <a:pt x="96991" y="1531377"/>
+                    <a:pt x="95250" y="1555750"/>
+                  </a:cubicBezTo>
+                  <a:cubicBezTo>
+                    <a:pt x="93591" y="1578974"/>
+                    <a:pt x="95250" y="1602317"/>
+                    <a:pt x="95250" y="1625600"/>
+                  </a:cubicBezTo>
+                </a:path>
+              </a:pathLst>
+            </a:custGeom>
+            <a:ln w="28575">
+              <a:headEnd type="none" w="med" len="med"/>
+              <a:tailEnd type="triangle" w="med" len="med"/>
+            </a:ln>
+          </p:spPr>
+          <p:style>
+            <a:lnRef idx="1">
+              <a:schemeClr val="dk1"/>
+            </a:lnRef>
+            <a:fillRef idx="0">
+              <a:schemeClr val="dk1"/>
+            </a:fillRef>
+            <a:effectRef idx="0">
+              <a:schemeClr val="dk1"/>
+            </a:effectRef>
+            <a:fontRef idx="minor">
+              <a:schemeClr val="tx1"/>
+            </a:fontRef>
+          </p:style>
+          <p:txBody>
+            <a:bodyPr rtlCol="0" anchor="ctr"/>
+            <a:lstStyle/>
+            <a:p>
+              <a:pPr algn="ctr"/>
+              <a:endParaRPr lang="en-US">
+                <a:ln w="12700">
+                  <a:solidFill>
+                    <a:schemeClr val="tx1"/>
+                  </a:solidFill>
+                </a:ln>
+              </a:endParaRPr>
+            </a:p>
+          </p:txBody>
+        </p:sp>
+      </p:grpSp>
+      <p:sp>
+        <p:nvSpPr>
+          <p:cNvPr id="8" name="TextBox 2">
+            <a:extLst>
+              <a:ext uri="{FF2B5EF4-FFF2-40B4-BE49-F238E27FC236}">
+                <a16:creationId xmlns:a16="http://schemas.microsoft.com/office/drawing/2014/main" id="{5A6988E6-98CF-CC51-00E3-6B11D1E1D90B}"/>
+              </a:ext>
+            </a:extLst>
+          </p:cNvPr>
+          <p:cNvSpPr txBox="1">
+            <a:spLocks noChangeArrowheads="1"/>
+          </p:cNvSpPr>
+          <p:nvPr/>
+        </p:nvSpPr>
+        <p:spPr bwMode="auto">
+          <a:xfrm>
+            <a:off x="3880663" y="6536377"/>
+            <a:ext cx="5299849" cy="276999"/>
+          </a:xfrm>
+          <a:prstGeom prst="rect">
+            <a:avLst/>
+          </a:prstGeom>
+          <a:noFill/>
+          <a:ln>
+            <a:noFill/>
+          </a:ln>
+          <a:extLst>
+            <a:ext uri="{909E8E84-426E-40DD-AFC4-6F175D3DCCD1}">
+              <a14:hiddenFill xmlns:a14="http://schemas.microsoft.com/office/drawing/2010/main">
+                <a:solidFill>
+                  <a:srgbClr val="FFFFFF"/>
+                </a:solidFill>
+              </a14:hiddenFill>
+            </a:ext>
+            <a:ext uri="{91240B29-F687-4F45-9708-019B960494DF}">
+              <a14:hiddenLine xmlns:a14="http://schemas.microsoft.com/office/drawing/2010/main" w="9525">
+                <a:solidFill>
+                  <a:srgbClr val="000000"/>
+                </a:solidFill>
+                <a:miter lim="800000"/>
+                <a:headEnd/>
+                <a:tailEnd/>
+              </a14:hiddenLine>
+            </a:ext>
+          </a:extLst>
+        </p:spPr>
+        <p:txBody>
+          <a:bodyPr wrap="none">
+            <a:spAutoFit/>
+          </a:bodyPr>
+          <a:lstStyle>
+            <a:lvl1pPr fontAlgn="t" latinLnBrk="1">
+              <a:spcBef>
+                <a:spcPct val="20000"/>
+              </a:spcBef>
+              <a:buClr>
+                <a:schemeClr val="hlink"/>
+              </a:buClr>
+              <a:buSzPct val="80000"/>
+              <a:buFont typeface="Wingdings" pitchFamily="2" charset="2"/>
+              <a:buChar char="n"/>
+              <a:defRPr kumimoji="1" sz="3000">
+                <a:solidFill>
+                  <a:schemeClr val="tx1"/>
+                </a:solidFill>
+                <a:latin typeface="굴림" panose="020B0600000101010101" pitchFamily="34" charset="-127"/>
+                <a:ea typeface="굴림" panose="020B0600000101010101" pitchFamily="34" charset="-127"/>
+                <a:cs typeface="Arial" panose="020B0604020202020204" pitchFamily="34" charset="0"/>
+              </a:defRPr>
+            </a:lvl1pPr>
+            <a:lvl2pPr marL="742950" indent="-285750" fontAlgn="t" latinLnBrk="1">
+              <a:spcBef>
+                <a:spcPct val="20000"/>
+              </a:spcBef>
+              <a:buClr>
+                <a:schemeClr val="accent2"/>
+              </a:buClr>
+              <a:buSzPct val="70000"/>
+              <a:buFont typeface="Wingdings" pitchFamily="2" charset="2"/>
+              <a:buChar char="n"/>
+              <a:defRPr kumimoji="1" sz="2600">
+                <a:solidFill>
+                  <a:schemeClr val="tx1"/>
+                </a:solidFill>
+                <a:latin typeface="굴림" panose="020B0600000101010101" pitchFamily="34" charset="-127"/>
+                <a:ea typeface="굴림" panose="020B0600000101010101" pitchFamily="34" charset="-127"/>
+                <a:cs typeface="Arial" panose="020B0604020202020204" pitchFamily="34" charset="0"/>
+              </a:defRPr>
+            </a:lvl2pPr>
+            <a:lvl3pPr marL="1143000" indent="-228600" fontAlgn="t" latinLnBrk="1">
+              <a:spcBef>
+                <a:spcPct val="20000"/>
+              </a:spcBef>
+              <a:buClr>
+                <a:schemeClr val="accent1"/>
+              </a:buClr>
+              <a:buSzPct val="70000"/>
+              <a:buFont typeface="Wingdings" pitchFamily="2" charset="2"/>
+              <a:buChar char="n"/>
+              <a:defRPr kumimoji="1" sz="2300">
+                <a:solidFill>
+                  <a:schemeClr val="tx1"/>
+                </a:solidFill>
+                <a:latin typeface="굴림" panose="020B0600000101010101" pitchFamily="34" charset="-127"/>
+                <a:ea typeface="굴림" panose="020B0600000101010101" pitchFamily="34" charset="-127"/>
+                <a:cs typeface="Arial" panose="020B0604020202020204" pitchFamily="34" charset="0"/>
+              </a:defRPr>
+            </a:lvl3pPr>
+            <a:lvl4pPr marL="1600200" indent="-228600" fontAlgn="t" latinLnBrk="1">
+              <a:spcBef>
+                <a:spcPct val="20000"/>
+              </a:spcBef>
+              <a:buClr>
+                <a:schemeClr val="folHlink"/>
+              </a:buClr>
+              <a:buSzPct val="70000"/>
+              <a:buFont typeface="Wingdings" pitchFamily="2" charset="2"/>
+              <a:buChar char="n"/>
+              <a:defRPr kumimoji="1" sz="2000">
+                <a:solidFill>
+                  <a:schemeClr val="tx1"/>
+                </a:solidFill>
+                <a:latin typeface="굴림" panose="020B0600000101010101" pitchFamily="34" charset="-127"/>
+                <a:ea typeface="굴림" panose="020B0600000101010101" pitchFamily="34" charset="-127"/>
+                <a:cs typeface="Arial" panose="020B0604020202020204" pitchFamily="34" charset="0"/>
+              </a:defRPr>
+            </a:lvl4pPr>
+            <a:lvl5pPr marL="2057400" indent="-228600" fontAlgn="t" latinLnBrk="1">
+              <a:spcBef>
+                <a:spcPct val="20000"/>
+              </a:spcBef>
+              <a:buClr>
+                <a:schemeClr val="folHlink"/>
+              </a:buClr>
+              <a:buSzPct val="70000"/>
+              <a:buFont typeface="Wingdings" pitchFamily="2" charset="2"/>
+              <a:buChar char="n"/>
+              <a:defRPr kumimoji="1" sz="2000">
+                <a:solidFill>
+                  <a:schemeClr val="tx1"/>
+                </a:solidFill>
+                <a:latin typeface="굴림" panose="020B0600000101010101" pitchFamily="34" charset="-127"/>
+                <a:ea typeface="굴림" panose="020B0600000101010101" pitchFamily="34" charset="-127"/>
+                <a:cs typeface="Arial" panose="020B0604020202020204" pitchFamily="34" charset="0"/>
+              </a:defRPr>
+            </a:lvl5pPr>
+            <a:lvl6pPr marL="2514600" indent="-228600" eaLnBrk="0" fontAlgn="t" latinLnBrk="1" hangingPunct="0">
+              <a:spcBef>
+                <a:spcPct val="20000"/>
+              </a:spcBef>
+              <a:spcAft>
+                <a:spcPct val="0"/>
+              </a:spcAft>
+              <a:buClr>
+                <a:schemeClr val="folHlink"/>
+              </a:buClr>
+              <a:buSzPct val="70000"/>
+              <a:buFont typeface="Wingdings" pitchFamily="2" charset="2"/>
+              <a:buChar char="n"/>
+              <a:defRPr kumimoji="1" sz="2000">
+                <a:solidFill>
+                  <a:schemeClr val="tx1"/>
+                </a:solidFill>
+                <a:latin typeface="굴림" panose="020B0600000101010101" pitchFamily="34" charset="-127"/>
+                <a:ea typeface="굴림" panose="020B0600000101010101" pitchFamily="34" charset="-127"/>
+                <a:cs typeface="Arial" panose="020B0604020202020204" pitchFamily="34" charset="0"/>
+              </a:defRPr>
+            </a:lvl6pPr>
+            <a:lvl7pPr marL="2971800" indent="-228600" eaLnBrk="0" fontAlgn="t" latinLnBrk="1" hangingPunct="0">
+              <a:spcBef>
+                <a:spcPct val="20000"/>
+              </a:spcBef>
+              <a:spcAft>
+                <a:spcPct val="0"/>
+              </a:spcAft>
+              <a:buClr>
+                <a:schemeClr val="folHlink"/>
+              </a:buClr>
+              <a:buSzPct val="70000"/>
+              <a:buFont typeface="Wingdings" pitchFamily="2" charset="2"/>
+              <a:buChar char="n"/>
+              <a:defRPr kumimoji="1" sz="2000">
+                <a:solidFill>
+                  <a:schemeClr val="tx1"/>
+                </a:solidFill>
+                <a:latin typeface="굴림" panose="020B0600000101010101" pitchFamily="34" charset="-127"/>
+                <a:ea typeface="굴림" panose="020B0600000101010101" pitchFamily="34" charset="-127"/>
+                <a:cs typeface="Arial" panose="020B0604020202020204" pitchFamily="34" charset="0"/>
+              </a:defRPr>
+            </a:lvl7pPr>
+            <a:lvl8pPr marL="3429000" indent="-228600" eaLnBrk="0" fontAlgn="t" latinLnBrk="1" hangingPunct="0">
+              <a:spcBef>
+                <a:spcPct val="20000"/>
+              </a:spcBef>
+              <a:spcAft>
+                <a:spcPct val="0"/>
+              </a:spcAft>
+              <a:buClr>
+                <a:schemeClr val="folHlink"/>
+              </a:buClr>
+              <a:buSzPct val="70000"/>
+              <a:buFont typeface="Wingdings" pitchFamily="2" charset="2"/>
+              <a:buChar char="n"/>
+              <a:defRPr kumimoji="1" sz="2000">
+                <a:solidFill>
+                  <a:schemeClr val="tx1"/>
+                </a:solidFill>
+                <a:latin typeface="굴림" panose="020B0600000101010101" pitchFamily="34" charset="-127"/>
+                <a:ea typeface="굴림" panose="020B0600000101010101" pitchFamily="34" charset="-127"/>
+                <a:cs typeface="Arial" panose="020B0604020202020204" pitchFamily="34" charset="0"/>
+              </a:defRPr>
+            </a:lvl8pPr>
+            <a:lvl9pPr marL="3886200" indent="-228600" eaLnBrk="0" fontAlgn="t" latinLnBrk="1" hangingPunct="0">
+              <a:spcBef>
+                <a:spcPct val="20000"/>
+              </a:spcBef>
+              <a:spcAft>
+                <a:spcPct val="0"/>
+              </a:spcAft>
+              <a:buClr>
+                <a:schemeClr val="folHlink"/>
+              </a:buClr>
+              <a:buSzPct val="70000"/>
+              <a:buFont typeface="Wingdings" pitchFamily="2" charset="2"/>
+              <a:buChar char="n"/>
+              <a:defRPr kumimoji="1" sz="2000">
+                <a:solidFill>
+                  <a:schemeClr val="tx1"/>
+                </a:solidFill>
+                <a:latin typeface="굴림" panose="020B0600000101010101" pitchFamily="34" charset="-127"/>
+                <a:ea typeface="굴림" panose="020B0600000101010101" pitchFamily="34" charset="-127"/>
+                <a:cs typeface="Arial" panose="020B0604020202020204" pitchFamily="34" charset="0"/>
+              </a:defRPr>
+            </a:lvl9pPr>
+          </a:lstStyle>
+          <a:p>
+            <a:pPr eaLnBrk="1" fontAlgn="base" hangingPunct="1">
+              <a:spcBef>
+                <a:spcPct val="0"/>
+              </a:spcBef>
+              <a:buClrTx/>
+              <a:buSzTx/>
+              <a:buFontTx/>
+              <a:buNone/>
+            </a:pPr>
+            <a:r>
+              <a:rPr lang="en-US" altLang="ko-KR" sz="1200" dirty="0"/>
+              <a:t>Slides from Prof. </a:t>
+            </a:r>
+            <a:r>
+              <a:rPr lang="en-US" altLang="ko-KR" sz="1200" dirty="0" err="1"/>
+              <a:t>Hwu</a:t>
+            </a:r>
+            <a:r>
+              <a:rPr lang="en-US" altLang="ko-KR" sz="1200" dirty="0"/>
+              <a:t> et al, Programming Massively Parallel Processors</a:t>
+            </a:r>
+          </a:p>
+        </p:txBody>
+      </p:sp>
+    </p:spTree>
+    <p:extLst>
+      <p:ext uri="{BB962C8B-B14F-4D97-AF65-F5344CB8AC3E}">
+        <p14:creationId xmlns:p14="http://schemas.microsoft.com/office/powerpoint/2010/main" val="357374224"/>
+      </p:ext>
+    </p:extLst>
+  </p:cSld>
+  <p:clrMapOvr>
+    <a:masterClrMapping/>
+  </p:clrMapOvr>
+  <mc:AlternateContent xmlns:mc="http://schemas.openxmlformats.org/markup-compatibility/2006" xmlns:p14="http://schemas.microsoft.com/office/powerpoint/2010/main">
+    <mc:Choice Requires="p14">
+      <p:transition spd="med" p14:dur="700">
+        <p:fade/>
+      </p:transition>
+    </mc:Choice>
+    <mc:Fallback xmlns="">
+      <p:transition spd="med">
+        <p:fade/>
+      </p:transition>
+    </mc:Fallback>
+  </mc:AlternateContent>
+  <p:timing>
+    <p:tnLst>
+      <p:par>
+        <p:cTn id="1" dur="indefinite" restart="never" nodeType="tmRoot">
+          <p:childTnLst>
+            <p:seq concurrent="1" nextAc="seek">
+              <p:cTn id="2" dur="indefinite" nodeType="mainSeq">
+                <p:childTnLst>
+                  <p:par>
+                    <p:cTn id="3" fill="hold">
+                      <p:stCondLst>
+                        <p:cond delay="indefinite"/>
+                      </p:stCondLst>
+                      <p:childTnLst>
+                        <p:par>
+                          <p:cTn id="4" fill="hold">
+                            <p:stCondLst>
+                              <p:cond delay="0"/>
+                            </p:stCondLst>
+                            <p:childTnLst>
+                              <p:par>
+                                <p:cTn id="5" presetID="10" presetClass="entr" presetSubtype="0" fill="hold" grpId="0" nodeType="clickEffect">
+                                  <p:stCondLst>
+                                    <p:cond delay="0"/>
+                                  </p:stCondLst>
+                                  <p:childTnLst>
+                                    <p:set>
+                                      <p:cBhvr>
+                                        <p:cTn id="6" dur="1" fill="hold">
+                                          <p:stCondLst>
+                                            <p:cond delay="0"/>
+                                          </p:stCondLst>
+                                        </p:cTn>
+                                        <p:tgtEl>
+                                          <p:spTgt spid="3">
+                                            <p:txEl>
+                                              <p:pRg st="0" end="0"/>
+                                            </p:txEl>
+                                          </p:spTgt>
+                                        </p:tgtEl>
+                                        <p:attrNameLst>
+                                          <p:attrName>style.visibility</p:attrName>
+                                        </p:attrNameLst>
+                                      </p:cBhvr>
+                                      <p:to>
+                                        <p:strVal val="visible"/>
+                                      </p:to>
+                                    </p:set>
+                                    <p:animEffect transition="in" filter="fade">
+                                      <p:cBhvr>
+                                        <p:cTn id="7" dur="500"/>
+                                        <p:tgtEl>
+                                          <p:spTgt spid="3">
+                                            <p:txEl>
+                                              <p:pRg st="0" end="0"/>
+                                            </p:txEl>
+                                          </p:spTgt>
+                                        </p:tgtEl>
+                                      </p:cBhvr>
+                                    </p:animEffect>
+                                  </p:childTnLst>
+                                </p:cTn>
+                              </p:par>
+                            </p:childTnLst>
+                          </p:cTn>
+                        </p:par>
+                      </p:childTnLst>
+                    </p:cTn>
+                  </p:par>
+                  <p:par>
+                    <p:cTn id="8" fill="hold">
+                      <p:stCondLst>
+                        <p:cond delay="indefinite"/>
+                      </p:stCondLst>
+                      <p:childTnLst>
+                        <p:par>
+                          <p:cTn id="9" fill="hold">
+                            <p:stCondLst>
+                              <p:cond delay="0"/>
+                            </p:stCondLst>
+                            <p:childTnLst>
+                              <p:par>
+                                <p:cTn id="10" presetID="10" presetClass="entr" presetSubtype="0" fill="hold" grpId="0" nodeType="clickEffect">
+                                  <p:stCondLst>
+                                    <p:cond delay="0"/>
+                                  </p:stCondLst>
+                                  <p:childTnLst>
+                                    <p:set>
+                                      <p:cBhvr>
+                                        <p:cTn id="11" dur="1" fill="hold">
+                                          <p:stCondLst>
+                                            <p:cond delay="0"/>
+                                          </p:stCondLst>
+                                        </p:cTn>
+                                        <p:tgtEl>
+                                          <p:spTgt spid="5">
+                                            <p:txEl>
+                                              <p:pRg st="0" end="0"/>
+                                            </p:txEl>
+                                          </p:spTgt>
+                                        </p:tgtEl>
+                                        <p:attrNameLst>
+                                          <p:attrName>style.visibility</p:attrName>
+                                        </p:attrNameLst>
+                                      </p:cBhvr>
+                                      <p:to>
+                                        <p:strVal val="visible"/>
+                                      </p:to>
+                                    </p:set>
+                                    <p:animEffect transition="in" filter="fade">
+                                      <p:cBhvr>
+                                        <p:cTn id="12" dur="500"/>
+                                        <p:tgtEl>
+                                          <p:spTgt spid="5">
+                                            <p:txEl>
+                                              <p:pRg st="0" end="0"/>
+                                            </p:txEl>
+                                          </p:spTgt>
+                                        </p:tgtEl>
+                                      </p:cBhvr>
+                                    </p:animEffect>
+                                  </p:childTnLst>
+                                </p:cTn>
+                              </p:par>
+                            </p:childTnLst>
+                          </p:cTn>
+                        </p:par>
+                      </p:childTnLst>
+                    </p:cTn>
+                  </p:par>
+                  <p:par>
+                    <p:cTn id="13" fill="hold">
+                      <p:stCondLst>
+                        <p:cond delay="indefinite"/>
+                      </p:stCondLst>
+                      <p:childTnLst>
+                        <p:par>
+                          <p:cTn id="14" fill="hold">
+                            <p:stCondLst>
+                              <p:cond delay="0"/>
+                            </p:stCondLst>
+                            <p:childTnLst>
+                              <p:par>
+                                <p:cTn id="15" presetID="10" presetClass="entr" presetSubtype="0" fill="hold" grpId="0" nodeType="clickEffect">
+                                  <p:stCondLst>
+                                    <p:cond delay="0"/>
+                                  </p:stCondLst>
+                                  <p:childTnLst>
+                                    <p:set>
+                                      <p:cBhvr>
+                                        <p:cTn id="16" dur="1" fill="hold">
+                                          <p:stCondLst>
+                                            <p:cond delay="0"/>
+                                          </p:stCondLst>
+                                        </p:cTn>
+                                        <p:tgtEl>
+                                          <p:spTgt spid="4">
+                                            <p:txEl>
+                                              <p:pRg st="0" end="0"/>
+                                            </p:txEl>
+                                          </p:spTgt>
+                                        </p:tgtEl>
+                                        <p:attrNameLst>
+                                          <p:attrName>style.visibility</p:attrName>
+                                        </p:attrNameLst>
+                                      </p:cBhvr>
+                                      <p:to>
+                                        <p:strVal val="visible"/>
+                                      </p:to>
+                                    </p:set>
+                                    <p:animEffect transition="in" filter="fade">
+                                      <p:cBhvr>
+                                        <p:cTn id="17" dur="500"/>
+                                        <p:tgtEl>
+                                          <p:spTgt spid="4">
+                                            <p:txEl>
+                                              <p:pRg st="0" end="0"/>
+                                            </p:txEl>
+                                          </p:spTgt>
+                                        </p:tgtEl>
+                                      </p:cBhvr>
+                                    </p:animEffect>
+                                  </p:childTnLst>
+                                </p:cTn>
+                              </p:par>
+                              <p:par>
+                                <p:cTn id="18" presetID="10" presetClass="entr" presetSubtype="0" fill="hold" nodeType="withEffect">
+                                  <p:stCondLst>
+                                    <p:cond delay="0"/>
+                                  </p:stCondLst>
+                                  <p:childTnLst>
+                                    <p:set>
+                                      <p:cBhvr>
+                                        <p:cTn id="19" dur="1" fill="hold">
+                                          <p:stCondLst>
+                                            <p:cond delay="0"/>
+                                          </p:stCondLst>
+                                        </p:cTn>
+                                        <p:tgtEl>
+                                          <p:spTgt spid="73"/>
+                                        </p:tgtEl>
+                                        <p:attrNameLst>
+                                          <p:attrName>style.visibility</p:attrName>
+                                        </p:attrNameLst>
+                                      </p:cBhvr>
+                                      <p:to>
+                                        <p:strVal val="visible"/>
+                                      </p:to>
+                                    </p:set>
+                                    <p:animEffect transition="in" filter="fade">
+                                      <p:cBhvr>
+                                        <p:cTn id="20" dur="500"/>
+                                        <p:tgtEl>
+                                          <p:spTgt spid="73"/>
+                                        </p:tgtEl>
+                                      </p:cBhvr>
+                                    </p:animEffect>
+                                  </p:childTnLst>
+                                </p:cTn>
+                              </p:par>
+                            </p:childTnLst>
+                          </p:cTn>
+                        </p:par>
+                      </p:childTnLst>
+                    </p:cTn>
+                  </p:par>
+                  <p:par>
+                    <p:cTn id="21" fill="hold">
+                      <p:stCondLst>
+                        <p:cond delay="indefinite"/>
+                      </p:stCondLst>
+                      <p:childTnLst>
+                        <p:par>
+                          <p:cTn id="22" fill="hold">
+                            <p:stCondLst>
+                              <p:cond delay="0"/>
+                            </p:stCondLst>
+                            <p:childTnLst>
+                              <p:par>
+                                <p:cTn id="23" presetID="10" presetClass="entr" presetSubtype="0" fill="hold" grpId="0" nodeType="clickEffect">
+                                  <p:stCondLst>
+                                    <p:cond delay="0"/>
+                                  </p:stCondLst>
+                                  <p:childTnLst>
+                                    <p:set>
+                                      <p:cBhvr>
+                                        <p:cTn id="24" dur="1" fill="hold">
+                                          <p:stCondLst>
+                                            <p:cond delay="0"/>
+                                          </p:stCondLst>
+                                        </p:cTn>
+                                        <p:tgtEl>
+                                          <p:spTgt spid="6">
+                                            <p:txEl>
+                                              <p:pRg st="0" end="0"/>
+                                            </p:txEl>
+                                          </p:spTgt>
+                                        </p:tgtEl>
+                                        <p:attrNameLst>
+                                          <p:attrName>style.visibility</p:attrName>
+                                        </p:attrNameLst>
+                                      </p:cBhvr>
+                                      <p:to>
+                                        <p:strVal val="visible"/>
+                                      </p:to>
+                                    </p:set>
+                                    <p:animEffect transition="in" filter="fade">
+                                      <p:cBhvr>
+                                        <p:cTn id="25" dur="500"/>
+                                        <p:tgtEl>
+                                          <p:spTgt spid="6">
+                                            <p:txEl>
+                                              <p:pRg st="0" end="0"/>
+                                            </p:txEl>
+                                          </p:spTgt>
+                                        </p:tgtEl>
+                                      </p:cBhvr>
+                                    </p:animEffect>
+                                  </p:childTnLst>
+                                </p:cTn>
+                              </p:par>
+                              <p:par>
+                                <p:cTn id="26" presetID="10" presetClass="entr" presetSubtype="0" fill="hold" nodeType="withEffect">
+                                  <p:stCondLst>
+                                    <p:cond delay="0"/>
+                                  </p:stCondLst>
+                                  <p:childTnLst>
+                                    <p:set>
+                                      <p:cBhvr>
+                                        <p:cTn id="27" dur="1" fill="hold">
+                                          <p:stCondLst>
+                                            <p:cond delay="0"/>
+                                          </p:stCondLst>
+                                        </p:cTn>
+                                        <p:tgtEl>
+                                          <p:spTgt spid="74"/>
+                                        </p:tgtEl>
+                                        <p:attrNameLst>
+                                          <p:attrName>style.visibility</p:attrName>
+                                        </p:attrNameLst>
+                                      </p:cBhvr>
+                                      <p:to>
+                                        <p:strVal val="visible"/>
+                                      </p:to>
+                                    </p:set>
+                                    <p:animEffect transition="in" filter="fade">
+                                      <p:cBhvr>
+                                        <p:cTn id="28" dur="500"/>
+                                        <p:tgtEl>
+                                          <p:spTgt spid="74"/>
+                                        </p:tgtEl>
+                                      </p:cBhvr>
+                                    </p:animEffect>
+                                  </p:childTnLst>
+                                </p:cTn>
+                              </p:par>
+                            </p:childTnLst>
+                          </p:cTn>
+                        </p:par>
+                      </p:childTnLst>
+                    </p:cTn>
+                  </p:par>
+                  <p:par>
+                    <p:cTn id="29" fill="hold">
+                      <p:stCondLst>
+                        <p:cond delay="indefinite"/>
+                      </p:stCondLst>
+                      <p:childTnLst>
+                        <p:par>
+                          <p:cTn id="30" fill="hold">
+                            <p:stCondLst>
+                              <p:cond delay="0"/>
+                            </p:stCondLst>
+                            <p:childTnLst>
+                              <p:par>
+                                <p:cTn id="31" presetID="10" presetClass="entr" presetSubtype="0" fill="hold" grpId="0" nodeType="clickEffect">
+                                  <p:stCondLst>
+                                    <p:cond delay="0"/>
+                                  </p:stCondLst>
+                                  <p:childTnLst>
+                                    <p:set>
+                                      <p:cBhvr>
+                                        <p:cTn id="32" dur="1" fill="hold">
+                                          <p:stCondLst>
+                                            <p:cond delay="0"/>
+                                          </p:stCondLst>
+                                        </p:cTn>
+                                        <p:tgtEl>
+                                          <p:spTgt spid="4">
+                                            <p:txEl>
+                                              <p:pRg st="1" end="1"/>
+                                            </p:txEl>
+                                          </p:spTgt>
+                                        </p:tgtEl>
+                                        <p:attrNameLst>
+                                          <p:attrName>style.visibility</p:attrName>
+                                        </p:attrNameLst>
+                                      </p:cBhvr>
+                                      <p:to>
+                                        <p:strVal val="visible"/>
+                                      </p:to>
+                                    </p:set>
+                                    <p:animEffect transition="in" filter="fade">
+                                      <p:cBhvr>
+                                        <p:cTn id="33" dur="500"/>
+                                        <p:tgtEl>
+                                          <p:spTgt spid="4">
+                                            <p:txEl>
+                                              <p:pRg st="1" end="1"/>
+                                            </p:txEl>
+                                          </p:spTgt>
+                                        </p:tgtEl>
+                                      </p:cBhvr>
+                                    </p:animEffect>
+                                  </p:childTnLst>
+                                </p:cTn>
+                              </p:par>
+                              <p:par>
+                                <p:cTn id="34" presetID="10" presetClass="entr" presetSubtype="0" fill="hold" nodeType="withEffect">
+                                  <p:stCondLst>
+                                    <p:cond delay="0"/>
+                                  </p:stCondLst>
+                                  <p:childTnLst>
+                                    <p:set>
+                                      <p:cBhvr>
+                                        <p:cTn id="35" dur="1" fill="hold">
+                                          <p:stCondLst>
+                                            <p:cond delay="0"/>
+                                          </p:stCondLst>
+                                        </p:cTn>
+                                        <p:tgtEl>
+                                          <p:spTgt spid="75"/>
+                                        </p:tgtEl>
+                                        <p:attrNameLst>
+                                          <p:attrName>style.visibility</p:attrName>
+                                        </p:attrNameLst>
+                                      </p:cBhvr>
+                                      <p:to>
+                                        <p:strVal val="visible"/>
+                                      </p:to>
+                                    </p:set>
+                                    <p:animEffect transition="in" filter="fade">
+                                      <p:cBhvr>
+                                        <p:cTn id="36" dur="500"/>
+                                        <p:tgtEl>
+                                          <p:spTgt spid="75"/>
+                                        </p:tgtEl>
+                                      </p:cBhvr>
+                                    </p:animEffect>
+                                  </p:childTnLst>
+                                </p:cTn>
+                              </p:par>
+                            </p:childTnLst>
+                          </p:cTn>
+                        </p:par>
+                      </p:childTnLst>
+                    </p:cTn>
+                  </p:par>
+                  <p:par>
+                    <p:cTn id="37" fill="hold">
+                      <p:stCondLst>
+                        <p:cond delay="indefinite"/>
+                      </p:stCondLst>
+                      <p:childTnLst>
+                        <p:par>
+                          <p:cTn id="38" fill="hold">
+                            <p:stCondLst>
+                              <p:cond delay="0"/>
+                            </p:stCondLst>
+                            <p:childTnLst>
+                              <p:par>
+                                <p:cTn id="39" presetID="10" presetClass="entr" presetSubtype="0" fill="hold" grpId="0" nodeType="clickEffect">
+                                  <p:stCondLst>
+                                    <p:cond delay="0"/>
+                                  </p:stCondLst>
+                                  <p:childTnLst>
+                                    <p:set>
+                                      <p:cBhvr>
+                                        <p:cTn id="40" dur="1" fill="hold">
+                                          <p:stCondLst>
+                                            <p:cond delay="0"/>
+                                          </p:stCondLst>
+                                        </p:cTn>
+                                        <p:tgtEl>
+                                          <p:spTgt spid="6">
+                                            <p:txEl>
+                                              <p:pRg st="1" end="1"/>
+                                            </p:txEl>
+                                          </p:spTgt>
+                                        </p:tgtEl>
+                                        <p:attrNameLst>
+                                          <p:attrName>style.visibility</p:attrName>
+                                        </p:attrNameLst>
+                                      </p:cBhvr>
+                                      <p:to>
+                                        <p:strVal val="visible"/>
+                                      </p:to>
+                                    </p:set>
+                                    <p:animEffect transition="in" filter="fade">
+                                      <p:cBhvr>
+                                        <p:cTn id="41" dur="500"/>
+                                        <p:tgtEl>
+                                          <p:spTgt spid="6">
+                                            <p:txEl>
+                                              <p:pRg st="1" end="1"/>
+                                            </p:txEl>
+                                          </p:spTgt>
+                                        </p:tgtEl>
+                                      </p:cBhvr>
+                                    </p:animEffect>
+                                  </p:childTnLst>
+                                </p:cTn>
+                              </p:par>
+                              <p:par>
+                                <p:cTn id="42" presetID="10" presetClass="entr" presetSubtype="0" fill="hold" nodeType="withEffect">
+                                  <p:stCondLst>
+                                    <p:cond delay="0"/>
+                                  </p:stCondLst>
+                                  <p:childTnLst>
+                                    <p:set>
+                                      <p:cBhvr>
+                                        <p:cTn id="43" dur="1" fill="hold">
+                                          <p:stCondLst>
+                                            <p:cond delay="0"/>
+                                          </p:stCondLst>
+                                        </p:cTn>
+                                        <p:tgtEl>
+                                          <p:spTgt spid="76"/>
+                                        </p:tgtEl>
+                                        <p:attrNameLst>
+                                          <p:attrName>style.visibility</p:attrName>
+                                        </p:attrNameLst>
+                                      </p:cBhvr>
+                                      <p:to>
+                                        <p:strVal val="visible"/>
+                                      </p:to>
+                                    </p:set>
+                                    <p:animEffect transition="in" filter="fade">
+                                      <p:cBhvr>
+                                        <p:cTn id="44" dur="500"/>
+                                        <p:tgtEl>
+                                          <p:spTgt spid="76"/>
+                                        </p:tgtEl>
+                                      </p:cBhvr>
+                                    </p:animEffect>
+                                  </p:childTnLst>
+                                </p:cTn>
+                              </p:par>
+                            </p:childTnLst>
+                          </p:cTn>
+                        </p:par>
+                      </p:childTnLst>
+                    </p:cTn>
+                  </p:par>
+                  <p:par>
+                    <p:cTn id="45" fill="hold">
+                      <p:stCondLst>
+                        <p:cond delay="indefinite"/>
+                      </p:stCondLst>
+                      <p:childTnLst>
+                        <p:par>
+                          <p:cTn id="46" fill="hold">
+                            <p:stCondLst>
+                              <p:cond delay="0"/>
+                            </p:stCondLst>
+                            <p:childTnLst>
+                              <p:par>
+                                <p:cTn id="47" presetID="10" presetClass="entr" presetSubtype="0" fill="hold" grpId="0" nodeType="clickEffect">
+                                  <p:stCondLst>
+                                    <p:cond delay="0"/>
+                                  </p:stCondLst>
+                                  <p:childTnLst>
+                                    <p:set>
+                                      <p:cBhvr>
+                                        <p:cTn id="48" dur="1" fill="hold">
+                                          <p:stCondLst>
+                                            <p:cond delay="0"/>
+                                          </p:stCondLst>
+                                        </p:cTn>
+                                        <p:tgtEl>
+                                          <p:spTgt spid="6">
+                                            <p:txEl>
+                                              <p:pRg st="2" end="2"/>
+                                            </p:txEl>
+                                          </p:spTgt>
+                                        </p:tgtEl>
+                                        <p:attrNameLst>
+                                          <p:attrName>style.visibility</p:attrName>
+                                        </p:attrNameLst>
+                                      </p:cBhvr>
+                                      <p:to>
+                                        <p:strVal val="visible"/>
+                                      </p:to>
+                                    </p:set>
+                                    <p:animEffect transition="in" filter="fade">
+                                      <p:cBhvr>
+                                        <p:cTn id="49" dur="500"/>
+                                        <p:tgtEl>
+                                          <p:spTgt spid="6">
+                                            <p:txEl>
+                                              <p:pRg st="2" end="2"/>
+                                            </p:txEl>
+                                          </p:spTgt>
+                                        </p:tgtEl>
+                                      </p:cBhvr>
+                                    </p:animEffect>
+                                  </p:childTnLst>
+                                </p:cTn>
+                              </p:par>
+                            </p:childTnLst>
+                          </p:cTn>
+                        </p:par>
+                      </p:childTnLst>
+                    </p:cTn>
+                  </p:par>
+                </p:childTnLst>
+              </p:cTn>
+              <p:prevCondLst>
+                <p:cond evt="onPrev" delay="0">
+                  <p:tgtEl>
+                    <p:sldTgt/>
+                  </p:tgtEl>
+                </p:cond>
+              </p:prevCondLst>
+              <p:nextCondLst>
+                <p:cond evt="onNext" delay="0">
+                  <p:tgtEl>
+                    <p:sldTgt/>
+                  </p:tgtEl>
+                </p:cond>
+              </p:nextCondLst>
+            </p:seq>
+          </p:childTnLst>
+        </p:cTn>
+      </p:par>
+    </p:tnLst>
+    <p:bldLst>
+      <p:bldP spid="3" grpId="0" build="p"/>
+      <p:bldP spid="4" grpId="0" uiExpand="1" build="p"/>
+      <p:bldP spid="5" grpId="0" build="p"/>
+      <p:bldP spid="6" grpId="0" uiExpand="1" build="p"/>
+    </p:bldLst>
+  </p:timing>
+</p:sld>
+</file>
+
+<file path=ppt/slides/slide9.xml><?xml version="1.0" encoding="utf-8"?>
+<p:sld xmlns:a="http://schemas.openxmlformats.org/drawingml/2006/main" xmlns:r="http://schemas.openxmlformats.org/officeDocument/2006/relationships" xmlns:p="http://schemas.openxmlformats.org/presentationml/2006/main">
+  <p:cSld>
+    <p:spTree>
+      <p:nvGrpSpPr>
+        <p:cNvPr id="1" name=""/>
+        <p:cNvGrpSpPr/>
+        <p:nvPr/>
+      </p:nvGrpSpPr>
+      <p:grpSpPr>
+        <a:xfrm>
+          <a:off x="0" y="0"/>
+          <a:ext cx="0" cy="0"/>
+          <a:chOff x="0" y="0"/>
+          <a:chExt cx="0" cy="0"/>
+        </a:xfrm>
+      </p:grpSpPr>
+      <p:sp>
+        <p:nvSpPr>
           <p:cNvPr id="21505" name="제목 1">
             <a:extLst>
               <a:ext uri="{FF2B5EF4-FFF2-40B4-BE49-F238E27FC236}">
@@ -28300,215 +34722,6 @@
           <a:xfrm>
             <a:off x="971550" y="1341438"/>
             <a:ext cx="7221538" cy="3516312"/>
-          </a:xfrm>
-          <a:prstGeom prst="rect">
-            <a:avLst/>
-          </a:prstGeom>
-          <a:noFill/>
-          <a:ln>
-            <a:noFill/>
-          </a:ln>
-          <a:extLst>
-            <a:ext uri="{909E8E84-426E-40DD-AFC4-6F175D3DCCD1}">
-              <a14:hiddenFill xmlns:a14="http://schemas.microsoft.com/office/drawing/2010/main">
-                <a:solidFill>
-                  <a:srgbClr val="FFFFFF"/>
-                </a:solidFill>
-              </a14:hiddenFill>
-            </a:ext>
-            <a:ext uri="{91240B29-F687-4F45-9708-019B960494DF}">
-              <a14:hiddenLine xmlns:a14="http://schemas.microsoft.com/office/drawing/2010/main" w="9525">
-                <a:solidFill>
-                  <a:srgbClr val="000000"/>
-                </a:solidFill>
-                <a:miter lim="800000"/>
-                <a:headEnd/>
-                <a:tailEnd/>
-              </a14:hiddenLine>
-            </a:ext>
-          </a:extLst>
-        </p:spPr>
-      </p:pic>
-    </p:spTree>
-  </p:cSld>
-  <p:clrMapOvr>
-    <a:masterClrMapping/>
-  </p:clrMapOvr>
-</p:sld>
-</file>
-
-<file path=ppt/slides/slide9.xml><?xml version="1.0" encoding="utf-8"?>
-<p:sld xmlns:a="http://schemas.openxmlformats.org/drawingml/2006/main" xmlns:r="http://schemas.openxmlformats.org/officeDocument/2006/relationships" xmlns:p="http://schemas.openxmlformats.org/presentationml/2006/main">
-  <p:cSld>
-    <p:spTree>
-      <p:nvGrpSpPr>
-        <p:cNvPr id="1" name=""/>
-        <p:cNvGrpSpPr/>
-        <p:nvPr/>
-      </p:nvGrpSpPr>
-      <p:grpSpPr>
-        <a:xfrm>
-          <a:off x="0" y="0"/>
-          <a:ext cx="0" cy="0"/>
-          <a:chOff x="0" y="0"/>
-          <a:chExt cx="0" cy="0"/>
-        </a:xfrm>
-      </p:grpSpPr>
-      <p:sp>
-        <p:nvSpPr>
-          <p:cNvPr id="22529" name="제목 1">
-            <a:extLst>
-              <a:ext uri="{FF2B5EF4-FFF2-40B4-BE49-F238E27FC236}">
-                <a16:creationId xmlns:a16="http://schemas.microsoft.com/office/drawing/2014/main" id="{F43A70CC-6E7B-12BC-D14F-4D568C2E4A4F}"/>
-              </a:ext>
-            </a:extLst>
-          </p:cNvPr>
-          <p:cNvSpPr>
-            <a:spLocks noGrp="1" noChangeArrowheads="1"/>
-          </p:cNvSpPr>
-          <p:nvPr>
-            <p:ph type="title"/>
-          </p:nvPr>
-        </p:nvSpPr>
-        <p:spPr/>
-        <p:txBody>
-          <a:bodyPr/>
-          <a:lstStyle/>
-          <a:p>
-            <a:r>
-              <a:rPr lang="en-US" altLang="ko-KR" b="1" u="sng"/>
-              <a:t>Decomposition</a:t>
-            </a:r>
-            <a:endParaRPr lang="ko-KR" altLang="en-US" b="1" u="sng"/>
-          </a:p>
-        </p:txBody>
-      </p:sp>
-      <p:sp>
-        <p:nvSpPr>
-          <p:cNvPr id="22530" name="내용 개체 틀 2">
-            <a:extLst>
-              <a:ext uri="{FF2B5EF4-FFF2-40B4-BE49-F238E27FC236}">
-                <a16:creationId xmlns:a16="http://schemas.microsoft.com/office/drawing/2014/main" id="{7973E5FC-9CA8-D29C-ADB0-0BCCF19E830A}"/>
-              </a:ext>
-            </a:extLst>
-          </p:cNvPr>
-          <p:cNvSpPr>
-            <a:spLocks noGrp="1" noChangeArrowheads="1"/>
-          </p:cNvSpPr>
-          <p:nvPr>
-            <p:ph idx="1"/>
-          </p:nvPr>
-        </p:nvSpPr>
-        <p:spPr/>
-        <p:txBody>
-          <a:bodyPr/>
-          <a:lstStyle/>
-          <a:p>
-            <a:r>
-              <a:rPr lang="en-US" altLang="ko-KR"/>
-              <a:t>Break up computation into tasks to be divided among processes</a:t>
-            </a:r>
-          </a:p>
-          <a:p>
-            <a:r>
-              <a:rPr lang="en-US" altLang="ko-KR"/>
-              <a:t>identify concurrency and decide level at which to exploit it</a:t>
-            </a:r>
-            <a:endParaRPr lang="ko-KR" altLang="en-US"/>
-          </a:p>
-        </p:txBody>
-      </p:sp>
-      <p:pic>
-        <p:nvPicPr>
-          <p:cNvPr id="22531" name="Picture 4">
-            <a:extLst>
-              <a:ext uri="{FF2B5EF4-FFF2-40B4-BE49-F238E27FC236}">
-                <a16:creationId xmlns:a16="http://schemas.microsoft.com/office/drawing/2014/main" id="{DF9F1759-5D28-C6D9-071D-8F6090B35331}"/>
-              </a:ext>
-            </a:extLst>
-          </p:cNvPr>
-          <p:cNvPicPr>
-            <a:picLocks noChangeAspect="1" noChangeArrowheads="1"/>
-          </p:cNvPicPr>
-          <p:nvPr/>
-        </p:nvPicPr>
-        <p:blipFill>
-          <a:blip r:embed="rId2">
-            <a:extLst>
-              <a:ext uri="{28A0092B-C50C-407E-A947-70E740481C1C}">
-                <a14:useLocalDpi xmlns:a14="http://schemas.microsoft.com/office/drawing/2010/main" val="0"/>
-              </a:ext>
-            </a:extLst>
-          </a:blip>
-          <a:srcRect t="48595"/>
-          <a:stretch>
-            <a:fillRect/>
-          </a:stretch>
-        </p:blipFill>
-        <p:spPr bwMode="auto">
-          <a:xfrm>
-            <a:off x="250825" y="4221163"/>
-            <a:ext cx="4233863" cy="1944687"/>
-          </a:xfrm>
-          <a:prstGeom prst="rect">
-            <a:avLst/>
-          </a:prstGeom>
-          <a:noFill/>
-          <a:ln>
-            <a:noFill/>
-          </a:ln>
-          <a:extLst>
-            <a:ext uri="{909E8E84-426E-40DD-AFC4-6F175D3DCCD1}">
-              <a14:hiddenFill xmlns:a14="http://schemas.microsoft.com/office/drawing/2010/main">
-                <a:solidFill>
-                  <a:srgbClr val="FFFFFF"/>
-                </a:solidFill>
-              </a14:hiddenFill>
-            </a:ext>
-            <a:ext uri="{91240B29-F687-4F45-9708-019B960494DF}">
-              <a14:hiddenLine xmlns:a14="http://schemas.microsoft.com/office/drawing/2010/main" w="9525">
-                <a:solidFill>
-                  <a:srgbClr val="000000"/>
-                </a:solidFill>
-                <a:miter lim="800000"/>
-                <a:headEnd/>
-                <a:tailEnd/>
-              </a14:hiddenLine>
-            </a:ext>
-          </a:extLst>
-        </p:spPr>
-      </p:pic>
-      <p:pic>
-        <p:nvPicPr>
-          <p:cNvPr id="22532" name="Picture 5">
-            <a:extLst>
-              <a:ext uri="{FF2B5EF4-FFF2-40B4-BE49-F238E27FC236}">
-                <a16:creationId xmlns:a16="http://schemas.microsoft.com/office/drawing/2014/main" id="{A93BCB6F-A310-5C8E-7CDA-5DE62459BFE4}"/>
-              </a:ext>
-            </a:extLst>
-          </p:cNvPr>
-          <p:cNvPicPr>
-            <a:picLocks noChangeAspect="1" noChangeArrowheads="1"/>
-          </p:cNvPicPr>
-          <p:nvPr/>
-        </p:nvPicPr>
-        <p:blipFill>
-          <a:blip r:embed="rId3">
-            <a:extLst>
-              <a:ext uri="{28A0092B-C50C-407E-A947-70E740481C1C}">
-                <a14:useLocalDpi xmlns:a14="http://schemas.microsoft.com/office/drawing/2010/main" val="0"/>
-              </a:ext>
-            </a:extLst>
-          </a:blip>
-          <a:srcRect t="47406"/>
-          <a:stretch>
-            <a:fillRect/>
-          </a:stretch>
-        </p:blipFill>
-        <p:spPr bwMode="auto">
-          <a:xfrm>
-            <a:off x="4965700" y="4076700"/>
-            <a:ext cx="3854450" cy="2376488"/>
           </a:xfrm>
           <a:prstGeom prst="rect">
             <a:avLst/>

--- a/multicore03-updated.pptx
+++ b/multicore03-updated.pptx
@@ -5,7 +5,7 @@
     <p:sldMasterId id="2147483655" r:id="rId1"/>
   </p:sldMasterIdLst>
   <p:notesMasterIdLst>
-    <p:notesMasterId r:id="rId59"/>
+    <p:notesMasterId r:id="rId61"/>
   </p:notesMasterIdLst>
   <p:sldIdLst>
     <p:sldId id="346" r:id="rId2"/>
@@ -65,6 +65,8 @@
     <p:sldId id="348" r:id="rId56"/>
     <p:sldId id="341" r:id="rId57"/>
     <p:sldId id="342" r:id="rId58"/>
+    <p:sldId id="367" r:id="rId59"/>
+    <p:sldId id="368" r:id="rId60"/>
   </p:sldIdLst>
   <p:sldSz cx="9144000" cy="6858000" type="screen4x3"/>
   <p:notesSz cx="7099300" cy="10234613"/>
@@ -324,7 +326,7 @@
               <a:pPr>
                 <a:defRPr/>
               </a:pPr>
-              <a:t>2026. 3. 15.</a:t>
+              <a:t>2026. 3. 21.</a:t>
             </a:fld>
             <a:endParaRPr lang="ko-KR" altLang="en-US"/>
           </a:p>
@@ -28137,6 +28139,304 @@
         </p:txBody>
       </p:sp>
     </p:spTree>
+  </p:cSld>
+  <p:clrMapOvr>
+    <a:masterClrMapping/>
+  </p:clrMapOvr>
+</p:sld>
+</file>
+
+<file path=ppt/slides/slide58.xml><?xml version="1.0" encoding="utf-8"?>
+<p:sld xmlns:a="http://schemas.openxmlformats.org/drawingml/2006/main" xmlns:r="http://schemas.openxmlformats.org/officeDocument/2006/relationships" xmlns:p="http://schemas.openxmlformats.org/presentationml/2006/main">
+  <p:cSld>
+    <p:spTree>
+      <p:nvGrpSpPr>
+        <p:cNvPr id="1" name=""/>
+        <p:cNvGrpSpPr/>
+        <p:nvPr/>
+      </p:nvGrpSpPr>
+      <p:grpSpPr>
+        <a:xfrm>
+          <a:off x="0" y="0"/>
+          <a:ext cx="0" cy="0"/>
+          <a:chOff x="0" y="0"/>
+          <a:chExt cx="0" cy="0"/>
+        </a:xfrm>
+      </p:grpSpPr>
+      <p:sp>
+        <p:nvSpPr>
+          <p:cNvPr id="2" name="제목 1">
+            <a:extLst>
+              <a:ext uri="{FF2B5EF4-FFF2-40B4-BE49-F238E27FC236}">
+                <a16:creationId xmlns:a16="http://schemas.microsoft.com/office/drawing/2014/main" id="{6CBC3CF5-25D1-0150-FD1F-7BC180C450CF}"/>
+              </a:ext>
+            </a:extLst>
+          </p:cNvPr>
+          <p:cNvSpPr>
+            <a:spLocks noGrp="1"/>
+          </p:cNvSpPr>
+          <p:nvPr>
+            <p:ph type="title"/>
+          </p:nvPr>
+        </p:nvSpPr>
+        <p:spPr/>
+        <p:txBody>
+          <a:bodyPr/>
+          <a:lstStyle/>
+          <a:p>
+            <a:r>
+              <a:rPr kumimoji="1" lang="en-US" altLang="ko-Kore-KR" b="1" u="sng" dirty="0"/>
+              <a:t>Multithreading Benefits</a:t>
+            </a:r>
+            <a:endParaRPr kumimoji="1" lang="ko-Kore-KR" altLang="en-US" b="1" u="sng" dirty="0"/>
+          </a:p>
+        </p:txBody>
+      </p:sp>
+      <p:sp>
+        <p:nvSpPr>
+          <p:cNvPr id="3" name="내용 개체 틀 2">
+            <a:extLst>
+              <a:ext uri="{FF2B5EF4-FFF2-40B4-BE49-F238E27FC236}">
+                <a16:creationId xmlns:a16="http://schemas.microsoft.com/office/drawing/2014/main" id="{A8F382E3-9DB2-287B-7855-3D57927C25F6}"/>
+              </a:ext>
+            </a:extLst>
+          </p:cNvPr>
+          <p:cNvSpPr>
+            <a:spLocks noGrp="1"/>
+          </p:cNvSpPr>
+          <p:nvPr>
+            <p:ph idx="1"/>
+          </p:nvPr>
+        </p:nvSpPr>
+        <p:spPr/>
+        <p:txBody>
+          <a:bodyPr/>
+          <a:lstStyle/>
+          <a:p>
+            <a:r>
+              <a:rPr kumimoji="1" lang="en-US" altLang="ko-Kore-KR" dirty="0"/>
+              <a:t>Better CPU utilization (better throughput)</a:t>
+            </a:r>
+          </a:p>
+          <a:p>
+            <a:pPr lvl="1"/>
+            <a:r>
+              <a:rPr lang="en-US" altLang="ko-Kore-KR" dirty="0"/>
+              <a:t>Blocking I/O + processing</a:t>
+            </a:r>
+          </a:p>
+          <a:p>
+            <a:r>
+              <a:rPr kumimoji="1" lang="en-US" altLang="ko-Kore-KR" dirty="0"/>
+              <a:t>More responsive programs</a:t>
+            </a:r>
+          </a:p>
+          <a:p>
+            <a:pPr lvl="1"/>
+            <a:r>
+              <a:rPr lang="en-US" altLang="ko-Kore-KR" dirty="0"/>
+              <a:t>ex) server loop with listen-for/process request</a:t>
+            </a:r>
+          </a:p>
+          <a:p>
+            <a:pPr lvl="1"/>
+            <a:r>
+              <a:rPr lang="en-US" altLang="ko-Kore-KR" dirty="0"/>
+              <a:t>ex) GUI</a:t>
+            </a:r>
+          </a:p>
+          <a:p>
+            <a:r>
+              <a:rPr kumimoji="1" lang="en-US" altLang="ko-Kore-KR" dirty="0"/>
+              <a:t>More fair distribution of CPU resources</a:t>
+            </a:r>
+          </a:p>
+          <a:p>
+            <a:endParaRPr lang="en-US" altLang="ko-Kore-KR" dirty="0"/>
+          </a:p>
+          <a:p>
+            <a:r>
+              <a:rPr kumimoji="1" lang="en-US" altLang="ko-Kore-KR" dirty="0"/>
+              <a:t>High performance (parallel execution)</a:t>
+            </a:r>
+            <a:endParaRPr kumimoji="1" lang="ko-Kore-KR" altLang="en-US" dirty="0"/>
+          </a:p>
+        </p:txBody>
+      </p:sp>
+    </p:spTree>
+    <p:extLst>
+      <p:ext uri="{BB962C8B-B14F-4D97-AF65-F5344CB8AC3E}">
+        <p14:creationId xmlns:p14="http://schemas.microsoft.com/office/powerpoint/2010/main" val="2278965768"/>
+      </p:ext>
+    </p:extLst>
+  </p:cSld>
+  <p:clrMapOvr>
+    <a:masterClrMapping/>
+  </p:clrMapOvr>
+</p:sld>
+</file>
+
+<file path=ppt/slides/slide59.xml><?xml version="1.0" encoding="utf-8"?>
+<p:sld xmlns:a="http://schemas.openxmlformats.org/drawingml/2006/main" xmlns:r="http://schemas.openxmlformats.org/officeDocument/2006/relationships" xmlns:p="http://schemas.openxmlformats.org/presentationml/2006/main">
+  <p:cSld>
+    <p:spTree>
+      <p:nvGrpSpPr>
+        <p:cNvPr id="1" name=""/>
+        <p:cNvGrpSpPr/>
+        <p:nvPr/>
+      </p:nvGrpSpPr>
+      <p:grpSpPr>
+        <a:xfrm>
+          <a:off x="0" y="0"/>
+          <a:ext cx="0" cy="0"/>
+          <a:chOff x="0" y="0"/>
+          <a:chExt cx="0" cy="0"/>
+        </a:xfrm>
+      </p:grpSpPr>
+      <p:sp>
+        <p:nvSpPr>
+          <p:cNvPr id="2" name="제목 1">
+            <a:extLst>
+              <a:ext uri="{FF2B5EF4-FFF2-40B4-BE49-F238E27FC236}">
+                <a16:creationId xmlns:a16="http://schemas.microsoft.com/office/drawing/2014/main" id="{D70B9B26-5CA2-B664-BF87-7E5344C0BFC0}"/>
+              </a:ext>
+            </a:extLst>
+          </p:cNvPr>
+          <p:cNvSpPr>
+            <a:spLocks noGrp="1"/>
+          </p:cNvSpPr>
+          <p:nvPr>
+            <p:ph type="title"/>
+          </p:nvPr>
+        </p:nvSpPr>
+        <p:spPr/>
+        <p:txBody>
+          <a:bodyPr/>
+          <a:lstStyle/>
+          <a:p>
+            <a:r>
+              <a:rPr kumimoji="1" lang="en-US" altLang="ko-Kore-KR" b="1" u="sng" dirty="0"/>
+              <a:t>Multithreading costs</a:t>
+            </a:r>
+            <a:endParaRPr kumimoji="1" lang="ko-Kore-KR" altLang="en-US" dirty="0"/>
+          </a:p>
+        </p:txBody>
+      </p:sp>
+      <p:sp>
+        <p:nvSpPr>
+          <p:cNvPr id="3" name="내용 개체 틀 2">
+            <a:extLst>
+              <a:ext uri="{FF2B5EF4-FFF2-40B4-BE49-F238E27FC236}">
+                <a16:creationId xmlns:a16="http://schemas.microsoft.com/office/drawing/2014/main" id="{DE10C6FF-5889-8E86-1F46-08DD1A9ED512}"/>
+              </a:ext>
+            </a:extLst>
+          </p:cNvPr>
+          <p:cNvSpPr>
+            <a:spLocks noGrp="1"/>
+          </p:cNvSpPr>
+          <p:nvPr>
+            <p:ph idx="1"/>
+          </p:nvPr>
+        </p:nvSpPr>
+        <p:spPr>
+          <a:xfrm>
+            <a:off x="457200" y="1412776"/>
+            <a:ext cx="8229600" cy="4525963"/>
+          </a:xfrm>
+        </p:spPr>
+        <p:txBody>
+          <a:bodyPr/>
+          <a:lstStyle/>
+          <a:p>
+            <a:r>
+              <a:rPr kumimoji="1" lang="en-US" altLang="ko-Kore-KR" dirty="0"/>
+              <a:t>More complex design</a:t>
+            </a:r>
+          </a:p>
+          <a:p>
+            <a:pPr lvl="1"/>
+            <a:r>
+              <a:rPr lang="en-US" altLang="ko-Kore-KR" sz="2400" dirty="0"/>
+              <a:t>ex) shared data access, thread interaction, bug fix</a:t>
+            </a:r>
+            <a:endParaRPr lang="en-US" altLang="ko-Kore-KR" dirty="0"/>
+          </a:p>
+          <a:p>
+            <a:endParaRPr kumimoji="1" lang="en-US" altLang="ko-Kore-KR" dirty="0"/>
+          </a:p>
+          <a:p>
+            <a:r>
+              <a:rPr kumimoji="1" lang="en-US" altLang="ko-Kore-KR" dirty="0"/>
+              <a:t>Context switching overhead</a:t>
+            </a:r>
+          </a:p>
+          <a:p>
+            <a:pPr lvl="1"/>
+            <a:r>
+              <a:rPr lang="en-US" altLang="ko-Kore-KR" sz="2400" dirty="0"/>
+              <a:t>Saving local data and </a:t>
+            </a:r>
+            <a:r>
+              <a:rPr lang="en-US" altLang="ko-Kore-KR" sz="2400" dirty="0" err="1"/>
+              <a:t>etc</a:t>
+            </a:r>
+            <a:r>
+              <a:rPr lang="en-US" altLang="ko-Kore-KR" sz="2400" dirty="0"/>
+              <a:t> of current thread</a:t>
+            </a:r>
+          </a:p>
+          <a:p>
+            <a:pPr lvl="1"/>
+            <a:r>
+              <a:rPr lang="en-US" altLang="ko-Kore-KR" sz="2400" dirty="0"/>
+              <a:t>Load the local data and </a:t>
+            </a:r>
+            <a:r>
+              <a:rPr lang="en-US" altLang="ko-Kore-KR" sz="2400" dirty="0" err="1"/>
+              <a:t>etc</a:t>
+            </a:r>
+            <a:r>
+              <a:rPr lang="en-US" altLang="ko-Kore-KR" sz="2400" dirty="0"/>
+              <a:t> of next thread</a:t>
+            </a:r>
+          </a:p>
+          <a:p>
+            <a:pPr lvl="1"/>
+            <a:endParaRPr lang="en-US" altLang="ko-Kore-KR" dirty="0"/>
+          </a:p>
+          <a:p>
+            <a:r>
+              <a:rPr kumimoji="1" lang="en-US" altLang="ko-Kore-KR" dirty="0"/>
+              <a:t>Increased resource consumption</a:t>
+            </a:r>
+          </a:p>
+          <a:p>
+            <a:pPr lvl="1"/>
+            <a:r>
+              <a:rPr lang="en-US" altLang="ko-Kore-KR" dirty="0"/>
+              <a:t>Thread memory (local stack), OS management</a:t>
+            </a:r>
+          </a:p>
+          <a:p>
+            <a:pPr lvl="1"/>
+            <a:r>
+              <a:rPr kumimoji="1" lang="en-US" altLang="ko-Kore-KR" dirty="0"/>
+              <a:t>Thread creation</a:t>
+            </a:r>
+            <a:r>
+              <a:rPr lang="en-US" altLang="ko-Kore-KR" dirty="0"/>
+              <a:t>/deletion overhead</a:t>
+            </a:r>
+            <a:endParaRPr kumimoji="1" lang="ko-Kore-KR" altLang="en-US" dirty="0"/>
+          </a:p>
+        </p:txBody>
+      </p:sp>
+    </p:spTree>
+    <p:extLst>
+      <p:ext uri="{BB962C8B-B14F-4D97-AF65-F5344CB8AC3E}">
+        <p14:creationId xmlns:p14="http://schemas.microsoft.com/office/powerpoint/2010/main" val="2631548237"/>
+      </p:ext>
+    </p:extLst>
   </p:cSld>
   <p:clrMapOvr>
     <a:masterClrMapping/>
